--- a/slides/Math130Unit2C.pptx
+++ b/slides/Math130Unit2C.pptx
@@ -171,7 +171,7 @@
 <file path=ppt/revisionInfo.xml><?xml version="1.0" encoding="utf-8"?>
 <p1510:revInfo xmlns:a="http://schemas.openxmlformats.org/drawingml/2006/main" xmlns:r="http://schemas.openxmlformats.org/officeDocument/2006/relationships" xmlns:p1510="http://schemas.microsoft.com/office/powerpoint/2015/10/main">
   <p1510:revLst>
-    <p1510:client id="{C0B815FC-C6D2-48B4-BE3B-C772A4756563}" v="5" dt="2026-03-02T20:39:32.286"/>
+    <p1510:client id="{C0B815FC-C6D2-48B4-BE3B-C772A4756563}" v="38" dt="2026-03-04T19:36:28.746"/>
   </p1510:revLst>
 </p1510:revInfo>
 </file>
@@ -180,8 +180,8 @@
 <pc:chgInfo xmlns:a="http://schemas.openxmlformats.org/drawingml/2006/main" xmlns:r="http://schemas.openxmlformats.org/officeDocument/2006/relationships" xmlns:ac="http://schemas.microsoft.com/office/drawing/2013/main/command" xmlns:pc="http://schemas.microsoft.com/office/powerpoint/2013/main/command">
   <pc:docChgLst>
     <pc:chgData name="Volk, Andrew Harrison (General Math and Science)" userId="d2898ccd-3028-4ee4-8f2f-5598df4c43dc" providerId="ADAL" clId="{D0EF2AF6-1D9C-4815-94DD-A346A16C3C87}"/>
-    <pc:docChg chg="custSel addSld modSld">
-      <pc:chgData name="Volk, Andrew Harrison (General Math and Science)" userId="d2898ccd-3028-4ee4-8f2f-5598df4c43dc" providerId="ADAL" clId="{D0EF2AF6-1D9C-4815-94DD-A346A16C3C87}" dt="2026-03-02T20:39:32.286" v="33" actId="931"/>
+    <pc:docChg chg="undo custSel addSld modSld">
+      <pc:chgData name="Volk, Andrew Harrison (General Math and Science)" userId="d2898ccd-3028-4ee4-8f2f-5598df4c43dc" providerId="ADAL" clId="{D0EF2AF6-1D9C-4815-94DD-A346A16C3C87}" dt="2026-03-04T19:39:11.016" v="334" actId="14100"/>
       <pc:docMkLst>
         <pc:docMk/>
       </pc:docMkLst>
@@ -223,6 +223,169 @@
           </ac:picMkLst>
         </pc:picChg>
       </pc:sldChg>
+      <pc:sldChg chg="addSp delSp modSp mod">
+        <pc:chgData name="Volk, Andrew Harrison (General Math and Science)" userId="d2898ccd-3028-4ee4-8f2f-5598df4c43dc" providerId="ADAL" clId="{D0EF2AF6-1D9C-4815-94DD-A346A16C3C87}" dt="2026-03-04T19:34:08.428" v="240" actId="20577"/>
+        <pc:sldMkLst>
+          <pc:docMk/>
+          <pc:sldMk cId="0" sldId="271"/>
+        </pc:sldMkLst>
+        <pc:spChg chg="mod">
+          <ac:chgData name="Volk, Andrew Harrison (General Math and Science)" userId="d2898ccd-3028-4ee4-8f2f-5598df4c43dc" providerId="ADAL" clId="{D0EF2AF6-1D9C-4815-94DD-A346A16C3C87}" dt="2026-03-04T19:34:08.428" v="240" actId="20577"/>
+          <ac:spMkLst>
+            <pc:docMk/>
+            <pc:sldMk cId="0" sldId="271"/>
+            <ac:spMk id="15" creationId="{00000000-0000-0000-0000-000000000000}"/>
+          </ac:spMkLst>
+        </pc:spChg>
+        <pc:spChg chg="mod">
+          <ac:chgData name="Volk, Andrew Harrison (General Math and Science)" userId="d2898ccd-3028-4ee4-8f2f-5598df4c43dc" providerId="ADAL" clId="{D0EF2AF6-1D9C-4815-94DD-A346A16C3C87}" dt="2026-03-04T19:33:28.656" v="233" actId="14100"/>
+          <ac:spMkLst>
+            <pc:docMk/>
+            <pc:sldMk cId="0" sldId="271"/>
+            <ac:spMk id="19" creationId="{00000000-0000-0000-0000-000000000000}"/>
+          </ac:spMkLst>
+        </pc:spChg>
+        <pc:spChg chg="add">
+          <ac:chgData name="Volk, Andrew Harrison (General Math and Science)" userId="d2898ccd-3028-4ee4-8f2f-5598df4c43dc" providerId="ADAL" clId="{D0EF2AF6-1D9C-4815-94DD-A346A16C3C87}" dt="2026-03-04T19:32:38.120" v="224" actId="11529"/>
+          <ac:spMkLst>
+            <pc:docMk/>
+            <pc:sldMk cId="0" sldId="271"/>
+            <ac:spMk id="20" creationId="{6EA09A1A-A50A-0DE8-5FA1-BE22B748E83C}"/>
+          </ac:spMkLst>
+        </pc:spChg>
+        <pc:spChg chg="add mod">
+          <ac:chgData name="Volk, Andrew Harrison (General Math and Science)" userId="d2898ccd-3028-4ee4-8f2f-5598df4c43dc" providerId="ADAL" clId="{D0EF2AF6-1D9C-4815-94DD-A346A16C3C87}" dt="2026-03-04T19:32:54.285" v="228" actId="1076"/>
+          <ac:spMkLst>
+            <pc:docMk/>
+            <pc:sldMk cId="0" sldId="271"/>
+            <ac:spMk id="21" creationId="{3DA96E7D-5377-5DEB-802F-09496F803049}"/>
+          </ac:spMkLst>
+        </pc:spChg>
+        <pc:spChg chg="add mod">
+          <ac:chgData name="Volk, Andrew Harrison (General Math and Science)" userId="d2898ccd-3028-4ee4-8f2f-5598df4c43dc" providerId="ADAL" clId="{D0EF2AF6-1D9C-4815-94DD-A346A16C3C87}" dt="2026-03-04T19:33:25.139" v="232" actId="1076"/>
+          <ac:spMkLst>
+            <pc:docMk/>
+            <pc:sldMk cId="0" sldId="271"/>
+            <ac:spMk id="22" creationId="{E676F061-1504-340E-88DD-DD0842E1D21B}"/>
+          </ac:spMkLst>
+        </pc:spChg>
+        <pc:spChg chg="add mod">
+          <ac:chgData name="Volk, Andrew Harrison (General Math and Science)" userId="d2898ccd-3028-4ee4-8f2f-5598df4c43dc" providerId="ADAL" clId="{D0EF2AF6-1D9C-4815-94DD-A346A16C3C87}" dt="2026-03-04T19:33:47.591" v="236" actId="14100"/>
+          <ac:spMkLst>
+            <pc:docMk/>
+            <pc:sldMk cId="0" sldId="271"/>
+            <ac:spMk id="23" creationId="{61B2E264-D9F5-912B-ED60-A34E69EA0D33}"/>
+          </ac:spMkLst>
+        </pc:spChg>
+        <pc:cxnChg chg="add del mod">
+          <ac:chgData name="Volk, Andrew Harrison (General Math and Science)" userId="d2898ccd-3028-4ee4-8f2f-5598df4c43dc" providerId="ADAL" clId="{D0EF2AF6-1D9C-4815-94DD-A346A16C3C87}" dt="2026-03-04T19:34:03.527" v="239" actId="11529"/>
+          <ac:cxnSpMkLst>
+            <pc:docMk/>
+            <pc:sldMk cId="0" sldId="271"/>
+            <ac:cxnSpMk id="25" creationId="{E5C66793-F0F7-4D0E-D0D9-134015945E7F}"/>
+          </ac:cxnSpMkLst>
+        </pc:cxnChg>
+        <pc:cxnChg chg="add mod">
+          <ac:chgData name="Volk, Andrew Harrison (General Math and Science)" userId="d2898ccd-3028-4ee4-8f2f-5598df4c43dc" providerId="ADAL" clId="{D0EF2AF6-1D9C-4815-94DD-A346A16C3C87}" dt="2026-03-04T19:34:01.132" v="238"/>
+          <ac:cxnSpMkLst>
+            <pc:docMk/>
+            <pc:sldMk cId="0" sldId="271"/>
+            <ac:cxnSpMk id="26" creationId="{F9C54FDE-1B9B-3B1A-1969-3E26DCB4DB68}"/>
+          </ac:cxnSpMkLst>
+        </pc:cxnChg>
+      </pc:sldChg>
+      <pc:sldChg chg="modSp mod">
+        <pc:chgData name="Volk, Andrew Harrison (General Math and Science)" userId="d2898ccd-3028-4ee4-8f2f-5598df4c43dc" providerId="ADAL" clId="{D0EF2AF6-1D9C-4815-94DD-A346A16C3C87}" dt="2026-03-04T19:34:50.647" v="251" actId="1076"/>
+        <pc:sldMkLst>
+          <pc:docMk/>
+          <pc:sldMk cId="0" sldId="272"/>
+        </pc:sldMkLst>
+        <pc:spChg chg="mod">
+          <ac:chgData name="Volk, Andrew Harrison (General Math and Science)" userId="d2898ccd-3028-4ee4-8f2f-5598df4c43dc" providerId="ADAL" clId="{D0EF2AF6-1D9C-4815-94DD-A346A16C3C87}" dt="2026-03-04T19:34:50.647" v="251" actId="1076"/>
+          <ac:spMkLst>
+            <pc:docMk/>
+            <pc:sldMk cId="0" sldId="272"/>
+            <ac:spMk id="6" creationId="{00000000-0000-0000-0000-000000000000}"/>
+          </ac:spMkLst>
+        </pc:spChg>
+        <pc:spChg chg="mod">
+          <ac:chgData name="Volk, Andrew Harrison (General Math and Science)" userId="d2898ccd-3028-4ee4-8f2f-5598df4c43dc" providerId="ADAL" clId="{D0EF2AF6-1D9C-4815-94DD-A346A16C3C87}" dt="2026-03-04T19:34:40.668" v="248"/>
+          <ac:spMkLst>
+            <pc:docMk/>
+            <pc:sldMk cId="0" sldId="272"/>
+            <ac:spMk id="11" creationId="{00000000-0000-0000-0000-000000000000}"/>
+          </ac:spMkLst>
+        </pc:spChg>
+        <pc:spChg chg="mod">
+          <ac:chgData name="Volk, Andrew Harrison (General Math and Science)" userId="d2898ccd-3028-4ee4-8f2f-5598df4c43dc" providerId="ADAL" clId="{D0EF2AF6-1D9C-4815-94DD-A346A16C3C87}" dt="2026-03-04T19:34:32.576" v="247" actId="6549"/>
+          <ac:spMkLst>
+            <pc:docMk/>
+            <pc:sldMk cId="0" sldId="272"/>
+            <ac:spMk id="16" creationId="{00000000-0000-0000-0000-000000000000}"/>
+          </ac:spMkLst>
+        </pc:spChg>
+      </pc:sldChg>
+      <pc:sldChg chg="modSp mod">
+        <pc:chgData name="Volk, Andrew Harrison (General Math and Science)" userId="d2898ccd-3028-4ee4-8f2f-5598df4c43dc" providerId="ADAL" clId="{D0EF2AF6-1D9C-4815-94DD-A346A16C3C87}" dt="2026-03-04T19:36:03.305" v="271" actId="20577"/>
+        <pc:sldMkLst>
+          <pc:docMk/>
+          <pc:sldMk cId="0" sldId="274"/>
+        </pc:sldMkLst>
+        <pc:spChg chg="mod">
+          <ac:chgData name="Volk, Andrew Harrison (General Math and Science)" userId="d2898ccd-3028-4ee4-8f2f-5598df4c43dc" providerId="ADAL" clId="{D0EF2AF6-1D9C-4815-94DD-A346A16C3C87}" dt="2026-03-04T19:36:03.305" v="271" actId="20577"/>
+          <ac:spMkLst>
+            <pc:docMk/>
+            <pc:sldMk cId="0" sldId="274"/>
+            <ac:spMk id="10" creationId="{00000000-0000-0000-0000-000000000000}"/>
+          </ac:spMkLst>
+        </pc:spChg>
+        <pc:spChg chg="mod">
+          <ac:chgData name="Volk, Andrew Harrison (General Math and Science)" userId="d2898ccd-3028-4ee4-8f2f-5598df4c43dc" providerId="ADAL" clId="{D0EF2AF6-1D9C-4815-94DD-A346A16C3C87}" dt="2026-03-04T19:35:22.129" v="259" actId="1076"/>
+          <ac:spMkLst>
+            <pc:docMk/>
+            <pc:sldMk cId="0" sldId="274"/>
+            <ac:spMk id="11" creationId="{00000000-0000-0000-0000-000000000000}"/>
+          </ac:spMkLst>
+        </pc:spChg>
+      </pc:sldChg>
+      <pc:sldChg chg="modSp">
+        <pc:chgData name="Volk, Andrew Harrison (General Math and Science)" userId="d2898ccd-3028-4ee4-8f2f-5598df4c43dc" providerId="ADAL" clId="{D0EF2AF6-1D9C-4815-94DD-A346A16C3C87}" dt="2026-03-04T19:36:28.746" v="272"/>
+        <pc:sldMkLst>
+          <pc:docMk/>
+          <pc:sldMk cId="0" sldId="275"/>
+        </pc:sldMkLst>
+        <pc:spChg chg="mod">
+          <ac:chgData name="Volk, Andrew Harrison (General Math and Science)" userId="d2898ccd-3028-4ee4-8f2f-5598df4c43dc" providerId="ADAL" clId="{D0EF2AF6-1D9C-4815-94DD-A346A16C3C87}" dt="2026-03-04T19:36:28.746" v="272"/>
+          <ac:spMkLst>
+            <pc:docMk/>
+            <pc:sldMk cId="0" sldId="275"/>
+            <ac:spMk id="5" creationId="{00000000-0000-0000-0000-000000000000}"/>
+          </ac:spMkLst>
+        </pc:spChg>
+      </pc:sldChg>
+      <pc:sldChg chg="modSp mod">
+        <pc:chgData name="Volk, Andrew Harrison (General Math and Science)" userId="d2898ccd-3028-4ee4-8f2f-5598df4c43dc" providerId="ADAL" clId="{D0EF2AF6-1D9C-4815-94DD-A346A16C3C87}" dt="2026-03-04T19:38:02.120" v="282" actId="1076"/>
+        <pc:sldMkLst>
+          <pc:docMk/>
+          <pc:sldMk cId="0" sldId="280"/>
+        </pc:sldMkLst>
+        <pc:spChg chg="mod">
+          <ac:chgData name="Volk, Andrew Harrison (General Math and Science)" userId="d2898ccd-3028-4ee4-8f2f-5598df4c43dc" providerId="ADAL" clId="{D0EF2AF6-1D9C-4815-94DD-A346A16C3C87}" dt="2026-03-04T19:38:02.120" v="282" actId="1076"/>
+          <ac:spMkLst>
+            <pc:docMk/>
+            <pc:sldMk cId="0" sldId="280"/>
+            <ac:spMk id="4" creationId="{00000000-0000-0000-0000-000000000000}"/>
+          </ac:spMkLst>
+        </pc:spChg>
+        <pc:spChg chg="mod">
+          <ac:chgData name="Volk, Andrew Harrison (General Math and Science)" userId="d2898ccd-3028-4ee4-8f2f-5598df4c43dc" providerId="ADAL" clId="{D0EF2AF6-1D9C-4815-94DD-A346A16C3C87}" dt="2026-03-04T19:37:56.925" v="281" actId="14100"/>
+          <ac:spMkLst>
+            <pc:docMk/>
+            <pc:sldMk cId="0" sldId="280"/>
+            <ac:spMk id="6" creationId="{00000000-0000-0000-0000-000000000000}"/>
+          </ac:spMkLst>
+        </pc:spChg>
+      </pc:sldChg>
       <pc:sldChg chg="modSp mod">
         <pc:chgData name="Volk, Andrew Harrison (General Math and Science)" userId="d2898ccd-3028-4ee4-8f2f-5598df4c43dc" providerId="ADAL" clId="{D0EF2AF6-1D9C-4815-94DD-A346A16C3C87}" dt="2026-03-02T18:49:27.214" v="3" actId="27636"/>
         <pc:sldMkLst>
@@ -238,18 +401,81 @@
           </ac:spMkLst>
         </pc:spChg>
       </pc:sldChg>
-      <pc:sldChg chg="modSp mod">
-        <pc:chgData name="Volk, Andrew Harrison (General Math and Science)" userId="d2898ccd-3028-4ee4-8f2f-5598df4c43dc" providerId="ADAL" clId="{D0EF2AF6-1D9C-4815-94DD-A346A16C3C87}" dt="2026-03-02T18:49:27.261" v="12" actId="27636"/>
+      <pc:sldChg chg="addSp modSp mod">
+        <pc:chgData name="Volk, Andrew Harrison (General Math and Science)" userId="d2898ccd-3028-4ee4-8f2f-5598df4c43dc" providerId="ADAL" clId="{D0EF2AF6-1D9C-4815-94DD-A346A16C3C87}" dt="2026-03-04T19:32:08.881" v="223" actId="14100"/>
         <pc:sldMkLst>
           <pc:docMk/>
           <pc:sldMk cId="0" sldId="290"/>
         </pc:sldMkLst>
         <pc:spChg chg="mod">
-          <ac:chgData name="Volk, Andrew Harrison (General Math and Science)" userId="d2898ccd-3028-4ee4-8f2f-5598df4c43dc" providerId="ADAL" clId="{D0EF2AF6-1D9C-4815-94DD-A346A16C3C87}" dt="2026-03-02T18:49:27.261" v="12" actId="27636"/>
+          <ac:chgData name="Volk, Andrew Harrison (General Math and Science)" userId="d2898ccd-3028-4ee4-8f2f-5598df4c43dc" providerId="ADAL" clId="{D0EF2AF6-1D9C-4815-94DD-A346A16C3C87}" dt="2026-03-04T19:29:54.681" v="193" actId="14100"/>
+          <ac:spMkLst>
+            <pc:docMk/>
+            <pc:sldMk cId="0" sldId="290"/>
+            <ac:spMk id="6" creationId="{00000000-0000-0000-0000-000000000000}"/>
+          </ac:spMkLst>
+        </pc:spChg>
+        <pc:spChg chg="mod">
+          <ac:chgData name="Volk, Andrew Harrison (General Math and Science)" userId="d2898ccd-3028-4ee4-8f2f-5598df4c43dc" providerId="ADAL" clId="{D0EF2AF6-1D9C-4815-94DD-A346A16C3C87}" dt="2026-03-04T19:29:58.656" v="194" actId="1076"/>
+          <ac:spMkLst>
+            <pc:docMk/>
+            <pc:sldMk cId="0" sldId="290"/>
+            <ac:spMk id="7" creationId="{00000000-0000-0000-0000-000000000000}"/>
+          </ac:spMkLst>
+        </pc:spChg>
+        <pc:spChg chg="mod">
+          <ac:chgData name="Volk, Andrew Harrison (General Math and Science)" userId="d2898ccd-3028-4ee4-8f2f-5598df4c43dc" providerId="ADAL" clId="{D0EF2AF6-1D9C-4815-94DD-A346A16C3C87}" dt="2026-03-04T19:32:08.881" v="223" actId="14100"/>
+          <ac:spMkLst>
+            <pc:docMk/>
+            <pc:sldMk cId="0" sldId="290"/>
+            <ac:spMk id="8" creationId="{00000000-0000-0000-0000-000000000000}"/>
+          </ac:spMkLst>
+        </pc:spChg>
+        <pc:spChg chg="mod">
+          <ac:chgData name="Volk, Andrew Harrison (General Math and Science)" userId="d2898ccd-3028-4ee4-8f2f-5598df4c43dc" providerId="ADAL" clId="{D0EF2AF6-1D9C-4815-94DD-A346A16C3C87}" dt="2026-03-04T19:30:10.929" v="197" actId="14100"/>
+          <ac:spMkLst>
+            <pc:docMk/>
+            <pc:sldMk cId="0" sldId="290"/>
+            <ac:spMk id="60" creationId="{00000000-0000-0000-0000-000000000000}"/>
+          </ac:spMkLst>
+        </pc:spChg>
+        <pc:spChg chg="mod">
+          <ac:chgData name="Volk, Andrew Harrison (General Math and Science)" userId="d2898ccd-3028-4ee4-8f2f-5598df4c43dc" providerId="ADAL" clId="{D0EF2AF6-1D9C-4815-94DD-A346A16C3C87}" dt="2026-03-04T19:30:18.394" v="198" actId="14100"/>
+          <ac:spMkLst>
+            <pc:docMk/>
+            <pc:sldMk cId="0" sldId="290"/>
+            <ac:spMk id="61" creationId="{00000000-0000-0000-0000-000000000000}"/>
+          </ac:spMkLst>
+        </pc:spChg>
+        <pc:spChg chg="mod">
+          <ac:chgData name="Volk, Andrew Harrison (General Math and Science)" userId="d2898ccd-3028-4ee4-8f2f-5598df4c43dc" providerId="ADAL" clId="{D0EF2AF6-1D9C-4815-94DD-A346A16C3C87}" dt="2026-03-04T19:30:54.908" v="213" actId="20577"/>
           <ac:spMkLst>
             <pc:docMk/>
             <pc:sldMk cId="0" sldId="290"/>
             <ac:spMk id="62" creationId="{00000000-0000-0000-0000-000000000000}"/>
+          </ac:spMkLst>
+        </pc:spChg>
+        <pc:picChg chg="add mod">
+          <ac:chgData name="Volk, Andrew Harrison (General Math and Science)" userId="d2898ccd-3028-4ee4-8f2f-5598df4c43dc" providerId="ADAL" clId="{D0EF2AF6-1D9C-4815-94DD-A346A16C3C87}" dt="2026-03-04T19:31:34.458" v="221" actId="14100"/>
+          <ac:picMkLst>
+            <pc:docMk/>
+            <pc:sldMk cId="0" sldId="290"/>
+            <ac:picMk id="9" creationId="{D12D0020-2D16-47C1-04E2-A2EEC627864D}"/>
+          </ac:picMkLst>
+        </pc:picChg>
+      </pc:sldChg>
+      <pc:sldChg chg="modSp mod">
+        <pc:chgData name="Volk, Andrew Harrison (General Math and Science)" userId="d2898ccd-3028-4ee4-8f2f-5598df4c43dc" providerId="ADAL" clId="{D0EF2AF6-1D9C-4815-94DD-A346A16C3C87}" dt="2026-03-04T19:36:44.489" v="273" actId="1076"/>
+        <pc:sldMkLst>
+          <pc:docMk/>
+          <pc:sldMk cId="0" sldId="293"/>
+        </pc:sldMkLst>
+        <pc:spChg chg="mod">
+          <ac:chgData name="Volk, Andrew Harrison (General Math and Science)" userId="d2898ccd-3028-4ee4-8f2f-5598df4c43dc" providerId="ADAL" clId="{D0EF2AF6-1D9C-4815-94DD-A346A16C3C87}" dt="2026-03-04T19:36:44.489" v="273" actId="1076"/>
+          <ac:spMkLst>
+            <pc:docMk/>
+            <pc:sldMk cId="0" sldId="293"/>
+            <ac:spMk id="6" creationId="{00000000-0000-0000-0000-000000000000}"/>
           </ac:spMkLst>
         </pc:spChg>
       </pc:sldChg>
@@ -344,14 +570,30 @@
           </ac:spMkLst>
         </pc:spChg>
       </pc:sldChg>
-      <pc:sldChg chg="modSp mod">
-        <pc:chgData name="Volk, Andrew Harrison (General Math and Science)" userId="d2898ccd-3028-4ee4-8f2f-5598df4c43dc" providerId="ADAL" clId="{D0EF2AF6-1D9C-4815-94DD-A346A16C3C87}" dt="2026-03-02T18:49:27.277" v="14" actId="27636"/>
+      <pc:sldChg chg="delSp modSp mod">
+        <pc:chgData name="Volk, Andrew Harrison (General Math and Science)" userId="d2898ccd-3028-4ee4-8f2f-5598df4c43dc" providerId="ADAL" clId="{D0EF2AF6-1D9C-4815-94DD-A346A16C3C87}" dt="2026-03-04T19:37:19.336" v="279" actId="478"/>
         <pc:sldMkLst>
           <pc:docMk/>
           <pc:sldMk cId="0" sldId="301"/>
         </pc:sldMkLst>
-        <pc:spChg chg="mod">
-          <ac:chgData name="Volk, Andrew Harrison (General Math and Science)" userId="d2898ccd-3028-4ee4-8f2f-5598df4c43dc" providerId="ADAL" clId="{D0EF2AF6-1D9C-4815-94DD-A346A16C3C87}" dt="2026-03-02T18:49:27.277" v="14" actId="27636"/>
+        <pc:spChg chg="del mod">
+          <ac:chgData name="Volk, Andrew Harrison (General Math and Science)" userId="d2898ccd-3028-4ee4-8f2f-5598df4c43dc" providerId="ADAL" clId="{D0EF2AF6-1D9C-4815-94DD-A346A16C3C87}" dt="2026-03-04T19:37:14.009" v="277" actId="478"/>
+          <ac:spMkLst>
+            <pc:docMk/>
+            <pc:sldMk cId="0" sldId="301"/>
+            <ac:spMk id="220" creationId="{00000000-0000-0000-0000-000000000000}"/>
+          </ac:spMkLst>
+        </pc:spChg>
+        <pc:spChg chg="del">
+          <ac:chgData name="Volk, Andrew Harrison (General Math and Science)" userId="d2898ccd-3028-4ee4-8f2f-5598df4c43dc" providerId="ADAL" clId="{D0EF2AF6-1D9C-4815-94DD-A346A16C3C87}" dt="2026-03-04T19:37:19.336" v="279" actId="478"/>
+          <ac:spMkLst>
+            <pc:docMk/>
+            <pc:sldMk cId="0" sldId="301"/>
+            <ac:spMk id="221" creationId="{00000000-0000-0000-0000-000000000000}"/>
+          </ac:spMkLst>
+        </pc:spChg>
+        <pc:spChg chg="del mod">
+          <ac:chgData name="Volk, Andrew Harrison (General Math and Science)" userId="d2898ccd-3028-4ee4-8f2f-5598df4c43dc" providerId="ADAL" clId="{D0EF2AF6-1D9C-4815-94DD-A346A16C3C87}" dt="2026-03-04T19:37:16.738" v="278" actId="478"/>
           <ac:spMkLst>
             <pc:docMk/>
             <pc:sldMk cId="0" sldId="301"/>
@@ -375,13 +617,29 @@
         </pc:spChg>
       </pc:sldChg>
       <pc:sldChg chg="modSp mod">
-        <pc:chgData name="Volk, Andrew Harrison (General Math and Science)" userId="d2898ccd-3028-4ee4-8f2f-5598df4c43dc" providerId="ADAL" clId="{D0EF2AF6-1D9C-4815-94DD-A346A16C3C87}" dt="2026-03-02T18:49:27.293" v="16" actId="27636"/>
+        <pc:chgData name="Volk, Andrew Harrison (General Math and Science)" userId="d2898ccd-3028-4ee4-8f2f-5598df4c43dc" providerId="ADAL" clId="{D0EF2AF6-1D9C-4815-94DD-A346A16C3C87}" dt="2026-03-04T19:39:11.016" v="334" actId="14100"/>
         <pc:sldMkLst>
           <pc:docMk/>
           <pc:sldMk cId="0" sldId="304"/>
         </pc:sldMkLst>
         <pc:spChg chg="mod">
-          <ac:chgData name="Volk, Andrew Harrison (General Math and Science)" userId="d2898ccd-3028-4ee4-8f2f-5598df4c43dc" providerId="ADAL" clId="{D0EF2AF6-1D9C-4815-94DD-A346A16C3C87}" dt="2026-03-02T18:49:27.293" v="16" actId="27636"/>
+          <ac:chgData name="Volk, Andrew Harrison (General Math and Science)" userId="d2898ccd-3028-4ee4-8f2f-5598df4c43dc" providerId="ADAL" clId="{D0EF2AF6-1D9C-4815-94DD-A346A16C3C87}" dt="2026-03-04T19:38:29.636" v="316" actId="14100"/>
+          <ac:spMkLst>
+            <pc:docMk/>
+            <pc:sldMk cId="0" sldId="304"/>
+            <ac:spMk id="201" creationId="{00000000-0000-0000-0000-000000000000}"/>
+          </ac:spMkLst>
+        </pc:spChg>
+        <pc:spChg chg="mod">
+          <ac:chgData name="Volk, Andrew Harrison (General Math and Science)" userId="d2898ccd-3028-4ee4-8f2f-5598df4c43dc" providerId="ADAL" clId="{D0EF2AF6-1D9C-4815-94DD-A346A16C3C87}" dt="2026-03-04T19:39:11.016" v="334" actId="14100"/>
+          <ac:spMkLst>
+            <pc:docMk/>
+            <pc:sldMk cId="0" sldId="304"/>
+            <ac:spMk id="202" creationId="{00000000-0000-0000-0000-000000000000}"/>
+          </ac:spMkLst>
+        </pc:spChg>
+        <pc:spChg chg="mod">
+          <ac:chgData name="Volk, Andrew Harrison (General Math and Science)" userId="d2898ccd-3028-4ee4-8f2f-5598df4c43dc" providerId="ADAL" clId="{D0EF2AF6-1D9C-4815-94DD-A346A16C3C87}" dt="2026-03-04T19:39:01.601" v="330" actId="27636"/>
           <ac:spMkLst>
             <pc:docMk/>
             <pc:sldMk cId="0" sldId="304"/>
@@ -471,22 +729,6 @@
           <pc:docMk/>
           <pc:sldMk cId="2947970795" sldId="315"/>
         </pc:sldMkLst>
-        <pc:picChg chg="add del mod">
-          <ac:chgData name="Volk, Andrew Harrison (General Math and Science)" userId="d2898ccd-3028-4ee4-8f2f-5598df4c43dc" providerId="ADAL" clId="{D0EF2AF6-1D9C-4815-94DD-A346A16C3C87}" dt="2026-03-02T20:17:09.196" v="30" actId="478"/>
-          <ac:picMkLst>
-            <pc:docMk/>
-            <pc:sldMk cId="2947970795" sldId="315"/>
-            <ac:picMk id="3" creationId="{B2B8C0AD-82E8-2553-1F98-64ED76210ACB}"/>
-          </ac:picMkLst>
-        </pc:picChg>
-        <pc:picChg chg="add del mod">
-          <ac:chgData name="Volk, Andrew Harrison (General Math and Science)" userId="d2898ccd-3028-4ee4-8f2f-5598df4c43dc" providerId="ADAL" clId="{D0EF2AF6-1D9C-4815-94DD-A346A16C3C87}" dt="2026-03-02T20:39:22.325" v="32" actId="478"/>
-          <ac:picMkLst>
-            <pc:docMk/>
-            <pc:sldMk cId="2947970795" sldId="315"/>
-            <ac:picMk id="5" creationId="{4744F851-E075-D516-166B-0CCE14ECE01E}"/>
-          </ac:picMkLst>
-        </pc:picChg>
         <pc:picChg chg="add mod">
           <ac:chgData name="Volk, Andrew Harrison (General Math and Science)" userId="d2898ccd-3028-4ee4-8f2f-5598df4c43dc" providerId="ADAL" clId="{D0EF2AF6-1D9C-4815-94DD-A346A16C3C87}" dt="2026-03-02T20:39:32.286" v="33" actId="931"/>
           <ac:picMkLst>
@@ -15284,8 +15526,8 @@
         </p:nvSpPr>
         <p:spPr>
           <a:xfrm>
-            <a:off x="4846320" y="1051560"/>
-            <a:ext cx="3565560" cy="3566160"/>
+            <a:off x="4693981" y="1051560"/>
+            <a:ext cx="4319382" cy="3566160"/>
           </a:xfrm>
           <a:prstGeom prst="rect">
             <a:avLst/>
@@ -15318,7 +15560,7 @@
         </p:nvSpPr>
         <p:spPr>
           <a:xfrm>
-            <a:off x="4846320" y="1051560"/>
+            <a:off x="4659394" y="1051560"/>
             <a:ext cx="54864" cy="3566160"/>
           </a:xfrm>
           <a:prstGeom prst="rect">
@@ -15345,8 +15587,8 @@
         </p:nvSpPr>
         <p:spPr>
           <a:xfrm>
-            <a:off x="5030640" y="1200000"/>
-            <a:ext cx="3200400" cy="1700000"/>
+            <a:off x="5030639" y="1200000"/>
+            <a:ext cx="3896213" cy="1700000"/>
           </a:xfrm>
           <a:prstGeom prst="rect">
             <a:avLst/>
@@ -15396,7 +15638,7 @@
                 </a:solidFill>
                 <a:latin typeface="Calibri" pitchFamily="34" charset="0"/>
               </a:rPr>
-              <a:t>The wall of a living room with a vaulted ceiling has 4 windows as shown.</a:t>
+              <a:t>The wall of a living room with a vaulted ceiling has 3 windows as shown.</a:t>
             </a:r>
           </a:p>
           <a:p>
@@ -15437,8 +15679,8 @@
         </p:nvSpPr>
         <p:spPr>
           <a:xfrm>
-            <a:off x="3017520" y="3000000"/>
-            <a:ext cx="4663440" cy="1560000"/>
+            <a:off x="4663442" y="2808514"/>
+            <a:ext cx="4319383" cy="2063426"/>
           </a:xfrm>
           <a:prstGeom prst="rect">
             <a:avLst/>
@@ -15471,8 +15713,8 @@
         </p:nvSpPr>
         <p:spPr>
           <a:xfrm>
-            <a:off x="3017520" y="3000000"/>
-            <a:ext cx="54864" cy="1560000"/>
+            <a:off x="4663442" y="2808514"/>
+            <a:ext cx="50816" cy="2063426"/>
           </a:xfrm>
           <a:prstGeom prst="rect">
             <a:avLst/>
@@ -15498,8 +15740,8 @@
         </p:nvSpPr>
         <p:spPr>
           <a:xfrm>
-            <a:off x="3160000" y="3050000"/>
-            <a:ext cx="4400000" cy="1460000"/>
+            <a:off x="4719412" y="2808514"/>
+            <a:ext cx="4207441" cy="2013426"/>
           </a:xfrm>
           <a:prstGeom prst="rect">
             <a:avLst/>
@@ -15509,7 +15751,7 @@
         </p:spPr>
         <p:txBody>
           <a:bodyPr wrap="square" lIns="91440" tIns="91440" rIns="91440" bIns="91440" rtlCol="0" anchor="t">
-            <a:normAutofit lnSpcReduction="10000"/>
+            <a:normAutofit/>
           </a:bodyPr>
           <a:lstStyle/>
           <a:p>
@@ -15517,13 +15759,69 @@
               <a:buNone/>
             </a:pPr>
             <a:r>
-              <a:rPr lang="en-US" sz="1400" b="1" dirty="0">
+              <a:rPr lang="en-US" sz="1600" b="1" dirty="0">
                 <a:solidFill>
                   <a:srgbClr val="4ECDC4"/>
                 </a:solidFill>
                 <a:latin typeface="Calibri"/>
               </a:rPr>
-              <a:t>Solution</a:t>
+              <a:t>Solution Step</a:t>
+            </a:r>
+          </a:p>
+          <a:p>
+            <a:pPr marL="0" indent="0">
+              <a:buNone/>
+            </a:pPr>
+            <a:r>
+              <a:rPr lang="en-US" sz="1400" dirty="0">
+                <a:solidFill>
+                  <a:srgbClr val="FFFFFF"/>
+                </a:solidFill>
+                <a:latin typeface="Calibri"/>
+              </a:rPr>
+              <a:t> </a:t>
+            </a:r>
+          </a:p>
+          <a:p>
+            <a:pPr marL="0" indent="0">
+              <a:buNone/>
+            </a:pPr>
+            <a:r>
+              <a:rPr lang="en-US" sz="1400" dirty="0">
+                <a:solidFill>
+                  <a:srgbClr val="B0BEC5"/>
+                </a:solidFill>
+                <a:latin typeface="Calibri"/>
+              </a:rPr>
+              <a:t>Step 1: Wall = rectangle + triangle on top</a:t>
+            </a:r>
+          </a:p>
+          <a:p>
+            <a:pPr marL="0" indent="0">
+              <a:buNone/>
+            </a:pPr>
+            <a:r>
+              <a:rPr lang="en-US" sz="1400" dirty="0">
+                <a:solidFill>
+                  <a:srgbClr val="B0BEC5"/>
+                </a:solidFill>
+                <a:latin typeface="Calibri"/>
+              </a:rPr>
+              <a:t>Step 2: Find each area, then subtract 4 windows</a:t>
+            </a:r>
+          </a:p>
+          <a:p>
+            <a:pPr marL="0" indent="0">
+              <a:buNone/>
+            </a:pPr>
+            <a:r>
+              <a:rPr lang="en-US" sz="1400" dirty="0">
+                <a:solidFill>
+                  <a:srgbClr val="B0BEC5"/>
+                </a:solidFill>
+                <a:latin typeface="Calibri"/>
+              </a:rPr>
+              <a:t>Step 3: Net wall area ÷ 80 ft² per quart = quarts needed</a:t>
             </a:r>
           </a:p>
           <a:p>
@@ -15545,73 +15843,47 @@
               <a:buNone/>
             </a:pPr>
             <a:r>
-              <a:rPr lang="en-US" sz="1200" dirty="0">
-                <a:solidFill>
-                  <a:srgbClr val="B0BEC5"/>
+              <a:rPr lang="en-US" sz="1200" i="1" dirty="0">
+                <a:solidFill>
+                  <a:srgbClr val="5C6B7A"/>
                 </a:solidFill>
                 <a:latin typeface="Calibri"/>
               </a:rPr>
-              <a:t>Step 1: Wall = rectangle + triangle on top</a:t>
-            </a:r>
-          </a:p>
-          <a:p>
-            <a:pPr marL="0" indent="0">
-              <a:buNone/>
-            </a:pPr>
-            <a:r>
-              <a:rPr lang="en-US" sz="1200" dirty="0">
-                <a:solidFill>
-                  <a:srgbClr val="B0BEC5"/>
-                </a:solidFill>
-                <a:latin typeface="Calibri"/>
-              </a:rPr>
-              <a:t>Step 2: Find each area, then subtract 4 windows</a:t>
-            </a:r>
-          </a:p>
-          <a:p>
-            <a:pPr marL="0" indent="0">
-              <a:buNone/>
-            </a:pPr>
-            <a:r>
-              <a:rPr lang="en-US" sz="1200" dirty="0">
-                <a:solidFill>
-                  <a:srgbClr val="B0BEC5"/>
-                </a:solidFill>
-                <a:latin typeface="Calibri"/>
-              </a:rPr>
-              <a:t>Step 3: Net wall area ÷ 80 ft² per quart = quarts needed</a:t>
-            </a:r>
-          </a:p>
-          <a:p>
-            <a:pPr marL="0" indent="0">
-              <a:buNone/>
-            </a:pPr>
-            <a:r>
-              <a:rPr lang="en-US" sz="1200" dirty="0">
-                <a:solidFill>
-                  <a:srgbClr val="FFFFFF"/>
-                </a:solidFill>
-                <a:latin typeface="Calibri"/>
-              </a:rPr>
-              <a:t> </a:t>
-            </a:r>
-          </a:p>
-          <a:p>
-            <a:pPr marL="0" indent="0">
-              <a:buNone/>
-            </a:pPr>
-            <a:r>
-              <a:rPr lang="en-US" sz="1200" i="1" dirty="0">
-                <a:solidFill>
-                  <a:srgbClr val="5C6B7A"/>
-                </a:solidFill>
-                <a:latin typeface="Calibri"/>
-              </a:rPr>
               <a:t>See diagram for exact dimensions → answer varies by wall size.</a:t>
             </a:r>
           </a:p>
         </p:txBody>
       </p:sp>
+      <p:pic>
+        <p:nvPicPr>
+          <p:cNvPr id="9" name="Picture 8">
+            <a:extLst>
+              <a:ext uri="{FF2B5EF4-FFF2-40B4-BE49-F238E27FC236}">
+                <a16:creationId xmlns:a16="http://schemas.microsoft.com/office/drawing/2014/main" id="{D12D0020-2D16-47C1-04E2-A2EEC627864D}"/>
+              </a:ext>
+            </a:extLst>
+          </p:cNvPr>
+          <p:cNvPicPr>
+            <a:picLocks noChangeAspect="1"/>
+          </p:cNvPicPr>
+          <p:nvPr/>
+        </p:nvPicPr>
+        <p:blipFill>
+          <a:blip r:embed="rId3"/>
+          <a:stretch>
+            <a:fillRect/>
+          </a:stretch>
+        </p:blipFill>
+        <p:spPr>
+          <a:xfrm>
+            <a:off x="2109024" y="3331028"/>
+            <a:ext cx="1181265" cy="689939"/>
+          </a:xfrm>
+          <a:prstGeom prst="rect">
+            <a:avLst/>
+          </a:prstGeom>
+        </p:spPr>
+      </p:pic>
     </p:spTree>
   </p:cSld>
   <p:clrMapOvr>
@@ -16818,7 +17090,28 @@
                 <a:cs typeface="Calibri" pitchFamily="34" charset="-120"/>
               </a:rPr>
               <a:t>All three sides are equal.
-Shown with double tick marks. All angles = 60°.</a:t>
+Shown with double tick marks. </a:t>
+            </a:r>
+            <a:br>
+              <a:rPr lang="en-US" sz="1400" dirty="0">
+                <a:solidFill>
+                  <a:srgbClr val="3D4A5C"/>
+                </a:solidFill>
+                <a:latin typeface="Calibri" pitchFamily="34" charset="0"/>
+                <a:ea typeface="Calibri" pitchFamily="34" charset="-122"/>
+                <a:cs typeface="Calibri" pitchFamily="34" charset="-120"/>
+              </a:rPr>
+            </a:br>
+            <a:r>
+              <a:rPr lang="en-US" sz="1400" dirty="0">
+                <a:solidFill>
+                  <a:srgbClr val="3D4A5C"/>
+                </a:solidFill>
+                <a:latin typeface="Calibri" pitchFamily="34" charset="0"/>
+                <a:ea typeface="Calibri" pitchFamily="34" charset="-122"/>
+                <a:cs typeface="Calibri" pitchFamily="34" charset="-120"/>
+              </a:rPr>
+              <a:t>All angles = 60°.</a:t>
             </a:r>
             <a:endParaRPr lang="en-US" sz="1400" dirty="0"/>
           </a:p>
@@ -16933,7 +17226,7 @@
         <p:spPr>
           <a:xfrm>
             <a:off x="5074920" y="3474720"/>
-            <a:ext cx="3291840" cy="914400"/>
+            <a:ext cx="2732604" cy="914400"/>
           </a:xfrm>
           <a:prstGeom prst="rect">
             <a:avLst/>
@@ -16960,6 +17253,194 @@
               <a:t>Has one right angle (90°). The side opposite the right angle is the hypotenuse; the other sides are legs.</a:t>
             </a:r>
             <a:endParaRPr lang="en-US" sz="1400" dirty="0"/>
+          </a:p>
+        </p:txBody>
+      </p:sp>
+      <p:sp>
+        <p:nvSpPr>
+          <p:cNvPr id="20" name="Isosceles Triangle 19">
+            <a:extLst>
+              <a:ext uri="{FF2B5EF4-FFF2-40B4-BE49-F238E27FC236}">
+                <a16:creationId xmlns:a16="http://schemas.microsoft.com/office/drawing/2014/main" id="{6EA09A1A-A50A-0DE8-5FA1-BE22B748E83C}"/>
+              </a:ext>
+            </a:extLst>
+          </p:cNvPr>
+          <p:cNvSpPr/>
+          <p:nvPr/>
+        </p:nvSpPr>
+        <p:spPr>
+          <a:xfrm>
+            <a:off x="3156857" y="3063240"/>
+            <a:ext cx="732972" cy="659674"/>
+          </a:xfrm>
+          <a:prstGeom prst="triangle">
+            <a:avLst/>
+          </a:prstGeom>
+        </p:spPr>
+        <p:style>
+          <a:lnRef idx="2">
+            <a:schemeClr val="accent1">
+              <a:shade val="15000"/>
+            </a:schemeClr>
+          </a:lnRef>
+          <a:fillRef idx="1">
+            <a:schemeClr val="accent1"/>
+          </a:fillRef>
+          <a:effectRef idx="0">
+            <a:schemeClr val="accent1"/>
+          </a:effectRef>
+          <a:fontRef idx="minor">
+            <a:schemeClr val="lt1"/>
+          </a:fontRef>
+        </p:style>
+        <p:txBody>
+          <a:bodyPr rtlCol="0" anchor="ctr"/>
+          <a:lstStyle/>
+          <a:p>
+            <a:pPr algn="ctr"/>
+            <a:endParaRPr lang="en-US"/>
+          </a:p>
+        </p:txBody>
+      </p:sp>
+      <p:sp>
+        <p:nvSpPr>
+          <p:cNvPr id="21" name="Isosceles Triangle 20">
+            <a:extLst>
+              <a:ext uri="{FF2B5EF4-FFF2-40B4-BE49-F238E27FC236}">
+                <a16:creationId xmlns:a16="http://schemas.microsoft.com/office/drawing/2014/main" id="{3DA96E7D-5377-5DEB-802F-09496F803049}"/>
+              </a:ext>
+            </a:extLst>
+          </p:cNvPr>
+          <p:cNvSpPr/>
+          <p:nvPr/>
+        </p:nvSpPr>
+        <p:spPr>
+          <a:xfrm>
+            <a:off x="7582770" y="1069521"/>
+            <a:ext cx="732972" cy="969917"/>
+          </a:xfrm>
+          <a:prstGeom prst="triangle">
+            <a:avLst/>
+          </a:prstGeom>
+        </p:spPr>
+        <p:style>
+          <a:lnRef idx="2">
+            <a:schemeClr val="accent1">
+              <a:shade val="15000"/>
+            </a:schemeClr>
+          </a:lnRef>
+          <a:fillRef idx="1">
+            <a:schemeClr val="accent1"/>
+          </a:fillRef>
+          <a:effectRef idx="0">
+            <a:schemeClr val="accent1"/>
+          </a:effectRef>
+          <a:fontRef idx="minor">
+            <a:schemeClr val="lt1"/>
+          </a:fontRef>
+        </p:style>
+        <p:txBody>
+          <a:bodyPr rtlCol="0" anchor="ctr"/>
+          <a:lstStyle/>
+          <a:p>
+            <a:pPr algn="ctr"/>
+            <a:endParaRPr lang="en-US"/>
+          </a:p>
+        </p:txBody>
+      </p:sp>
+      <p:sp>
+        <p:nvSpPr>
+          <p:cNvPr id="22" name="Isosceles Triangle 21">
+            <a:extLst>
+              <a:ext uri="{FF2B5EF4-FFF2-40B4-BE49-F238E27FC236}">
+                <a16:creationId xmlns:a16="http://schemas.microsoft.com/office/drawing/2014/main" id="{E676F061-1504-340E-88DD-DD0842E1D21B}"/>
+              </a:ext>
+            </a:extLst>
+          </p:cNvPr>
+          <p:cNvSpPr/>
+          <p:nvPr/>
+        </p:nvSpPr>
+        <p:spPr>
+          <a:xfrm>
+            <a:off x="7807524" y="3246120"/>
+            <a:ext cx="732972" cy="969917"/>
+          </a:xfrm>
+          <a:prstGeom prst="triangle">
+            <a:avLst>
+              <a:gd name="adj" fmla="val 0"/>
+            </a:avLst>
+          </a:prstGeom>
+        </p:spPr>
+        <p:style>
+          <a:lnRef idx="2">
+            <a:schemeClr val="accent1">
+              <a:shade val="15000"/>
+            </a:schemeClr>
+          </a:lnRef>
+          <a:fillRef idx="1">
+            <a:schemeClr val="accent1"/>
+          </a:fillRef>
+          <a:effectRef idx="0">
+            <a:schemeClr val="accent1"/>
+          </a:effectRef>
+          <a:fontRef idx="minor">
+            <a:schemeClr val="lt1"/>
+          </a:fontRef>
+        </p:style>
+        <p:txBody>
+          <a:bodyPr rtlCol="0" anchor="ctr"/>
+          <a:lstStyle/>
+          <a:p>
+            <a:pPr algn="ctr"/>
+            <a:endParaRPr lang="en-US"/>
+          </a:p>
+        </p:txBody>
+      </p:sp>
+      <p:sp>
+        <p:nvSpPr>
+          <p:cNvPr id="23" name="Isosceles Triangle 22">
+            <a:extLst>
+              <a:ext uri="{FF2B5EF4-FFF2-40B4-BE49-F238E27FC236}">
+                <a16:creationId xmlns:a16="http://schemas.microsoft.com/office/drawing/2014/main" id="{61B2E264-D9F5-912B-ED60-A34E69EA0D33}"/>
+              </a:ext>
+            </a:extLst>
+          </p:cNvPr>
+          <p:cNvSpPr/>
+          <p:nvPr/>
+        </p:nvSpPr>
+        <p:spPr>
+          <a:xfrm>
+            <a:off x="3539816" y="1133856"/>
+            <a:ext cx="425777" cy="969917"/>
+          </a:xfrm>
+          <a:prstGeom prst="triangle">
+            <a:avLst>
+              <a:gd name="adj" fmla="val 0"/>
+            </a:avLst>
+          </a:prstGeom>
+        </p:spPr>
+        <p:style>
+          <a:lnRef idx="2">
+            <a:schemeClr val="accent1">
+              <a:shade val="15000"/>
+            </a:schemeClr>
+          </a:lnRef>
+          <a:fillRef idx="1">
+            <a:schemeClr val="accent1"/>
+          </a:fillRef>
+          <a:effectRef idx="0">
+            <a:schemeClr val="accent1"/>
+          </a:effectRef>
+          <a:fontRef idx="minor">
+            <a:schemeClr val="lt1"/>
+          </a:fontRef>
+        </p:style>
+        <p:txBody>
+          <a:bodyPr rtlCol="0" anchor="ctr"/>
+          <a:lstStyle/>
+          <a:p>
+            <a:pPr algn="ctr"/>
+            <a:endParaRPr lang="en-US"/>
           </a:p>
         </p:txBody>
       </p:sp>
@@ -17128,45 +17609,206 @@
           </a:p>
         </p:txBody>
       </p:sp>
-      <p:sp>
-        <p:nvSpPr>
-          <p:cNvPr id="6" name="Text 4"/>
-          <p:cNvSpPr/>
-          <p:nvPr/>
-        </p:nvSpPr>
-        <p:spPr>
-          <a:xfrm>
-            <a:off x="1005840" y="1600200"/>
-            <a:ext cx="3200400" cy="548640"/>
-          </a:xfrm>
-          <a:prstGeom prst="rect">
-            <a:avLst/>
-          </a:prstGeom>
-          <a:noFill/>
-          <a:ln/>
-        </p:spPr>
-        <p:txBody>
-          <a:bodyPr wrap="square" lIns="0" tIns="0" rIns="0" bIns="0" rtlCol="0" anchor="ctr"/>
-          <a:lstStyle/>
-          <a:p>
-            <a:pPr marL="0" indent="0">
-              <a:buNone/>
-            </a:pPr>
-            <a:r>
-              <a:rPr lang="en-US" sz="2400" b="1" dirty="0">
-                <a:solidFill>
-                  <a:srgbClr val="FFFFFF"/>
-                </a:solidFill>
-                <a:latin typeface="Calibri" pitchFamily="34" charset="0"/>
-                <a:ea typeface="Calibri" pitchFamily="34" charset="-122"/>
-                <a:cs typeface="Calibri" pitchFamily="34" charset="-120"/>
-              </a:rPr>
-              <a:t>∠A + ∠B + ∠C = 180°</a:t>
-            </a:r>
-            <a:endParaRPr lang="en-US" sz="2400" dirty="0"/>
-          </a:p>
-        </p:txBody>
-      </p:sp>
+      <mc:AlternateContent xmlns:mc="http://schemas.openxmlformats.org/markup-compatibility/2006">
+        <mc:Choice xmlns:a14="http://schemas.microsoft.com/office/drawing/2010/main" Requires="a14">
+          <p:sp>
+            <p:nvSpPr>
+              <p:cNvPr id="6" name="Text 4"/>
+              <p:cNvSpPr/>
+              <p:nvPr/>
+            </p:nvSpPr>
+            <p:spPr>
+              <a:xfrm>
+                <a:off x="868680" y="1600200"/>
+                <a:ext cx="3474720" cy="548640"/>
+              </a:xfrm>
+              <a:prstGeom prst="rect">
+                <a:avLst/>
+              </a:prstGeom>
+              <a:noFill/>
+              <a:ln/>
+            </p:spPr>
+            <p:txBody>
+              <a:bodyPr wrap="square" lIns="0" tIns="0" rIns="0" bIns="0" rtlCol="0" anchor="ctr"/>
+              <a:lstStyle/>
+              <a:p>
+                <a:pPr marL="0" indent="0">
+                  <a:buNone/>
+                </a:pPr>
+                <a14:m>
+                  <m:oMathPara xmlns:m="http://schemas.openxmlformats.org/officeDocument/2006/math">
+                    <m:oMathParaPr>
+                      <m:jc m:val="centerGroup"/>
+                    </m:oMathParaPr>
+                    <m:oMath xmlns:m="http://schemas.openxmlformats.org/officeDocument/2006/math">
+                      <m:r>
+                        <a:rPr lang="en-US" sz="2400" b="1" i="1" dirty="0" smtClean="0">
+                          <a:solidFill>
+                            <a:srgbClr val="FFFFFF"/>
+                          </a:solidFill>
+                          <a:latin typeface="Cambria Math" panose="02040503050406030204" pitchFamily="18" charset="0"/>
+                          <a:ea typeface="Calibri" pitchFamily="34" charset="-122"/>
+                          <a:cs typeface="Calibri" pitchFamily="34" charset="-120"/>
+                        </a:rPr>
+                        <m:t>∠</m:t>
+                      </m:r>
+                      <m:r>
+                        <a:rPr lang="en-US" sz="2400" b="1" i="1" dirty="0" smtClean="0">
+                          <a:solidFill>
+                            <a:srgbClr val="FFFFFF"/>
+                          </a:solidFill>
+                          <a:latin typeface="Cambria Math" panose="02040503050406030204" pitchFamily="18" charset="0"/>
+                          <a:ea typeface="Calibri" pitchFamily="34" charset="-122"/>
+                          <a:cs typeface="Calibri" pitchFamily="34" charset="-120"/>
+                        </a:rPr>
+                        <m:t>𝑨</m:t>
+                      </m:r>
+                      <m:r>
+                        <a:rPr lang="en-US" sz="2400" b="1" i="1" dirty="0" smtClean="0">
+                          <a:solidFill>
+                            <a:srgbClr val="FFFFFF"/>
+                          </a:solidFill>
+                          <a:latin typeface="Cambria Math" panose="02040503050406030204" pitchFamily="18" charset="0"/>
+                          <a:ea typeface="Calibri" pitchFamily="34" charset="-122"/>
+                          <a:cs typeface="Calibri" pitchFamily="34" charset="-120"/>
+                        </a:rPr>
+                        <m:t> + </m:t>
+                      </m:r>
+                      <m:r>
+                        <a:rPr lang="en-US" sz="2400" b="1" i="1" dirty="0" smtClean="0">
+                          <a:solidFill>
+                            <a:srgbClr val="FFFFFF"/>
+                          </a:solidFill>
+                          <a:latin typeface="Cambria Math" panose="02040503050406030204" pitchFamily="18" charset="0"/>
+                          <a:ea typeface="Calibri" pitchFamily="34" charset="-122"/>
+                          <a:cs typeface="Calibri" pitchFamily="34" charset="-120"/>
+                        </a:rPr>
+                        <m:t>∠</m:t>
+                      </m:r>
+                      <m:r>
+                        <a:rPr lang="en-US" sz="2400" b="1" i="1" dirty="0" smtClean="0">
+                          <a:solidFill>
+                            <a:srgbClr val="FFFFFF"/>
+                          </a:solidFill>
+                          <a:latin typeface="Cambria Math" panose="02040503050406030204" pitchFamily="18" charset="0"/>
+                          <a:ea typeface="Calibri" pitchFamily="34" charset="-122"/>
+                          <a:cs typeface="Calibri" pitchFamily="34" charset="-120"/>
+                        </a:rPr>
+                        <m:t>𝑩</m:t>
+                      </m:r>
+                      <m:r>
+                        <a:rPr lang="en-US" sz="2400" b="1" i="1" dirty="0" smtClean="0">
+                          <a:solidFill>
+                            <a:srgbClr val="FFFFFF"/>
+                          </a:solidFill>
+                          <a:latin typeface="Cambria Math" panose="02040503050406030204" pitchFamily="18" charset="0"/>
+                          <a:ea typeface="Calibri" pitchFamily="34" charset="-122"/>
+                          <a:cs typeface="Calibri" pitchFamily="34" charset="-120"/>
+                        </a:rPr>
+                        <m:t> + </m:t>
+                      </m:r>
+                      <m:r>
+                        <a:rPr lang="en-US" sz="2400" b="1" i="1" dirty="0" smtClean="0">
+                          <a:solidFill>
+                            <a:srgbClr val="FFFFFF"/>
+                          </a:solidFill>
+                          <a:latin typeface="Cambria Math" panose="02040503050406030204" pitchFamily="18" charset="0"/>
+                          <a:ea typeface="Calibri" pitchFamily="34" charset="-122"/>
+                          <a:cs typeface="Calibri" pitchFamily="34" charset="-120"/>
+                        </a:rPr>
+                        <m:t>∠</m:t>
+                      </m:r>
+                      <m:r>
+                        <a:rPr lang="en-US" sz="2400" b="1" i="1" dirty="0" smtClean="0">
+                          <a:solidFill>
+                            <a:srgbClr val="FFFFFF"/>
+                          </a:solidFill>
+                          <a:latin typeface="Cambria Math" panose="02040503050406030204" pitchFamily="18" charset="0"/>
+                          <a:ea typeface="Calibri" pitchFamily="34" charset="-122"/>
+                          <a:cs typeface="Calibri" pitchFamily="34" charset="-120"/>
+                        </a:rPr>
+                        <m:t>𝑪</m:t>
+                      </m:r>
+                      <m:r>
+                        <a:rPr lang="en-US" sz="2400" b="1" i="1" dirty="0" smtClean="0">
+                          <a:solidFill>
+                            <a:srgbClr val="FFFFFF"/>
+                          </a:solidFill>
+                          <a:latin typeface="Cambria Math" panose="02040503050406030204" pitchFamily="18" charset="0"/>
+                          <a:ea typeface="Calibri" pitchFamily="34" charset="-122"/>
+                          <a:cs typeface="Calibri" pitchFamily="34" charset="-120"/>
+                        </a:rPr>
+                        <m:t> = </m:t>
+                      </m:r>
+                      <m:r>
+                        <a:rPr lang="en-US" sz="2400" b="1" i="1" dirty="0" smtClean="0">
+                          <a:solidFill>
+                            <a:srgbClr val="FFFFFF"/>
+                          </a:solidFill>
+                          <a:latin typeface="Cambria Math" panose="02040503050406030204" pitchFamily="18" charset="0"/>
+                          <a:ea typeface="Calibri" pitchFamily="34" charset="-122"/>
+                          <a:cs typeface="Calibri" pitchFamily="34" charset="-120"/>
+                        </a:rPr>
+                        <m:t>𝟏𝟖𝟎</m:t>
+                      </m:r>
+                      <m:r>
+                        <a:rPr lang="en-US" sz="2400" b="1" i="1" dirty="0" smtClean="0">
+                          <a:solidFill>
+                            <a:srgbClr val="FFFFFF"/>
+                          </a:solidFill>
+                          <a:latin typeface="Cambria Math" panose="02040503050406030204" pitchFamily="18" charset="0"/>
+                          <a:ea typeface="Calibri" pitchFamily="34" charset="-122"/>
+                          <a:cs typeface="Calibri" pitchFamily="34" charset="-120"/>
+                        </a:rPr>
+                        <m:t>°</m:t>
+                      </m:r>
+                    </m:oMath>
+                  </m:oMathPara>
+                </a14:m>
+              </a:p>
+            </p:txBody>
+          </p:sp>
+        </mc:Choice>
+        <mc:Fallback>
+          <p:sp>
+            <p:nvSpPr>
+              <p:cNvPr id="6" name="Text 4"/>
+              <p:cNvSpPr>
+                <a:spLocks noRot="1" noChangeAspect="1" noMove="1" noResize="1" noEditPoints="1" noAdjustHandles="1" noChangeArrowheads="1" noChangeShapeType="1" noTextEdit="1"/>
+              </p:cNvSpPr>
+              <p:nvPr/>
+            </p:nvSpPr>
+            <p:spPr>
+              <a:xfrm>
+                <a:off x="868680" y="1600200"/>
+                <a:ext cx="3474720" cy="548640"/>
+              </a:xfrm>
+              <a:prstGeom prst="rect">
+                <a:avLst/>
+              </a:prstGeom>
+              <a:blipFill>
+                <a:blip r:embed="rId3"/>
+                <a:stretch>
+                  <a:fillRect l="-2105" t="-1111" r="-5965" b="-16667"/>
+                </a:stretch>
+              </a:blipFill>
+              <a:ln/>
+            </p:spPr>
+            <p:txBody>
+              <a:bodyPr/>
+              <a:lstStyle/>
+              <a:p>
+                <a:r>
+                  <a:rPr lang="en-US">
+                    <a:noFill/>
+                  </a:rPr>
+                  <a:t> </a:t>
+                </a:r>
+              </a:p>
+            </p:txBody>
+          </p:sp>
+        </mc:Fallback>
+      </mc:AlternateContent>
       <p:sp>
         <p:nvSpPr>
           <p:cNvPr id="7" name="Text 5"/>
@@ -17306,45 +17948,162 @@
           </a:p>
         </p:txBody>
       </p:sp>
-      <p:sp>
-        <p:nvSpPr>
-          <p:cNvPr id="11" name="Text 9"/>
-          <p:cNvSpPr/>
-          <p:nvPr/>
-        </p:nvSpPr>
-        <p:spPr>
-          <a:xfrm>
-            <a:off x="5120640" y="1691640"/>
-            <a:ext cx="3200400" cy="548640"/>
-          </a:xfrm>
-          <a:prstGeom prst="rect">
-            <a:avLst/>
-          </a:prstGeom>
-          <a:noFill/>
-          <a:ln/>
-        </p:spPr>
-        <p:txBody>
-          <a:bodyPr wrap="square" lIns="0" tIns="0" rIns="0" bIns="0" rtlCol="0" anchor="ctr"/>
-          <a:lstStyle/>
-          <a:p>
-            <a:pPr marL="0" indent="0">
-              <a:buNone/>
-            </a:pPr>
-            <a:r>
-              <a:rPr lang="en-US" sz="2400" b="1" dirty="0">
-                <a:solidFill>
-                  <a:srgbClr val="1A7A7A"/>
-                </a:solidFill>
-                <a:latin typeface="Calibri" pitchFamily="34" charset="0"/>
-                <a:ea typeface="Calibri" pitchFamily="34" charset="-122"/>
-                <a:cs typeface="Calibri" pitchFamily="34" charset="-120"/>
-              </a:rPr>
-              <a:t>P = a + b + c</a:t>
-            </a:r>
-            <a:endParaRPr lang="en-US" sz="2400" dirty="0"/>
-          </a:p>
-        </p:txBody>
-      </p:sp>
+      <mc:AlternateContent xmlns:mc="http://schemas.openxmlformats.org/markup-compatibility/2006">
+        <mc:Choice xmlns:a14="http://schemas.microsoft.com/office/drawing/2010/main" Requires="a14">
+          <p:sp>
+            <p:nvSpPr>
+              <p:cNvPr id="11" name="Text 9"/>
+              <p:cNvSpPr/>
+              <p:nvPr/>
+            </p:nvSpPr>
+            <p:spPr>
+              <a:xfrm>
+                <a:off x="5120640" y="1691640"/>
+                <a:ext cx="3200400" cy="548640"/>
+              </a:xfrm>
+              <a:prstGeom prst="rect">
+                <a:avLst/>
+              </a:prstGeom>
+              <a:noFill/>
+              <a:ln/>
+            </p:spPr>
+            <p:txBody>
+              <a:bodyPr wrap="square" lIns="0" tIns="0" rIns="0" bIns="0" rtlCol="0" anchor="ctr"/>
+              <a:lstStyle/>
+              <a:p>
+                <a:pPr marL="0" indent="0">
+                  <a:buNone/>
+                </a:pPr>
+                <a14:m>
+                  <m:oMathPara xmlns:m="http://schemas.openxmlformats.org/officeDocument/2006/math">
+                    <m:oMathParaPr>
+                      <m:jc m:val="centerGroup"/>
+                    </m:oMathParaPr>
+                    <m:oMath xmlns:m="http://schemas.openxmlformats.org/officeDocument/2006/math">
+                      <m:r>
+                        <a:rPr lang="en-US" sz="2400" b="1" i="1" dirty="0" smtClean="0">
+                          <a:solidFill>
+                            <a:srgbClr val="1A7A7A"/>
+                          </a:solidFill>
+                          <a:latin typeface="Cambria Math" panose="02040503050406030204" pitchFamily="18" charset="0"/>
+                          <a:ea typeface="Calibri" pitchFamily="34" charset="-122"/>
+                          <a:cs typeface="Calibri" pitchFamily="34" charset="-120"/>
+                        </a:rPr>
+                        <m:t>𝑷</m:t>
+                      </m:r>
+                      <m:r>
+                        <a:rPr lang="en-US" sz="2400" b="1" i="1" dirty="0" smtClean="0">
+                          <a:solidFill>
+                            <a:srgbClr val="1A7A7A"/>
+                          </a:solidFill>
+                          <a:latin typeface="Cambria Math" panose="02040503050406030204" pitchFamily="18" charset="0"/>
+                          <a:ea typeface="Calibri" pitchFamily="34" charset="-122"/>
+                          <a:cs typeface="Calibri" pitchFamily="34" charset="-120"/>
+                        </a:rPr>
+                        <m:t> = </m:t>
+                      </m:r>
+                      <m:r>
+                        <a:rPr lang="en-US" sz="2400" b="1" i="1" dirty="0" smtClean="0">
+                          <a:solidFill>
+                            <a:srgbClr val="1A7A7A"/>
+                          </a:solidFill>
+                          <a:latin typeface="Cambria Math" panose="02040503050406030204" pitchFamily="18" charset="0"/>
+                          <a:ea typeface="Calibri" pitchFamily="34" charset="-122"/>
+                          <a:cs typeface="Calibri" pitchFamily="34" charset="-120"/>
+                        </a:rPr>
+                        <m:t>𝒂</m:t>
+                      </m:r>
+                      <m:r>
+                        <a:rPr lang="en-US" sz="2400" b="1" i="1" dirty="0" smtClean="0">
+                          <a:solidFill>
+                            <a:srgbClr val="1A7A7A"/>
+                          </a:solidFill>
+                          <a:latin typeface="Cambria Math" panose="02040503050406030204" pitchFamily="18" charset="0"/>
+                          <a:ea typeface="Calibri" pitchFamily="34" charset="-122"/>
+                          <a:cs typeface="Calibri" pitchFamily="34" charset="-120"/>
+                        </a:rPr>
+                        <m:t> + </m:t>
+                      </m:r>
+                      <m:r>
+                        <a:rPr lang="en-US" sz="2400" b="1" i="1" dirty="0" smtClean="0">
+                          <a:solidFill>
+                            <a:srgbClr val="1A7A7A"/>
+                          </a:solidFill>
+                          <a:latin typeface="Cambria Math" panose="02040503050406030204" pitchFamily="18" charset="0"/>
+                          <a:ea typeface="Calibri" pitchFamily="34" charset="-122"/>
+                          <a:cs typeface="Calibri" pitchFamily="34" charset="-120"/>
+                        </a:rPr>
+                        <m:t>𝒃</m:t>
+                      </m:r>
+                      <m:r>
+                        <a:rPr lang="en-US" sz="2400" b="1" i="1" dirty="0" smtClean="0">
+                          <a:solidFill>
+                            <a:srgbClr val="1A7A7A"/>
+                          </a:solidFill>
+                          <a:latin typeface="Cambria Math" panose="02040503050406030204" pitchFamily="18" charset="0"/>
+                          <a:ea typeface="Calibri" pitchFamily="34" charset="-122"/>
+                          <a:cs typeface="Calibri" pitchFamily="34" charset="-120"/>
+                        </a:rPr>
+                        <m:t> + </m:t>
+                      </m:r>
+                      <m:r>
+                        <a:rPr lang="en-US" sz="2400" b="1" i="1" dirty="0" smtClean="0">
+                          <a:solidFill>
+                            <a:srgbClr val="1A7A7A"/>
+                          </a:solidFill>
+                          <a:latin typeface="Cambria Math" panose="02040503050406030204" pitchFamily="18" charset="0"/>
+                          <a:ea typeface="Calibri" pitchFamily="34" charset="-122"/>
+                          <a:cs typeface="Calibri" pitchFamily="34" charset="-120"/>
+                        </a:rPr>
+                        <m:t>𝒄</m:t>
+                      </m:r>
+                    </m:oMath>
+                  </m:oMathPara>
+                </a14:m>
+              </a:p>
+            </p:txBody>
+          </p:sp>
+        </mc:Choice>
+        <mc:Fallback>
+          <p:sp>
+            <p:nvSpPr>
+              <p:cNvPr id="11" name="Text 9"/>
+              <p:cNvSpPr>
+                <a:spLocks noRot="1" noChangeAspect="1" noMove="1" noResize="1" noEditPoints="1" noAdjustHandles="1" noChangeArrowheads="1" noChangeShapeType="1" noTextEdit="1"/>
+              </p:cNvSpPr>
+              <p:nvPr/>
+            </p:nvSpPr>
+            <p:spPr>
+              <a:xfrm>
+                <a:off x="5120640" y="1691640"/>
+                <a:ext cx="3200400" cy="548640"/>
+              </a:xfrm>
+              <a:prstGeom prst="rect">
+                <a:avLst/>
+              </a:prstGeom>
+              <a:blipFill>
+                <a:blip r:embed="rId4"/>
+                <a:stretch>
+                  <a:fillRect t="-1111" b="-16667"/>
+                </a:stretch>
+              </a:blipFill>
+              <a:ln/>
+            </p:spPr>
+            <p:txBody>
+              <a:bodyPr/>
+              <a:lstStyle/>
+              <a:p>
+                <a:r>
+                  <a:rPr lang="en-US">
+                    <a:noFill/>
+                  </a:rPr>
+                  <a:t> </a:t>
+                </a:r>
+              </a:p>
+            </p:txBody>
+          </p:sp>
+        </mc:Fallback>
+      </mc:AlternateContent>
       <p:sp>
         <p:nvSpPr>
           <p:cNvPr id="12" name="Text 10"/>
@@ -17484,45 +18243,118 @@
           </a:p>
         </p:txBody>
       </p:sp>
-      <p:sp>
-        <p:nvSpPr>
-          <p:cNvPr id="16" name="Text 14"/>
-          <p:cNvSpPr/>
-          <p:nvPr/>
-        </p:nvSpPr>
-        <p:spPr>
-          <a:xfrm>
-            <a:off x="1005840" y="3886200"/>
-            <a:ext cx="3200400" cy="457200"/>
-          </a:xfrm>
-          <a:prstGeom prst="rect">
-            <a:avLst/>
-          </a:prstGeom>
-          <a:noFill/>
-          <a:ln/>
-        </p:spPr>
-        <p:txBody>
-          <a:bodyPr wrap="square" lIns="0" tIns="0" rIns="0" bIns="0" rtlCol="0" anchor="ctr"/>
-          <a:lstStyle/>
-          <a:p>
-            <a:pPr marL="0" indent="0">
-              <a:buNone/>
-            </a:pPr>
-            <a:r>
-              <a:rPr lang="en-US" sz="2600" b="1" dirty="0">
-                <a:solidFill>
-                  <a:srgbClr val="D4A843"/>
-                </a:solidFill>
-                <a:latin typeface="Calibri" pitchFamily="34" charset="0"/>
-                <a:ea typeface="Calibri" pitchFamily="34" charset="-122"/>
-                <a:cs typeface="Calibri" pitchFamily="34" charset="-120"/>
-              </a:rPr>
-              <a:t>A = ½ × b × h</a:t>
-            </a:r>
-            <a:endParaRPr lang="en-US" sz="2600" dirty="0"/>
-          </a:p>
-        </p:txBody>
-      </p:sp>
+      <mc:AlternateContent xmlns:mc="http://schemas.openxmlformats.org/markup-compatibility/2006">
+        <mc:Choice xmlns:a14="http://schemas.microsoft.com/office/drawing/2010/main" Requires="a14">
+          <p:sp>
+            <p:nvSpPr>
+              <p:cNvPr id="16" name="Text 14"/>
+              <p:cNvSpPr/>
+              <p:nvPr/>
+            </p:nvSpPr>
+            <p:spPr>
+              <a:xfrm>
+                <a:off x="1005840" y="3886200"/>
+                <a:ext cx="3200400" cy="457200"/>
+              </a:xfrm>
+              <a:prstGeom prst="rect">
+                <a:avLst/>
+              </a:prstGeom>
+              <a:noFill/>
+              <a:ln/>
+            </p:spPr>
+            <p:txBody>
+              <a:bodyPr wrap="square" lIns="0" tIns="0" rIns="0" bIns="0" rtlCol="0" anchor="ctr"/>
+              <a:lstStyle/>
+              <a:p>
+                <a:pPr marL="0" indent="0">
+                  <a:buNone/>
+                </a:pPr>
+                <a14:m>
+                  <m:oMathPara xmlns:m="http://schemas.openxmlformats.org/officeDocument/2006/math">
+                    <m:oMathParaPr>
+                      <m:jc m:val="centerGroup"/>
+                    </m:oMathParaPr>
+                    <m:oMath xmlns:m="http://schemas.openxmlformats.org/officeDocument/2006/math">
+                      <m:r>
+                        <a:rPr lang="en-US" sz="2600" b="1" i="1" dirty="0" smtClean="0">
+                          <a:solidFill>
+                            <a:srgbClr val="D4A843"/>
+                          </a:solidFill>
+                          <a:latin typeface="Cambria Math" panose="02040503050406030204" pitchFamily="18" charset="0"/>
+                          <a:ea typeface="Calibri" pitchFamily="34" charset="-122"/>
+                          <a:cs typeface="Calibri" pitchFamily="34" charset="-120"/>
+                        </a:rPr>
+                        <m:t>𝑨</m:t>
+                      </m:r>
+                      <m:r>
+                        <a:rPr lang="en-US" sz="2600" b="1" i="1" dirty="0" smtClean="0">
+                          <a:solidFill>
+                            <a:srgbClr val="D4A843"/>
+                          </a:solidFill>
+                          <a:latin typeface="Cambria Math" panose="02040503050406030204" pitchFamily="18" charset="0"/>
+                          <a:ea typeface="Calibri" pitchFamily="34" charset="-122"/>
+                          <a:cs typeface="Calibri" pitchFamily="34" charset="-120"/>
+                        </a:rPr>
+                        <m:t> = ½</m:t>
+                      </m:r>
+                      <m:r>
+                        <a:rPr lang="en-US" sz="2600" b="1" i="1" dirty="0" smtClean="0">
+                          <a:solidFill>
+                            <a:srgbClr val="D4A843"/>
+                          </a:solidFill>
+                          <a:latin typeface="Cambria Math" panose="02040503050406030204" pitchFamily="18" charset="0"/>
+                          <a:ea typeface="Calibri" pitchFamily="34" charset="-122"/>
+                          <a:cs typeface="Calibri" pitchFamily="34" charset="-120"/>
+                        </a:rPr>
+                        <m:t>𝒃𝒉</m:t>
+                      </m:r>
+                    </m:oMath>
+                  </m:oMathPara>
+                </a14:m>
+              </a:p>
+            </p:txBody>
+          </p:sp>
+        </mc:Choice>
+        <mc:Fallback>
+          <p:sp>
+            <p:nvSpPr>
+              <p:cNvPr id="16" name="Text 14"/>
+              <p:cNvSpPr>
+                <a:spLocks noRot="1" noChangeAspect="1" noMove="1" noResize="1" noEditPoints="1" noAdjustHandles="1" noChangeArrowheads="1" noChangeShapeType="1" noTextEdit="1"/>
+              </p:cNvSpPr>
+              <p:nvPr/>
+            </p:nvSpPr>
+            <p:spPr>
+              <a:xfrm>
+                <a:off x="1005840" y="3886200"/>
+                <a:ext cx="3200400" cy="457200"/>
+              </a:xfrm>
+              <a:prstGeom prst="rect">
+                <a:avLst/>
+              </a:prstGeom>
+              <a:blipFill>
+                <a:blip r:embed="rId5"/>
+                <a:stretch>
+                  <a:fillRect/>
+                </a:stretch>
+              </a:blipFill>
+              <a:ln/>
+            </p:spPr>
+            <p:txBody>
+              <a:bodyPr/>
+              <a:lstStyle/>
+              <a:p>
+                <a:r>
+                  <a:rPr lang="en-US">
+                    <a:noFill/>
+                  </a:rPr>
+                  <a:t> </a:t>
+                </a:r>
+              </a:p>
+            </p:txBody>
+          </p:sp>
+        </mc:Fallback>
+      </mc:AlternateContent>
       <p:sp>
         <p:nvSpPr>
           <p:cNvPr id="17" name="Text 15"/>
@@ -19052,45 +19884,196 @@
           </a:p>
         </p:txBody>
       </p:sp>
-      <p:sp>
-        <p:nvSpPr>
-          <p:cNvPr id="10" name="Text 8"/>
-          <p:cNvSpPr/>
-          <p:nvPr/>
-        </p:nvSpPr>
-        <p:spPr>
-          <a:xfrm>
-            <a:off x="5394960" y="1600200"/>
-            <a:ext cx="2926080" cy="548640"/>
-          </a:xfrm>
-          <a:prstGeom prst="rect">
-            <a:avLst/>
-          </a:prstGeom>
-          <a:noFill/>
-          <a:ln/>
-        </p:spPr>
-        <p:txBody>
-          <a:bodyPr wrap="square" lIns="0" tIns="0" rIns="0" bIns="0" rtlCol="0" anchor="ctr"/>
-          <a:lstStyle/>
-          <a:p>
-            <a:pPr marL="0" indent="0" algn="ctr">
-              <a:buNone/>
-            </a:pPr>
-            <a:r>
-              <a:rPr lang="en-US" sz="2400" b="1" dirty="0">
-                <a:solidFill>
-                  <a:srgbClr val="FFFFFF"/>
-                </a:solidFill>
-                <a:latin typeface="Calibri" pitchFamily="34" charset="0"/>
-                <a:ea typeface="Calibri" pitchFamily="34" charset="-122"/>
-                <a:cs typeface="Calibri" pitchFamily="34" charset="-120"/>
-              </a:rPr>
-              <a:t>A = (s²√3) / 4</a:t>
-            </a:r>
-            <a:endParaRPr lang="en-US" sz="2400" dirty="0"/>
-          </a:p>
-        </p:txBody>
-      </p:sp>
+      <mc:AlternateContent xmlns:mc="http://schemas.openxmlformats.org/markup-compatibility/2006">
+        <mc:Choice xmlns:a14="http://schemas.microsoft.com/office/drawing/2010/main" Requires="a14">
+          <p:sp>
+            <p:nvSpPr>
+              <p:cNvPr id="10" name="Text 8"/>
+              <p:cNvSpPr/>
+              <p:nvPr/>
+            </p:nvSpPr>
+            <p:spPr>
+              <a:xfrm>
+                <a:off x="5394960" y="1600200"/>
+                <a:ext cx="2926080" cy="548640"/>
+              </a:xfrm>
+              <a:prstGeom prst="rect">
+                <a:avLst/>
+              </a:prstGeom>
+              <a:noFill/>
+              <a:ln/>
+            </p:spPr>
+            <p:txBody>
+              <a:bodyPr wrap="square" lIns="0" tIns="0" rIns="0" bIns="0" rtlCol="0" anchor="ctr"/>
+              <a:lstStyle/>
+              <a:p>
+                <a:pPr algn="ctr"/>
+                <a14:m>
+                  <m:oMathPara xmlns:m="http://schemas.openxmlformats.org/officeDocument/2006/math">
+                    <m:oMathParaPr>
+                      <m:jc m:val="centerGroup"/>
+                    </m:oMathParaPr>
+                    <m:oMath xmlns:m="http://schemas.openxmlformats.org/officeDocument/2006/math">
+                      <m:r>
+                        <a:rPr lang="en-US" sz="2400" b="1" i="1" dirty="0" smtClean="0">
+                          <a:solidFill>
+                            <a:srgbClr val="FFFFFF"/>
+                          </a:solidFill>
+                          <a:latin typeface="Cambria Math" panose="02040503050406030204" pitchFamily="18" charset="0"/>
+                          <a:ea typeface="Calibri" pitchFamily="34" charset="-122"/>
+                          <a:cs typeface="Calibri" pitchFamily="34" charset="-120"/>
+                        </a:rPr>
+                        <m:t>𝑨</m:t>
+                      </m:r>
+                      <m:r>
+                        <a:rPr lang="en-US" sz="2400" b="1" i="1" dirty="0" smtClean="0">
+                          <a:solidFill>
+                            <a:srgbClr val="FFFFFF"/>
+                          </a:solidFill>
+                          <a:latin typeface="Cambria Math" panose="02040503050406030204" pitchFamily="18" charset="0"/>
+                          <a:ea typeface="Calibri" pitchFamily="34" charset="-122"/>
+                          <a:cs typeface="Calibri" pitchFamily="34" charset="-120"/>
+                        </a:rPr>
+                        <m:t> = </m:t>
+                      </m:r>
+                      <m:f>
+                        <m:fPr>
+                          <m:ctrlPr>
+                            <a:rPr lang="en-US" sz="2400" b="1" i="1" dirty="0" smtClean="0">
+                              <a:solidFill>
+                                <a:srgbClr val="FFFFFF"/>
+                              </a:solidFill>
+                              <a:latin typeface="Cambria Math" panose="02040503050406030204" pitchFamily="18" charset="0"/>
+                              <a:ea typeface="Calibri" pitchFamily="34" charset="-122"/>
+                              <a:cs typeface="Calibri" pitchFamily="34" charset="-120"/>
+                            </a:rPr>
+                          </m:ctrlPr>
+                        </m:fPr>
+                        <m:num>
+                          <m:r>
+                            <a:rPr lang="en-US" sz="2400" b="1" i="1" dirty="0">
+                              <a:solidFill>
+                                <a:srgbClr val="FFFFFF"/>
+                              </a:solidFill>
+                              <a:latin typeface="Cambria Math" panose="02040503050406030204" pitchFamily="18" charset="0"/>
+                              <a:ea typeface="Calibri" pitchFamily="34" charset="-122"/>
+                              <a:cs typeface="Calibri" pitchFamily="34" charset="-120"/>
+                            </a:rPr>
+                            <m:t>𝒔</m:t>
+                          </m:r>
+                          <m:r>
+                            <a:rPr lang="en-US" sz="2400" b="1" i="1" dirty="0" smtClean="0">
+                              <a:solidFill>
+                                <a:srgbClr val="FFFFFF"/>
+                              </a:solidFill>
+                              <a:latin typeface="Cambria Math" panose="02040503050406030204" pitchFamily="18" charset="0"/>
+                              <a:ea typeface="Calibri" pitchFamily="34" charset="-122"/>
+                              <a:cs typeface="Calibri" pitchFamily="34" charset="-120"/>
+                            </a:rPr>
+                            <m:t> </m:t>
+                          </m:r>
+                          <m:rad>
+                            <m:radPr>
+                              <m:ctrlPr>
+                                <a:rPr lang="en-US" sz="2400" b="1" i="1" dirty="0" smtClean="0">
+                                  <a:solidFill>
+                                    <a:srgbClr val="FFFFFF"/>
+                                  </a:solidFill>
+                                  <a:latin typeface="Cambria Math" panose="02040503050406030204" pitchFamily="18" charset="0"/>
+                                  <a:ea typeface="Calibri" pitchFamily="34" charset="-122"/>
+                                  <a:cs typeface="Calibri" pitchFamily="34" charset="-120"/>
+                                </a:rPr>
+                              </m:ctrlPr>
+                            </m:radPr>
+                            <m:deg>
+                              <m:r>
+                                <a:rPr lang="en-US" sz="2400" b="1" i="1" dirty="0" smtClean="0">
+                                  <a:solidFill>
+                                    <a:srgbClr val="FFFFFF"/>
+                                  </a:solidFill>
+                                  <a:latin typeface="Cambria Math" panose="02040503050406030204" pitchFamily="18" charset="0"/>
+                                  <a:ea typeface="Calibri" pitchFamily="34" charset="-122"/>
+                                  <a:cs typeface="Calibri" pitchFamily="34" charset="-120"/>
+                                </a:rPr>
+                                <m:t>𝟐</m:t>
+                              </m:r>
+                            </m:deg>
+                            <m:e>
+                              <m:r>
+                                <a:rPr lang="en-US" sz="2400" b="1" i="1" dirty="0" smtClean="0">
+                                  <a:solidFill>
+                                    <a:srgbClr val="FFFFFF"/>
+                                  </a:solidFill>
+                                  <a:latin typeface="Cambria Math" panose="02040503050406030204" pitchFamily="18" charset="0"/>
+                                  <a:ea typeface="Calibri" pitchFamily="34" charset="-122"/>
+                                  <a:cs typeface="Calibri" pitchFamily="34" charset="-120"/>
+                                </a:rPr>
+                                <m:t>𝟑</m:t>
+                              </m:r>
+                            </m:e>
+                          </m:rad>
+                        </m:num>
+                        <m:den>
+                          <m:r>
+                            <a:rPr lang="en-US" sz="2400" b="1" i="1" dirty="0" smtClean="0">
+                              <a:solidFill>
+                                <a:srgbClr val="FFFFFF"/>
+                              </a:solidFill>
+                              <a:latin typeface="Cambria Math" panose="02040503050406030204" pitchFamily="18" charset="0"/>
+                              <a:ea typeface="Calibri" pitchFamily="34" charset="-122"/>
+                              <a:cs typeface="Calibri" pitchFamily="34" charset="-120"/>
+                            </a:rPr>
+                            <m:t>𝟒</m:t>
+                          </m:r>
+                        </m:den>
+                      </m:f>
+                    </m:oMath>
+                  </m:oMathPara>
+                </a14:m>
+              </a:p>
+            </p:txBody>
+          </p:sp>
+        </mc:Choice>
+        <mc:Fallback>
+          <p:sp>
+            <p:nvSpPr>
+              <p:cNvPr id="10" name="Text 8"/>
+              <p:cNvSpPr>
+                <a:spLocks noRot="1" noChangeAspect="1" noMove="1" noResize="1" noEditPoints="1" noAdjustHandles="1" noChangeArrowheads="1" noChangeShapeType="1" noTextEdit="1"/>
+              </p:cNvSpPr>
+              <p:nvPr/>
+            </p:nvSpPr>
+            <p:spPr>
+              <a:xfrm>
+                <a:off x="5394960" y="1600200"/>
+                <a:ext cx="2926080" cy="548640"/>
+              </a:xfrm>
+              <a:prstGeom prst="rect">
+                <a:avLst/>
+              </a:prstGeom>
+              <a:blipFill>
+                <a:blip r:embed="rId3"/>
+                <a:stretch>
+                  <a:fillRect t="-12222" b="-20000"/>
+                </a:stretch>
+              </a:blipFill>
+              <a:ln/>
+            </p:spPr>
+            <p:txBody>
+              <a:bodyPr/>
+              <a:lstStyle/>
+              <a:p>
+                <a:r>
+                  <a:rPr lang="en-US">
+                    <a:noFill/>
+                  </a:rPr>
+                  <a:t> </a:t>
+                </a:r>
+              </a:p>
+            </p:txBody>
+          </p:sp>
+        </mc:Fallback>
+      </mc:AlternateContent>
       <p:sp>
         <p:nvSpPr>
           <p:cNvPr id="11" name="Text 9"/>
@@ -19099,7 +20082,7 @@
         </p:nvSpPr>
         <p:spPr>
           <a:xfrm>
-            <a:off x="5394960" y="2194560"/>
+            <a:off x="5394960" y="2423160"/>
             <a:ext cx="2926080" cy="365760"/>
           </a:xfrm>
           <a:prstGeom prst="rect">
@@ -19769,45 +20752,151 @@
           </a:p>
         </p:txBody>
       </p:sp>
-      <p:sp>
-        <p:nvSpPr>
-          <p:cNvPr id="5" name="Text 3"/>
-          <p:cNvSpPr/>
-          <p:nvPr/>
-        </p:nvSpPr>
-        <p:spPr>
-          <a:xfrm>
-            <a:off x="731520" y="1097280"/>
-            <a:ext cx="7680960" cy="822960"/>
-          </a:xfrm>
-          <a:prstGeom prst="rect">
-            <a:avLst/>
-          </a:prstGeom>
-          <a:noFill/>
-          <a:ln/>
-        </p:spPr>
-        <p:txBody>
-          <a:bodyPr wrap="square" lIns="0" tIns="0" rIns="0" bIns="0" rtlCol="0" anchor="ctr"/>
-          <a:lstStyle/>
-          <a:p>
-            <a:pPr marL="0" indent="0" algn="ctr">
-              <a:buNone/>
-            </a:pPr>
-            <a:r>
-              <a:rPr lang="en-US" sz="4800" b="1" dirty="0">
-                <a:solidFill>
-                  <a:srgbClr val="FFFFFF"/>
-                </a:solidFill>
-                <a:latin typeface="Georgia" pitchFamily="34" charset="0"/>
-                <a:ea typeface="Georgia" pitchFamily="34" charset="-122"/>
-                <a:cs typeface="Georgia" pitchFamily="34" charset="-120"/>
-              </a:rPr>
-              <a:t>a² + b² = c²</a:t>
-            </a:r>
-            <a:endParaRPr lang="en-US" sz="4800" dirty="0"/>
-          </a:p>
-        </p:txBody>
-      </p:sp>
+      <mc:AlternateContent xmlns:mc="http://schemas.openxmlformats.org/markup-compatibility/2006">
+        <mc:Choice xmlns:a14="http://schemas.microsoft.com/office/drawing/2010/main" Requires="a14">
+          <p:sp>
+            <p:nvSpPr>
+              <p:cNvPr id="5" name="Text 3"/>
+              <p:cNvSpPr/>
+              <p:nvPr/>
+            </p:nvSpPr>
+            <p:spPr>
+              <a:xfrm>
+                <a:off x="731520" y="1097280"/>
+                <a:ext cx="7680960" cy="822960"/>
+              </a:xfrm>
+              <a:prstGeom prst="rect">
+                <a:avLst/>
+              </a:prstGeom>
+              <a:noFill/>
+              <a:ln/>
+            </p:spPr>
+            <p:txBody>
+              <a:bodyPr wrap="square" lIns="0" tIns="0" rIns="0" bIns="0" rtlCol="0" anchor="ctr"/>
+              <a:lstStyle/>
+              <a:p>
+                <a:pPr marL="0" indent="0" algn="ctr">
+                  <a:buNone/>
+                </a:pPr>
+                <a14:m>
+                  <m:oMathPara xmlns:m="http://schemas.openxmlformats.org/officeDocument/2006/math">
+                    <m:oMathParaPr>
+                      <m:jc m:val="centerGroup"/>
+                    </m:oMathParaPr>
+                    <m:oMath xmlns:m="http://schemas.openxmlformats.org/officeDocument/2006/math">
+                      <m:r>
+                        <a:rPr lang="en-US" sz="4800" b="1" i="1" dirty="0" smtClean="0">
+                          <a:solidFill>
+                            <a:srgbClr val="FFFFFF"/>
+                          </a:solidFill>
+                          <a:latin typeface="Cambria Math" panose="02040503050406030204" pitchFamily="18" charset="0"/>
+                          <a:ea typeface="Georgia" pitchFamily="34" charset="-122"/>
+                          <a:cs typeface="Georgia" pitchFamily="34" charset="-120"/>
+                        </a:rPr>
+                        <m:t>𝒂</m:t>
+                      </m:r>
+                      <m:r>
+                        <a:rPr lang="en-US" sz="4800" b="1" i="1" dirty="0" smtClean="0">
+                          <a:solidFill>
+                            <a:srgbClr val="FFFFFF"/>
+                          </a:solidFill>
+                          <a:latin typeface="Cambria Math" panose="02040503050406030204" pitchFamily="18" charset="0"/>
+                          <a:ea typeface="Georgia" pitchFamily="34" charset="-122"/>
+                          <a:cs typeface="Georgia" pitchFamily="34" charset="-120"/>
+                        </a:rPr>
+                        <m:t>² + </m:t>
+                      </m:r>
+                      <m:r>
+                        <a:rPr lang="en-US" sz="4800" b="1" i="1" dirty="0" smtClean="0">
+                          <a:solidFill>
+                            <a:srgbClr val="FFFFFF"/>
+                          </a:solidFill>
+                          <a:latin typeface="Cambria Math" panose="02040503050406030204" pitchFamily="18" charset="0"/>
+                          <a:ea typeface="Georgia" pitchFamily="34" charset="-122"/>
+                          <a:cs typeface="Georgia" pitchFamily="34" charset="-120"/>
+                        </a:rPr>
+                        <m:t>𝒃</m:t>
+                      </m:r>
+                      <m:r>
+                        <a:rPr lang="en-US" sz="4800" b="1" i="1" dirty="0" smtClean="0">
+                          <a:solidFill>
+                            <a:srgbClr val="FFFFFF"/>
+                          </a:solidFill>
+                          <a:latin typeface="Cambria Math" panose="02040503050406030204" pitchFamily="18" charset="0"/>
+                          <a:ea typeface="Georgia" pitchFamily="34" charset="-122"/>
+                          <a:cs typeface="Georgia" pitchFamily="34" charset="-120"/>
+                        </a:rPr>
+                        <m:t>² = </m:t>
+                      </m:r>
+                      <m:r>
+                        <a:rPr lang="en-US" sz="4800" b="1" i="1" dirty="0" smtClean="0">
+                          <a:solidFill>
+                            <a:srgbClr val="FFFFFF"/>
+                          </a:solidFill>
+                          <a:latin typeface="Cambria Math" panose="02040503050406030204" pitchFamily="18" charset="0"/>
+                          <a:ea typeface="Georgia" pitchFamily="34" charset="-122"/>
+                          <a:cs typeface="Georgia" pitchFamily="34" charset="-120"/>
+                        </a:rPr>
+                        <m:t>𝒄</m:t>
+                      </m:r>
+                      <m:r>
+                        <a:rPr lang="en-US" sz="4800" b="1" i="1" dirty="0" smtClean="0">
+                          <a:solidFill>
+                            <a:srgbClr val="FFFFFF"/>
+                          </a:solidFill>
+                          <a:latin typeface="Cambria Math" panose="02040503050406030204" pitchFamily="18" charset="0"/>
+                          <a:ea typeface="Georgia" pitchFamily="34" charset="-122"/>
+                          <a:cs typeface="Georgia" pitchFamily="34" charset="-120"/>
+                        </a:rPr>
+                        <m:t>²</m:t>
+                      </m:r>
+                    </m:oMath>
+                  </m:oMathPara>
+                </a14:m>
+              </a:p>
+            </p:txBody>
+          </p:sp>
+        </mc:Choice>
+        <mc:Fallback>
+          <p:sp>
+            <p:nvSpPr>
+              <p:cNvPr id="5" name="Text 3"/>
+              <p:cNvSpPr>
+                <a:spLocks noRot="1" noChangeAspect="1" noMove="1" noResize="1" noEditPoints="1" noAdjustHandles="1" noChangeArrowheads="1" noChangeShapeType="1" noTextEdit="1"/>
+              </p:cNvSpPr>
+              <p:nvPr/>
+            </p:nvSpPr>
+            <p:spPr>
+              <a:xfrm>
+                <a:off x="731520" y="1097280"/>
+                <a:ext cx="7680960" cy="822960"/>
+              </a:xfrm>
+              <a:prstGeom prst="rect">
+                <a:avLst/>
+              </a:prstGeom>
+              <a:blipFill>
+                <a:blip r:embed="rId3"/>
+                <a:stretch>
+                  <a:fillRect/>
+                </a:stretch>
+              </a:blipFill>
+              <a:ln/>
+            </p:spPr>
+            <p:txBody>
+              <a:bodyPr/>
+              <a:lstStyle/>
+              <a:p>
+                <a:r>
+                  <a:rPr lang="en-US">
+                    <a:noFill/>
+                  </a:rPr>
+                  <a:t> </a:t>
+                </a:r>
+              </a:p>
+            </p:txBody>
+          </p:sp>
+        </mc:Fallback>
+      </mc:AlternateContent>
       <p:sp>
         <p:nvSpPr>
           <p:cNvPr id="6" name="Text 4"/>
@@ -20766,7 +21855,7 @@
         </p:nvSpPr>
         <p:spPr>
           <a:xfrm>
-            <a:off x="1000000" y="1200000"/>
+            <a:off x="789120" y="974131"/>
             <a:ext cx="7200000" cy="2600000"/>
           </a:xfrm>
           <a:prstGeom prst="rect">
@@ -21715,158 +22804,6 @@
           </a:p>
         </p:txBody>
       </p:sp>
-      <p:sp>
-        <p:nvSpPr>
-          <p:cNvPr id="220" name="CalloutBG"/>
-          <p:cNvSpPr/>
-          <p:nvPr/>
-        </p:nvSpPr>
-        <p:spPr>
-          <a:xfrm>
-            <a:off x="457200" y="4697720"/>
-            <a:ext cx="8229600" cy="395780"/>
-          </a:xfrm>
-          <a:prstGeom prst="rect">
-            <a:avLst/>
-          </a:prstGeom>
-          <a:solidFill>
-            <a:srgbClr val="1B2A4A"/>
-          </a:solidFill>
-          <a:ln>
-            <a:solidFill>
-              <a:srgbClr val="E0DDD8"/>
-            </a:solidFill>
-          </a:ln>
-        </p:spPr>
-        <p:txBody>
-          <a:bodyPr/>
-          <a:lstStyle/>
-          <a:p>
-            <a:endParaRPr lang="en-US"/>
-          </a:p>
-        </p:txBody>
-      </p:sp>
-      <p:sp>
-        <p:nvSpPr>
-          <p:cNvPr id="221" name="CalloutAccent"/>
-          <p:cNvSpPr/>
-          <p:nvPr/>
-        </p:nvSpPr>
-        <p:spPr>
-          <a:xfrm>
-            <a:off x="457200" y="4697720"/>
-            <a:ext cx="54864" cy="395780"/>
-          </a:xfrm>
-          <a:prstGeom prst="rect">
-            <a:avLst/>
-          </a:prstGeom>
-          <a:solidFill>
-            <a:srgbClr val="4ECDC4"/>
-          </a:solidFill>
-          <a:ln/>
-        </p:spPr>
-        <p:txBody>
-          <a:bodyPr/>
-          <a:lstStyle/>
-          <a:p>
-            <a:endParaRPr lang="en-US"/>
-          </a:p>
-        </p:txBody>
-      </p:sp>
-      <p:sp>
-        <p:nvSpPr>
-          <p:cNvPr id="222" name="CalloutText"/>
-          <p:cNvSpPr/>
-          <p:nvPr/>
-        </p:nvSpPr>
-        <p:spPr>
-          <a:xfrm>
-            <a:off x="600000" y="4757720"/>
-            <a:ext cx="7980000" cy="295780"/>
-          </a:xfrm>
-          <a:prstGeom prst="rect">
-            <a:avLst/>
-          </a:prstGeom>
-          <a:noFill/>
-          <a:ln/>
-        </p:spPr>
-        <p:txBody>
-          <a:bodyPr wrap="square" lIns="91440" tIns="45720" rIns="91440" bIns="45720" rtlCol="0" anchor="t">
-            <a:normAutofit fontScale="25000" lnSpcReduction="20000"/>
-          </a:bodyPr>
-          <a:lstStyle/>
-          <a:p>
-            <a:pPr marL="0" indent="0">
-              <a:buNone/>
-            </a:pPr>
-            <a:r>
-              <a:rPr lang="en-US" sz="1400" b="1" dirty="0">
-                <a:solidFill>
-                  <a:srgbClr val="4ECDC4"/>
-                </a:solidFill>
-                <a:latin typeface="Calibri"/>
-              </a:rPr>
-              <a:t>Corrected Example</a:t>
-            </a:r>
-          </a:p>
-          <a:p>
-            <a:pPr marL="0" indent="0">
-              <a:buNone/>
-            </a:pPr>
-            <a:r>
-              <a:rPr lang="en-US" sz="1200" dirty="0">
-                <a:solidFill>
-                  <a:srgbClr val="FFFFFF"/>
-                </a:solidFill>
-                <a:latin typeface="Calibri"/>
-              </a:rPr>
-              <a:t> </a:t>
-            </a:r>
-          </a:p>
-          <a:p>
-            <a:pPr marL="0" indent="0">
-              <a:buNone/>
-            </a:pPr>
-            <a:r>
-              <a:rPr lang="en-US" sz="1300" dirty="0">
-                <a:solidFill>
-                  <a:srgbClr val="B0BEC5"/>
-                </a:solidFill>
-                <a:latin typeface="Calibri"/>
-              </a:rPr>
-              <a:t>Triangle with base 8 cm, slant side 10 cm, height 6 cm.</a:t>
-            </a:r>
-          </a:p>
-          <a:p>
-            <a:pPr marL="0" indent="0">
-              <a:buNone/>
-            </a:pPr>
-            <a:r>
-              <a:rPr lang="en-US" sz="1300" b="1" dirty="0">
-                <a:solidFill>
-                  <a:srgbClr val="D4A843"/>
-                </a:solidFill>
-                <a:latin typeface="Calibri"/>
-              </a:rPr>
-              <a:t>WRONG: A = ½ × 8 × 10 = 40 cm²   (used slant side, not height)</a:t>
-            </a:r>
-          </a:p>
-          <a:p>
-            <a:pPr marL="0" indent="0">
-              <a:buNone/>
-            </a:pPr>
-            <a:r>
-              <a:rPr lang="en-US" sz="1300" b="1" dirty="0">
-                <a:solidFill>
-                  <a:srgbClr val="4ECDC4"/>
-                </a:solidFill>
-                <a:latin typeface="Calibri"/>
-              </a:rPr>
-              <a:t>RIGHT:  A = ½ × 8 × 6 = 24 cm²   (used perpendicular height)</a:t>
-            </a:r>
-          </a:p>
-        </p:txBody>
-      </p:sp>
     </p:spTree>
   </p:cSld>
   <p:clrMapOvr>
@@ -25178,11 +26115,6 @@
               </a:rPr>
               <a:t> </a:t>
             </a:r>
-          </a:p>
-          <a:p>
-            <a:pPr marL="0" indent="0">
-              <a:buNone/>
-            </a:pPr>
             <a:r>
               <a:rPr lang="en-US" sz="1300" dirty="0">
                 <a:solidFill>
@@ -25197,6 +26129,17 @@
             <a:pPr marL="0" indent="0">
               <a:buNone/>
             </a:pPr>
+            <a:endParaRPr lang="en-US" sz="1600" b="1" dirty="0">
+              <a:solidFill>
+                <a:srgbClr val="1A7A7A"/>
+              </a:solidFill>
+              <a:latin typeface="Calibri" pitchFamily="34" charset="0"/>
+            </a:endParaRPr>
+          </a:p>
+          <a:p>
+            <a:pPr marL="0" indent="0">
+              <a:buNone/>
+            </a:pPr>
             <a:r>
               <a:rPr lang="en-US" sz="1600" b="1" dirty="0">
                 <a:solidFill>
@@ -25206,11 +26149,6 @@
               </a:rPr>
               <a:t>Mistake 2 — Inverting the ratio</a:t>
             </a:r>
-          </a:p>
-          <a:p>
-            <a:pPr marL="0" indent="0">
-              <a:buNone/>
-            </a:pPr>
             <a:r>
               <a:rPr lang="en-US" sz="1200" dirty="0">
                 <a:solidFill>
@@ -25239,6 +26177,17 @@
             <a:pPr marL="0" indent="0">
               <a:buNone/>
             </a:pPr>
+            <a:endParaRPr lang="en-US" sz="1600" b="1" dirty="0">
+              <a:solidFill>
+                <a:srgbClr val="1A7A7A"/>
+              </a:solidFill>
+              <a:latin typeface="Calibri" pitchFamily="34" charset="0"/>
+            </a:endParaRPr>
+          </a:p>
+          <a:p>
+            <a:pPr marL="0" indent="0">
+              <a:buNone/>
+            </a:pPr>
             <a:r>
               <a:rPr lang="en-US" sz="1600" b="1" dirty="0">
                 <a:solidFill>
@@ -25248,11 +26197,6 @@
               </a:rPr>
               <a:t>Mistake 3 — Mixing sides from different triangles</a:t>
             </a:r>
-          </a:p>
-          <a:p>
-            <a:pPr marL="0" indent="0">
-              <a:buNone/>
-            </a:pPr>
             <a:r>
               <a:rPr lang="en-US" sz="1200" dirty="0">
                 <a:solidFill>
@@ -25281,6 +26225,17 @@
             <a:pPr marL="0" indent="0">
               <a:buNone/>
             </a:pPr>
+            <a:endParaRPr lang="en-US" sz="1600" b="1" dirty="0">
+              <a:solidFill>
+                <a:srgbClr val="1A7A7A"/>
+              </a:solidFill>
+              <a:latin typeface="Calibri" pitchFamily="34" charset="0"/>
+            </a:endParaRPr>
+          </a:p>
+          <a:p>
+            <a:pPr marL="0" indent="0">
+              <a:buNone/>
+            </a:pPr>
             <a:r>
               <a:rPr lang="en-US" sz="1600" b="1" dirty="0">
                 <a:solidFill>
@@ -25290,11 +26245,6 @@
               </a:rPr>
               <a:t>Mistake 4 — Confusing the scale factor direction</a:t>
             </a:r>
-          </a:p>
-          <a:p>
-            <a:pPr marL="0" indent="0">
-              <a:buNone/>
-            </a:pPr>
             <a:r>
               <a:rPr lang="en-US" sz="1200" dirty="0">
                 <a:solidFill>
@@ -25368,7 +26318,7 @@
         <p:spPr>
           <a:xfrm>
             <a:off x="731520" y="3920000"/>
-            <a:ext cx="54864" cy="1500000"/>
+            <a:ext cx="54864" cy="1144406"/>
           </a:xfrm>
           <a:prstGeom prst="rect">
             <a:avLst/>
@@ -25395,7 +26345,7 @@
         <p:spPr>
           <a:xfrm>
             <a:off x="880000" y="3970000"/>
-            <a:ext cx="7400000" cy="1390000"/>
+            <a:ext cx="7532480" cy="1390000"/>
           </a:xfrm>
           <a:prstGeom prst="rect">
             <a:avLst/>
@@ -25420,20 +26370,6 @@
                 <a:latin typeface="Calibri"/>
               </a:rPr>
               <a:t>Self-Check Strategy</a:t>
-            </a:r>
-          </a:p>
-          <a:p>
-            <a:pPr marL="0" indent="0">
-              <a:buNone/>
-            </a:pPr>
-            <a:r>
-              <a:rPr lang="en-US" sz="1200" dirty="0">
-                <a:solidFill>
-                  <a:srgbClr val="FFFFFF"/>
-                </a:solidFill>
-                <a:latin typeface="Calibri"/>
-              </a:rPr>
-              <a:t> </a:t>
             </a:r>
           </a:p>
           <a:p>
@@ -25573,7 +26509,7 @@
         </p:nvSpPr>
         <p:spPr>
           <a:xfrm>
-            <a:off x="731520" y="1920240"/>
+            <a:off x="731520" y="1639424"/>
             <a:ext cx="5486400" cy="1828800"/>
           </a:xfrm>
           <a:prstGeom prst="rect">
@@ -25659,8 +26595,8 @@
         </p:nvSpPr>
         <p:spPr>
           <a:xfrm>
-            <a:off x="731520" y="3200000"/>
-            <a:ext cx="7680960" cy="548640"/>
+            <a:off x="731520" y="3310309"/>
+            <a:ext cx="5081451" cy="548640"/>
           </a:xfrm>
           <a:prstGeom prst="rect">
             <a:avLst/>

--- a/slides/Math130Unit2C.pptx
+++ b/slides/Math130Unit2C.pptx
@@ -912,7 +912,7 @@
           <a:bodyPr/>
           <a:lstStyle/>
           <a:p>
-            <a:endParaRPr lang="en-US" dirty="0"/>
+            <a:endParaRPr lang="en-US"/>
           </a:p>
         </p:txBody>
       </p:sp>
@@ -996,7 +996,7 @@
           <a:bodyPr/>
           <a:lstStyle/>
           <a:p>
-            <a:endParaRPr lang="en-US" dirty="0"/>
+            <a:endParaRPr lang="en-US"/>
           </a:p>
         </p:txBody>
       </p:sp>
@@ -1080,7 +1080,7 @@
           <a:bodyPr/>
           <a:lstStyle/>
           <a:p>
-            <a:endParaRPr lang="en-US" dirty="0"/>
+            <a:endParaRPr lang="en-US"/>
           </a:p>
         </p:txBody>
       </p:sp>
@@ -1164,7 +1164,7 @@
           <a:bodyPr/>
           <a:lstStyle/>
           <a:p>
-            <a:endParaRPr lang="en-US" dirty="0"/>
+            <a:endParaRPr lang="en-US"/>
           </a:p>
         </p:txBody>
       </p:sp>
@@ -1248,7 +1248,7 @@
           <a:bodyPr/>
           <a:lstStyle/>
           <a:p>
-            <a:endParaRPr lang="en-US" dirty="0"/>
+            <a:endParaRPr lang="en-US"/>
           </a:p>
         </p:txBody>
       </p:sp>
@@ -1332,7 +1332,7 @@
           <a:bodyPr/>
           <a:lstStyle/>
           <a:p>
-            <a:endParaRPr lang="en-US" dirty="0"/>
+            <a:endParaRPr lang="en-US"/>
           </a:p>
         </p:txBody>
       </p:sp>
@@ -1416,7 +1416,7 @@
           <a:bodyPr/>
           <a:lstStyle/>
           <a:p>
-            <a:endParaRPr lang="en-US" dirty="0"/>
+            <a:endParaRPr lang="en-US"/>
           </a:p>
         </p:txBody>
       </p:sp>
@@ -1500,7 +1500,7 @@
           <a:bodyPr/>
           <a:lstStyle/>
           <a:p>
-            <a:endParaRPr lang="en-US" dirty="0"/>
+            <a:endParaRPr lang="en-US"/>
           </a:p>
         </p:txBody>
       </p:sp>
@@ -1584,7 +1584,7 @@
           <a:bodyPr/>
           <a:lstStyle/>
           <a:p>
-            <a:endParaRPr lang="en-US" dirty="0"/>
+            <a:endParaRPr lang="en-US"/>
           </a:p>
         </p:txBody>
       </p:sp>
@@ -1668,7 +1668,7 @@
           <a:bodyPr/>
           <a:lstStyle/>
           <a:p>
-            <a:endParaRPr lang="en-US" dirty="0"/>
+            <a:endParaRPr lang="en-US"/>
           </a:p>
         </p:txBody>
       </p:sp>
@@ -1752,7 +1752,7 @@
           <a:bodyPr/>
           <a:lstStyle/>
           <a:p>
-            <a:endParaRPr lang="en-US" dirty="0"/>
+            <a:endParaRPr lang="en-US"/>
           </a:p>
         </p:txBody>
       </p:sp>
@@ -1836,7 +1836,7 @@
           <a:bodyPr/>
           <a:lstStyle/>
           <a:p>
-            <a:endParaRPr lang="en-US" dirty="0"/>
+            <a:endParaRPr lang="en-US"/>
           </a:p>
         </p:txBody>
       </p:sp>
@@ -1921,7 +1921,7 @@
           <a:lstStyle/>
           <a:p>
             <a:r>
-              <a:rPr lang="en-US" dirty="0"/>
+              <a:rPr lang="en-US"/>
               <a:t>Diagram: Right Triangle — the two shorter sides are legs a and b; the side opposite the right angle (longest side) is hypotenuse c. Mark the right angle with a small square at the corner.</a:t>
             </a:r>
           </a:p>
@@ -2007,7 +2007,7 @@
           <a:bodyPr/>
           <a:lstStyle/>
           <a:p>
-            <a:endParaRPr lang="en-US" dirty="0"/>
+            <a:endParaRPr lang="en-US"/>
           </a:p>
         </p:txBody>
       </p:sp>
@@ -2091,7 +2091,7 @@
           <a:bodyPr/>
           <a:lstStyle/>
           <a:p>
-            <a:endParaRPr lang="en-US" dirty="0"/>
+            <a:endParaRPr lang="en-US"/>
           </a:p>
         </p:txBody>
       </p:sp>
@@ -2175,7 +2175,7 @@
           <a:bodyPr/>
           <a:lstStyle/>
           <a:p>
-            <a:endParaRPr lang="en-US" dirty="0"/>
+            <a:endParaRPr lang="en-US"/>
           </a:p>
         </p:txBody>
       </p:sp>
@@ -2259,7 +2259,7 @@
           <a:bodyPr/>
           <a:lstStyle/>
           <a:p>
-            <a:endParaRPr lang="en-US" dirty="0"/>
+            <a:endParaRPr lang="en-US"/>
           </a:p>
         </p:txBody>
       </p:sp>
@@ -2343,7 +2343,7 @@
           <a:bodyPr/>
           <a:lstStyle/>
           <a:p>
-            <a:endParaRPr lang="en-US" dirty="0"/>
+            <a:endParaRPr lang="en-US"/>
           </a:p>
         </p:txBody>
       </p:sp>
@@ -2427,7 +2427,7 @@
           <a:bodyPr/>
           <a:lstStyle/>
           <a:p>
-            <a:endParaRPr lang="en-US" dirty="0"/>
+            <a:endParaRPr lang="en-US"/>
           </a:p>
         </p:txBody>
       </p:sp>
@@ -2511,7 +2511,7 @@
           <a:bodyPr/>
           <a:lstStyle/>
           <a:p>
-            <a:endParaRPr lang="en-US" dirty="0"/>
+            <a:endParaRPr lang="en-US"/>
           </a:p>
         </p:txBody>
       </p:sp>
@@ -2595,7 +2595,7 @@
           <a:bodyPr/>
           <a:lstStyle/>
           <a:p>
-            <a:endParaRPr lang="en-US" dirty="0"/>
+            <a:endParaRPr lang="en-US"/>
           </a:p>
         </p:txBody>
       </p:sp>
@@ -2679,7 +2679,7 @@
           <a:bodyPr/>
           <a:lstStyle/>
           <a:p>
-            <a:endParaRPr lang="en-US" dirty="0"/>
+            <a:endParaRPr lang="en-US"/>
           </a:p>
         </p:txBody>
       </p:sp>
@@ -2763,7 +2763,7 @@
           <a:bodyPr/>
           <a:lstStyle/>
           <a:p>
-            <a:endParaRPr lang="en-US" dirty="0"/>
+            <a:endParaRPr lang="en-US"/>
           </a:p>
         </p:txBody>
       </p:sp>
@@ -2847,7 +2847,7 @@
           <a:bodyPr/>
           <a:lstStyle/>
           <a:p>
-            <a:endParaRPr lang="en-US" dirty="0"/>
+            <a:endParaRPr lang="en-US"/>
           </a:p>
         </p:txBody>
       </p:sp>
@@ -2931,7 +2931,7 @@
           <a:bodyPr/>
           <a:lstStyle/>
           <a:p>
-            <a:endParaRPr lang="en-US" dirty="0"/>
+            <a:endParaRPr lang="en-US"/>
           </a:p>
         </p:txBody>
       </p:sp>
@@ -3015,7 +3015,7 @@
           <a:bodyPr/>
           <a:lstStyle/>
           <a:p>
-            <a:endParaRPr lang="en-US" dirty="0"/>
+            <a:endParaRPr lang="en-US"/>
           </a:p>
         </p:txBody>
       </p:sp>
@@ -3099,7 +3099,7 @@
           <a:bodyPr/>
           <a:lstStyle/>
           <a:p>
-            <a:endParaRPr lang="en-US" dirty="0"/>
+            <a:endParaRPr lang="en-US"/>
           </a:p>
         </p:txBody>
       </p:sp>
@@ -3183,7 +3183,7 @@
           <a:bodyPr/>
           <a:lstStyle/>
           <a:p>
-            <a:endParaRPr lang="en-US" dirty="0"/>
+            <a:endParaRPr lang="en-US"/>
           </a:p>
         </p:txBody>
       </p:sp>
@@ -3699,7 +3699,7 @@
               <a:buNone/>
             </a:pPr>
             <a:r>
-              <a:rPr lang="en-US" sz="1600" b="1" kern="0" spc="800" dirty="0">
+              <a:rPr lang="en-US" sz="1600" b="1" kern="0" spc="800">
                 <a:solidFill>
                   <a:srgbClr val="4ECDC4"/>
                 </a:solidFill>
@@ -3709,7 +3709,7 @@
               </a:rPr>
               <a:t>MATH 130</a:t>
             </a:r>
-            <a:endParaRPr lang="en-US" sz="1600" dirty="0"/>
+            <a:endParaRPr lang="en-US" sz="1600"/>
           </a:p>
         </p:txBody>
       </p:sp>
@@ -3741,7 +3741,7 @@
               <a:buNone/>
             </a:pPr>
             <a:r>
-              <a:rPr lang="en-US" sz="4200" b="1" dirty="0">
+              <a:rPr lang="en-US" sz="4200" b="1">
                 <a:solidFill>
                   <a:srgbClr val="FFFFFF"/>
                 </a:solidFill>
@@ -3751,7 +3751,7 @@
               </a:rPr>
               <a:t>Geometry: Angles</a:t>
             </a:r>
-            <a:endParaRPr lang="en-US" sz="4200" dirty="0"/>
+            <a:endParaRPr lang="en-US" sz="4200"/>
           </a:p>
           <a:p>
             <a:pPr marL="0" indent="0">
@@ -3761,7 +3761,7 @@
               <a:buNone/>
             </a:pPr>
             <a:r>
-              <a:rPr lang="en-US" sz="4200" b="1" dirty="0">
+              <a:rPr lang="en-US" sz="4200" b="1">
                 <a:solidFill>
                   <a:srgbClr val="FFFFFF"/>
                 </a:solidFill>
@@ -3771,7 +3771,7 @@
               </a:rPr>
               <a:t>&amp; Polygons</a:t>
             </a:r>
-            <a:endParaRPr lang="en-US" sz="4200" dirty="0"/>
+            <a:endParaRPr lang="en-US" sz="4200"/>
           </a:p>
         </p:txBody>
       </p:sp>
@@ -3830,7 +3830,7 @@
               <a:buNone/>
             </a:pPr>
             <a:r>
-              <a:rPr lang="en-US" sz="1400" i="1" dirty="0">
+              <a:rPr lang="en-US" sz="1400" i="1">
                 <a:solidFill>
                   <a:srgbClr val="E8E4DD"/>
                 </a:solidFill>
@@ -3840,7 +3840,7 @@
               </a:rPr>
               <a:t>Properties, Measurements, and Formulas for Lines, Angles, and Surfaces</a:t>
             </a:r>
-            <a:endParaRPr lang="en-US" sz="1400" dirty="0"/>
+            <a:endParaRPr lang="en-US" sz="1400"/>
           </a:p>
         </p:txBody>
       </p:sp>
@@ -3869,7 +3869,7 @@
               <a:buNone/>
             </a:pPr>
             <a:r>
-              <a:rPr lang="en-US" sz="1200" dirty="0">
+              <a:rPr lang="en-US" sz="1200">
                 <a:solidFill>
                   <a:srgbClr val="7A8599"/>
                 </a:solidFill>
@@ -3879,7 +3879,7 @@
               </a:rPr>
               <a:t>Liberty University  |  Spring 2026</a:t>
             </a:r>
-            <a:endParaRPr lang="en-US" sz="1200" dirty="0"/>
+            <a:endParaRPr lang="en-US" sz="1200"/>
           </a:p>
         </p:txBody>
       </p:sp>
@@ -3968,7 +3968,7 @@
               <a:buNone/>
             </a:pPr>
             <a:r>
-              <a:rPr lang="en-US" sz="3200" b="1" dirty="0">
+              <a:rPr lang="en-US" sz="3200" b="1">
                 <a:solidFill>
                   <a:srgbClr val="1B2A4A"/>
                 </a:solidFill>
@@ -3978,7 +3978,7 @@
               </a:rPr>
               <a:t>Types of Angles</a:t>
             </a:r>
-            <a:endParaRPr lang="en-US" sz="3200" dirty="0"/>
+            <a:endParaRPr lang="en-US" sz="3200"/>
           </a:p>
         </p:txBody>
       </p:sp>
@@ -4068,7 +4068,7 @@
               <a:buNone/>
             </a:pPr>
             <a:r>
-              <a:rPr lang="en-US" sz="1600" b="1" dirty="0">
+              <a:rPr lang="en-US" sz="1600" b="1">
                 <a:solidFill>
                   <a:srgbClr val="1B2A4A"/>
                 </a:solidFill>
@@ -4078,7 +4078,7 @@
               </a:rPr>
               <a:t>Right Angle</a:t>
             </a:r>
-            <a:endParaRPr lang="en-US" sz="1600" dirty="0"/>
+            <a:endParaRPr lang="en-US" sz="1600"/>
           </a:p>
         </p:txBody>
       </p:sp>
@@ -4107,7 +4107,7 @@
               <a:buNone/>
             </a:pPr>
             <a:r>
-              <a:rPr lang="en-US" sz="2200" b="1" dirty="0">
+              <a:rPr lang="en-US" sz="2200" b="1">
                 <a:solidFill>
                   <a:srgbClr val="1A7A7A"/>
                 </a:solidFill>
@@ -4117,7 +4117,7 @@
               </a:rPr>
               <a:t>Exactly 90°</a:t>
             </a:r>
-            <a:endParaRPr lang="en-US" sz="2200" dirty="0"/>
+            <a:endParaRPr lang="en-US" sz="2200"/>
           </a:p>
         </p:txBody>
       </p:sp>
@@ -4207,7 +4207,7 @@
               <a:buNone/>
             </a:pPr>
             <a:r>
-              <a:rPr lang="en-US" sz="1600" b="1" dirty="0">
+              <a:rPr lang="en-US" sz="1600" b="1">
                 <a:solidFill>
                   <a:srgbClr val="1B2A4A"/>
                 </a:solidFill>
@@ -4217,7 +4217,7 @@
               </a:rPr>
               <a:t>Straight Angle</a:t>
             </a:r>
-            <a:endParaRPr lang="en-US" sz="1600" dirty="0"/>
+            <a:endParaRPr lang="en-US" sz="1600"/>
           </a:p>
         </p:txBody>
       </p:sp>
@@ -4246,7 +4246,7 @@
               <a:buNone/>
             </a:pPr>
             <a:r>
-              <a:rPr lang="en-US" sz="2200" b="1" dirty="0">
+              <a:rPr lang="en-US" sz="2200" b="1">
                 <a:solidFill>
                   <a:srgbClr val="0D4F4F"/>
                 </a:solidFill>
@@ -4256,7 +4256,7 @@
               </a:rPr>
               <a:t>Exactly 180°</a:t>
             </a:r>
-            <a:endParaRPr lang="en-US" sz="2200" dirty="0"/>
+            <a:endParaRPr lang="en-US" sz="2200"/>
           </a:p>
         </p:txBody>
       </p:sp>
@@ -4346,7 +4346,7 @@
               <a:buNone/>
             </a:pPr>
             <a:r>
-              <a:rPr lang="en-US" sz="1600" b="1" dirty="0">
+              <a:rPr lang="en-US" sz="1600" b="1">
                 <a:solidFill>
                   <a:srgbClr val="1B2A4A"/>
                 </a:solidFill>
@@ -4356,7 +4356,7 @@
               </a:rPr>
               <a:t>Acute Angle</a:t>
             </a:r>
-            <a:endParaRPr lang="en-US" sz="1600" dirty="0"/>
+            <a:endParaRPr lang="en-US" sz="1600"/>
           </a:p>
         </p:txBody>
       </p:sp>
@@ -4385,7 +4385,7 @@
               <a:buNone/>
             </a:pPr>
             <a:r>
-              <a:rPr lang="en-US" sz="2200" b="1" dirty="0">
+              <a:rPr lang="en-US" sz="2200" b="1">
                 <a:solidFill>
                   <a:srgbClr val="2AA5A5"/>
                 </a:solidFill>
@@ -4395,7 +4395,7 @@
               </a:rPr>
               <a:t>Between 0° and 90°</a:t>
             </a:r>
-            <a:endParaRPr lang="en-US" sz="2200" dirty="0"/>
+            <a:endParaRPr lang="en-US" sz="2200"/>
           </a:p>
         </p:txBody>
       </p:sp>
@@ -4485,7 +4485,7 @@
               <a:buNone/>
             </a:pPr>
             <a:r>
-              <a:rPr lang="en-US" sz="1600" b="1" dirty="0">
+              <a:rPr lang="en-US" sz="1600" b="1">
                 <a:solidFill>
                   <a:srgbClr val="1B2A4A"/>
                 </a:solidFill>
@@ -4495,7 +4495,7 @@
               </a:rPr>
               <a:t>Obtuse Angle</a:t>
             </a:r>
-            <a:endParaRPr lang="en-US" sz="1600" dirty="0"/>
+            <a:endParaRPr lang="en-US" sz="1600"/>
           </a:p>
         </p:txBody>
       </p:sp>
@@ -4524,7 +4524,7 @@
               <a:buNone/>
             </a:pPr>
             <a:r>
-              <a:rPr lang="en-US" sz="2200" b="1" dirty="0">
+              <a:rPr lang="en-US" sz="2200" b="1">
                 <a:solidFill>
                   <a:srgbClr val="D4A843"/>
                 </a:solidFill>
@@ -4534,7 +4534,7 @@
               </a:rPr>
               <a:t>Between 90° and 180°</a:t>
             </a:r>
-            <a:endParaRPr lang="en-US" sz="2200" dirty="0"/>
+            <a:endParaRPr lang="en-US" sz="2200"/>
           </a:p>
         </p:txBody>
       </p:sp>
@@ -4590,7 +4590,7 @@
               <a:buNone/>
             </a:pPr>
             <a:r>
-              <a:rPr lang="en-US" sz="1600" b="1" dirty="0">
+              <a:rPr lang="en-US" sz="1600" b="1">
                 <a:solidFill>
                   <a:srgbClr val="4ECDC4"/>
                 </a:solidFill>
@@ -4600,7 +4600,7 @@
               </a:rPr>
               <a:t>Supplementary Angles</a:t>
             </a:r>
-            <a:endParaRPr lang="en-US" sz="1600" dirty="0"/>
+            <a:endParaRPr lang="en-US" sz="1600"/>
           </a:p>
         </p:txBody>
       </p:sp>
@@ -4629,7 +4629,7 @@
               <a:buNone/>
             </a:pPr>
             <a:r>
-              <a:rPr lang="en-US" sz="1400" dirty="0">
+              <a:rPr lang="en-US" sz="1400">
                 <a:solidFill>
                   <a:srgbClr val="FFFFFF"/>
                 </a:solidFill>
@@ -4639,14 +4639,14 @@
               </a:rPr>
               <a:t>Two angles whose measures</a:t>
             </a:r>
-            <a:endParaRPr lang="en-US" sz="1400" dirty="0"/>
-          </a:p>
-          <a:p>
-            <a:pPr marL="0" indent="0">
-              <a:buNone/>
-            </a:pPr>
-            <a:r>
-              <a:rPr lang="en-US" sz="1400" dirty="0">
+            <a:endParaRPr lang="en-US" sz="1400"/>
+          </a:p>
+          <a:p>
+            <a:pPr marL="0" indent="0">
+              <a:buNone/>
+            </a:pPr>
+            <a:r>
+              <a:rPr lang="en-US" sz="1400">
                 <a:solidFill>
                   <a:srgbClr val="FFFFFF"/>
                 </a:solidFill>
@@ -4656,7 +4656,7 @@
               </a:rPr>
               <a:t>add up to 180°</a:t>
             </a:r>
-            <a:endParaRPr lang="en-US" sz="1400" dirty="0"/>
+            <a:endParaRPr lang="en-US" sz="1400"/>
           </a:p>
         </p:txBody>
       </p:sp>
@@ -4712,7 +4712,7 @@
               <a:buNone/>
             </a:pPr>
             <a:r>
-              <a:rPr lang="en-US" sz="1600" b="1" dirty="0">
+              <a:rPr lang="en-US" sz="1600" b="1">
                 <a:solidFill>
                   <a:srgbClr val="4ECDC4"/>
                 </a:solidFill>
@@ -4722,7 +4722,7 @@
               </a:rPr>
               <a:t>Complementary Angles</a:t>
             </a:r>
-            <a:endParaRPr lang="en-US" sz="1600" dirty="0"/>
+            <a:endParaRPr lang="en-US" sz="1600"/>
           </a:p>
         </p:txBody>
       </p:sp>
@@ -4751,7 +4751,7 @@
               <a:buNone/>
             </a:pPr>
             <a:r>
-              <a:rPr lang="en-US" sz="1400" dirty="0">
+              <a:rPr lang="en-US" sz="1400">
                 <a:solidFill>
                   <a:srgbClr val="FFFFFF"/>
                 </a:solidFill>
@@ -4761,14 +4761,14 @@
               </a:rPr>
               <a:t>Two angles whose measures</a:t>
             </a:r>
-            <a:endParaRPr lang="en-US" sz="1400" dirty="0"/>
-          </a:p>
-          <a:p>
-            <a:pPr marL="0" indent="0">
-              <a:buNone/>
-            </a:pPr>
-            <a:r>
-              <a:rPr lang="en-US" sz="1400" dirty="0">
+            <a:endParaRPr lang="en-US" sz="1400"/>
+          </a:p>
+          <a:p>
+            <a:pPr marL="0" indent="0">
+              <a:buNone/>
+            </a:pPr>
+            <a:r>
+              <a:rPr lang="en-US" sz="1400">
                 <a:solidFill>
                   <a:srgbClr val="FFFFFF"/>
                 </a:solidFill>
@@ -4778,7 +4778,7 @@
               </a:rPr>
               <a:t>add up to 90°</a:t>
             </a:r>
-            <a:endParaRPr lang="en-US" sz="1400" dirty="0"/>
+            <a:endParaRPr lang="en-US" sz="1400"/>
           </a:p>
         </p:txBody>
       </p:sp>
@@ -4867,7 +4867,7 @@
               <a:buNone/>
             </a:pPr>
             <a:r>
-              <a:rPr lang="en-US" sz="3200" b="1" dirty="0">
+              <a:rPr lang="en-US" sz="3200" b="1">
                 <a:solidFill>
                   <a:srgbClr val="1B2A4A"/>
                 </a:solidFill>
@@ -4877,7 +4877,7 @@
               </a:rPr>
               <a:t>Adjacent &amp; Vertical Angles</a:t>
             </a:r>
-            <a:endParaRPr lang="en-US" sz="3200" dirty="0"/>
+            <a:endParaRPr lang="en-US" sz="3200"/>
           </a:p>
         </p:txBody>
       </p:sp>
@@ -4967,7 +4967,7 @@
               <a:buNone/>
             </a:pPr>
             <a:r>
-              <a:rPr lang="en-US" sz="2000" b="1" dirty="0">
+              <a:rPr lang="en-US" sz="2000" b="1">
                 <a:solidFill>
                   <a:srgbClr val="1B2A4A"/>
                 </a:solidFill>
@@ -4977,7 +4977,7 @@
               </a:rPr>
               <a:t>Adjacent Angles</a:t>
             </a:r>
-            <a:endParaRPr lang="en-US" sz="2000" dirty="0"/>
+            <a:endParaRPr lang="en-US" sz="2000"/>
           </a:p>
         </p:txBody>
       </p:sp>
@@ -5006,7 +5006,7 @@
               <a:buNone/>
             </a:pPr>
             <a:r>
-              <a:rPr lang="en-US" sz="1400" dirty="0">
+              <a:rPr lang="en-US" sz="1400">
                 <a:solidFill>
                   <a:srgbClr val="3D4A5C"/>
                 </a:solidFill>
@@ -5016,7 +5016,7 @@
               </a:rPr>
               <a:t>Two angles that share a common vertex and a common side, but do not overlap.</a:t>
             </a:r>
-            <a:endParaRPr lang="en-US" sz="1400" dirty="0"/>
+            <a:endParaRPr lang="en-US" sz="1400"/>
           </a:p>
         </p:txBody>
       </p:sp>
@@ -5045,7 +5045,7 @@
               <a:buNone/>
             </a:pPr>
             <a:r>
-              <a:rPr lang="en-US" sz="1200" i="1" dirty="0">
+              <a:rPr lang="en-US" sz="1200" i="1">
                 <a:solidFill>
                   <a:srgbClr val="7A8599"/>
                 </a:solidFill>
@@ -5055,7 +5055,7 @@
               </a:rPr>
               <a:t>∠AOB and ∠BOC are adjacent angles — they share vertex O and ray OB.</a:t>
             </a:r>
-            <a:endParaRPr lang="en-US" sz="1200" dirty="0"/>
+            <a:endParaRPr lang="en-US" sz="1200"/>
           </a:p>
         </p:txBody>
       </p:sp>
@@ -5145,7 +5145,7 @@
               <a:buNone/>
             </a:pPr>
             <a:r>
-              <a:rPr lang="en-US" sz="2000" b="1" dirty="0">
+              <a:rPr lang="en-US" sz="2000" b="1">
                 <a:solidFill>
                   <a:srgbClr val="1B2A4A"/>
                 </a:solidFill>
@@ -5155,7 +5155,7 @@
               </a:rPr>
               <a:t>Vertical Angles</a:t>
             </a:r>
-            <a:endParaRPr lang="en-US" sz="2000" dirty="0"/>
+            <a:endParaRPr lang="en-US" sz="2000"/>
           </a:p>
         </p:txBody>
       </p:sp>
@@ -5184,7 +5184,7 @@
               <a:buNone/>
             </a:pPr>
             <a:r>
-              <a:rPr lang="en-US" sz="1400" dirty="0">
+              <a:rPr lang="en-US" sz="1400">
                 <a:solidFill>
                   <a:srgbClr val="3D4A5C"/>
                 </a:solidFill>
@@ -5194,7 +5194,7 @@
               </a:rPr>
               <a:t>Two angles formed by intersecting lines that are on opposite sides of the intersection.</a:t>
             </a:r>
-            <a:endParaRPr lang="en-US" sz="1400" dirty="0"/>
+            <a:endParaRPr lang="en-US" sz="1400"/>
           </a:p>
         </p:txBody>
       </p:sp>
@@ -5223,7 +5223,7 @@
               <a:buNone/>
             </a:pPr>
             <a:r>
-              <a:rPr lang="en-US" sz="1300" b="1" dirty="0">
+              <a:rPr lang="en-US" sz="1300" b="1">
                 <a:solidFill>
                   <a:srgbClr val="1A7A7A"/>
                 </a:solidFill>
@@ -5233,7 +5233,7 @@
               </a:rPr>
               <a:t>Vertical angles are always equal in measure (congruent).</a:t>
             </a:r>
-            <a:endParaRPr lang="en-US" sz="1300" dirty="0"/>
+            <a:endParaRPr lang="en-US" sz="1300"/>
           </a:p>
         </p:txBody>
       </p:sp>
@@ -5316,7 +5316,7 @@
               <a:buNone/>
             </a:pPr>
             <a:r>
-              <a:rPr lang="en-US" sz="1300" b="1" dirty="0">
+              <a:rPr lang="en-US" sz="1300" b="1">
                 <a:solidFill>
                   <a:srgbClr val="1B2A4A"/>
                 </a:solidFill>
@@ -5327,7 +5327,7 @@
               <a:t>Key Insight: </a:t>
             </a:r>
             <a:r>
-              <a:rPr lang="en-US" sz="1300" dirty="0">
+              <a:rPr lang="en-US" sz="1300">
                 <a:solidFill>
                   <a:srgbClr val="3D4A5C"/>
                 </a:solidFill>
@@ -5337,7 +5337,7 @@
               </a:rPr>
               <a:t>When two lines intersect, they form two pairs of vertical angles. Each pair consists of congruent angles, and any two adjacent angles are supplementary (sum to 180°).</a:t>
             </a:r>
-            <a:endParaRPr lang="en-US" sz="1300" dirty="0"/>
+            <a:endParaRPr lang="en-US" sz="1300"/>
           </a:p>
         </p:txBody>
       </p:sp>
@@ -5426,7 +5426,7 @@
               <a:buNone/>
             </a:pPr>
             <a:r>
-              <a:rPr lang="en-US" sz="2800" b="1" dirty="0">
+              <a:rPr lang="en-US" sz="2800" b="1">
                 <a:solidFill>
                   <a:srgbClr val="1B2A4A"/>
                 </a:solidFill>
@@ -5489,7 +5489,7 @@
               <a:buNone/>
             </a:pPr>
             <a:r>
-              <a:rPr lang="en-US" sz="1200" b="1" dirty="0">
+              <a:rPr lang="en-US" sz="1200" b="1">
                 <a:solidFill>
                   <a:srgbClr val="FFFFFF"/>
                 </a:solidFill>
@@ -5525,7 +5525,7 @@
               <a:buNone/>
             </a:pPr>
             <a:r>
-              <a:rPr lang="en-US" sz="1200" b="1" dirty="0">
+              <a:rPr lang="en-US" sz="1200" b="1">
                 <a:solidFill>
                   <a:srgbClr val="FFFFFF"/>
                 </a:solidFill>
@@ -5622,7 +5622,7 @@
               <a:buNone/>
             </a:pPr>
             <a:r>
-              <a:rPr lang="en-US" sz="1500" b="1" dirty="0">
+              <a:rPr lang="en-US" sz="1500" b="1">
                 <a:solidFill>
                   <a:srgbClr val="1B2A4A"/>
                 </a:solidFill>
@@ -5687,7 +5687,7 @@
               <a:buNone/>
             </a:pPr>
             <a:r>
-              <a:rPr lang="en-US" sz="1300" dirty="0">
+              <a:rPr lang="en-US" sz="1300">
                 <a:solidFill>
                   <a:srgbClr val="3D4A5C"/>
                 </a:solidFill>
@@ -5784,7 +5784,7 @@
               <a:buNone/>
             </a:pPr>
             <a:r>
-              <a:rPr lang="en-US" sz="1500" b="1" dirty="0">
+              <a:rPr lang="en-US" sz="1500" b="1">
                 <a:solidFill>
                   <a:srgbClr val="1B2A4A"/>
                 </a:solidFill>
@@ -5849,7 +5849,7 @@
               <a:buNone/>
             </a:pPr>
             <a:r>
-              <a:rPr lang="en-US" sz="1300" dirty="0">
+              <a:rPr lang="en-US" sz="1300">
                 <a:solidFill>
                   <a:srgbClr val="3D4A5C"/>
                 </a:solidFill>
@@ -5946,7 +5946,7 @@
               <a:buNone/>
             </a:pPr>
             <a:r>
-              <a:rPr lang="en-US" sz="1500" b="1" dirty="0">
+              <a:rPr lang="en-US" sz="1500" b="1">
                 <a:solidFill>
                   <a:srgbClr val="1B2A4A"/>
                 </a:solidFill>
@@ -6011,7 +6011,7 @@
               <a:buNone/>
             </a:pPr>
             <a:r>
-              <a:rPr lang="en-US" sz="1300" dirty="0">
+              <a:rPr lang="en-US" sz="1300">
                 <a:solidFill>
                   <a:srgbClr val="3D4A5C"/>
                 </a:solidFill>
@@ -6108,7 +6108,7 @@
               <a:buNone/>
             </a:pPr>
             <a:r>
-              <a:rPr lang="en-US" sz="1500" b="1" dirty="0">
+              <a:rPr lang="en-US" sz="1500" b="1">
                 <a:solidFill>
                   <a:srgbClr val="1B2A4A"/>
                 </a:solidFill>
@@ -6173,7 +6173,7 @@
               <a:buNone/>
             </a:pPr>
             <a:r>
-              <a:rPr lang="en-US" sz="1300" dirty="0">
+              <a:rPr lang="en-US" sz="1300">
                 <a:solidFill>
                   <a:srgbClr val="3D4A5C"/>
                 </a:solidFill>
@@ -6270,7 +6270,7 @@
               <a:buNone/>
             </a:pPr>
             <a:r>
-              <a:rPr lang="en-US" sz="1500" b="1" dirty="0">
+              <a:rPr lang="en-US" sz="1500" b="1">
                 <a:solidFill>
                   <a:srgbClr val="1B2A4A"/>
                 </a:solidFill>
@@ -6335,7 +6335,7 @@
               <a:buNone/>
             </a:pPr>
             <a:r>
-              <a:rPr lang="en-US" sz="1300" dirty="0">
+              <a:rPr lang="en-US" sz="1300">
                 <a:solidFill>
                   <a:srgbClr val="3D4A5C"/>
                 </a:solidFill>
@@ -6404,7 +6404,7 @@
               <a:buNone/>
             </a:pPr>
             <a:r>
-              <a:rPr lang="en-US" sz="1300" b="1" dirty="0">
+              <a:rPr lang="en-US" sz="1300" b="1">
                 <a:solidFill>
                   <a:srgbClr val="B8922F"/>
                 </a:solidFill>
@@ -6413,7 +6413,7 @@
               <a:t>Key principle: </a:t>
             </a:r>
             <a:r>
-              <a:rPr lang="en-US" sz="1300" dirty="0">
+              <a:rPr lang="en-US" sz="1300">
                 <a:solidFill>
                   <a:srgbClr val="3D4A5C"/>
                 </a:solidFill>
@@ -6509,7 +6509,7 @@
               <a:buNone/>
             </a:pPr>
             <a:r>
-              <a:rPr lang="en-US" sz="3200" b="1" dirty="0">
+              <a:rPr lang="en-US" sz="3200" b="1">
                 <a:solidFill>
                   <a:srgbClr val="1B2A4A"/>
                 </a:solidFill>
@@ -6519,7 +6519,7 @@
               </a:rPr>
               <a:t>Parallel Lines &amp; Transversals</a:t>
             </a:r>
-            <a:endParaRPr lang="en-US" sz="3200" dirty="0"/>
+            <a:endParaRPr lang="en-US" sz="3200"/>
           </a:p>
         </p:txBody>
       </p:sp>
@@ -6548,7 +6548,7 @@
               <a:buNone/>
             </a:pPr>
             <a:r>
-              <a:rPr lang="en-US" sz="1400" dirty="0">
+              <a:rPr lang="en-US" sz="1400">
                 <a:solidFill>
                   <a:srgbClr val="3D4A5C"/>
                 </a:solidFill>
@@ -6558,7 +6558,7 @@
               </a:rPr>
               <a:t>When a transversal crosses parallel lines, special angle relationships form:</a:t>
             </a:r>
-            <a:endParaRPr lang="en-US" sz="1400" dirty="0"/>
+            <a:endParaRPr lang="en-US" sz="1400"/>
           </a:p>
         </p:txBody>
       </p:sp>
@@ -6648,7 +6648,7 @@
               <a:buNone/>
             </a:pPr>
             <a:r>
-              <a:rPr lang="en-US" sz="1500" b="1" dirty="0">
+              <a:rPr lang="en-US" sz="1500" b="1">
                 <a:solidFill>
                   <a:srgbClr val="1B2A4A"/>
                 </a:solidFill>
@@ -6658,14 +6658,14 @@
               </a:rPr>
               <a:t>Corresponding</a:t>
             </a:r>
-            <a:endParaRPr lang="en-US" sz="1500" dirty="0"/>
-          </a:p>
-          <a:p>
-            <a:pPr marL="0" indent="0">
-              <a:buNone/>
-            </a:pPr>
-            <a:r>
-              <a:rPr lang="en-US" sz="1500" b="1" dirty="0">
+            <a:endParaRPr lang="en-US" sz="1500"/>
+          </a:p>
+          <a:p>
+            <a:pPr marL="0" indent="0">
+              <a:buNone/>
+            </a:pPr>
+            <a:r>
+              <a:rPr lang="en-US" sz="1500" b="1">
                 <a:solidFill>
                   <a:srgbClr val="1B2A4A"/>
                 </a:solidFill>
@@ -6675,7 +6675,7 @@
               </a:rPr>
               <a:t>Angles</a:t>
             </a:r>
-            <a:endParaRPr lang="en-US" sz="1500" dirty="0"/>
+            <a:endParaRPr lang="en-US" sz="1500"/>
           </a:p>
         </p:txBody>
       </p:sp>
@@ -6704,7 +6704,7 @@
               <a:buNone/>
             </a:pPr>
             <a:r>
-              <a:rPr lang="en-US" sz="1200" dirty="0">
+              <a:rPr lang="en-US" sz="1200">
                 <a:solidFill>
                   <a:srgbClr val="3D4A5C"/>
                 </a:solidFill>
@@ -6714,14 +6714,14 @@
               </a:rPr>
               <a:t>Same position at each intersection.</a:t>
             </a:r>
-            <a:endParaRPr lang="en-US" sz="1200" dirty="0"/>
-          </a:p>
-          <a:p>
-            <a:pPr marL="0" indent="0">
-              <a:buNone/>
-            </a:pPr>
-            <a:r>
-              <a:rPr lang="en-US" sz="1200" dirty="0">
+            <a:endParaRPr lang="en-US" sz="1200"/>
+          </a:p>
+          <a:p>
+            <a:pPr marL="0" indent="0">
+              <a:buNone/>
+            </a:pPr>
+            <a:r>
+              <a:rPr lang="en-US" sz="1200">
                 <a:solidFill>
                   <a:srgbClr val="3D4A5C"/>
                 </a:solidFill>
@@ -6731,7 +6731,7 @@
               </a:rPr>
               <a:t>∠1 = ∠5</a:t>
             </a:r>
-            <a:endParaRPr lang="en-US" sz="1200" dirty="0"/>
+            <a:endParaRPr lang="en-US" sz="1200"/>
           </a:p>
         </p:txBody>
       </p:sp>
@@ -6787,7 +6787,7 @@
               <a:buNone/>
             </a:pPr>
             <a:r>
-              <a:rPr lang="en-US" sz="1200" b="1" dirty="0">
+              <a:rPr lang="en-US" sz="1200" b="1">
                 <a:solidFill>
                   <a:srgbClr val="FFFFFF"/>
                 </a:solidFill>
@@ -6797,7 +6797,7 @@
               </a:rPr>
               <a:t>Equal</a:t>
             </a:r>
-            <a:endParaRPr lang="en-US" sz="1200" dirty="0"/>
+            <a:endParaRPr lang="en-US" sz="1200"/>
           </a:p>
         </p:txBody>
       </p:sp>
@@ -6887,7 +6887,7 @@
               <a:buNone/>
             </a:pPr>
             <a:r>
-              <a:rPr lang="en-US" sz="1500" b="1" dirty="0">
+              <a:rPr lang="en-US" sz="1500" b="1">
                 <a:solidFill>
                   <a:srgbClr val="1B2A4A"/>
                 </a:solidFill>
@@ -6897,14 +6897,14 @@
               </a:rPr>
               <a:t>Alternate</a:t>
             </a:r>
-            <a:endParaRPr lang="en-US" sz="1500" dirty="0"/>
-          </a:p>
-          <a:p>
-            <a:pPr marL="0" indent="0">
-              <a:buNone/>
-            </a:pPr>
-            <a:r>
-              <a:rPr lang="en-US" sz="1500" b="1" dirty="0">
+            <a:endParaRPr lang="en-US" sz="1500"/>
+          </a:p>
+          <a:p>
+            <a:pPr marL="0" indent="0">
+              <a:buNone/>
+            </a:pPr>
+            <a:r>
+              <a:rPr lang="en-US" sz="1500" b="1">
                 <a:solidFill>
                   <a:srgbClr val="1B2A4A"/>
                 </a:solidFill>
@@ -6914,7 +6914,7 @@
               </a:rPr>
               <a:t>Interior Angles</a:t>
             </a:r>
-            <a:endParaRPr lang="en-US" sz="1500" dirty="0"/>
+            <a:endParaRPr lang="en-US" sz="1500"/>
           </a:p>
         </p:txBody>
       </p:sp>
@@ -6943,7 +6943,7 @@
               <a:buNone/>
             </a:pPr>
             <a:r>
-              <a:rPr lang="en-US" sz="1200" dirty="0">
+              <a:rPr lang="en-US" sz="1200">
                 <a:solidFill>
                   <a:srgbClr val="3D4A5C"/>
                 </a:solidFill>
@@ -6953,14 +6953,14 @@
               </a:rPr>
               <a:t>Opposite sides, between the lines.</a:t>
             </a:r>
-            <a:endParaRPr lang="en-US" sz="1200" dirty="0"/>
-          </a:p>
-          <a:p>
-            <a:pPr marL="0" indent="0">
-              <a:buNone/>
-            </a:pPr>
-            <a:r>
-              <a:rPr lang="en-US" sz="1200" dirty="0">
+            <a:endParaRPr lang="en-US" sz="1200"/>
+          </a:p>
+          <a:p>
+            <a:pPr marL="0" indent="0">
+              <a:buNone/>
+            </a:pPr>
+            <a:r>
+              <a:rPr lang="en-US" sz="1200">
                 <a:solidFill>
                   <a:srgbClr val="3D4A5C"/>
                 </a:solidFill>
@@ -6970,7 +6970,7 @@
               </a:rPr>
               <a:t>∠3 = ∠6</a:t>
             </a:r>
-            <a:endParaRPr lang="en-US" sz="1200" dirty="0"/>
+            <a:endParaRPr lang="en-US" sz="1200"/>
           </a:p>
         </p:txBody>
       </p:sp>
@@ -7026,7 +7026,7 @@
               <a:buNone/>
             </a:pPr>
             <a:r>
-              <a:rPr lang="en-US" sz="1200" b="1" dirty="0">
+              <a:rPr lang="en-US" sz="1200" b="1">
                 <a:solidFill>
                   <a:srgbClr val="FFFFFF"/>
                 </a:solidFill>
@@ -7036,7 +7036,7 @@
               </a:rPr>
               <a:t>Equal</a:t>
             </a:r>
-            <a:endParaRPr lang="en-US" sz="1200" dirty="0"/>
+            <a:endParaRPr lang="en-US" sz="1200"/>
           </a:p>
         </p:txBody>
       </p:sp>
@@ -7126,7 +7126,7 @@
               <a:buNone/>
             </a:pPr>
             <a:r>
-              <a:rPr lang="en-US" sz="1500" b="1" dirty="0">
+              <a:rPr lang="en-US" sz="1500" b="1">
                 <a:solidFill>
                   <a:srgbClr val="1B2A4A"/>
                 </a:solidFill>
@@ -7136,14 +7136,14 @@
               </a:rPr>
               <a:t>Alternate</a:t>
             </a:r>
-            <a:endParaRPr lang="en-US" sz="1500" dirty="0"/>
-          </a:p>
-          <a:p>
-            <a:pPr marL="0" indent="0">
-              <a:buNone/>
-            </a:pPr>
-            <a:r>
-              <a:rPr lang="en-US" sz="1500" b="1" dirty="0">
+            <a:endParaRPr lang="en-US" sz="1500"/>
+          </a:p>
+          <a:p>
+            <a:pPr marL="0" indent="0">
+              <a:buNone/>
+            </a:pPr>
+            <a:r>
+              <a:rPr lang="en-US" sz="1500" b="1">
                 <a:solidFill>
                   <a:srgbClr val="1B2A4A"/>
                 </a:solidFill>
@@ -7153,7 +7153,7 @@
               </a:rPr>
               <a:t>Exterior Angles</a:t>
             </a:r>
-            <a:endParaRPr lang="en-US" sz="1500" dirty="0"/>
+            <a:endParaRPr lang="en-US" sz="1500"/>
           </a:p>
         </p:txBody>
       </p:sp>
@@ -7182,7 +7182,7 @@
               <a:buNone/>
             </a:pPr>
             <a:r>
-              <a:rPr lang="en-US" sz="1200" dirty="0">
+              <a:rPr lang="en-US" sz="1200">
                 <a:solidFill>
                   <a:srgbClr val="3D4A5C"/>
                 </a:solidFill>
@@ -7192,14 +7192,14 @@
               </a:rPr>
               <a:t>Opposite sides, outside the lines.</a:t>
             </a:r>
-            <a:endParaRPr lang="en-US" sz="1200" dirty="0"/>
-          </a:p>
-          <a:p>
-            <a:pPr marL="0" indent="0">
-              <a:buNone/>
-            </a:pPr>
-            <a:r>
-              <a:rPr lang="en-US" sz="1200" dirty="0">
+            <a:endParaRPr lang="en-US" sz="1200"/>
+          </a:p>
+          <a:p>
+            <a:pPr marL="0" indent="0">
+              <a:buNone/>
+            </a:pPr>
+            <a:r>
+              <a:rPr lang="en-US" sz="1200">
                 <a:solidFill>
                   <a:srgbClr val="3D4A5C"/>
                 </a:solidFill>
@@ -7209,7 +7209,7 @@
               </a:rPr>
               <a:t>∠1 = ∠8</a:t>
             </a:r>
-            <a:endParaRPr lang="en-US" sz="1200" dirty="0"/>
+            <a:endParaRPr lang="en-US" sz="1200"/>
           </a:p>
         </p:txBody>
       </p:sp>
@@ -7265,7 +7265,7 @@
               <a:buNone/>
             </a:pPr>
             <a:r>
-              <a:rPr lang="en-US" sz="1200" b="1" dirty="0">
+              <a:rPr lang="en-US" sz="1200" b="1">
                 <a:solidFill>
                   <a:srgbClr val="FFFFFF"/>
                 </a:solidFill>
@@ -7275,7 +7275,7 @@
               </a:rPr>
               <a:t>Equal</a:t>
             </a:r>
-            <a:endParaRPr lang="en-US" sz="1200" dirty="0"/>
+            <a:endParaRPr lang="en-US" sz="1200"/>
           </a:p>
         </p:txBody>
       </p:sp>
@@ -7331,7 +7331,7 @@
               <a:buNone/>
             </a:pPr>
             <a:r>
-              <a:rPr lang="en-US" sz="1300" dirty="0">
+              <a:rPr lang="en-US" sz="1300">
                 <a:solidFill>
                   <a:srgbClr val="FFFFFF"/>
                 </a:solidFill>
@@ -7341,7 +7341,7 @@
               </a:rPr>
               <a:t>Angles labeled 1–8 at two intersections:  t is the transversal,  l ∥ m are the parallel lines</a:t>
             </a:r>
-            <a:endParaRPr lang="en-US" sz="1300" dirty="0"/>
+            <a:endParaRPr lang="en-US" sz="1300"/>
           </a:p>
         </p:txBody>
       </p:sp>
@@ -7430,7 +7430,7 @@
               <a:buNone/>
             </a:pPr>
             <a:r>
-              <a:rPr lang="en-US" sz="3200" b="1" dirty="0">
+              <a:rPr lang="en-US" sz="3200" b="1">
                 <a:solidFill>
                   <a:srgbClr val="1B2A4A"/>
                 </a:solidFill>
@@ -7440,7 +7440,7 @@
               </a:rPr>
               <a:t>Corresponding Segments</a:t>
             </a:r>
-            <a:endParaRPr lang="en-US" sz="3200" dirty="0"/>
+            <a:endParaRPr lang="en-US" sz="3200"/>
           </a:p>
         </p:txBody>
       </p:sp>
@@ -7469,7 +7469,7 @@
               <a:buNone/>
             </a:pPr>
             <a:r>
-              <a:rPr lang="en-US" sz="1400" dirty="0">
+              <a:rPr lang="en-US" sz="1400">
                 <a:solidFill>
                   <a:srgbClr val="3D4A5C"/>
                 </a:solidFill>
@@ -7479,7 +7479,7 @@
               </a:rPr>
               <a:t>When two transversals cross a pair of parallel lines, the segments between those parallel lines are called corresponding segments.</a:t>
             </a:r>
-            <a:endParaRPr lang="en-US" sz="1400" dirty="0"/>
+            <a:endParaRPr lang="en-US" sz="1400"/>
           </a:p>
         </p:txBody>
       </p:sp>
@@ -7535,7 +7535,7 @@
               <a:buNone/>
             </a:pPr>
             <a:r>
-              <a:rPr lang="en-US" sz="1400" dirty="0">
+              <a:rPr lang="en-US" sz="1400">
                 <a:solidFill>
                   <a:srgbClr val="E8E4DD"/>
                 </a:solidFill>
@@ -7545,7 +7545,7 @@
               </a:rPr>
               <a:t>If  l₁ ∥ l₂ ∥ l₃ , then segments a, b are corresponding and c, d are corresponding.</a:t>
             </a:r>
-            <a:endParaRPr lang="en-US" sz="1400" dirty="0"/>
+            <a:endParaRPr lang="en-US" sz="1400"/>
           </a:p>
         </p:txBody>
       </p:sp>
@@ -7574,7 +7574,7 @@
               <a:buNone/>
             </a:pPr>
             <a:r>
-              <a:rPr lang="en-US" sz="2200" b="1" dirty="0">
+              <a:rPr lang="en-US" sz="2200" b="1">
                 <a:solidFill>
                   <a:srgbClr val="4ECDC4"/>
                 </a:solidFill>
@@ -7584,7 +7584,7 @@
               </a:rPr>
               <a:t>a / b  =  c / d        and equivalently        a / c  =  b / d</a:t>
             </a:r>
-            <a:endParaRPr lang="en-US" sz="2200" dirty="0"/>
+            <a:endParaRPr lang="en-US" sz="2200"/>
           </a:p>
         </p:txBody>
       </p:sp>
@@ -7674,7 +7674,7 @@
               <a:buNone/>
             </a:pPr>
             <a:r>
-              <a:rPr lang="en-US" sz="1600" b="1" dirty="0">
+              <a:rPr lang="en-US" sz="1600" b="1">
                 <a:solidFill>
                   <a:srgbClr val="1B2A4A"/>
                 </a:solidFill>
@@ -7684,7 +7684,7 @@
               </a:rPr>
               <a:t>Example</a:t>
             </a:r>
-            <a:endParaRPr lang="en-US" sz="1600" dirty="0"/>
+            <a:endParaRPr lang="en-US" sz="1600"/>
           </a:p>
         </p:txBody>
       </p:sp>
@@ -7713,7 +7713,7 @@
               <a:buNone/>
             </a:pPr>
             <a:r>
-              <a:rPr lang="en-US" sz="1300" dirty="0">
+              <a:rPr lang="en-US" sz="1300">
                 <a:solidFill>
                   <a:srgbClr val="3D4A5C"/>
                 </a:solidFill>
@@ -7723,7 +7723,7 @@
               </a:rPr>
               <a:t>Assuming the vertical lines are parallel, use proportions to find unknown distances.  Worked Example: if a = 6, b = 9, c = 8, find d.  Step 1 — Set up: a/b = c/d  →  6/9 = 8/d.  Step 2 — Cross-multiply: 6d = 9 × 8 = 72.  Step 3 — Solve: d = 12.</a:t>
             </a:r>
-            <a:endParaRPr lang="en-US" sz="1300" dirty="0"/>
+            <a:endParaRPr lang="en-US" sz="1300"/>
           </a:p>
         </p:txBody>
       </p:sp>
@@ -7812,7 +7812,7 @@
               <a:buNone/>
             </a:pPr>
             <a:r>
-              <a:rPr lang="en-US" sz="2800" b="1" dirty="0">
+              <a:rPr lang="en-US" sz="2800" b="1">
                 <a:solidFill>
                   <a:srgbClr val="1B2A4A"/>
                 </a:solidFill>
@@ -7915,7 +7915,7 @@
               <a:buNone/>
             </a:pPr>
             <a:r>
-              <a:rPr lang="en-US" sz="1600" b="1" dirty="0">
+              <a:rPr lang="en-US" sz="1600" b="1">
                 <a:solidFill>
                   <a:srgbClr val="1A7A7A"/>
                 </a:solidFill>
@@ -7929,7 +7929,7 @@
               <a:buNone/>
             </a:pPr>
             <a:r>
-              <a:rPr lang="en-US" sz="1200" dirty="0">
+              <a:rPr lang="en-US" sz="1200">
                 <a:solidFill>
                   <a:srgbClr val="FFFFFF"/>
                 </a:solidFill>
@@ -7943,7 +7943,7 @@
               <a:buNone/>
             </a:pPr>
             <a:r>
-              <a:rPr lang="en-US" sz="1400" b="1" dirty="0">
+              <a:rPr lang="en-US" sz="1400" b="1">
                 <a:solidFill>
                   <a:srgbClr val="D4A843"/>
                 </a:solidFill>
@@ -7952,7 +7952,7 @@
               <a:t>Step 1</a:t>
             </a:r>
             <a:r>
-              <a:rPr lang="en-US" sz="1400" dirty="0">
+              <a:rPr lang="en-US" sz="1400">
                 <a:solidFill>
                   <a:srgbClr val="3D4A5C"/>
                 </a:solidFill>
@@ -7966,7 +7966,7 @@
               <a:buNone/>
             </a:pPr>
             <a:r>
-              <a:rPr lang="en-US" sz="1200" dirty="0">
+              <a:rPr lang="en-US" sz="1200">
                 <a:solidFill>
                   <a:srgbClr val="5C6B7A"/>
                 </a:solidFill>
@@ -7980,7 +7980,7 @@
               <a:buNone/>
             </a:pPr>
             <a:r>
-              <a:rPr lang="en-US" sz="1200" dirty="0">
+              <a:rPr lang="en-US" sz="1200">
                 <a:solidFill>
                   <a:srgbClr val="FFFFFF"/>
                 </a:solidFill>
@@ -7994,7 +7994,7 @@
               <a:buNone/>
             </a:pPr>
             <a:r>
-              <a:rPr lang="en-US" sz="1400" b="1" dirty="0">
+              <a:rPr lang="en-US" sz="1400" b="1">
                 <a:solidFill>
                   <a:srgbClr val="D4A843"/>
                 </a:solidFill>
@@ -8003,7 +8003,7 @@
               <a:t>Step 2</a:t>
             </a:r>
             <a:r>
-              <a:rPr lang="en-US" sz="1400" dirty="0">
+              <a:rPr lang="en-US" sz="1400">
                 <a:solidFill>
                   <a:srgbClr val="3D4A5C"/>
                 </a:solidFill>
@@ -8017,7 +8017,7 @@
               <a:buNone/>
             </a:pPr>
             <a:r>
-              <a:rPr lang="en-US" sz="1200" dirty="0">
+              <a:rPr lang="en-US" sz="1200">
                 <a:solidFill>
                   <a:srgbClr val="5C6B7A"/>
                 </a:solidFill>
@@ -8031,7 +8031,7 @@
               <a:buNone/>
             </a:pPr>
             <a:r>
-              <a:rPr lang="en-US" sz="1200" dirty="0">
+              <a:rPr lang="en-US" sz="1200">
                 <a:solidFill>
                   <a:srgbClr val="FFFFFF"/>
                 </a:solidFill>
@@ -8045,7 +8045,7 @@
               <a:buNone/>
             </a:pPr>
             <a:r>
-              <a:rPr lang="en-US" sz="1400" b="1" dirty="0">
+              <a:rPr lang="en-US" sz="1400" b="1">
                 <a:solidFill>
                   <a:srgbClr val="D4A843"/>
                 </a:solidFill>
@@ -8054,7 +8054,7 @@
               <a:t>Step 3</a:t>
             </a:r>
             <a:r>
-              <a:rPr lang="en-US" sz="1400" dirty="0">
+              <a:rPr lang="en-US" sz="1400">
                 <a:solidFill>
                   <a:srgbClr val="3D4A5C"/>
                 </a:solidFill>
@@ -8068,7 +8068,7 @@
               <a:buNone/>
             </a:pPr>
             <a:r>
-              <a:rPr lang="en-US" sz="1200" dirty="0">
+              <a:rPr lang="en-US" sz="1200">
                 <a:solidFill>
                   <a:srgbClr val="5C6B7A"/>
                 </a:solidFill>
@@ -8082,7 +8082,7 @@
               <a:buNone/>
             </a:pPr>
             <a:r>
-              <a:rPr lang="en-US" sz="1200" dirty="0">
+              <a:rPr lang="en-US" sz="1200">
                 <a:solidFill>
                   <a:srgbClr val="FFFFFF"/>
                 </a:solidFill>
@@ -8096,7 +8096,7 @@
               <a:buNone/>
             </a:pPr>
             <a:r>
-              <a:rPr lang="en-US" sz="1400" b="1" dirty="0">
+              <a:rPr lang="en-US" sz="1400" b="1">
                 <a:solidFill>
                   <a:srgbClr val="D4A843"/>
                 </a:solidFill>
@@ -8105,7 +8105,7 @@
               <a:t>Step 4</a:t>
             </a:r>
             <a:r>
-              <a:rPr lang="en-US" sz="1400" dirty="0">
+              <a:rPr lang="en-US" sz="1400">
                 <a:solidFill>
                   <a:srgbClr val="3D4A5C"/>
                 </a:solidFill>
@@ -8119,7 +8119,7 @@
               <a:buNone/>
             </a:pPr>
             <a:r>
-              <a:rPr lang="en-US" sz="1200" dirty="0">
+              <a:rPr lang="en-US" sz="1200">
                 <a:solidFill>
                   <a:srgbClr val="5C6B7A"/>
                 </a:solidFill>
@@ -8133,7 +8133,7 @@
               <a:buNone/>
             </a:pPr>
             <a:r>
-              <a:rPr lang="en-US" sz="1200" dirty="0">
+              <a:rPr lang="en-US" sz="1200">
                 <a:solidFill>
                   <a:srgbClr val="FFFFFF"/>
                 </a:solidFill>
@@ -8147,7 +8147,7 @@
               <a:buNone/>
             </a:pPr>
             <a:r>
-              <a:rPr lang="en-US" sz="1200" i="1" dirty="0">
+              <a:rPr lang="en-US" sz="1200" i="1">
                 <a:solidFill>
                   <a:srgbClr val="4ECDC4"/>
                 </a:solidFill>
@@ -8161,7 +8161,7 @@
               <a:buNone/>
             </a:pPr>
             <a:r>
-              <a:rPr lang="en-US" sz="1200" dirty="0">
+              <a:rPr lang="en-US" sz="1200">
                 <a:solidFill>
                   <a:srgbClr val="5C6B7A"/>
                 </a:solidFill>
@@ -8175,7 +8175,7 @@
               <a:buNone/>
             </a:pPr>
             <a:r>
-              <a:rPr lang="en-US" sz="1200" dirty="0">
+              <a:rPr lang="en-US" sz="1200">
                 <a:solidFill>
                   <a:srgbClr val="5C6B7A"/>
                 </a:solidFill>
@@ -8189,7 +8189,7 @@
               <a:buNone/>
             </a:pPr>
             <a:r>
-              <a:rPr lang="en-US" sz="1200" dirty="0">
+              <a:rPr lang="en-US" sz="1200">
                 <a:solidFill>
                   <a:srgbClr val="FFFFFF"/>
                 </a:solidFill>
@@ -8203,7 +8203,7 @@
               <a:buNone/>
             </a:pPr>
             <a:r>
-              <a:rPr lang="en-US" sz="1300" b="1" dirty="0">
+              <a:rPr lang="en-US" sz="1300" b="1">
                 <a:solidFill>
                   <a:srgbClr val="D4A843"/>
                 </a:solidFill>
@@ -8217,7 +8217,7 @@
               <a:buNone/>
             </a:pPr>
             <a:r>
-              <a:rPr lang="en-US" sz="1200" dirty="0">
+              <a:rPr lang="en-US" sz="1200">
                 <a:solidFill>
                   <a:srgbClr val="3D4A5C"/>
                 </a:solidFill>
@@ -8231,7 +8231,7 @@
               <a:buNone/>
             </a:pPr>
             <a:r>
-              <a:rPr lang="en-US" sz="1200" dirty="0">
+              <a:rPr lang="en-US" sz="1200">
                 <a:solidFill>
                   <a:srgbClr val="3D4A5C"/>
                 </a:solidFill>
@@ -8327,7 +8327,7 @@
               <a:buNone/>
             </a:pPr>
             <a:r>
-              <a:rPr lang="en-US" sz="2800" b="1" dirty="0">
+              <a:rPr lang="en-US" sz="2800" b="1">
                 <a:solidFill>
                   <a:srgbClr val="1B2A4A"/>
                 </a:solidFill>
@@ -8399,7 +8399,7 @@
               <a:buNone/>
             </a:pPr>
             <a:r>
-              <a:rPr lang="en-US" sz="1500" b="1" dirty="0">
+              <a:rPr lang="en-US" sz="1500" b="1">
                 <a:solidFill>
                   <a:srgbClr val="D4A843"/>
                 </a:solidFill>
@@ -8413,7 +8413,7 @@
               <a:buNone/>
             </a:pPr>
             <a:r>
-              <a:rPr lang="en-US" sz="1200" dirty="0">
+              <a:rPr lang="en-US" sz="1200">
                 <a:solidFill>
                   <a:srgbClr val="FFFFFF"/>
                 </a:solidFill>
@@ -8427,7 +8427,7 @@
               <a:buNone/>
             </a:pPr>
             <a:r>
-              <a:rPr lang="en-US" sz="1300" dirty="0">
+              <a:rPr lang="en-US" sz="1300">
                 <a:solidFill>
                   <a:srgbClr val="B0BEC5"/>
                 </a:solidFill>
@@ -8441,7 +8441,7 @@
               <a:buNone/>
             </a:pPr>
             <a:r>
-              <a:rPr lang="en-US" sz="1300" dirty="0">
+              <a:rPr lang="en-US" sz="1300">
                 <a:solidFill>
                   <a:srgbClr val="B0BEC5"/>
                 </a:solidFill>
@@ -8455,7 +8455,7 @@
               <a:buNone/>
             </a:pPr>
             <a:r>
-              <a:rPr lang="en-US" sz="1200" dirty="0">
+              <a:rPr lang="en-US" sz="1200">
                 <a:solidFill>
                   <a:srgbClr val="FFFFFF"/>
                 </a:solidFill>
@@ -8469,7 +8469,7 @@
               <a:buNone/>
             </a:pPr>
             <a:r>
-              <a:rPr lang="en-US" sz="1300" b="1" dirty="0">
+              <a:rPr lang="en-US" sz="1300" b="1">
                 <a:solidFill>
                   <a:srgbClr val="4ECDC4"/>
                 </a:solidFill>
@@ -8478,7 +8478,7 @@
               <a:t>Step 1:</a:t>
             </a:r>
             <a:r>
-              <a:rPr lang="en-US" sz="1300" dirty="0">
+              <a:rPr lang="en-US" sz="1300">
                 <a:solidFill>
                   <a:srgbClr val="FFFFFF"/>
                 </a:solidFill>
@@ -8492,7 +8492,7 @@
               <a:buNone/>
             </a:pPr>
             <a:r>
-              <a:rPr lang="en-US" sz="1300" b="1" dirty="0">
+              <a:rPr lang="en-US" sz="1300" b="1">
                 <a:solidFill>
                   <a:srgbClr val="4ECDC4"/>
                 </a:solidFill>
@@ -8501,7 +8501,7 @@
               <a:t>Step 2:</a:t>
             </a:r>
             <a:r>
-              <a:rPr lang="en-US" sz="1300" dirty="0">
+              <a:rPr lang="en-US" sz="1300">
                 <a:solidFill>
                   <a:srgbClr val="FFFFFF"/>
                 </a:solidFill>
@@ -8515,7 +8515,7 @@
               <a:buNone/>
             </a:pPr>
             <a:r>
-              <a:rPr lang="en-US" sz="1300" b="1" dirty="0">
+              <a:rPr lang="en-US" sz="1300" b="1">
                 <a:solidFill>
                   <a:srgbClr val="4ECDC4"/>
                 </a:solidFill>
@@ -8524,7 +8524,7 @@
               <a:t>Step 3:</a:t>
             </a:r>
             <a:r>
-              <a:rPr lang="en-US" sz="1300" dirty="0">
+              <a:rPr lang="en-US" sz="1300">
                 <a:solidFill>
                   <a:srgbClr val="FFFFFF"/>
                 </a:solidFill>
@@ -8538,7 +8538,7 @@
               <a:buNone/>
             </a:pPr>
             <a:r>
-              <a:rPr lang="en-US" sz="1200" dirty="0">
+              <a:rPr lang="en-US" sz="1200">
                 <a:solidFill>
                   <a:srgbClr val="FFFFFF"/>
                 </a:solidFill>
@@ -8552,7 +8552,7 @@
               <a:buNone/>
             </a:pPr>
             <a:r>
-              <a:rPr lang="en-US" sz="1600" b="1" dirty="0">
+              <a:rPr lang="en-US" sz="1600" b="1">
                 <a:solidFill>
                   <a:srgbClr val="D4A843"/>
                 </a:solidFill>
@@ -8566,7 +8566,7 @@
               <a:buNone/>
             </a:pPr>
             <a:r>
-              <a:rPr lang="en-US" sz="1200" dirty="0">
+              <a:rPr lang="en-US" sz="1200">
                 <a:solidFill>
                   <a:srgbClr val="FFFFFF"/>
                 </a:solidFill>
@@ -8580,7 +8580,7 @@
               <a:buNone/>
             </a:pPr>
             <a:r>
-              <a:rPr lang="en-US" sz="1300" b="1" dirty="0">
+              <a:rPr lang="en-US" sz="1300" b="1">
                 <a:solidFill>
                   <a:srgbClr val="4ECDC4"/>
                 </a:solidFill>
@@ -8589,7 +8589,7 @@
               <a:t>Step 4: </a:t>
             </a:r>
             <a:r>
-              <a:rPr lang="en-US" sz="1300" dirty="0">
+              <a:rPr lang="en-US" sz="1300">
                 <a:solidFill>
                   <a:srgbClr val="B0BEC5"/>
                 </a:solidFill>
@@ -8685,7 +8685,7 @@
               <a:buNone/>
             </a:pPr>
             <a:r>
-              <a:rPr lang="en-US" sz="3000" b="1" dirty="0">
+              <a:rPr lang="en-US" sz="3000" b="1">
                 <a:solidFill>
                   <a:srgbClr val="1B2A4A"/>
                 </a:solidFill>
@@ -8695,7 +8695,7 @@
               </a:rPr>
               <a:t>Example: Parallel Lines &amp; Angles</a:t>
             </a:r>
-            <a:endParaRPr lang="en-US" sz="3000" dirty="0"/>
+            <a:endParaRPr lang="en-US" sz="3000"/>
           </a:p>
         </p:txBody>
       </p:sp>
@@ -8778,7 +8778,7 @@
               <a:buNone/>
             </a:pPr>
             <a:r>
-              <a:rPr lang="en-US" sz="1200" b="1" kern="0" spc="300" dirty="0">
+              <a:rPr lang="en-US" sz="1200" b="1" kern="0" spc="300">
                 <a:solidFill>
                   <a:srgbClr val="1A7A7A"/>
                 </a:solidFill>
@@ -8788,7 +8788,7 @@
               </a:rPr>
               <a:t>Problem</a:t>
             </a:r>
-            <a:endParaRPr lang="en-US" sz="1200" dirty="0"/>
+            <a:endParaRPr lang="en-US" sz="1200"/>
           </a:p>
         </p:txBody>
       </p:sp>
@@ -8817,7 +8817,7 @@
               <a:buNone/>
             </a:pPr>
             <a:r>
-              <a:rPr lang="en-US" sz="1400" dirty="0">
+              <a:rPr lang="en-US" sz="1400">
                 <a:solidFill>
                   <a:srgbClr val="3D4A5C"/>
                 </a:solidFill>
@@ -8827,14 +8827,14 @@
               </a:rPr>
               <a:t>Lines l and m are parallel, and t is a transversal.</a:t>
             </a:r>
-            <a:endParaRPr lang="en-US" sz="1400" dirty="0"/>
-          </a:p>
-          <a:p>
-            <a:pPr marL="0" indent="0">
-              <a:buNone/>
-            </a:pPr>
-            <a:r>
-              <a:rPr lang="en-US" sz="1400" dirty="0">
+            <a:endParaRPr lang="en-US" sz="1400"/>
+          </a:p>
+          <a:p>
+            <a:pPr marL="0" indent="0">
+              <a:buNone/>
+            </a:pPr>
+            <a:r>
+              <a:rPr lang="en-US" sz="1400">
                 <a:solidFill>
                   <a:srgbClr val="3D4A5C"/>
                 </a:solidFill>
@@ -8844,7 +8844,7 @@
               </a:rPr>
               <a:t>Given ∠2 = 2x + 19° and ∠7 = 3x + 2°, find the measure of ∠1.</a:t>
             </a:r>
-            <a:endParaRPr lang="en-US" sz="1400" dirty="0"/>
+            <a:endParaRPr lang="en-US" sz="1400"/>
           </a:p>
         </p:txBody>
       </p:sp>
@@ -8907,7 +8907,7 @@
               <a:buNone/>
             </a:pPr>
             <a:r>
-              <a:rPr lang="en-US" sz="1600" b="1" dirty="0">
+              <a:rPr lang="en-US" sz="1600" b="1">
                 <a:solidFill>
                   <a:srgbClr val="1B2A4A"/>
                 </a:solidFill>
@@ -8917,7 +8917,7 @@
               </a:rPr>
               <a:t>Solution Strategy</a:t>
             </a:r>
-            <a:endParaRPr lang="en-US" sz="1600" dirty="0"/>
+            <a:endParaRPr lang="en-US" sz="1600"/>
           </a:p>
         </p:txBody>
       </p:sp>
@@ -8949,7 +8949,7 @@
               <a:buNone/>
             </a:pPr>
             <a:r>
-              <a:rPr lang="en-US" sz="1300" b="1" dirty="0">
+              <a:rPr lang="en-US" sz="1300" b="1">
                 <a:solidFill>
                   <a:srgbClr val="1A7A7A"/>
                 </a:solidFill>
@@ -8960,7 +8960,7 @@
               <a:t>Step 1: </a:t>
             </a:r>
             <a:r>
-              <a:rPr lang="en-US" sz="1300" dirty="0">
+              <a:rPr lang="en-US" sz="1300">
                 <a:solidFill>
                   <a:srgbClr val="3D4A5C"/>
                 </a:solidFill>
@@ -8970,7 +8970,7 @@
               </a:rPr>
               <a:t>Identify the relationship — ∠2 and ∠7 are alternate exterior angles (equal).</a:t>
             </a:r>
-            <a:endParaRPr lang="en-US" sz="1300" dirty="0"/>
+            <a:endParaRPr lang="en-US" sz="1300"/>
           </a:p>
           <a:p>
             <a:pPr marL="0" indent="0">
@@ -8980,7 +8980,7 @@
               <a:buNone/>
             </a:pPr>
             <a:r>
-              <a:rPr lang="en-US" sz="1300" b="1" dirty="0">
+              <a:rPr lang="en-US" sz="1300" b="1">
                 <a:solidFill>
                   <a:srgbClr val="1A7A7A"/>
                 </a:solidFill>
@@ -8991,7 +8991,7 @@
               <a:t>Step 2: </a:t>
             </a:r>
             <a:r>
-              <a:rPr lang="en-US" sz="1300" dirty="0">
+              <a:rPr lang="en-US" sz="1300">
                 <a:solidFill>
                   <a:srgbClr val="3D4A5C"/>
                 </a:solidFill>
@@ -9001,7 +9001,7 @@
               </a:rPr>
               <a:t>Set them equal:  2x + 19 = 3x + 2  →  x = 17</a:t>
             </a:r>
-            <a:endParaRPr lang="en-US" sz="1300" dirty="0"/>
+            <a:endParaRPr lang="en-US" sz="1300"/>
           </a:p>
           <a:p>
             <a:pPr marL="0" indent="0">
@@ -9011,7 +9011,7 @@
               <a:buNone/>
             </a:pPr>
             <a:r>
-              <a:rPr lang="en-US" sz="1300" b="1" dirty="0">
+              <a:rPr lang="en-US" sz="1300" b="1">
                 <a:solidFill>
                   <a:srgbClr val="1A7A7A"/>
                 </a:solidFill>
@@ -9022,7 +9022,7 @@
               <a:t>Step 3: </a:t>
             </a:r>
             <a:r>
-              <a:rPr lang="en-US" sz="1300" dirty="0">
+              <a:rPr lang="en-US" sz="1300">
                 <a:solidFill>
                   <a:srgbClr val="3D4A5C"/>
                 </a:solidFill>
@@ -9032,7 +9032,7 @@
               </a:rPr>
               <a:t>Find ∠2 = 2(17) + 19 = 53°</a:t>
             </a:r>
-            <a:endParaRPr lang="en-US" sz="1300" dirty="0"/>
+            <a:endParaRPr lang="en-US" sz="1300"/>
           </a:p>
           <a:p>
             <a:pPr marL="0" indent="0">
@@ -9042,7 +9042,7 @@
               <a:buNone/>
             </a:pPr>
             <a:r>
-              <a:rPr lang="en-US" sz="1300" b="1" dirty="0">
+              <a:rPr lang="en-US" sz="1300" b="1">
                 <a:solidFill>
                   <a:srgbClr val="1A7A7A"/>
                 </a:solidFill>
@@ -9053,7 +9053,7 @@
               <a:t>Step 4: </a:t>
             </a:r>
             <a:r>
-              <a:rPr lang="en-US" sz="1300" dirty="0">
+              <a:rPr lang="en-US" sz="1300">
                 <a:solidFill>
                   <a:srgbClr val="3D4A5C"/>
                 </a:solidFill>
@@ -9063,7 +9063,7 @@
               </a:rPr>
               <a:t>∠1 and ∠2 are supplementary → ∠1 = 180° − 53° = 127°</a:t>
             </a:r>
-            <a:endParaRPr lang="en-US" sz="1300" dirty="0"/>
+            <a:endParaRPr lang="en-US" sz="1300"/>
           </a:p>
         </p:txBody>
       </p:sp>
@@ -9440,7 +9440,7 @@
               <a:buNone/>
             </a:pPr>
             <a:r>
-              <a:rPr lang="en-US" sz="1400" kern="0" spc="600" dirty="0">
+              <a:rPr lang="en-US" sz="1400" kern="0" spc="600">
                 <a:solidFill>
                   <a:srgbClr val="4ECDC4"/>
                 </a:solidFill>
@@ -9450,7 +9450,7 @@
               </a:rPr>
               <a:t>SECTION 2</a:t>
             </a:r>
-            <a:endParaRPr lang="en-US" sz="1400" dirty="0"/>
+            <a:endParaRPr lang="en-US" sz="1400"/>
           </a:p>
         </p:txBody>
       </p:sp>
@@ -9479,7 +9479,7 @@
               <a:buNone/>
             </a:pPr>
             <a:r>
-              <a:rPr lang="en-US" sz="4000" b="1" dirty="0">
+              <a:rPr lang="en-US" sz="4000" b="1">
                 <a:solidFill>
                   <a:srgbClr val="FFFFFF"/>
                 </a:solidFill>
@@ -9489,14 +9489,14 @@
               </a:rPr>
               <a:t>Polygons &amp;</a:t>
             </a:r>
-            <a:endParaRPr lang="en-US" sz="4000" dirty="0"/>
-          </a:p>
-          <a:p>
-            <a:pPr marL="0" indent="0">
-              <a:buNone/>
-            </a:pPr>
-            <a:r>
-              <a:rPr lang="en-US" sz="4000" b="1" dirty="0">
+            <a:endParaRPr lang="en-US" sz="4000"/>
+          </a:p>
+          <a:p>
+            <a:pPr marL="0" indent="0">
+              <a:buNone/>
+            </a:pPr>
+            <a:r>
+              <a:rPr lang="en-US" sz="4000" b="1">
                 <a:solidFill>
                   <a:srgbClr val="FFFFFF"/>
                 </a:solidFill>
@@ -9506,7 +9506,7 @@
               </a:rPr>
               <a:t>Quadrilaterals</a:t>
             </a:r>
-            <a:endParaRPr lang="en-US" sz="4000" dirty="0"/>
+            <a:endParaRPr lang="en-US" sz="4000"/>
           </a:p>
         </p:txBody>
       </p:sp>
@@ -9565,7 +9565,7 @@
               <a:buNone/>
             </a:pPr>
             <a:r>
-              <a:rPr lang="en-US" sz="1400" i="1" dirty="0">
+              <a:rPr lang="en-US" sz="1400" i="1">
                 <a:solidFill>
                   <a:srgbClr val="D4C5A0"/>
                 </a:solidFill>
@@ -9867,7 +9867,7 @@
               <a:buNone/>
             </a:pPr>
             <a:r>
-              <a:rPr lang="en-US" sz="3200" b="1" dirty="0">
+              <a:rPr lang="en-US" sz="3200" b="1">
                 <a:solidFill>
                   <a:srgbClr val="1B2A4A"/>
                 </a:solidFill>
@@ -9877,7 +9877,7 @@
               </a:rPr>
               <a:t>Polygons</a:t>
             </a:r>
-            <a:endParaRPr lang="en-US" sz="3200" dirty="0"/>
+            <a:endParaRPr lang="en-US" sz="3200"/>
           </a:p>
         </p:txBody>
       </p:sp>
@@ -9906,7 +9906,7 @@
               <a:buNone/>
             </a:pPr>
             <a:r>
-              <a:rPr lang="en-US" sz="1400" dirty="0">
+              <a:rPr lang="en-US" sz="1400">
                 <a:solidFill>
                   <a:srgbClr val="3D4A5C"/>
                 </a:solidFill>
@@ -9916,7 +9916,7 @@
               </a:rPr>
               <a:t>A polygon is a closed region of a plane bounded by three or more straight line segments. Sides must be non-collinear and non-self-intersecting (no crossings). Formulas below apply to convex polygons.</a:t>
             </a:r>
-            <a:endParaRPr lang="en-US" sz="1400" dirty="0"/>
+            <a:endParaRPr lang="en-US" sz="1400"/>
           </a:p>
         </p:txBody>
       </p:sp>
@@ -10006,7 +10006,7 @@
               <a:buNone/>
             </a:pPr>
             <a:r>
-              <a:rPr lang="en-US" sz="1300" b="1" dirty="0">
+              <a:rPr lang="en-US" sz="1300" b="1">
                 <a:solidFill>
                   <a:srgbClr val="1B2A4A"/>
                 </a:solidFill>
@@ -10016,7 +10016,7 @@
               </a:rPr>
               <a:t>Triangle</a:t>
             </a:r>
-            <a:endParaRPr lang="en-US" sz="1300" dirty="0"/>
+            <a:endParaRPr lang="en-US" sz="1300"/>
           </a:p>
         </p:txBody>
       </p:sp>
@@ -10045,7 +10045,7 @@
               <a:buNone/>
             </a:pPr>
             <a:r>
-              <a:rPr lang="en-US" sz="1800" b="1" dirty="0">
+              <a:rPr lang="en-US" sz="1800" b="1">
                 <a:solidFill>
                   <a:srgbClr val="1A7A7A"/>
                 </a:solidFill>
@@ -10055,7 +10055,7 @@
               </a:rPr>
               <a:t>3 sides</a:t>
             </a:r>
-            <a:endParaRPr lang="en-US" sz="1800" dirty="0"/>
+            <a:endParaRPr lang="en-US" sz="1800"/>
           </a:p>
         </p:txBody>
       </p:sp>
@@ -10145,7 +10145,7 @@
               <a:buNone/>
             </a:pPr>
             <a:r>
-              <a:rPr lang="en-US" sz="1300" b="1" dirty="0">
+              <a:rPr lang="en-US" sz="1300" b="1">
                 <a:solidFill>
                   <a:srgbClr val="1B2A4A"/>
                 </a:solidFill>
@@ -10155,7 +10155,7 @@
               </a:rPr>
               <a:t>Quadrilateral</a:t>
             </a:r>
-            <a:endParaRPr lang="en-US" sz="1300" dirty="0"/>
+            <a:endParaRPr lang="en-US" sz="1300"/>
           </a:p>
         </p:txBody>
       </p:sp>
@@ -10184,7 +10184,7 @@
               <a:buNone/>
             </a:pPr>
             <a:r>
-              <a:rPr lang="en-US" sz="1800" b="1" dirty="0">
+              <a:rPr lang="en-US" sz="1800" b="1">
                 <a:solidFill>
                   <a:srgbClr val="0D4F4F"/>
                 </a:solidFill>
@@ -10194,7 +10194,7 @@
               </a:rPr>
               <a:t>4 sides</a:t>
             </a:r>
-            <a:endParaRPr lang="en-US" sz="1800" dirty="0"/>
+            <a:endParaRPr lang="en-US" sz="1800"/>
           </a:p>
         </p:txBody>
       </p:sp>
@@ -10284,7 +10284,7 @@
               <a:buNone/>
             </a:pPr>
             <a:r>
-              <a:rPr lang="en-US" sz="1300" b="1" dirty="0">
+              <a:rPr lang="en-US" sz="1300" b="1">
                 <a:solidFill>
                   <a:srgbClr val="1B2A4A"/>
                 </a:solidFill>
@@ -10294,7 +10294,7 @@
               </a:rPr>
               <a:t>Pentagon</a:t>
             </a:r>
-            <a:endParaRPr lang="en-US" sz="1300" dirty="0"/>
+            <a:endParaRPr lang="en-US" sz="1300"/>
           </a:p>
         </p:txBody>
       </p:sp>
@@ -10323,7 +10323,7 @@
               <a:buNone/>
             </a:pPr>
             <a:r>
-              <a:rPr lang="en-US" sz="1800" b="1" dirty="0">
+              <a:rPr lang="en-US" sz="1800" b="1">
                 <a:solidFill>
                   <a:srgbClr val="2AA5A5"/>
                 </a:solidFill>
@@ -10333,7 +10333,7 @@
               </a:rPr>
               <a:t>5 sides</a:t>
             </a:r>
-            <a:endParaRPr lang="en-US" sz="1800" dirty="0"/>
+            <a:endParaRPr lang="en-US" sz="1800"/>
           </a:p>
         </p:txBody>
       </p:sp>
@@ -10423,7 +10423,7 @@
               <a:buNone/>
             </a:pPr>
             <a:r>
-              <a:rPr lang="en-US" sz="1300" b="1" dirty="0">
+              <a:rPr lang="en-US" sz="1300" b="1">
                 <a:solidFill>
                   <a:srgbClr val="1B2A4A"/>
                 </a:solidFill>
@@ -10433,7 +10433,7 @@
               </a:rPr>
               <a:t>Hexagon</a:t>
             </a:r>
-            <a:endParaRPr lang="en-US" sz="1300" dirty="0"/>
+            <a:endParaRPr lang="en-US" sz="1300"/>
           </a:p>
         </p:txBody>
       </p:sp>
@@ -10462,7 +10462,7 @@
               <a:buNone/>
             </a:pPr>
             <a:r>
-              <a:rPr lang="en-US" sz="1800" b="1" dirty="0">
+              <a:rPr lang="en-US" sz="1800" b="1">
                 <a:solidFill>
                   <a:srgbClr val="D4A843"/>
                 </a:solidFill>
@@ -10472,7 +10472,7 @@
               </a:rPr>
               <a:t>6 sides</a:t>
             </a:r>
-            <a:endParaRPr lang="en-US" sz="1800" dirty="0"/>
+            <a:endParaRPr lang="en-US" sz="1800"/>
           </a:p>
         </p:txBody>
       </p:sp>
@@ -10562,7 +10562,7 @@
               <a:buNone/>
             </a:pPr>
             <a:r>
-              <a:rPr lang="en-US" sz="1300" b="1" dirty="0">
+              <a:rPr lang="en-US" sz="1300" b="1">
                 <a:solidFill>
                   <a:srgbClr val="1B2A4A"/>
                 </a:solidFill>
@@ -10572,7 +10572,7 @@
               </a:rPr>
               <a:t>Heptagon &amp; beyond</a:t>
             </a:r>
-            <a:endParaRPr lang="en-US" sz="1300" dirty="0"/>
+            <a:endParaRPr lang="en-US" sz="1300"/>
           </a:p>
         </p:txBody>
       </p:sp>
@@ -10603,7 +10603,7 @@
               <a:buNone/>
             </a:pPr>
             <a:r>
-              <a:rPr lang="en-US" sz="1800" b="1" dirty="0">
+              <a:rPr lang="en-US" sz="1800" b="1">
                 <a:solidFill>
                   <a:srgbClr val="B8922F"/>
                 </a:solidFill>
@@ -10613,7 +10613,7 @@
               </a:rPr>
               <a:t>8+ sides</a:t>
             </a:r>
-            <a:endParaRPr lang="en-US" sz="1800" dirty="0"/>
+            <a:endParaRPr lang="en-US" sz="1800"/>
           </a:p>
         </p:txBody>
       </p:sp>
@@ -10702,7 +10702,7 @@
               <a:buNone/>
             </a:pPr>
             <a:r>
-              <a:rPr lang="en-US" sz="3200" b="1" dirty="0">
+              <a:rPr lang="en-US" sz="3200" b="1">
                 <a:solidFill>
                   <a:srgbClr val="1B2A4A"/>
                 </a:solidFill>
@@ -10712,7 +10712,7 @@
               </a:rPr>
               <a:t>Polygon Angle Formulas</a:t>
             </a:r>
-            <a:endParaRPr lang="en-US" sz="3200" dirty="0"/>
+            <a:endParaRPr lang="en-US" sz="3200"/>
           </a:p>
         </p:txBody>
       </p:sp>
@@ -10741,7 +10741,7 @@
               <a:buNone/>
             </a:pPr>
             <a:r>
-              <a:rPr lang="en-US" sz="1400" dirty="0">
+              <a:rPr lang="en-US" sz="1400">
                 <a:solidFill>
                   <a:srgbClr val="3D4A5C"/>
                 </a:solidFill>
@@ -10751,7 +10751,7 @@
               </a:rPr>
               <a:t>These formulas apply to convex polygons with n sides.</a:t>
             </a:r>
-            <a:endParaRPr lang="en-US" sz="1400" dirty="0"/>
+            <a:endParaRPr lang="en-US" sz="1400"/>
           </a:p>
         </p:txBody>
       </p:sp>
@@ -10807,7 +10807,7 @@
               <a:buNone/>
             </a:pPr>
             <a:r>
-              <a:rPr lang="en-US" sz="1800" b="1" dirty="0">
+              <a:rPr lang="en-US" sz="1800" b="1">
                 <a:solidFill>
                   <a:srgbClr val="4ECDC4"/>
                 </a:solidFill>
@@ -10817,7 +10817,7 @@
               </a:rPr>
               <a:t>Interior &amp; Exterior Angles of Polygons</a:t>
             </a:r>
-            <a:endParaRPr lang="en-US" sz="1800" dirty="0"/>
+            <a:endParaRPr lang="en-US" sz="1800"/>
           </a:p>
         </p:txBody>
       </p:sp>
@@ -10848,7 +10848,7 @@
               <a:buNone/>
             </a:pPr>
             <a:r>
-              <a:rPr lang="en-US" sz="1600" b="1" dirty="0">
+              <a:rPr lang="en-US" sz="1600" b="1">
                 <a:solidFill>
                   <a:srgbClr val="FFFFFF"/>
                 </a:solidFill>
@@ -10858,14 +10858,14 @@
               </a:rPr>
               <a:t>Sum of Interior Angles = (n − 2) × 180°</a:t>
             </a:r>
-            <a:endParaRPr lang="en-US" sz="1600" dirty="0"/>
-          </a:p>
-          <a:p>
-            <a:pPr marL="0" indent="0">
-              <a:buNone/>
-            </a:pPr>
-            <a:r>
-              <a:rPr lang="en-US" sz="1200" dirty="0">
+            <a:endParaRPr lang="en-US" sz="1600"/>
+          </a:p>
+          <a:p>
+            <a:pPr marL="0" indent="0">
+              <a:buNone/>
+            </a:pPr>
+            <a:r>
+              <a:rPr lang="en-US" sz="1200">
                 <a:solidFill>
                   <a:srgbClr val="E8E4DD"/>
                 </a:solidFill>
@@ -10875,20 +10875,20 @@
               </a:rPr>
               <a:t>where n = number of sides</a:t>
             </a:r>
-            <a:endParaRPr lang="en-US" sz="1600" dirty="0"/>
-          </a:p>
-          <a:p>
-            <a:pPr marL="0" indent="0">
-              <a:buNone/>
-            </a:pPr>
-            <a:endParaRPr lang="en-US" sz="1600" dirty="0"/>
-          </a:p>
-          <a:p>
-            <a:pPr marL="0" indent="0">
-              <a:buNone/>
-            </a:pPr>
-            <a:r>
-              <a:rPr lang="en-US" sz="1600" b="1" dirty="0">
+            <a:endParaRPr lang="en-US" sz="1600"/>
+          </a:p>
+          <a:p>
+            <a:pPr marL="0" indent="0">
+              <a:buNone/>
+            </a:pPr>
+            <a:endParaRPr lang="en-US" sz="1600"/>
+          </a:p>
+          <a:p>
+            <a:pPr marL="0" indent="0">
+              <a:buNone/>
+            </a:pPr>
+            <a:r>
+              <a:rPr lang="en-US" sz="1600" b="1">
                 <a:solidFill>
                   <a:srgbClr val="4ECDC4"/>
                 </a:solidFill>
@@ -10898,20 +10898,20 @@
               </a:rPr>
               <a:t>Sum of Exterior Angles = 360°  (always, for any convex polygon)</a:t>
             </a:r>
-            <a:endParaRPr lang="en-US" sz="1600" dirty="0"/>
-          </a:p>
-          <a:p>
-            <a:pPr marL="0" indent="0">
-              <a:buNone/>
-            </a:pPr>
-            <a:endParaRPr lang="en-US" sz="1600" dirty="0"/>
-          </a:p>
-          <a:p>
-            <a:pPr marL="0" indent="0">
-              <a:buNone/>
-            </a:pPr>
-            <a:r>
-              <a:rPr lang="en-US" sz="1400" b="1" dirty="0">
+            <a:endParaRPr lang="en-US" sz="1600"/>
+          </a:p>
+          <a:p>
+            <a:pPr marL="0" indent="0">
+              <a:buNone/>
+            </a:pPr>
+            <a:endParaRPr lang="en-US" sz="1600"/>
+          </a:p>
+          <a:p>
+            <a:pPr marL="0" indent="0">
+              <a:buNone/>
+            </a:pPr>
+            <a:r>
+              <a:rPr lang="en-US" sz="1400" b="1">
                 <a:solidFill>
                   <a:srgbClr val="D4A843"/>
                 </a:solidFill>
@@ -10921,7 +10921,7 @@
               </a:rPr>
               <a:t>Each Interior Angle of a Regular Polygon = (n − 2) × 180° / n</a:t>
             </a:r>
-            <a:endParaRPr lang="en-US" sz="1600" dirty="0"/>
+            <a:endParaRPr lang="en-US" sz="1600"/>
           </a:p>
         </p:txBody>
       </p:sp>
@@ -11010,7 +11010,7 @@
               <a:buNone/>
             </a:pPr>
             <a:r>
-              <a:rPr lang="en-US" sz="2800" b="1" dirty="0">
+              <a:rPr lang="en-US" sz="2800" b="1">
                 <a:solidFill>
                   <a:srgbClr val="1B2A4A"/>
                 </a:solidFill>
@@ -11109,7 +11109,7 @@
               <a:buNone/>
             </a:pPr>
             <a:r>
-              <a:rPr lang="en-US" sz="1600" b="1" dirty="0">
+              <a:rPr lang="en-US" sz="1600" b="1">
                 <a:solidFill>
                   <a:srgbClr val="1A7A7A"/>
                 </a:solidFill>
@@ -11123,7 +11123,7 @@
               <a:buNone/>
             </a:pPr>
             <a:r>
-              <a:rPr lang="en-US" sz="1200" dirty="0">
+              <a:rPr lang="en-US" sz="1200">
                 <a:solidFill>
                   <a:srgbClr val="FFFFFF"/>
                 </a:solidFill>
@@ -11137,7 +11137,7 @@
               <a:buNone/>
             </a:pPr>
             <a:r>
-              <a:rPr lang="en-US" sz="1300" dirty="0">
+              <a:rPr lang="en-US" sz="1300">
                 <a:solidFill>
                   <a:srgbClr val="3D4A5C"/>
                 </a:solidFill>
@@ -11151,7 +11151,7 @@
               <a:buNone/>
             </a:pPr>
             <a:r>
-              <a:rPr lang="en-US" sz="1300" dirty="0">
+              <a:rPr lang="en-US" sz="1300">
                 <a:solidFill>
                   <a:srgbClr val="3D4A5C"/>
                 </a:solidFill>
@@ -11165,7 +11165,7 @@
               <a:buNone/>
             </a:pPr>
             <a:r>
-              <a:rPr lang="en-US" sz="1300" dirty="0">
+              <a:rPr lang="en-US" sz="1300">
                 <a:solidFill>
                   <a:srgbClr val="3D4A5C"/>
                 </a:solidFill>
@@ -11179,7 +11179,7 @@
               <a:buNone/>
             </a:pPr>
             <a:r>
-              <a:rPr lang="en-US" sz="1600" b="1" dirty="0">
+              <a:rPr lang="en-US" sz="1600" b="1">
                 <a:solidFill>
                   <a:srgbClr val="D4A843"/>
                 </a:solidFill>
@@ -11193,7 +11193,7 @@
               <a:buNone/>
             </a:pPr>
             <a:r>
-              <a:rPr lang="en-US" sz="1200" dirty="0">
+              <a:rPr lang="en-US" sz="1200">
                 <a:solidFill>
                   <a:srgbClr val="FFFFFF"/>
                 </a:solidFill>
@@ -11207,7 +11207,7 @@
               <a:buNone/>
             </a:pPr>
             <a:r>
-              <a:rPr lang="en-US" sz="1600" b="1" dirty="0">
+              <a:rPr lang="en-US" sz="1600" b="1">
                 <a:solidFill>
                   <a:srgbClr val="1A7A7A"/>
                 </a:solidFill>
@@ -11221,7 +11221,7 @@
               <a:buNone/>
             </a:pPr>
             <a:r>
-              <a:rPr lang="en-US" sz="1200" dirty="0">
+              <a:rPr lang="en-US" sz="1200">
                 <a:solidFill>
                   <a:srgbClr val="FFFFFF"/>
                 </a:solidFill>
@@ -11235,7 +11235,7 @@
               <a:buNone/>
             </a:pPr>
             <a:r>
-              <a:rPr lang="en-US" sz="1300" dirty="0">
+              <a:rPr lang="en-US" sz="1300">
                 <a:solidFill>
                   <a:srgbClr val="3D4A5C"/>
                 </a:solidFill>
@@ -11249,7 +11249,7 @@
               <a:buNone/>
             </a:pPr>
             <a:r>
-              <a:rPr lang="en-US" sz="1300" dirty="0">
+              <a:rPr lang="en-US" sz="1300">
                 <a:solidFill>
                   <a:srgbClr val="3D4A5C"/>
                 </a:solidFill>
@@ -11263,7 +11263,7 @@
               <a:buNone/>
             </a:pPr>
             <a:r>
-              <a:rPr lang="en-US" sz="1300" dirty="0">
+              <a:rPr lang="en-US" sz="1300">
                 <a:solidFill>
                   <a:srgbClr val="3D4A5C"/>
                 </a:solidFill>
@@ -11277,7 +11277,7 @@
               <a:buNone/>
             </a:pPr>
             <a:r>
-              <a:rPr lang="en-US" sz="1300" dirty="0">
+              <a:rPr lang="en-US" sz="1300">
                 <a:solidFill>
                   <a:srgbClr val="3D4A5C"/>
                 </a:solidFill>
@@ -11376,7 +11376,7 @@
               <a:buNone/>
             </a:pPr>
             <a:r>
-              <a:rPr lang="en-US" sz="1400" b="1" dirty="0">
+              <a:rPr lang="en-US" sz="1400" b="1">
                 <a:solidFill>
                   <a:srgbClr val="4ECDC4"/>
                 </a:solidFill>
@@ -11390,7 +11390,7 @@
               <a:buNone/>
             </a:pPr>
             <a:r>
-              <a:rPr lang="en-US" sz="1200" dirty="0">
+              <a:rPr lang="en-US" sz="1200">
                 <a:solidFill>
                   <a:srgbClr val="FFFFFF"/>
                 </a:solidFill>
@@ -11404,7 +11404,7 @@
               <a:buNone/>
             </a:pPr>
             <a:r>
-              <a:rPr lang="en-US" sz="1300" dirty="0">
+              <a:rPr lang="en-US" sz="1300">
                 <a:solidFill>
                   <a:srgbClr val="B0BEC5"/>
                 </a:solidFill>
@@ -11418,7 +11418,7 @@
               <a:buNone/>
             </a:pPr>
             <a:r>
-              <a:rPr lang="en-US" sz="1300" dirty="0">
+              <a:rPr lang="en-US" sz="1300">
                 <a:solidFill>
                   <a:srgbClr val="B0BEC5"/>
                 </a:solidFill>
@@ -11432,7 +11432,7 @@
               <a:buNone/>
             </a:pPr>
             <a:r>
-              <a:rPr lang="en-US" sz="1200" dirty="0">
+              <a:rPr lang="en-US" sz="1200">
                 <a:solidFill>
                   <a:srgbClr val="FFFFFF"/>
                 </a:solidFill>
@@ -11446,7 +11446,7 @@
               <a:buNone/>
             </a:pPr>
             <a:r>
-              <a:rPr lang="en-US" sz="1400" b="1" dirty="0">
+              <a:rPr lang="en-US" sz="1400" b="1">
                 <a:solidFill>
                   <a:srgbClr val="D4A843"/>
                 </a:solidFill>
@@ -11542,7 +11542,7 @@
               <a:buNone/>
             </a:pPr>
             <a:r>
-              <a:rPr lang="en-US" sz="2800" b="1" dirty="0">
+              <a:rPr lang="en-US" sz="2800" b="1">
                 <a:solidFill>
                   <a:srgbClr val="1B2A4A"/>
                 </a:solidFill>
@@ -11641,7 +11641,7 @@
               <a:buNone/>
             </a:pPr>
             <a:r>
-              <a:rPr lang="en-US" sz="1600" b="1" dirty="0">
+              <a:rPr lang="en-US" sz="1600" b="1">
                 <a:solidFill>
                   <a:srgbClr val="D4A843"/>
                 </a:solidFill>
@@ -11655,7 +11655,7 @@
               <a:buNone/>
             </a:pPr>
             <a:r>
-              <a:rPr lang="en-US" sz="1200" dirty="0">
+              <a:rPr lang="en-US" sz="1200">
                 <a:solidFill>
                   <a:srgbClr val="FFFFFF"/>
                 </a:solidFill>
@@ -11669,7 +11669,7 @@
               <a:buNone/>
             </a:pPr>
             <a:r>
-              <a:rPr lang="en-US" sz="1300" dirty="0">
+              <a:rPr lang="en-US" sz="1300">
                 <a:solidFill>
                   <a:srgbClr val="3D4A5C"/>
                 </a:solidFill>
@@ -11683,7 +11683,7 @@
               <a:buNone/>
             </a:pPr>
             <a:r>
-              <a:rPr lang="en-US" sz="1600" b="1" dirty="0">
+              <a:rPr lang="en-US" sz="1600" b="1">
                 <a:solidFill>
                   <a:srgbClr val="1A7A7A"/>
                 </a:solidFill>
@@ -11697,7 +11697,7 @@
               <a:buNone/>
             </a:pPr>
             <a:r>
-              <a:rPr lang="en-US" sz="1200" dirty="0">
+              <a:rPr lang="en-US" sz="1200">
                 <a:solidFill>
                   <a:srgbClr val="FFFFFF"/>
                 </a:solidFill>
@@ -11711,7 +11711,7 @@
               <a:buNone/>
             </a:pPr>
             <a:r>
-              <a:rPr lang="en-US" sz="1300" dirty="0">
+              <a:rPr lang="en-US" sz="1300">
                 <a:solidFill>
                   <a:srgbClr val="3D4A5C"/>
                 </a:solidFill>
@@ -11725,7 +11725,7 @@
               <a:buNone/>
             </a:pPr>
             <a:r>
-              <a:rPr lang="en-US" sz="1300" dirty="0">
+              <a:rPr lang="en-US" sz="1300">
                 <a:solidFill>
                   <a:srgbClr val="3D4A5C"/>
                 </a:solidFill>
@@ -11739,7 +11739,7 @@
               <a:buNone/>
             </a:pPr>
             <a:r>
-              <a:rPr lang="en-US" sz="1600" b="1" dirty="0">
+              <a:rPr lang="en-US" sz="1600" b="1">
                 <a:solidFill>
                   <a:srgbClr val="1A7A7A"/>
                 </a:solidFill>
@@ -11753,7 +11753,7 @@
               <a:buNone/>
             </a:pPr>
             <a:r>
-              <a:rPr lang="en-US" sz="1200" dirty="0">
+              <a:rPr lang="en-US" sz="1200">
                 <a:solidFill>
                   <a:srgbClr val="FFFFFF"/>
                 </a:solidFill>
@@ -11767,7 +11767,7 @@
               <a:buNone/>
             </a:pPr>
             <a:r>
-              <a:rPr lang="en-US" sz="1300" dirty="0">
+              <a:rPr lang="en-US" sz="1300">
                 <a:solidFill>
                   <a:srgbClr val="3D4A5C"/>
                 </a:solidFill>
@@ -11781,7 +11781,7 @@
               <a:buNone/>
             </a:pPr>
             <a:r>
-              <a:rPr lang="en-US" sz="1300" dirty="0">
+              <a:rPr lang="en-US" sz="1300">
                 <a:solidFill>
                   <a:srgbClr val="3D4A5C"/>
                 </a:solidFill>
@@ -11795,7 +11795,7 @@
               <a:buNone/>
             </a:pPr>
             <a:r>
-              <a:rPr lang="en-US" sz="1600" b="1" dirty="0">
+              <a:rPr lang="en-US" sz="1600" b="1">
                 <a:solidFill>
                   <a:srgbClr val="D4A843"/>
                 </a:solidFill>
@@ -11809,7 +11809,7 @@
               <a:buNone/>
             </a:pPr>
             <a:r>
-              <a:rPr lang="en-US" sz="1200" dirty="0">
+              <a:rPr lang="en-US" sz="1200">
                 <a:solidFill>
                   <a:srgbClr val="FFFFFF"/>
                 </a:solidFill>
@@ -11908,7 +11908,7 @@
               <a:buNone/>
             </a:pPr>
             <a:r>
-              <a:rPr lang="en-US" sz="1400" b="1" dirty="0">
+              <a:rPr lang="en-US" sz="1400" b="1">
                 <a:solidFill>
                   <a:srgbClr val="4ECDC4"/>
                 </a:solidFill>
@@ -11922,7 +11922,7 @@
               <a:buNone/>
             </a:pPr>
             <a:r>
-              <a:rPr lang="en-US" sz="1200" dirty="0">
+              <a:rPr lang="en-US" sz="1200">
                 <a:solidFill>
                   <a:srgbClr val="FFFFFF"/>
                 </a:solidFill>
@@ -11936,7 +11936,7 @@
               <a:buNone/>
             </a:pPr>
             <a:r>
-              <a:rPr lang="en-US" sz="1300" dirty="0">
+              <a:rPr lang="en-US" sz="1300">
                 <a:solidFill>
                   <a:srgbClr val="B0BEC5"/>
                 </a:solidFill>
@@ -11950,7 +11950,7 @@
               <a:buNone/>
             </a:pPr>
             <a:r>
-              <a:rPr lang="en-US" sz="1300" dirty="0">
+              <a:rPr lang="en-US" sz="1300">
                 <a:solidFill>
                   <a:srgbClr val="B0BEC5"/>
                 </a:solidFill>
@@ -11964,7 +11964,7 @@
               <a:buNone/>
             </a:pPr>
             <a:r>
-              <a:rPr lang="en-US" sz="1200" dirty="0">
+              <a:rPr lang="en-US" sz="1200">
                 <a:solidFill>
                   <a:srgbClr val="FFFFFF"/>
                 </a:solidFill>
@@ -11978,7 +11978,7 @@
               <a:buNone/>
             </a:pPr>
             <a:r>
-              <a:rPr lang="en-US" sz="1400" b="1" dirty="0">
+              <a:rPr lang="en-US" sz="1400" b="1">
                 <a:solidFill>
                   <a:srgbClr val="D4A843"/>
                 </a:solidFill>
@@ -12074,7 +12074,7 @@
               <a:buNone/>
             </a:pPr>
             <a:r>
-              <a:rPr lang="en-US" sz="3200" b="1" dirty="0">
+              <a:rPr lang="en-US" sz="3200" b="1">
                 <a:solidFill>
                   <a:srgbClr val="1B2A4A"/>
                 </a:solidFill>
@@ -12084,7 +12084,7 @@
               </a:rPr>
               <a:t>Types of Quadrilaterals</a:t>
             </a:r>
-            <a:endParaRPr lang="en-US" sz="3200" dirty="0"/>
+            <a:endParaRPr lang="en-US" sz="3200"/>
           </a:p>
         </p:txBody>
       </p:sp>
@@ -12174,7 +12174,7 @@
               <a:buNone/>
             </a:pPr>
             <a:r>
-              <a:rPr lang="en-US" sz="1600" b="1" dirty="0">
+              <a:rPr lang="en-US" sz="1600" b="1">
                 <a:solidFill>
                   <a:srgbClr val="1B2A4A"/>
                 </a:solidFill>
@@ -12184,7 +12184,7 @@
               </a:rPr>
               <a:t>Trapezoid</a:t>
             </a:r>
-            <a:endParaRPr lang="en-US" sz="1600" dirty="0"/>
+            <a:endParaRPr lang="en-US" sz="1600"/>
           </a:p>
         </p:txBody>
       </p:sp>
@@ -12213,7 +12213,7 @@
               <a:buNone/>
             </a:pPr>
             <a:r>
-              <a:rPr lang="en-US" sz="1400" dirty="0">
+              <a:rPr lang="en-US" sz="1400">
                 <a:solidFill>
                   <a:srgbClr val="3D4A5C"/>
                 </a:solidFill>
@@ -12223,7 +12223,7 @@
               </a:rPr>
               <a:t>Exactly two parallel sides (called bases)</a:t>
             </a:r>
-            <a:endParaRPr lang="en-US" sz="1400" dirty="0"/>
+            <a:endParaRPr lang="en-US" sz="1400"/>
           </a:p>
         </p:txBody>
       </p:sp>
@@ -12313,7 +12313,7 @@
               <a:buNone/>
             </a:pPr>
             <a:r>
-              <a:rPr lang="en-US" sz="1600" b="1" dirty="0">
+              <a:rPr lang="en-US" sz="1600" b="1">
                 <a:solidFill>
                   <a:srgbClr val="1B2A4A"/>
                 </a:solidFill>
@@ -12323,7 +12323,7 @@
               </a:rPr>
               <a:t>Parallelogram</a:t>
             </a:r>
-            <a:endParaRPr lang="en-US" sz="1600" dirty="0"/>
+            <a:endParaRPr lang="en-US" sz="1600"/>
           </a:p>
         </p:txBody>
       </p:sp>
@@ -12352,7 +12352,7 @@
               <a:buNone/>
             </a:pPr>
             <a:r>
-              <a:rPr lang="en-US" sz="1400" dirty="0">
+              <a:rPr lang="en-US" sz="1400">
                 <a:solidFill>
                   <a:srgbClr val="3D4A5C"/>
                 </a:solidFill>
@@ -12362,7 +12362,7 @@
               </a:rPr>
               <a:t>Both pairs of opposite sides are parallel</a:t>
             </a:r>
-            <a:endParaRPr lang="en-US" sz="1400" dirty="0"/>
+            <a:endParaRPr lang="en-US" sz="1400"/>
           </a:p>
         </p:txBody>
       </p:sp>
@@ -12452,7 +12452,7 @@
               <a:buNone/>
             </a:pPr>
             <a:r>
-              <a:rPr lang="en-US" sz="1600" b="1" dirty="0">
+              <a:rPr lang="en-US" sz="1600" b="1">
                 <a:solidFill>
                   <a:srgbClr val="1B2A4A"/>
                 </a:solidFill>
@@ -12462,7 +12462,7 @@
               </a:rPr>
               <a:t>Rhombus</a:t>
             </a:r>
-            <a:endParaRPr lang="en-US" sz="1600" dirty="0"/>
+            <a:endParaRPr lang="en-US" sz="1600"/>
           </a:p>
         </p:txBody>
       </p:sp>
@@ -12491,7 +12491,7 @@
               <a:buNone/>
             </a:pPr>
             <a:r>
-              <a:rPr lang="en-US" sz="1400" dirty="0">
+              <a:rPr lang="en-US" sz="1400">
                 <a:solidFill>
                   <a:srgbClr val="3D4A5C"/>
                 </a:solidFill>
@@ -12501,7 +12501,7 @@
               </a:rPr>
               <a:t>Parallelogram with four equal sides</a:t>
             </a:r>
-            <a:endParaRPr lang="en-US" sz="1400" dirty="0"/>
+            <a:endParaRPr lang="en-US" sz="1400"/>
           </a:p>
         </p:txBody>
       </p:sp>
@@ -12591,7 +12591,7 @@
               <a:buNone/>
             </a:pPr>
             <a:r>
-              <a:rPr lang="en-US" sz="1600" b="1" dirty="0">
+              <a:rPr lang="en-US" sz="1600" b="1">
                 <a:solidFill>
                   <a:srgbClr val="1B2A4A"/>
                 </a:solidFill>
@@ -12601,7 +12601,7 @@
               </a:rPr>
               <a:t>Rectangle</a:t>
             </a:r>
-            <a:endParaRPr lang="en-US" sz="1600" dirty="0"/>
+            <a:endParaRPr lang="en-US" sz="1600"/>
           </a:p>
         </p:txBody>
       </p:sp>
@@ -12630,7 +12630,7 @@
               <a:buNone/>
             </a:pPr>
             <a:r>
-              <a:rPr lang="en-US" sz="1400" dirty="0">
+              <a:rPr lang="en-US" sz="1400">
                 <a:solidFill>
                   <a:srgbClr val="3D4A5C"/>
                 </a:solidFill>
@@ -12640,7 +12640,7 @@
               </a:rPr>
               <a:t>Parallelogram with a right angle (all 90°)</a:t>
             </a:r>
-            <a:endParaRPr lang="en-US" sz="1400" dirty="0"/>
+            <a:endParaRPr lang="en-US" sz="1400"/>
           </a:p>
         </p:txBody>
       </p:sp>
@@ -12730,7 +12730,7 @@
               <a:buNone/>
             </a:pPr>
             <a:r>
-              <a:rPr lang="en-US" sz="1600" b="1" dirty="0">
+              <a:rPr lang="en-US" sz="1600" b="1">
                 <a:solidFill>
                   <a:srgbClr val="1B2A4A"/>
                 </a:solidFill>
@@ -12740,7 +12740,7 @@
               </a:rPr>
               <a:t>Square</a:t>
             </a:r>
-            <a:endParaRPr lang="en-US" sz="1600" dirty="0"/>
+            <a:endParaRPr lang="en-US" sz="1600"/>
           </a:p>
         </p:txBody>
       </p:sp>
@@ -12769,7 +12769,7 @@
               <a:buNone/>
             </a:pPr>
             <a:r>
-              <a:rPr lang="en-US" sz="1400" dirty="0">
+              <a:rPr lang="en-US" sz="1400">
                 <a:solidFill>
                   <a:srgbClr val="3D4A5C"/>
                 </a:solidFill>
@@ -12779,7 +12779,7 @@
               </a:rPr>
               <a:t>Rectangle with four equal sides</a:t>
             </a:r>
-            <a:endParaRPr lang="en-US" sz="1400" dirty="0"/>
+            <a:endParaRPr lang="en-US" sz="1400"/>
           </a:p>
         </p:txBody>
       </p:sp>
@@ -12835,7 +12835,7 @@
               <a:buNone/>
             </a:pPr>
             <a:r>
-              <a:rPr lang="en-US" sz="1200" i="1" dirty="0">
+              <a:rPr lang="en-US" sz="1200" i="1">
                 <a:solidFill>
                   <a:srgbClr val="7A8599"/>
                 </a:solidFill>
@@ -12845,7 +12845,7 @@
               </a:rPr>
               <a:t>A diagonal of a polygon is a line segment joining any two nonadjacent vertices.</a:t>
             </a:r>
-            <a:endParaRPr lang="en-US" sz="1200" dirty="0"/>
+            <a:endParaRPr lang="en-US" sz="1200"/>
           </a:p>
         </p:txBody>
       </p:sp>
@@ -12934,7 +12934,7 @@
               <a:buNone/>
             </a:pPr>
             <a:r>
-              <a:rPr lang="en-US" sz="3200" b="1" dirty="0">
+              <a:rPr lang="en-US" sz="3200" b="1">
                 <a:solidFill>
                   <a:srgbClr val="1B2A4A"/>
                 </a:solidFill>
@@ -12944,7 +12944,7 @@
               </a:rPr>
               <a:t>Area of Quadrilaterals</a:t>
             </a:r>
-            <a:endParaRPr lang="en-US" sz="3200" dirty="0"/>
+            <a:endParaRPr lang="en-US" sz="3200"/>
           </a:p>
         </p:txBody>
       </p:sp>
@@ -13034,7 +13034,7 @@
               <a:buNone/>
             </a:pPr>
             <a:r>
-              <a:rPr lang="en-US" sz="1600" b="1" dirty="0">
+              <a:rPr lang="en-US" sz="1600" b="1">
                 <a:solidFill>
                   <a:srgbClr val="1B2A4A"/>
                 </a:solidFill>
@@ -13044,7 +13044,7 @@
               </a:rPr>
               <a:t>Square</a:t>
             </a:r>
-            <a:endParaRPr lang="en-US" sz="1600" dirty="0"/>
+            <a:endParaRPr lang="en-US" sz="1600"/>
           </a:p>
         </p:txBody>
       </p:sp>
@@ -13073,7 +13073,7 @@
               <a:buNone/>
             </a:pPr>
             <a:r>
-              <a:rPr lang="en-US" sz="2800" b="1" dirty="0">
+              <a:rPr lang="en-US" sz="2800" b="1">
                 <a:solidFill>
                   <a:srgbClr val="1A7A7A"/>
                 </a:solidFill>
@@ -13083,7 +13083,7 @@
               </a:rPr>
               <a:t>A = s²</a:t>
             </a:r>
-            <a:endParaRPr lang="en-US" sz="2800" dirty="0"/>
+            <a:endParaRPr lang="en-US" sz="2800"/>
           </a:p>
         </p:txBody>
       </p:sp>
@@ -13112,7 +13112,7 @@
               <a:buNone/>
             </a:pPr>
             <a:r>
-              <a:rPr lang="en-US" sz="1200" dirty="0">
+              <a:rPr lang="en-US" sz="1200">
                 <a:solidFill>
                   <a:srgbClr val="7A8599"/>
                 </a:solidFill>
@@ -13122,7 +13122,7 @@
               </a:rPr>
               <a:t>s = side length</a:t>
             </a:r>
-            <a:endParaRPr lang="en-US" sz="1200" dirty="0"/>
+            <a:endParaRPr lang="en-US" sz="1200"/>
           </a:p>
         </p:txBody>
       </p:sp>
@@ -13212,7 +13212,7 @@
               <a:buNone/>
             </a:pPr>
             <a:r>
-              <a:rPr lang="en-US" sz="1600" b="1" dirty="0">
+              <a:rPr lang="en-US" sz="1600" b="1">
                 <a:solidFill>
                   <a:srgbClr val="1B2A4A"/>
                 </a:solidFill>
@@ -13222,7 +13222,7 @@
               </a:rPr>
               <a:t>Rectangle</a:t>
             </a:r>
-            <a:endParaRPr lang="en-US" sz="1600" dirty="0"/>
+            <a:endParaRPr lang="en-US" sz="1600"/>
           </a:p>
         </p:txBody>
       </p:sp>
@@ -13251,7 +13251,7 @@
               <a:buNone/>
             </a:pPr>
             <a:r>
-              <a:rPr lang="en-US" sz="2800" b="1" dirty="0">
+              <a:rPr lang="en-US" sz="2800" b="1">
                 <a:solidFill>
                   <a:srgbClr val="0D4F4F"/>
                 </a:solidFill>
@@ -13261,7 +13261,7 @@
               </a:rPr>
               <a:t>A = l × w</a:t>
             </a:r>
-            <a:endParaRPr lang="en-US" sz="2800" dirty="0"/>
+            <a:endParaRPr lang="en-US" sz="2800"/>
           </a:p>
         </p:txBody>
       </p:sp>
@@ -13290,7 +13290,7 @@
               <a:buNone/>
             </a:pPr>
             <a:r>
-              <a:rPr lang="en-US" sz="1200" dirty="0">
+              <a:rPr lang="en-US" sz="1200">
                 <a:solidFill>
                   <a:srgbClr val="7A8599"/>
                 </a:solidFill>
@@ -13300,7 +13300,7 @@
               </a:rPr>
               <a:t>l = length, w = width</a:t>
             </a:r>
-            <a:endParaRPr lang="en-US" sz="1200" dirty="0"/>
+            <a:endParaRPr lang="en-US" sz="1200"/>
           </a:p>
         </p:txBody>
       </p:sp>
@@ -13390,7 +13390,7 @@
               <a:buNone/>
             </a:pPr>
             <a:r>
-              <a:rPr lang="en-US" sz="1600" b="1" dirty="0">
+              <a:rPr lang="en-US" sz="1600" b="1">
                 <a:solidFill>
                   <a:srgbClr val="1B2A4A"/>
                 </a:solidFill>
@@ -13400,7 +13400,7 @@
               </a:rPr>
               <a:t>Parallelogram</a:t>
             </a:r>
-            <a:endParaRPr lang="en-US" sz="1600" dirty="0"/>
+            <a:endParaRPr lang="en-US" sz="1600"/>
           </a:p>
         </p:txBody>
       </p:sp>
@@ -13429,7 +13429,7 @@
               <a:buNone/>
             </a:pPr>
             <a:r>
-              <a:rPr lang="en-US" sz="2800" b="1" dirty="0">
+              <a:rPr lang="en-US" sz="2800" b="1">
                 <a:solidFill>
                   <a:srgbClr val="2AA5A5"/>
                 </a:solidFill>
@@ -13439,7 +13439,7 @@
               </a:rPr>
               <a:t>A = b × h</a:t>
             </a:r>
-            <a:endParaRPr lang="en-US" sz="2800" dirty="0"/>
+            <a:endParaRPr lang="en-US" sz="2800"/>
           </a:p>
         </p:txBody>
       </p:sp>
@@ -13468,7 +13468,7 @@
               <a:buNone/>
             </a:pPr>
             <a:r>
-              <a:rPr lang="en-US" sz="1200" dirty="0">
+              <a:rPr lang="en-US" sz="1200">
                 <a:solidFill>
                   <a:srgbClr val="7A8599"/>
                 </a:solidFill>
@@ -13478,7 +13478,7 @@
               </a:rPr>
               <a:t>b = base, h = height</a:t>
             </a:r>
-            <a:endParaRPr lang="en-US" sz="1200" dirty="0"/>
+            <a:endParaRPr lang="en-US" sz="1200"/>
           </a:p>
         </p:txBody>
       </p:sp>
@@ -13568,7 +13568,7 @@
               <a:buNone/>
             </a:pPr>
             <a:r>
-              <a:rPr lang="en-US" sz="1600" b="1" dirty="0">
+              <a:rPr lang="en-US" sz="1600" b="1">
                 <a:solidFill>
                   <a:srgbClr val="1B2A4A"/>
                 </a:solidFill>
@@ -13578,7 +13578,7 @@
               </a:rPr>
               <a:t>Trapezoid</a:t>
             </a:r>
-            <a:endParaRPr lang="en-US" sz="1600" dirty="0"/>
+            <a:endParaRPr lang="en-US" sz="1600"/>
           </a:p>
         </p:txBody>
       </p:sp>
@@ -13607,7 +13607,7 @@
               <a:buNone/>
             </a:pPr>
             <a:r>
-              <a:rPr lang="en-US" sz="2800" b="1" dirty="0">
+              <a:rPr lang="en-US" sz="2800" b="1">
                 <a:solidFill>
                   <a:srgbClr val="D4A843"/>
                 </a:solidFill>
@@ -13617,7 +13617,7 @@
               </a:rPr>
               <a:t>A = ½(b₁ + b₂)h</a:t>
             </a:r>
-            <a:endParaRPr lang="en-US" sz="2800" dirty="0"/>
+            <a:endParaRPr lang="en-US" sz="2800"/>
           </a:p>
         </p:txBody>
       </p:sp>
@@ -13646,7 +13646,7 @@
               <a:buNone/>
             </a:pPr>
             <a:r>
-              <a:rPr lang="en-US" sz="1200" dirty="0">
+              <a:rPr lang="en-US" sz="1200">
                 <a:solidFill>
                   <a:srgbClr val="7A8599"/>
                 </a:solidFill>
@@ -13656,7 +13656,7 @@
               </a:rPr>
               <a:t>b₁, b₂ = bases, h = height</a:t>
             </a:r>
-            <a:endParaRPr lang="en-US" sz="1200" dirty="0"/>
+            <a:endParaRPr lang="en-US" sz="1200"/>
           </a:p>
         </p:txBody>
       </p:sp>
@@ -13712,7 +13712,7 @@
               <a:buNone/>
             </a:pPr>
             <a:r>
-              <a:rPr lang="en-US" sz="1200" i="1" dirty="0">
+              <a:rPr lang="en-US" sz="1200" i="1">
                 <a:solidFill>
                   <a:srgbClr val="7A8599"/>
                 </a:solidFill>
@@ -13722,7 +13722,7 @@
               </a:rPr>
               <a:t>Area is given in square units (ft², m², mi², cm², in²)     |     Rhombus: A = d₁ × d₂ / 2  (d₁, d₂ = diagonals)</a:t>
             </a:r>
-            <a:endParaRPr lang="en-US" sz="1200" dirty="0"/>
+            <a:endParaRPr lang="en-US" sz="1200"/>
           </a:p>
         </p:txBody>
       </p:sp>
@@ -13811,7 +13811,7 @@
               <a:buNone/>
             </a:pPr>
             <a:r>
-              <a:rPr lang="en-US" sz="3000" b="1" dirty="0">
+              <a:rPr lang="en-US" sz="3000" b="1">
                 <a:solidFill>
                   <a:srgbClr val="1B2A4A"/>
                 </a:solidFill>
@@ -13821,7 +13821,7 @@
               </a:rPr>
               <a:t>Examples: Area of Quadrilaterals</a:t>
             </a:r>
-            <a:endParaRPr lang="en-US" sz="3000" dirty="0"/>
+            <a:endParaRPr lang="en-US" sz="3000"/>
           </a:p>
         </p:txBody>
       </p:sp>
@@ -13911,7 +13911,7 @@
               <a:buNone/>
             </a:pPr>
             <a:r>
-              <a:rPr lang="en-US" sz="1200" b="1" kern="0" spc="200" dirty="0">
+              <a:rPr lang="en-US" sz="1200" b="1" kern="0" spc="200">
                 <a:solidFill>
                   <a:srgbClr val="1A7A7A"/>
                 </a:solidFill>
@@ -13921,7 +13921,7 @@
               </a:rPr>
               <a:t>Parallelogram</a:t>
             </a:r>
-            <a:endParaRPr lang="en-US" sz="1200" dirty="0"/>
+            <a:endParaRPr lang="en-US" sz="1200"/>
           </a:p>
         </p:txBody>
       </p:sp>
@@ -13950,7 +13950,7 @@
               <a:buNone/>
             </a:pPr>
             <a:r>
-              <a:rPr lang="en-US" sz="1300" dirty="0">
+              <a:rPr lang="en-US" sz="1300">
                 <a:solidFill>
                   <a:srgbClr val="3D4A5C"/>
                 </a:solidFill>
@@ -13960,7 +13960,7 @@
               </a:rPr>
               <a:t>b = 9.2 cm, h = 6.1 cm</a:t>
             </a:r>
-            <a:endParaRPr lang="en-US" sz="1300" dirty="0"/>
+            <a:endParaRPr lang="en-US" sz="1300"/>
           </a:p>
         </p:txBody>
       </p:sp>
@@ -13989,7 +13989,7 @@
               <a:buNone/>
             </a:pPr>
             <a:r>
-              <a:rPr lang="en-US" sz="1300" dirty="0">
+              <a:rPr lang="en-US" sz="1300">
                 <a:solidFill>
                   <a:srgbClr val="3D4A5C"/>
                 </a:solidFill>
@@ -13999,7 +13999,7 @@
               </a:rPr>
               <a:t>A = b × h = 9.2 × 6.1</a:t>
             </a:r>
-            <a:endParaRPr lang="en-US" sz="1300" dirty="0"/>
+            <a:endParaRPr lang="en-US" sz="1300"/>
           </a:p>
         </p:txBody>
       </p:sp>
@@ -14028,7 +14028,7 @@
               <a:buNone/>
             </a:pPr>
             <a:r>
-              <a:rPr lang="en-US" sz="2000" b="1" dirty="0">
+              <a:rPr lang="en-US" sz="2000" b="1">
                 <a:solidFill>
                   <a:srgbClr val="1A7A7A"/>
                 </a:solidFill>
@@ -14038,7 +14038,7 @@
               </a:rPr>
               <a:t>A = 56.12 cm²</a:t>
             </a:r>
-            <a:endParaRPr lang="en-US" sz="2000" dirty="0"/>
+            <a:endParaRPr lang="en-US" sz="2000"/>
           </a:p>
         </p:txBody>
       </p:sp>
@@ -14128,7 +14128,7 @@
               <a:buNone/>
             </a:pPr>
             <a:r>
-              <a:rPr lang="en-US" sz="1200" b="1" kern="0" spc="200" dirty="0">
+              <a:rPr lang="en-US" sz="1200" b="1" kern="0" spc="200">
                 <a:solidFill>
                   <a:srgbClr val="D4A843"/>
                 </a:solidFill>
@@ -14138,7 +14138,7 @@
               </a:rPr>
               <a:t>Trapezoid</a:t>
             </a:r>
-            <a:endParaRPr lang="en-US" sz="1200" dirty="0"/>
+            <a:endParaRPr lang="en-US" sz="1200"/>
           </a:p>
         </p:txBody>
       </p:sp>
@@ -14167,7 +14167,7 @@
               <a:buNone/>
             </a:pPr>
             <a:r>
-              <a:rPr lang="en-US" sz="1300" dirty="0">
+              <a:rPr lang="en-US" sz="1300">
                 <a:solidFill>
                   <a:srgbClr val="3D4A5C"/>
                 </a:solidFill>
@@ -14177,7 +14177,7 @@
               </a:rPr>
               <a:t>b₁ = 3.6 ft, b₂ = 5.5 ft, h = 2.9 ft</a:t>
             </a:r>
-            <a:endParaRPr lang="en-US" sz="1300" dirty="0"/>
+            <a:endParaRPr lang="en-US" sz="1300"/>
           </a:p>
         </p:txBody>
       </p:sp>
@@ -14206,7 +14206,7 @@
               <a:buNone/>
             </a:pPr>
             <a:r>
-              <a:rPr lang="en-US" sz="1200" dirty="0">
+              <a:rPr lang="en-US" sz="1200">
                 <a:solidFill>
                   <a:srgbClr val="3D4A5C"/>
                 </a:solidFill>
@@ -14216,7 +14216,7 @@
               </a:rPr>
               <a:t>A = ½(b₁ + b₂)h = ½(3.6 + 5.5)(2.9)</a:t>
             </a:r>
-            <a:endParaRPr lang="en-US" sz="1200" dirty="0"/>
+            <a:endParaRPr lang="en-US" sz="1200"/>
           </a:p>
         </p:txBody>
       </p:sp>
@@ -14245,7 +14245,7 @@
               <a:buNone/>
             </a:pPr>
             <a:r>
-              <a:rPr lang="en-US" sz="2000" b="1" dirty="0">
+              <a:rPr lang="en-US" sz="2000" b="1">
                 <a:solidFill>
                   <a:srgbClr val="D4A843"/>
                 </a:solidFill>
@@ -14255,7 +14255,7 @@
               </a:rPr>
               <a:t>A = 13.195 ft²</a:t>
             </a:r>
-            <a:endParaRPr lang="en-US" sz="2000" dirty="0"/>
+            <a:endParaRPr lang="en-US" sz="2000"/>
           </a:p>
         </p:txBody>
       </p:sp>
@@ -14317,7 +14317,7 @@
               <a:buNone/>
             </a:pPr>
             <a:r>
-              <a:rPr lang="en-US" sz="1300" b="1" dirty="0">
+              <a:rPr lang="en-US" sz="1300" b="1">
                 <a:solidFill>
                   <a:srgbClr val="B8922F"/>
                 </a:solidFill>
@@ -14326,7 +14326,7 @@
               <a:t>Always label units: </a:t>
             </a:r>
             <a:r>
-              <a:rPr lang="en-US" sz="1300" dirty="0">
+              <a:rPr lang="en-US" sz="1300">
                 <a:solidFill>
                   <a:srgbClr val="3D4A5C"/>
                 </a:solidFill>
@@ -14422,7 +14422,7 @@
               <a:buNone/>
             </a:pPr>
             <a:r>
-              <a:rPr lang="en-US" sz="3000" b="1" dirty="0">
+              <a:rPr lang="en-US" sz="3000" b="1">
                 <a:solidFill>
                   <a:srgbClr val="1B2A4A"/>
                 </a:solidFill>
@@ -14432,7 +14432,7 @@
               </a:rPr>
               <a:t>Worked Example: Multi-Step Trapezoid</a:t>
             </a:r>
-            <a:endParaRPr lang="en-US" sz="3000" dirty="0"/>
+            <a:endParaRPr lang="en-US" sz="3000"/>
           </a:p>
         </p:txBody>
       </p:sp>
@@ -14522,7 +14522,7 @@
               <a:buNone/>
             </a:pPr>
             <a:r>
-              <a:rPr lang="en-US" sz="1200" b="1" kern="0" spc="200" dirty="0">
+              <a:rPr lang="en-US" sz="1200" b="1" kern="0" spc="200">
                 <a:solidFill>
                   <a:srgbClr val="1A7A7A"/>
                 </a:solidFill>
@@ -14532,7 +14532,7 @@
               </a:rPr>
               <a:t>Step 1 — Find the Height</a:t>
             </a:r>
-            <a:endParaRPr lang="en-US" sz="1200" dirty="0"/>
+            <a:endParaRPr lang="en-US" sz="1200"/>
           </a:p>
         </p:txBody>
       </p:sp>
@@ -14561,7 +14561,7 @@
               <a:buNone/>
             </a:pPr>
             <a:r>
-              <a:rPr lang="en-US" sz="1300" dirty="0">
+              <a:rPr lang="en-US" sz="1300">
                 <a:solidFill>
                   <a:srgbClr val="3D4A5C"/>
                 </a:solidFill>
@@ -14571,7 +14571,7 @@
               </a:rPr>
               <a:t>b₁ = 3.8, b₂ = 9.2, slant = 6.3 cm</a:t>
             </a:r>
-            <a:endParaRPr lang="en-US" sz="1300" dirty="0"/>
+            <a:endParaRPr lang="en-US" sz="1300"/>
           </a:p>
         </p:txBody>
       </p:sp>
@@ -14600,7 +14600,7 @@
               <a:buNone/>
             </a:pPr>
             <a:r>
-              <a:rPr lang="en-US" sz="1300" dirty="0">
+              <a:rPr lang="en-US" sz="1300">
                 <a:solidFill>
                   <a:srgbClr val="3D4A5C"/>
                 </a:solidFill>
@@ -14610,7 +14610,7 @@
               </a:rPr>
               <a:t>d = 9.2 − 3.8 = 5.4; h² + 5.4² = 6.3²</a:t>
             </a:r>
-            <a:endParaRPr lang="en-US" sz="1300" dirty="0"/>
+            <a:endParaRPr lang="en-US" sz="1300"/>
           </a:p>
         </p:txBody>
       </p:sp>
@@ -14639,7 +14639,7 @@
               <a:buNone/>
             </a:pPr>
             <a:r>
-              <a:rPr lang="en-US" sz="2000" b="1" dirty="0">
+              <a:rPr lang="en-US" sz="2000" b="1">
                 <a:solidFill>
                   <a:srgbClr val="1A7A7A"/>
                 </a:solidFill>
@@ -14649,7 +14649,7 @@
               </a:rPr>
               <a:t>h = √10.53 ≈ 3.2 cm</a:t>
             </a:r>
-            <a:endParaRPr lang="en-US" sz="2000" dirty="0"/>
+            <a:endParaRPr lang="en-US" sz="2000"/>
           </a:p>
         </p:txBody>
       </p:sp>
@@ -14739,7 +14739,7 @@
               <a:buNone/>
             </a:pPr>
             <a:r>
-              <a:rPr lang="en-US" sz="1200" b="1" kern="0" spc="200" dirty="0">
+              <a:rPr lang="en-US" sz="1200" b="1" kern="0" spc="200">
                 <a:solidFill>
                   <a:srgbClr val="D4A843"/>
                 </a:solidFill>
@@ -14749,7 +14749,7 @@
               </a:rPr>
               <a:t>Step 2 — Compute the Area</a:t>
             </a:r>
-            <a:endParaRPr lang="en-US" sz="1200" dirty="0"/>
+            <a:endParaRPr lang="en-US" sz="1200"/>
           </a:p>
         </p:txBody>
       </p:sp>
@@ -14778,7 +14778,7 @@
               <a:buNone/>
             </a:pPr>
             <a:r>
-              <a:rPr lang="en-US" sz="1300" dirty="0">
+              <a:rPr lang="en-US" sz="1300">
                 <a:solidFill>
                   <a:srgbClr val="3D4A5C"/>
                 </a:solidFill>
@@ -14788,7 +14788,7 @@
               </a:rPr>
               <a:t>A = ½(b₁ + b₂)h</a:t>
             </a:r>
-            <a:endParaRPr lang="en-US" sz="1300" dirty="0"/>
+            <a:endParaRPr lang="en-US" sz="1300"/>
           </a:p>
         </p:txBody>
       </p:sp>
@@ -14817,7 +14817,7 @@
               <a:buNone/>
             </a:pPr>
             <a:r>
-              <a:rPr lang="en-US" sz="1200" dirty="0">
+              <a:rPr lang="en-US" sz="1200">
                 <a:solidFill>
                   <a:srgbClr val="3D4A5C"/>
                 </a:solidFill>
@@ -14827,7 +14827,7 @@
               </a:rPr>
               <a:t>A = ½(3.8 + 9.2)(3.2) = ½(13.0)(3.2)</a:t>
             </a:r>
-            <a:endParaRPr lang="en-US" sz="1200" dirty="0"/>
+            <a:endParaRPr lang="en-US" sz="1200"/>
           </a:p>
         </p:txBody>
       </p:sp>
@@ -14856,7 +14856,7 @@
               <a:buNone/>
             </a:pPr>
             <a:r>
-              <a:rPr lang="en-US" sz="2000" b="1" dirty="0">
+              <a:rPr lang="en-US" sz="2000" b="1">
                 <a:solidFill>
                   <a:srgbClr val="D4A843"/>
                 </a:solidFill>
@@ -14866,7 +14866,7 @@
               </a:rPr>
               <a:t>A ≈ 21.1 cm²</a:t>
             </a:r>
-            <a:endParaRPr lang="en-US" sz="2000" dirty="0"/>
+            <a:endParaRPr lang="en-US" sz="2000"/>
           </a:p>
         </p:txBody>
       </p:sp>
@@ -14928,7 +14928,7 @@
               <a:buNone/>
             </a:pPr>
             <a:r>
-              <a:rPr lang="en-US" sz="1300" b="1" dirty="0">
+              <a:rPr lang="en-US" sz="1300" b="1">
                 <a:solidFill>
                   <a:srgbClr val="B8922F"/>
                 </a:solidFill>
@@ -14937,7 +14937,7 @@
               <a:t>Key strategy: </a:t>
             </a:r>
             <a:r>
-              <a:rPr lang="en-US" sz="1300" dirty="0">
+              <a:rPr lang="en-US" sz="1300">
                 <a:solidFill>
                   <a:srgbClr val="3D4A5C"/>
                 </a:solidFill>
@@ -15033,7 +15033,7 @@
               <a:buNone/>
             </a:pPr>
             <a:r>
-              <a:rPr lang="en-US" sz="2800" b="1" dirty="0">
+              <a:rPr lang="en-US" sz="2800" b="1">
                 <a:solidFill>
                   <a:srgbClr val="1B2A4A"/>
                 </a:solidFill>
@@ -15132,7 +15132,7 @@
               <a:buNone/>
             </a:pPr>
             <a:r>
-              <a:rPr lang="en-US" sz="1600" b="1" dirty="0">
+              <a:rPr lang="en-US" sz="1600" b="1">
                 <a:solidFill>
                   <a:srgbClr val="1A7A7A"/>
                 </a:solidFill>
@@ -15146,7 +15146,7 @@
               <a:buNone/>
             </a:pPr>
             <a:r>
-              <a:rPr lang="en-US" sz="1200" dirty="0">
+              <a:rPr lang="en-US" sz="1200">
                 <a:solidFill>
                   <a:srgbClr val="FFFFFF"/>
                 </a:solidFill>
@@ -15160,7 +15160,7 @@
               <a:buNone/>
             </a:pPr>
             <a:r>
-              <a:rPr lang="en-US" sz="1600" b="1" dirty="0">
+              <a:rPr lang="en-US" sz="1600" b="1">
                 <a:solidFill>
                   <a:srgbClr val="D4A843"/>
                 </a:solidFill>
@@ -15174,7 +15174,7 @@
               <a:buNone/>
             </a:pPr>
             <a:r>
-              <a:rPr lang="en-US" sz="1200" dirty="0">
+              <a:rPr lang="en-US" sz="1200">
                 <a:solidFill>
                   <a:srgbClr val="FFFFFF"/>
                 </a:solidFill>
@@ -15188,7 +15188,7 @@
               <a:buNone/>
             </a:pPr>
             <a:r>
-              <a:rPr lang="en-US" sz="1300" dirty="0">
+              <a:rPr lang="en-US" sz="1300">
                 <a:solidFill>
                   <a:srgbClr val="3D4A5C"/>
                 </a:solidFill>
@@ -15202,7 +15202,7 @@
               <a:buNone/>
             </a:pPr>
             <a:r>
-              <a:rPr lang="en-US" sz="1600" b="1" dirty="0">
+              <a:rPr lang="en-US" sz="1600" b="1">
                 <a:solidFill>
                   <a:srgbClr val="D4A843"/>
                 </a:solidFill>
@@ -15216,7 +15216,7 @@
               <a:buNone/>
             </a:pPr>
             <a:r>
-              <a:rPr lang="en-US" sz="1200" dirty="0">
+              <a:rPr lang="en-US" sz="1200">
                 <a:solidFill>
                   <a:srgbClr val="FFFFFF"/>
                 </a:solidFill>
@@ -15230,7 +15230,7 @@
               <a:buNone/>
             </a:pPr>
             <a:r>
-              <a:rPr lang="en-US" sz="1300" dirty="0">
+              <a:rPr lang="en-US" sz="1300">
                 <a:solidFill>
                   <a:srgbClr val="3D4A5C"/>
                 </a:solidFill>
@@ -15244,7 +15244,7 @@
               <a:buNone/>
             </a:pPr>
             <a:r>
-              <a:rPr lang="en-US" sz="1600" b="1" dirty="0">
+              <a:rPr lang="en-US" sz="1600" b="1">
                 <a:solidFill>
                   <a:srgbClr val="D4A843"/>
                 </a:solidFill>
@@ -15258,7 +15258,7 @@
               <a:buNone/>
             </a:pPr>
             <a:r>
-              <a:rPr lang="en-US" sz="1200" dirty="0">
+              <a:rPr lang="en-US" sz="1200">
                 <a:solidFill>
                   <a:srgbClr val="FFFFFF"/>
                 </a:solidFill>
@@ -15272,7 +15272,7 @@
               <a:buNone/>
             </a:pPr>
             <a:r>
-              <a:rPr lang="en-US" sz="1300" dirty="0">
+              <a:rPr lang="en-US" sz="1300">
                 <a:solidFill>
                   <a:srgbClr val="3D4A5C"/>
                 </a:solidFill>
@@ -15286,7 +15286,7 @@
               <a:buNone/>
             </a:pPr>
             <a:r>
-              <a:rPr lang="en-US" sz="1600" b="1" dirty="0">
+              <a:rPr lang="en-US" sz="1600" b="1">
                 <a:solidFill>
                   <a:srgbClr val="D4A843"/>
                 </a:solidFill>
@@ -15300,7 +15300,7 @@
               <a:buNone/>
             </a:pPr>
             <a:r>
-              <a:rPr lang="en-US" sz="1200" dirty="0">
+              <a:rPr lang="en-US" sz="1200">
                 <a:solidFill>
                   <a:srgbClr val="FFFFFF"/>
                 </a:solidFill>
@@ -15314,7 +15314,7 @@
               <a:buNone/>
             </a:pPr>
             <a:r>
-              <a:rPr lang="en-US" sz="1300" dirty="0">
+              <a:rPr lang="en-US" sz="1300">
                 <a:solidFill>
                   <a:srgbClr val="3D4A5C"/>
                 </a:solidFill>
@@ -15328,7 +15328,7 @@
               <a:buNone/>
             </a:pPr>
             <a:r>
-              <a:rPr lang="en-US" sz="1600" b="1" dirty="0">
+              <a:rPr lang="en-US" sz="1600" b="1">
                 <a:solidFill>
                   <a:srgbClr val="D4A843"/>
                 </a:solidFill>
@@ -15342,7 +15342,7 @@
               <a:buNone/>
             </a:pPr>
             <a:r>
-              <a:rPr lang="en-US" sz="1200" dirty="0">
+              <a:rPr lang="en-US" sz="1200">
                 <a:solidFill>
                   <a:srgbClr val="FFFFFF"/>
                 </a:solidFill>
@@ -15356,7 +15356,7 @@
               <a:buNone/>
             </a:pPr>
             <a:r>
-              <a:rPr lang="en-US" sz="1300" dirty="0">
+              <a:rPr lang="en-US" sz="1300">
                 <a:solidFill>
                   <a:srgbClr val="3D4A5C"/>
                 </a:solidFill>
@@ -15452,7 +15452,7 @@
               <a:buNone/>
             </a:pPr>
             <a:r>
-              <a:rPr lang="en-US" sz="1900" b="1" dirty="0">
+              <a:rPr lang="en-US" sz="1900" b="1">
                 <a:solidFill>
                   <a:srgbClr val="1B2A4A"/>
                 </a:solidFill>
@@ -15604,7 +15604,7 @@
               <a:buNone/>
             </a:pPr>
             <a:r>
-              <a:rPr lang="en-US" sz="1500" b="1" dirty="0">
+              <a:rPr lang="en-US" sz="1500" b="1">
                 <a:solidFill>
                   <a:srgbClr val="D4A843"/>
                 </a:solidFill>
@@ -15618,7 +15618,7 @@
               <a:buNone/>
             </a:pPr>
             <a:r>
-              <a:rPr lang="en-US" sz="1200" dirty="0">
+              <a:rPr lang="en-US" sz="1200">
                 <a:solidFill>
                   <a:srgbClr val="FFFFFF"/>
                 </a:solidFill>
@@ -15632,7 +15632,7 @@
               <a:buNone/>
             </a:pPr>
             <a:r>
-              <a:rPr lang="en-US" sz="1300" dirty="0">
+              <a:rPr lang="en-US" sz="1300">
                 <a:solidFill>
                   <a:srgbClr val="3D4A5C"/>
                 </a:solidFill>
@@ -15646,7 +15646,7 @@
               <a:buNone/>
             </a:pPr>
             <a:r>
-              <a:rPr lang="en-US" sz="1200" dirty="0">
+              <a:rPr lang="en-US" sz="1200">
                 <a:solidFill>
                   <a:srgbClr val="FFFFFF"/>
                 </a:solidFill>
@@ -15660,7 +15660,7 @@
               <a:buNone/>
             </a:pPr>
             <a:r>
-              <a:rPr lang="en-US" sz="1300" b="1" dirty="0">
+              <a:rPr lang="en-US" sz="1300" b="1">
                 <a:solidFill>
                   <a:srgbClr val="3D4A5C"/>
                 </a:solidFill>
@@ -15759,7 +15759,7 @@
               <a:buNone/>
             </a:pPr>
             <a:r>
-              <a:rPr lang="en-US" sz="1600" b="1" dirty="0">
+              <a:rPr lang="en-US" sz="1600" b="1">
                 <a:solidFill>
                   <a:srgbClr val="4ECDC4"/>
                 </a:solidFill>
@@ -15773,7 +15773,7 @@
               <a:buNone/>
             </a:pPr>
             <a:r>
-              <a:rPr lang="en-US" sz="1400" dirty="0">
+              <a:rPr lang="en-US" sz="1400">
                 <a:solidFill>
                   <a:srgbClr val="FFFFFF"/>
                 </a:solidFill>
@@ -15787,7 +15787,7 @@
               <a:buNone/>
             </a:pPr>
             <a:r>
-              <a:rPr lang="en-US" sz="1400" dirty="0">
+              <a:rPr lang="en-US" sz="1400">
                 <a:solidFill>
                   <a:srgbClr val="B0BEC5"/>
                 </a:solidFill>
@@ -15801,7 +15801,7 @@
               <a:buNone/>
             </a:pPr>
             <a:r>
-              <a:rPr lang="en-US" sz="1400" dirty="0">
+              <a:rPr lang="en-US" sz="1400">
                 <a:solidFill>
                   <a:srgbClr val="B0BEC5"/>
                 </a:solidFill>
@@ -15815,7 +15815,7 @@
               <a:buNone/>
             </a:pPr>
             <a:r>
-              <a:rPr lang="en-US" sz="1400" dirty="0">
+              <a:rPr lang="en-US" sz="1400">
                 <a:solidFill>
                   <a:srgbClr val="B0BEC5"/>
                 </a:solidFill>
@@ -15829,7 +15829,7 @@
               <a:buNone/>
             </a:pPr>
             <a:r>
-              <a:rPr lang="en-US" sz="1200" dirty="0">
+              <a:rPr lang="en-US" sz="1200">
                 <a:solidFill>
                   <a:srgbClr val="FFFFFF"/>
                 </a:solidFill>
@@ -15843,7 +15843,7 @@
               <a:buNone/>
             </a:pPr>
             <a:r>
-              <a:rPr lang="en-US" sz="1200" i="1" dirty="0">
+              <a:rPr lang="en-US" sz="1200" i="1">
                 <a:solidFill>
                   <a:srgbClr val="5C6B7A"/>
                 </a:solidFill>
@@ -15969,7 +15969,7 @@
               <a:buNone/>
             </a:pPr>
             <a:r>
-              <a:rPr lang="en-US" sz="3200" b="1" dirty="0">
+              <a:rPr lang="en-US" sz="3200" b="1">
                 <a:solidFill>
                   <a:srgbClr val="1B2A4A"/>
                 </a:solidFill>
@@ -16005,7 +16005,7 @@
               <a:buNone/>
             </a:pPr>
             <a:r>
-              <a:rPr lang="en-US" sz="1400" i="1" dirty="0">
+              <a:rPr lang="en-US" sz="1400" i="1">
                 <a:solidFill>
                   <a:srgbClr val="3D4A5C"/>
                 </a:solidFill>
@@ -16106,7 +16106,7 @@
               <a:buNone/>
             </a:pPr>
             <a:r>
-              <a:rPr lang="en-US" sz="1300" b="1" dirty="0">
+              <a:rPr lang="en-US" sz="1300" b="1">
                 <a:solidFill>
                   <a:srgbClr val="1A7A7A"/>
                 </a:solidFill>
@@ -16120,7 +16120,7 @@
               <a:buNone/>
             </a:pPr>
             <a:r>
-              <a:rPr lang="en-US" sz="1200" dirty="0">
+              <a:rPr lang="en-US" sz="1200">
                 <a:solidFill>
                   <a:srgbClr val="3D4A5C"/>
                 </a:solidFill>
@@ -16137,7 +16137,7 @@
               <a:buNone/>
             </a:pPr>
             <a:r>
-              <a:rPr lang="en-US" sz="1300" b="1" dirty="0">
+              <a:rPr lang="en-US" sz="1300" b="1">
                 <a:solidFill>
                   <a:srgbClr val="1A7A7A"/>
                 </a:solidFill>
@@ -16151,7 +16151,7 @@
               <a:buNone/>
             </a:pPr>
             <a:r>
-              <a:rPr lang="en-US" sz="1200" dirty="0">
+              <a:rPr lang="en-US" sz="1200">
                 <a:solidFill>
                   <a:srgbClr val="3D4A5C"/>
                 </a:solidFill>
@@ -16168,7 +16168,7 @@
               <a:buNone/>
             </a:pPr>
             <a:r>
-              <a:rPr lang="en-US" sz="1300" b="1" dirty="0">
+              <a:rPr lang="en-US" sz="1300" b="1">
                 <a:solidFill>
                   <a:srgbClr val="1A7A7A"/>
                 </a:solidFill>
@@ -16182,7 +16182,7 @@
               <a:buNone/>
             </a:pPr>
             <a:r>
-              <a:rPr lang="en-US" sz="1200" dirty="0">
+              <a:rPr lang="en-US" sz="1200">
                 <a:solidFill>
                   <a:srgbClr val="3D4A5C"/>
                 </a:solidFill>
@@ -16283,7 +16283,7 @@
               <a:buNone/>
             </a:pPr>
             <a:r>
-              <a:rPr lang="en-US" sz="1300" b="1" dirty="0">
+              <a:rPr lang="en-US" sz="1300" b="1">
                 <a:solidFill>
                   <a:srgbClr val="1A7A7A"/>
                 </a:solidFill>
@@ -16297,7 +16297,7 @@
               <a:buNone/>
             </a:pPr>
             <a:r>
-              <a:rPr lang="en-US" sz="1200" dirty="0">
+              <a:rPr lang="en-US" sz="1200">
                 <a:solidFill>
                   <a:srgbClr val="3D4A5C"/>
                 </a:solidFill>
@@ -16314,7 +16314,7 @@
               <a:buNone/>
             </a:pPr>
             <a:r>
-              <a:rPr lang="en-US" sz="1300" b="1" dirty="0">
+              <a:rPr lang="en-US" sz="1300" b="1">
                 <a:solidFill>
                   <a:srgbClr val="1A7A7A"/>
                 </a:solidFill>
@@ -16328,7 +16328,7 @@
               <a:buNone/>
             </a:pPr>
             <a:r>
-              <a:rPr lang="en-US" sz="1200" dirty="0">
+              <a:rPr lang="en-US" sz="1200">
                 <a:solidFill>
                   <a:srgbClr val="3D4A5C"/>
                 </a:solidFill>
@@ -16345,7 +16345,7 @@
               <a:buNone/>
             </a:pPr>
             <a:r>
-              <a:rPr lang="en-US" sz="1300" b="1" dirty="0">
+              <a:rPr lang="en-US" sz="1300" b="1">
                 <a:solidFill>
                   <a:srgbClr val="1A7A7A"/>
                 </a:solidFill>
@@ -16359,7 +16359,7 @@
               <a:buNone/>
             </a:pPr>
             <a:r>
-              <a:rPr lang="en-US" sz="1200" dirty="0">
+              <a:rPr lang="en-US" sz="1200">
                 <a:solidFill>
                   <a:srgbClr val="3D4A5C"/>
                 </a:solidFill>
@@ -16455,7 +16455,7 @@
               <a:buNone/>
             </a:pPr>
             <a:r>
-              <a:rPr lang="en-US" sz="1400" kern="0" spc="600" dirty="0">
+              <a:rPr lang="en-US" sz="1400" kern="0" spc="600">
                 <a:solidFill>
                   <a:srgbClr val="4ECDC4"/>
                 </a:solidFill>
@@ -16465,7 +16465,7 @@
               </a:rPr>
               <a:t>SECTION 3</a:t>
             </a:r>
-            <a:endParaRPr lang="en-US" sz="1400" dirty="0"/>
+            <a:endParaRPr lang="en-US" sz="1400"/>
           </a:p>
         </p:txBody>
       </p:sp>
@@ -16494,7 +16494,7 @@
               <a:buNone/>
             </a:pPr>
             <a:r>
-              <a:rPr lang="en-US" sz="4400" b="1" dirty="0">
+              <a:rPr lang="en-US" sz="4400" b="1">
                 <a:solidFill>
                   <a:srgbClr val="FFFFFF"/>
                 </a:solidFill>
@@ -16504,7 +16504,7 @@
               </a:rPr>
               <a:t>Triangles</a:t>
             </a:r>
-            <a:endParaRPr lang="en-US" sz="4400" dirty="0"/>
+            <a:endParaRPr lang="en-US" sz="4400"/>
           </a:p>
         </p:txBody>
       </p:sp>
@@ -16563,7 +16563,7 @@
               <a:buNone/>
             </a:pPr>
             <a:r>
-              <a:rPr lang="en-US" sz="1400" i="1" dirty="0">
+              <a:rPr lang="en-US" sz="1400" i="1">
                 <a:solidFill>
                   <a:srgbClr val="E8E4DD"/>
                 </a:solidFill>
@@ -16573,7 +16573,7 @@
               </a:rPr>
               <a:t>The most important polygon — every other polygon can be divided into triangles.</a:t>
             </a:r>
-            <a:endParaRPr lang="en-US" sz="1400" dirty="0"/>
+            <a:endParaRPr lang="en-US" sz="1400"/>
           </a:p>
         </p:txBody>
       </p:sp>
@@ -16662,7 +16662,7 @@
               <a:buNone/>
             </a:pPr>
             <a:r>
-              <a:rPr lang="en-US" sz="3200" b="1" dirty="0">
+              <a:rPr lang="en-US" sz="3200" b="1">
                 <a:solidFill>
                   <a:srgbClr val="1B2A4A"/>
                 </a:solidFill>
@@ -16672,7 +16672,7 @@
               </a:rPr>
               <a:t>Types of Triangles</a:t>
             </a:r>
-            <a:endParaRPr lang="en-US" sz="3200" dirty="0"/>
+            <a:endParaRPr lang="en-US" sz="3200"/>
           </a:p>
         </p:txBody>
       </p:sp>
@@ -16762,7 +16762,7 @@
               <a:buNone/>
             </a:pPr>
             <a:r>
-              <a:rPr lang="en-US" sz="2000" b="1" dirty="0">
+              <a:rPr lang="en-US" sz="2000" b="1">
                 <a:solidFill>
                   <a:srgbClr val="1B2A4A"/>
                 </a:solidFill>
@@ -16772,7 +16772,7 @@
               </a:rPr>
               <a:t>Scalene</a:t>
             </a:r>
-            <a:endParaRPr lang="en-US" sz="2000" dirty="0"/>
+            <a:endParaRPr lang="en-US" sz="2000"/>
           </a:p>
         </p:txBody>
       </p:sp>
@@ -16801,7 +16801,7 @@
               <a:buNone/>
             </a:pPr>
             <a:r>
-              <a:rPr lang="en-US" sz="1400" dirty="0">
+              <a:rPr lang="en-US" sz="1400">
                 <a:solidFill>
                   <a:srgbClr val="3D4A5C"/>
                 </a:solidFill>
@@ -16812,7 +16812,7 @@
               <a:t>No two sides are equal in length.
 No tick marks on sides.</a:t>
             </a:r>
-            <a:endParaRPr lang="en-US" sz="1400" dirty="0"/>
+            <a:endParaRPr lang="en-US" sz="1400"/>
           </a:p>
         </p:txBody>
       </p:sp>
@@ -16902,7 +16902,7 @@
               <a:buNone/>
             </a:pPr>
             <a:r>
-              <a:rPr lang="en-US" sz="2000" b="1" dirty="0">
+              <a:rPr lang="en-US" sz="2000" b="1">
                 <a:solidFill>
                   <a:srgbClr val="1B2A4A"/>
                 </a:solidFill>
@@ -16912,7 +16912,7 @@
               </a:rPr>
               <a:t>Isosceles</a:t>
             </a:r>
-            <a:endParaRPr lang="en-US" sz="2000" dirty="0"/>
+            <a:endParaRPr lang="en-US" sz="2000"/>
           </a:p>
         </p:txBody>
       </p:sp>
@@ -16941,7 +16941,7 @@
               <a:buNone/>
             </a:pPr>
             <a:r>
-              <a:rPr lang="en-US" sz="1400" dirty="0">
+              <a:rPr lang="en-US" sz="1400">
                 <a:solidFill>
                   <a:srgbClr val="3D4A5C"/>
                 </a:solidFill>
@@ -16952,7 +16952,7 @@
               <a:t>Two sides are equal in length.
 Shown with single tick marks on equal sides.</a:t>
             </a:r>
-            <a:endParaRPr lang="en-US" sz="1400" dirty="0"/>
+            <a:endParaRPr lang="en-US" sz="1400"/>
           </a:p>
         </p:txBody>
       </p:sp>
@@ -17042,7 +17042,7 @@
               <a:buNone/>
             </a:pPr>
             <a:r>
-              <a:rPr lang="en-US" sz="2000" b="1" dirty="0">
+              <a:rPr lang="en-US" sz="2000" b="1">
                 <a:solidFill>
                   <a:srgbClr val="1B2A4A"/>
                 </a:solidFill>
@@ -17052,7 +17052,7 @@
               </a:rPr>
               <a:t>Equilateral</a:t>
             </a:r>
-            <a:endParaRPr lang="en-US" sz="2000" dirty="0"/>
+            <a:endParaRPr lang="en-US" sz="2000"/>
           </a:p>
         </p:txBody>
       </p:sp>
@@ -17081,7 +17081,7 @@
               <a:buNone/>
             </a:pPr>
             <a:r>
-              <a:rPr lang="en-US" sz="1400" dirty="0">
+              <a:rPr lang="en-US" sz="1400">
                 <a:solidFill>
                   <a:srgbClr val="3D4A5C"/>
                 </a:solidFill>
@@ -17093,7 +17093,7 @@
 Shown with double tick marks. </a:t>
             </a:r>
             <a:br>
-              <a:rPr lang="en-US" sz="1400" dirty="0">
+              <a:rPr lang="en-US" sz="1400">
                 <a:solidFill>
                   <a:srgbClr val="3D4A5C"/>
                 </a:solidFill>
@@ -17103,7 +17103,7 @@
               </a:rPr>
             </a:br>
             <a:r>
-              <a:rPr lang="en-US" sz="1400" dirty="0">
+              <a:rPr lang="en-US" sz="1400">
                 <a:solidFill>
                   <a:srgbClr val="3D4A5C"/>
                 </a:solidFill>
@@ -17113,7 +17113,7 @@
               </a:rPr>
               <a:t>All angles = 60°.</a:t>
             </a:r>
-            <a:endParaRPr lang="en-US" sz="1400" dirty="0"/>
+            <a:endParaRPr lang="en-US" sz="1400"/>
           </a:p>
         </p:txBody>
       </p:sp>
@@ -17203,7 +17203,7 @@
               <a:buNone/>
             </a:pPr>
             <a:r>
-              <a:rPr lang="en-US" sz="2000" b="1" dirty="0">
+              <a:rPr lang="en-US" sz="2000" b="1">
                 <a:solidFill>
                   <a:srgbClr val="1B2A4A"/>
                 </a:solidFill>
@@ -17213,7 +17213,7 @@
               </a:rPr>
               <a:t>Right</a:t>
             </a:r>
-            <a:endParaRPr lang="en-US" sz="2000" dirty="0"/>
+            <a:endParaRPr lang="en-US" sz="2000"/>
           </a:p>
         </p:txBody>
       </p:sp>
@@ -17242,7 +17242,7 @@
               <a:buNone/>
             </a:pPr>
             <a:r>
-              <a:rPr lang="en-US" sz="1400" dirty="0">
+              <a:rPr lang="en-US" sz="1400">
                 <a:solidFill>
                   <a:srgbClr val="3D4A5C"/>
                 </a:solidFill>
@@ -17252,7 +17252,7 @@
               </a:rPr>
               <a:t>Has one right angle (90°). The side opposite the right angle is the hypotenuse; the other sides are legs.</a:t>
             </a:r>
-            <a:endParaRPr lang="en-US" sz="1400" dirty="0"/>
+            <a:endParaRPr lang="en-US" sz="1400"/>
           </a:p>
         </p:txBody>
       </p:sp>
@@ -17529,7 +17529,7 @@
               <a:buNone/>
             </a:pPr>
             <a:r>
-              <a:rPr lang="en-US" sz="3200" b="1" dirty="0">
+              <a:rPr lang="en-US" sz="3200" b="1">
                 <a:solidFill>
                   <a:srgbClr val="1B2A4A"/>
                 </a:solidFill>
@@ -17539,7 +17539,7 @@
               </a:rPr>
               <a:t>Triangle Properties</a:t>
             </a:r>
-            <a:endParaRPr lang="en-US" sz="3200" dirty="0"/>
+            <a:endParaRPr lang="en-US" sz="3200"/>
           </a:p>
         </p:txBody>
       </p:sp>
@@ -17595,7 +17595,7 @@
               <a:buNone/>
             </a:pPr>
             <a:r>
-              <a:rPr lang="en-US" sz="1600" b="1" dirty="0">
+              <a:rPr lang="en-US" sz="1600" b="1">
                 <a:solidFill>
                   <a:srgbClr val="4ECDC4"/>
                 </a:solidFill>
@@ -17605,7 +17605,7 @@
               </a:rPr>
               <a:t>Sum of Interior Angles</a:t>
             </a:r>
-            <a:endParaRPr lang="en-US" sz="1600" dirty="0"/>
+            <a:endParaRPr lang="en-US" sz="1600"/>
           </a:p>
         </p:txBody>
       </p:sp>
@@ -17672,18 +17672,7 @@
                           <a:ea typeface="Calibri" pitchFamily="34" charset="-122"/>
                           <a:cs typeface="Calibri" pitchFamily="34" charset="-120"/>
                         </a:rPr>
-                        <m:t> + </m:t>
-                      </m:r>
-                      <m:r>
-                        <a:rPr lang="en-US" sz="2400" b="1" i="1" dirty="0" smtClean="0">
-                          <a:solidFill>
-                            <a:srgbClr val="FFFFFF"/>
-                          </a:solidFill>
-                          <a:latin typeface="Cambria Math" panose="02040503050406030204" pitchFamily="18" charset="0"/>
-                          <a:ea typeface="Calibri" pitchFamily="34" charset="-122"/>
-                          <a:cs typeface="Calibri" pitchFamily="34" charset="-120"/>
-                        </a:rPr>
-                        <m:t>∠</m:t>
+                        <m:t> + ∠</m:t>
                       </m:r>
                       <m:r>
                         <a:rPr lang="en-US" sz="2400" b="1" i="1" dirty="0" smtClean="0">
@@ -17705,18 +17694,7 @@
                           <a:ea typeface="Calibri" pitchFamily="34" charset="-122"/>
                           <a:cs typeface="Calibri" pitchFamily="34" charset="-120"/>
                         </a:rPr>
-                        <m:t> + </m:t>
-                      </m:r>
-                      <m:r>
-                        <a:rPr lang="en-US" sz="2400" b="1" i="1" dirty="0" smtClean="0">
-                          <a:solidFill>
-                            <a:srgbClr val="FFFFFF"/>
-                          </a:solidFill>
-                          <a:latin typeface="Cambria Math" panose="02040503050406030204" pitchFamily="18" charset="0"/>
-                          <a:ea typeface="Calibri" pitchFamily="34" charset="-122"/>
-                          <a:cs typeface="Calibri" pitchFamily="34" charset="-120"/>
-                        </a:rPr>
-                        <m:t>∠</m:t>
+                        <m:t> + ∠</m:t>
                       </m:r>
                       <m:r>
                         <a:rPr lang="en-US" sz="2400" b="1" i="1" dirty="0" smtClean="0">
@@ -17765,6 +17743,7 @@
                     </m:oMath>
                   </m:oMathPara>
                 </a14:m>
+                <a:endParaRPr/>
               </a:p>
             </p:txBody>
           </p:sp>
@@ -17789,7 +17768,7 @@
               <a:blipFill>
                 <a:blip r:embed="rId3"/>
                 <a:stretch>
-                  <a:fillRect l="-2105" t="-1111" r="-5965" b="-16667"/>
+                  <a:fillRect l="-2105" r="-1930"/>
                 </a:stretch>
               </a:blipFill>
               <a:ln/>
@@ -17834,7 +17813,7 @@
               <a:buNone/>
             </a:pPr>
             <a:r>
-              <a:rPr lang="en-US" sz="1300" dirty="0">
+              <a:rPr lang="en-US" sz="1300">
                 <a:solidFill>
                   <a:srgbClr val="E8E4DD"/>
                 </a:solidFill>
@@ -17844,7 +17823,7 @@
               </a:rPr>
               <a:t>The three interior angles of any triangle always sum to exactly 180 degrees.</a:t>
             </a:r>
-            <a:endParaRPr lang="en-US" sz="1300" dirty="0"/>
+            <a:endParaRPr lang="en-US" sz="1300"/>
           </a:p>
         </p:txBody>
       </p:sp>
@@ -17934,7 +17913,7 @@
               <a:buNone/>
             </a:pPr>
             <a:r>
-              <a:rPr lang="en-US" sz="1600" b="1" dirty="0">
+              <a:rPr lang="en-US" sz="1600" b="1">
                 <a:solidFill>
                   <a:srgbClr val="1B2A4A"/>
                 </a:solidFill>
@@ -17944,7 +17923,7 @@
               </a:rPr>
               <a:t>Perimeter</a:t>
             </a:r>
-            <a:endParaRPr lang="en-US" sz="1600" dirty="0"/>
+            <a:endParaRPr lang="en-US" sz="1600"/>
           </a:p>
         </p:txBody>
       </p:sp>
@@ -18060,6 +18039,7 @@
                     </m:oMath>
                   </m:oMathPara>
                 </a14:m>
+                <a:endParaRPr/>
               </a:p>
             </p:txBody>
           </p:sp>
@@ -18084,7 +18064,7 @@
               <a:blipFill>
                 <a:blip r:embed="rId4"/>
                 <a:stretch>
-                  <a:fillRect t="-1111" b="-16667"/>
+                  <a:fillRect/>
                 </a:stretch>
               </a:blipFill>
               <a:ln/>
@@ -18129,7 +18109,7 @@
               <a:buNone/>
             </a:pPr>
             <a:r>
-              <a:rPr lang="en-US" sz="1300" dirty="0">
+              <a:rPr lang="en-US" sz="1300">
                 <a:solidFill>
                   <a:srgbClr val="3D4A5C"/>
                 </a:solidFill>
@@ -18139,7 +18119,7 @@
               </a:rPr>
               <a:t>The total distance around the triangle — sum of all three side lengths.</a:t>
             </a:r>
-            <a:endParaRPr lang="en-US" sz="1300" dirty="0"/>
+            <a:endParaRPr lang="en-US" sz="1300"/>
           </a:p>
         </p:txBody>
       </p:sp>
@@ -18229,7 +18209,7 @@
               <a:buNone/>
             </a:pPr>
             <a:r>
-              <a:rPr lang="en-US" sz="1600" b="1" dirty="0">
+              <a:rPr lang="en-US" sz="1600" b="1">
                 <a:solidFill>
                   <a:srgbClr val="1B2A4A"/>
                 </a:solidFill>
@@ -18239,7 +18219,7 @@
               </a:rPr>
               <a:t>Area of a Triangle</a:t>
             </a:r>
-            <a:endParaRPr lang="en-US" sz="1600" dirty="0"/>
+            <a:endParaRPr lang="en-US" sz="1600"/>
           </a:p>
         </p:txBody>
       </p:sp>
@@ -18311,6 +18291,7 @@
                     </m:oMath>
                   </m:oMathPara>
                 </a14:m>
+                <a:endParaRPr/>
               </a:p>
             </p:txBody>
           </p:sp>
@@ -18380,7 +18361,7 @@
               <a:buNone/>
             </a:pPr>
             <a:r>
-              <a:rPr lang="en-US" sz="1300" dirty="0">
+              <a:rPr lang="en-US" sz="1300">
                 <a:solidFill>
                   <a:srgbClr val="3D4A5C"/>
                 </a:solidFill>
@@ -18390,7 +18371,7 @@
               </a:rPr>
               <a:t>A triangle is exactly half of a parallelogram with the same base and height. The height (h) is the perpendicular distance from the base to the opposite vertex.</a:t>
             </a:r>
-            <a:endParaRPr lang="en-US" sz="1300" dirty="0"/>
+            <a:endParaRPr lang="en-US" sz="1300"/>
           </a:p>
         </p:txBody>
       </p:sp>
@@ -18479,7 +18460,7 @@
               <a:buNone/>
             </a:pPr>
             <a:r>
-              <a:rPr lang="en-US" sz="2800" b="1" dirty="0">
+              <a:rPr lang="en-US" sz="2800" b="1">
                 <a:solidFill>
                   <a:srgbClr val="1B2A4A"/>
                 </a:solidFill>
@@ -18578,7 +18559,7 @@
               <a:buNone/>
             </a:pPr>
             <a:r>
-              <a:rPr lang="en-US" sz="1600" b="1" dirty="0">
+              <a:rPr lang="en-US" sz="1600" b="1">
                 <a:solidFill>
                   <a:srgbClr val="1A7A7A"/>
                 </a:solidFill>
@@ -18592,7 +18573,7 @@
               <a:buNone/>
             </a:pPr>
             <a:r>
-              <a:rPr lang="en-US" sz="1200" dirty="0">
+              <a:rPr lang="en-US" sz="1200">
                 <a:solidFill>
                   <a:srgbClr val="FFFFFF"/>
                 </a:solidFill>
@@ -18606,7 +18587,7 @@
               <a:buNone/>
             </a:pPr>
             <a:r>
-              <a:rPr lang="en-US" sz="1600" b="1" dirty="0">
+              <a:rPr lang="en-US" sz="1600" b="1">
                 <a:solidFill>
                   <a:srgbClr val="D4A843"/>
                 </a:solidFill>
@@ -18620,7 +18601,7 @@
               <a:buNone/>
             </a:pPr>
             <a:r>
-              <a:rPr lang="en-US" sz="1200" dirty="0">
+              <a:rPr lang="en-US" sz="1200">
                 <a:solidFill>
                   <a:srgbClr val="FFFFFF"/>
                 </a:solidFill>
@@ -18634,7 +18615,7 @@
               <a:buNone/>
             </a:pPr>
             <a:r>
-              <a:rPr lang="en-US" sz="1300" dirty="0">
+              <a:rPr lang="en-US" sz="1300">
                 <a:solidFill>
                   <a:srgbClr val="3D4A5C"/>
                 </a:solidFill>
@@ -18648,7 +18629,7 @@
               <a:buNone/>
             </a:pPr>
             <a:r>
-              <a:rPr lang="en-US" sz="1600" b="1" dirty="0">
+              <a:rPr lang="en-US" sz="1600" b="1">
                 <a:solidFill>
                   <a:srgbClr val="D4A843"/>
                 </a:solidFill>
@@ -18662,7 +18643,7 @@
               <a:buNone/>
             </a:pPr>
             <a:r>
-              <a:rPr lang="en-US" sz="1200" dirty="0">
+              <a:rPr lang="en-US" sz="1200">
                 <a:solidFill>
                   <a:srgbClr val="FFFFFF"/>
                 </a:solidFill>
@@ -18676,7 +18657,7 @@
               <a:buNone/>
             </a:pPr>
             <a:r>
-              <a:rPr lang="en-US" sz="1300" dirty="0">
+              <a:rPr lang="en-US" sz="1300">
                 <a:solidFill>
                   <a:srgbClr val="3D4A5C"/>
                 </a:solidFill>
@@ -18690,7 +18671,7 @@
               <a:buNone/>
             </a:pPr>
             <a:r>
-              <a:rPr lang="en-US" sz="1600" b="1" dirty="0">
+              <a:rPr lang="en-US" sz="1600" b="1">
                 <a:solidFill>
                   <a:srgbClr val="D4A843"/>
                 </a:solidFill>
@@ -18704,7 +18685,7 @@
               <a:buNone/>
             </a:pPr>
             <a:r>
-              <a:rPr lang="en-US" sz="1200" dirty="0">
+              <a:rPr lang="en-US" sz="1200">
                 <a:solidFill>
                   <a:srgbClr val="FFFFFF"/>
                 </a:solidFill>
@@ -18718,7 +18699,7 @@
               <a:buNone/>
             </a:pPr>
             <a:r>
-              <a:rPr lang="en-US" sz="1300" dirty="0">
+              <a:rPr lang="en-US" sz="1300">
                 <a:solidFill>
                   <a:srgbClr val="3D4A5C"/>
                 </a:solidFill>
@@ -18732,7 +18713,7 @@
               <a:buNone/>
             </a:pPr>
             <a:r>
-              <a:rPr lang="en-US" sz="1300" dirty="0">
+              <a:rPr lang="en-US" sz="1300">
                 <a:solidFill>
                   <a:srgbClr val="3D4A5C"/>
                 </a:solidFill>
@@ -18746,7 +18727,7 @@
               <a:buNone/>
             </a:pPr>
             <a:r>
-              <a:rPr lang="en-US" sz="1600" b="1" dirty="0">
+              <a:rPr lang="en-US" sz="1600" b="1">
                 <a:solidFill>
                   <a:srgbClr val="1A7A7A"/>
                 </a:solidFill>
@@ -18760,7 +18741,7 @@
               <a:buNone/>
             </a:pPr>
             <a:r>
-              <a:rPr lang="en-US" sz="1200" dirty="0">
+              <a:rPr lang="en-US" sz="1200">
                 <a:solidFill>
                   <a:srgbClr val="FFFFFF"/>
                 </a:solidFill>
@@ -18863,7 +18844,7 @@
               <a:buNone/>
             </a:pPr>
             <a:r>
-              <a:rPr lang="en-US" sz="1400" b="1" dirty="0">
+              <a:rPr lang="en-US" sz="1400" b="1">
                 <a:solidFill>
                   <a:srgbClr val="D4A843"/>
                 </a:solidFill>
@@ -18877,7 +18858,7 @@
               <a:buNone/>
             </a:pPr>
             <a:r>
-              <a:rPr lang="en-US" sz="1200" dirty="0">
+              <a:rPr lang="en-US" sz="1200">
                 <a:solidFill>
                   <a:srgbClr val="FFFFFF"/>
                 </a:solidFill>
@@ -18891,7 +18872,7 @@
               <a:buNone/>
             </a:pPr>
             <a:r>
-              <a:rPr lang="en-US" sz="1300" dirty="0">
+              <a:rPr lang="en-US" sz="1300">
                 <a:solidFill>
                   <a:srgbClr val="3D4A5C"/>
                 </a:solidFill>
@@ -18905,7 +18886,7 @@
               <a:buNone/>
             </a:pPr>
             <a:r>
-              <a:rPr lang="en-US" sz="1300" dirty="0">
+              <a:rPr lang="en-US" sz="1300">
                 <a:solidFill>
                   <a:srgbClr val="3D4A5C"/>
                 </a:solidFill>
@@ -19001,7 +18982,7 @@
               <a:buNone/>
             </a:pPr>
             <a:r>
-              <a:rPr lang="en-US" sz="3200" b="1" dirty="0">
+              <a:rPr lang="en-US" sz="3200" b="1">
                 <a:solidFill>
                   <a:srgbClr val="1B2A4A"/>
                 </a:solidFill>
@@ -19011,7 +18992,7 @@
               </a:rPr>
               <a:t>Heron's Formula</a:t>
             </a:r>
-            <a:endParaRPr lang="en-US" sz="3200" dirty="0"/>
+            <a:endParaRPr lang="en-US" sz="3200"/>
           </a:p>
         </p:txBody>
       </p:sp>
@@ -19040,7 +19021,7 @@
               <a:buNone/>
             </a:pPr>
             <a:r>
-              <a:rPr lang="en-US" sz="1400" dirty="0">
+              <a:rPr lang="en-US" sz="1400">
                 <a:solidFill>
                   <a:srgbClr val="3D4A5C"/>
                 </a:solidFill>
@@ -19050,7 +19031,7 @@
               </a:rPr>
               <a:t>Use this when the height isn’t known — it only requires the three side lengths. When you know all three side lengths but not the height, use Heron’s Formula to find the area.</a:t>
             </a:r>
-            <a:endParaRPr lang="en-US" sz="1400" dirty="0"/>
+            <a:endParaRPr lang="en-US" sz="1400"/>
           </a:p>
         </p:txBody>
       </p:sp>
@@ -19106,7 +19087,7 @@
               <a:buNone/>
             </a:pPr>
             <a:r>
-              <a:rPr lang="en-US" sz="2200" b="1" dirty="0">
+              <a:rPr lang="en-US" sz="2200" b="1">
                 <a:solidFill>
                   <a:srgbClr val="4ECDC4"/>
                 </a:solidFill>
@@ -19116,7 +19097,7 @@
               </a:rPr>
               <a:t>s = (a + b + c) / 2</a:t>
             </a:r>
-            <a:endParaRPr lang="en-US" sz="2200" dirty="0"/>
+            <a:endParaRPr lang="en-US" sz="2200"/>
           </a:p>
         </p:txBody>
       </p:sp>
@@ -19145,7 +19126,7 @@
               <a:buNone/>
             </a:pPr>
             <a:r>
-              <a:rPr lang="en-US" sz="1200" dirty="0">
+              <a:rPr lang="en-US" sz="1200">
                 <a:solidFill>
                   <a:srgbClr val="E8E4DD"/>
                 </a:solidFill>
@@ -19155,7 +19136,7 @@
               </a:rPr>
               <a:t>(s = semi-perimeter = half the perimeter)</a:t>
             </a:r>
-            <a:endParaRPr lang="en-US" sz="1200" dirty="0"/>
+            <a:endParaRPr lang="en-US" sz="1200"/>
           </a:p>
         </p:txBody>
       </p:sp>
@@ -19184,7 +19165,7 @@
               <a:buNone/>
             </a:pPr>
             <a:r>
-              <a:rPr lang="en-US" sz="2600" b="1" dirty="0">
+              <a:rPr lang="en-US" sz="2600" b="1">
                 <a:solidFill>
                   <a:srgbClr val="FFFFFF"/>
                 </a:solidFill>
@@ -19194,7 +19175,7 @@
               </a:rPr>
               <a:t>A = √[ s(s − a)(s − b)(s − c) ]</a:t>
             </a:r>
-            <a:endParaRPr lang="en-US" sz="2600" dirty="0"/>
+            <a:endParaRPr lang="en-US" sz="2600"/>
           </a:p>
         </p:txBody>
       </p:sp>
@@ -19284,7 +19265,7 @@
               <a:buNone/>
             </a:pPr>
             <a:r>
-              <a:rPr lang="en-US" sz="1200" b="1" kern="0" spc="200" dirty="0">
+              <a:rPr lang="en-US" sz="1200" b="1" kern="0" spc="200">
                 <a:solidFill>
                   <a:srgbClr val="D4A843"/>
                 </a:solidFill>
@@ -19294,7 +19275,7 @@
               </a:rPr>
               <a:t>Example</a:t>
             </a:r>
-            <a:endParaRPr lang="en-US" sz="1200" dirty="0"/>
+            <a:endParaRPr lang="en-US" sz="1200"/>
           </a:p>
         </p:txBody>
       </p:sp>
@@ -19323,7 +19304,7 @@
               <a:buNone/>
             </a:pPr>
             <a:r>
-              <a:rPr lang="en-US" sz="1300" dirty="0">
+              <a:rPr lang="en-US" sz="1300">
                 <a:solidFill>
                   <a:srgbClr val="3D4A5C"/>
                 </a:solidFill>
@@ -19333,7 +19314,7 @@
               </a:rPr>
               <a:t>Triangle with sides a = 4.5 mi, b = 5.6 mi, c = 8.2 mi</a:t>
             </a:r>
-            <a:endParaRPr lang="en-US" sz="1300" dirty="0"/>
+            <a:endParaRPr lang="en-US" sz="1300"/>
           </a:p>
         </p:txBody>
       </p:sp>
@@ -19362,7 +19343,7 @@
               <a:buNone/>
             </a:pPr>
             <a:r>
-              <a:rPr lang="en-US" sz="1300" b="1" dirty="0">
+              <a:rPr lang="en-US" sz="1300" b="1">
                 <a:solidFill>
                   <a:srgbClr val="1A7A7A"/>
                 </a:solidFill>
@@ -19378,7 +19359,7 @@
               <a:buNone/>
             </a:pPr>
             <a:r>
-              <a:rPr lang="en-US" sz="1300" dirty="0">
+              <a:rPr lang="en-US" sz="1300">
                 <a:solidFill>
                   <a:srgbClr val="B0BEC5"/>
                 </a:solidFill>
@@ -19392,7 +19373,7 @@
               <a:buNone/>
             </a:pPr>
             <a:r>
-              <a:rPr lang="en-US" sz="1300" dirty="0">
+              <a:rPr lang="en-US" sz="1300">
                 <a:solidFill>
                   <a:srgbClr val="B0BEC5"/>
                 </a:solidFill>
@@ -19400,7 +19381,7 @@
               </a:rPr>
               <a:t>A = √[ 9.15 × 4.65 × 3.55 × 0.95 ] = √143.99 ≈ 11.87 mi²</a:t>
             </a:r>
-            <a:endParaRPr lang="en-US" sz="1300" dirty="0"/>
+            <a:endParaRPr lang="en-US" sz="1300"/>
           </a:p>
         </p:txBody>
       </p:sp>
@@ -19489,7 +19470,7 @@
               <a:buNone/>
             </a:pPr>
             <a:r>
-              <a:rPr lang="en-US" sz="3000" b="1" dirty="0">
+              <a:rPr lang="en-US" sz="3000" b="1">
                 <a:solidFill>
                   <a:srgbClr val="1B2A4A"/>
                 </a:solidFill>
@@ -19499,7 +19480,7 @@
               </a:rPr>
               <a:t>Equilateral Triangle Formula</a:t>
             </a:r>
-            <a:endParaRPr lang="en-US" sz="3000" dirty="0"/>
+            <a:endParaRPr lang="en-US" sz="3000"/>
           </a:p>
         </p:txBody>
       </p:sp>
@@ -19589,7 +19570,7 @@
               <a:buNone/>
             </a:pPr>
             <a:r>
-              <a:rPr lang="en-US" sz="1600" b="1" dirty="0">
+              <a:rPr lang="en-US" sz="1600" b="1">
                 <a:solidFill>
                   <a:srgbClr val="1B2A4A"/>
                 </a:solidFill>
@@ -19599,7 +19580,7 @@
               </a:rPr>
               <a:t>Deriving the Formula</a:t>
             </a:r>
-            <a:endParaRPr lang="en-US" sz="1600" dirty="0"/>
+            <a:endParaRPr lang="en-US" sz="1600"/>
           </a:p>
         </p:txBody>
       </p:sp>
@@ -19631,7 +19612,7 @@
               <a:buNone/>
             </a:pPr>
             <a:r>
-              <a:rPr lang="en-US" sz="1300" dirty="0">
+              <a:rPr lang="en-US" sz="1300">
                 <a:solidFill>
                   <a:srgbClr val="3D4A5C"/>
                 </a:solidFill>
@@ -19641,7 +19622,7 @@
               </a:rPr>
               <a:t>For an equilateral triangle with side s:</a:t>
             </a:r>
-            <a:endParaRPr lang="en-US" sz="1300" dirty="0"/>
+            <a:endParaRPr lang="en-US" sz="1300"/>
           </a:p>
           <a:p>
             <a:pPr marL="0" indent="0">
@@ -19650,7 +19631,7 @@
               </a:spcAft>
               <a:buNone/>
             </a:pPr>
-            <a:endParaRPr lang="en-US" sz="1300" dirty="0"/>
+            <a:endParaRPr lang="en-US" sz="1300"/>
           </a:p>
           <a:p>
             <a:pPr marL="0" indent="0">
@@ -19660,7 +19641,7 @@
               <a:buNone/>
             </a:pPr>
             <a:r>
-              <a:rPr lang="en-US" sz="1300" b="1" dirty="0">
+              <a:rPr lang="en-US" sz="1300" b="1">
                 <a:solidFill>
                   <a:srgbClr val="1A7A7A"/>
                 </a:solidFill>
@@ -19671,7 +19652,7 @@
               <a:t>1. </a:t>
             </a:r>
             <a:r>
-              <a:rPr lang="en-US" sz="1300" dirty="0">
+              <a:rPr lang="en-US" sz="1300">
                 <a:solidFill>
                   <a:srgbClr val="3D4A5C"/>
                 </a:solidFill>
@@ -19681,7 +19662,7 @@
               </a:rPr>
               <a:t>Split into two right triangles</a:t>
             </a:r>
-            <a:endParaRPr lang="en-US" sz="1300" dirty="0"/>
+            <a:endParaRPr lang="en-US" sz="1300"/>
           </a:p>
           <a:p>
             <a:pPr marL="0" indent="0">
@@ -19691,7 +19672,7 @@
               <a:buNone/>
             </a:pPr>
             <a:r>
-              <a:rPr lang="en-US" sz="1300" b="1" dirty="0">
+              <a:rPr lang="en-US" sz="1300" b="1">
                 <a:solidFill>
                   <a:srgbClr val="1A7A7A"/>
                 </a:solidFill>
@@ -19702,7 +19683,7 @@
               <a:t>2. </a:t>
             </a:r>
             <a:r>
-              <a:rPr lang="en-US" sz="1300" dirty="0">
+              <a:rPr lang="en-US" sz="1300">
                 <a:solidFill>
                   <a:srgbClr val="3D4A5C"/>
                 </a:solidFill>
@@ -19712,7 +19693,7 @@
               </a:rPr>
               <a:t>Base of each = s/2, hypotenuse = s</a:t>
             </a:r>
-            <a:endParaRPr lang="en-US" sz="1300" dirty="0"/>
+            <a:endParaRPr lang="en-US" sz="1300"/>
           </a:p>
           <a:p>
             <a:pPr marL="0" indent="0">
@@ -19722,7 +19703,7 @@
               <a:buNone/>
             </a:pPr>
             <a:r>
-              <a:rPr lang="en-US" sz="1300" b="1" dirty="0">
+              <a:rPr lang="en-US" sz="1300" b="1">
                 <a:solidFill>
                   <a:srgbClr val="1A7A7A"/>
                 </a:solidFill>
@@ -19733,7 +19714,7 @@
               <a:t>3. </a:t>
             </a:r>
             <a:r>
-              <a:rPr lang="en-US" sz="1300" dirty="0">
+              <a:rPr lang="en-US" sz="1300">
                 <a:solidFill>
                   <a:srgbClr val="3D4A5C"/>
                 </a:solidFill>
@@ -19743,7 +19724,7 @@
               </a:rPr>
               <a:t>Height: h² + (s/2)² = s²</a:t>
             </a:r>
-            <a:endParaRPr lang="en-US" sz="1300" dirty="0"/>
+            <a:endParaRPr lang="en-US" sz="1300"/>
           </a:p>
           <a:p>
             <a:pPr marL="0" indent="0">
@@ -19753,7 +19734,7 @@
               <a:buNone/>
             </a:pPr>
             <a:r>
-              <a:rPr lang="en-US" sz="1300" dirty="0">
+              <a:rPr lang="en-US" sz="1300">
                 <a:solidFill>
                   <a:srgbClr val="3D4A5C"/>
                 </a:solidFill>
@@ -19763,7 +19744,7 @@
               </a:rPr>
               <a:t>   h² = s² − s²/4 = 3s²/4</a:t>
             </a:r>
-            <a:endParaRPr lang="en-US" sz="1300" dirty="0"/>
+            <a:endParaRPr lang="en-US" sz="1300"/>
           </a:p>
           <a:p>
             <a:pPr marL="0" indent="0">
@@ -19773,7 +19754,7 @@
               <a:buNone/>
             </a:pPr>
             <a:r>
-              <a:rPr lang="en-US" sz="1300" b="1" dirty="0">
+              <a:rPr lang="en-US" sz="1300" b="1">
                 <a:solidFill>
                   <a:srgbClr val="1A7A7A"/>
                 </a:solidFill>
@@ -19783,7 +19764,7 @@
               </a:rPr>
               <a:t>   h = (s√3)/2</a:t>
             </a:r>
-            <a:endParaRPr lang="en-US" sz="1300" dirty="0"/>
+            <a:endParaRPr lang="en-US" sz="1300"/>
           </a:p>
           <a:p>
             <a:pPr marL="0" indent="0">
@@ -19793,7 +19774,7 @@
               <a:buNone/>
             </a:pPr>
             <a:r>
-              <a:rPr lang="en-US" sz="1300" b="1" dirty="0">
+              <a:rPr lang="en-US" sz="1300" b="1">
                 <a:solidFill>
                   <a:srgbClr val="1A7A7A"/>
                 </a:solidFill>
@@ -19804,7 +19785,7 @@
               <a:t>4. </a:t>
             </a:r>
             <a:r>
-              <a:rPr lang="en-US" sz="1300" dirty="0">
+              <a:rPr lang="en-US" sz="1300">
                 <a:solidFill>
                   <a:srgbClr val="3D4A5C"/>
                 </a:solidFill>
@@ -19814,7 +19795,7 @@
               </a:rPr>
               <a:t>A = ½ × s × (s√3)/2</a:t>
             </a:r>
-            <a:endParaRPr lang="en-US" sz="1300" dirty="0"/>
+            <a:endParaRPr lang="en-US" sz="1300"/>
           </a:p>
         </p:txBody>
       </p:sp>
@@ -19870,7 +19851,7 @@
               <a:buNone/>
             </a:pPr>
             <a:r>
-              <a:rPr lang="en-US" sz="1200" kern="0" spc="300" dirty="0">
+              <a:rPr lang="en-US" sz="1200" kern="0" spc="300">
                 <a:solidFill>
                   <a:srgbClr val="4ECDC4"/>
                 </a:solidFill>
@@ -19880,7 +19861,7 @@
               </a:rPr>
               <a:t>Formula</a:t>
             </a:r>
-            <a:endParaRPr lang="en-US" sz="1200" dirty="0"/>
+            <a:endParaRPr lang="en-US" sz="1200"/>
           </a:p>
         </p:txBody>
       </p:sp>
@@ -20030,6 +20011,7 @@
                     </m:oMath>
                   </m:oMathPara>
                 </a14:m>
+                <a:endParaRPr/>
               </a:p>
             </p:txBody>
           </p:sp>
@@ -20099,7 +20081,7 @@
               <a:buNone/>
             </a:pPr>
             <a:r>
-              <a:rPr lang="en-US" sz="1600" dirty="0">
+              <a:rPr lang="en-US" sz="1600">
                 <a:solidFill>
                   <a:srgbClr val="4ECDC4"/>
                 </a:solidFill>
@@ -20109,7 +20091,7 @@
               </a:rPr>
               <a:t>Height: h = (s√3) / 2</a:t>
             </a:r>
-            <a:endParaRPr lang="en-US" sz="1600" dirty="0"/>
+            <a:endParaRPr lang="en-US" sz="1600"/>
           </a:p>
         </p:txBody>
       </p:sp>
@@ -20199,7 +20181,7 @@
               <a:buNone/>
             </a:pPr>
             <a:r>
-              <a:rPr lang="en-US" sz="1200" dirty="0">
+              <a:rPr lang="en-US" sz="1200">
                 <a:solidFill>
                   <a:srgbClr val="3D4A5C"/>
                 </a:solidFill>
@@ -20209,7 +20191,7 @@
               </a:rPr>
               <a:t>Example: s = 4.4 in</a:t>
             </a:r>
-            <a:endParaRPr lang="en-US" sz="1200" dirty="0"/>
+            <a:endParaRPr lang="en-US" sz="1200"/>
           </a:p>
         </p:txBody>
       </p:sp>
@@ -20238,7 +20220,7 @@
               <a:buNone/>
             </a:pPr>
             <a:r>
-              <a:rPr lang="en-US" sz="1600" b="1" dirty="0">
+              <a:rPr lang="en-US" sz="1600" b="1">
                 <a:solidFill>
                   <a:srgbClr val="D4A843"/>
                 </a:solidFill>
@@ -20248,7 +20230,7 @@
               </a:rPr>
               <a:t>A = (4.4²√3)/4 ≈ 8.39 in²</a:t>
             </a:r>
-            <a:endParaRPr lang="en-US" sz="1600" dirty="0"/>
+            <a:endParaRPr lang="en-US" sz="1600"/>
           </a:p>
         </p:txBody>
       </p:sp>
@@ -20337,7 +20319,7 @@
               <a:buNone/>
             </a:pPr>
             <a:r>
-              <a:rPr lang="en-US" sz="1900" b="1" dirty="0">
+              <a:rPr lang="en-US" sz="1900" b="1">
                 <a:solidFill>
                   <a:srgbClr val="1B2A4A"/>
                 </a:solidFill>
@@ -20489,7 +20471,7 @@
               <a:buNone/>
             </a:pPr>
             <a:r>
-              <a:rPr lang="en-US" sz="1500" b="1" dirty="0">
+              <a:rPr lang="en-US" sz="1500" b="1">
                 <a:solidFill>
                   <a:srgbClr val="1A7A7A"/>
                 </a:solidFill>
@@ -20503,7 +20485,7 @@
               <a:buNone/>
             </a:pPr>
             <a:r>
-              <a:rPr lang="en-US" sz="1200" dirty="0">
+              <a:rPr lang="en-US" sz="1200">
                 <a:solidFill>
                   <a:srgbClr val="FFFFFF"/>
                 </a:solidFill>
@@ -20517,7 +20499,7 @@
               <a:buNone/>
             </a:pPr>
             <a:r>
-              <a:rPr lang="en-US" sz="1300" dirty="0">
+              <a:rPr lang="en-US" sz="1300">
                 <a:solidFill>
                   <a:srgbClr val="3D4A5C"/>
                 </a:solidFill>
@@ -20531,7 +20513,7 @@
               <a:buNone/>
             </a:pPr>
             <a:r>
-              <a:rPr lang="en-US" sz="1200" dirty="0">
+              <a:rPr lang="en-US" sz="1200">
                 <a:solidFill>
                   <a:srgbClr val="FFFFFF"/>
                 </a:solidFill>
@@ -20545,7 +20527,7 @@
               <a:buNone/>
             </a:pPr>
             <a:r>
-              <a:rPr lang="en-US" sz="1300" b="1" dirty="0">
+              <a:rPr lang="en-US" sz="1300" b="1">
                 <a:solidFill>
                   <a:srgbClr val="3D4A5C"/>
                 </a:solidFill>
@@ -20559,7 +20541,7 @@
               <a:buNone/>
             </a:pPr>
             <a:r>
-              <a:rPr lang="en-US" sz="1200" dirty="0">
+              <a:rPr lang="en-US" sz="1200">
                 <a:solidFill>
                   <a:srgbClr val="FFFFFF"/>
                 </a:solidFill>
@@ -20573,7 +20555,7 @@
               <a:buNone/>
             </a:pPr>
             <a:r>
-              <a:rPr lang="en-US" sz="1500" b="1" dirty="0">
+              <a:rPr lang="en-US" sz="1500" b="1">
                 <a:solidFill>
                   <a:srgbClr val="D4A843"/>
                 </a:solidFill>
@@ -20587,7 +20569,7 @@
               <a:buNone/>
             </a:pPr>
             <a:r>
-              <a:rPr lang="en-US" sz="1200" dirty="0">
+              <a:rPr lang="en-US" sz="1200">
                 <a:solidFill>
                   <a:srgbClr val="FFFFFF"/>
                 </a:solidFill>
@@ -20601,7 +20583,7 @@
               <a:buNone/>
             </a:pPr>
             <a:r>
-              <a:rPr lang="en-US" sz="1200" b="1" dirty="0">
+              <a:rPr lang="en-US" sz="1200" b="1">
                 <a:solidFill>
                   <a:srgbClr val="1A7A7A"/>
                 </a:solidFill>
@@ -20615,7 +20597,7 @@
               <a:buNone/>
             </a:pPr>
             <a:r>
-              <a:rPr lang="en-US" sz="1200" dirty="0">
+              <a:rPr lang="en-US" sz="1200">
                 <a:solidFill>
                   <a:srgbClr val="3D4A5C"/>
                 </a:solidFill>
@@ -20711,7 +20693,7 @@
               <a:buNone/>
             </a:pPr>
             <a:r>
-              <a:rPr lang="en-US" sz="3200" b="1" dirty="0">
+              <a:rPr lang="en-US" sz="3200" b="1">
                 <a:solidFill>
                   <a:srgbClr val="1B2A4A"/>
                 </a:solidFill>
@@ -20721,7 +20703,7 @@
               </a:rPr>
               <a:t>The Pythagorean Theorem</a:t>
             </a:r>
-            <a:endParaRPr lang="en-US" sz="3200" dirty="0"/>
+            <a:endParaRPr lang="en-US" sz="3200"/>
           </a:p>
         </p:txBody>
       </p:sp>
@@ -20853,6 +20835,7 @@
                     </m:oMath>
                   </m:oMathPara>
                 </a14:m>
+                <a:endParaRPr/>
               </a:p>
             </p:txBody>
           </p:sp>
@@ -20922,7 +20905,7 @@
               <a:buNone/>
             </a:pPr>
             <a:r>
-              <a:rPr lang="en-US" sz="1300" dirty="0">
+              <a:rPr lang="en-US" sz="1300">
                 <a:solidFill>
                   <a:srgbClr val="E8E4DD"/>
                 </a:solidFill>
@@ -20932,7 +20915,7 @@
               </a:rPr>
               <a:t>For a right triangle: the square of the hypotenuse equals the sum of the squares of the two legs.</a:t>
             </a:r>
-            <a:endParaRPr lang="en-US" sz="1300" dirty="0"/>
+            <a:endParaRPr lang="en-US" sz="1300"/>
           </a:p>
         </p:txBody>
       </p:sp>
@@ -21022,7 +21005,7 @@
               <a:buNone/>
             </a:pPr>
             <a:r>
-              <a:rPr lang="en-US" sz="1300" b="1" dirty="0">
+              <a:rPr lang="en-US" sz="1300" b="1">
                 <a:solidFill>
                   <a:srgbClr val="1A7A7A"/>
                 </a:solidFill>
@@ -21032,14 +21015,14 @@
               </a:rPr>
               <a:t>c = hypotenuse </a:t>
             </a:r>
-            <a:endParaRPr lang="en-US" sz="1300" dirty="0"/>
-          </a:p>
-          <a:p>
-            <a:pPr marL="0" indent="0">
-              <a:buNone/>
-            </a:pPr>
-            <a:r>
-              <a:rPr lang="en-US" sz="1300" dirty="0">
+            <a:endParaRPr lang="en-US" sz="1300"/>
+          </a:p>
+          <a:p>
+            <a:pPr marL="0" indent="0">
+              <a:buNone/>
+            </a:pPr>
+            <a:r>
+              <a:rPr lang="en-US" sz="1300">
                 <a:solidFill>
                   <a:srgbClr val="3D4A5C"/>
                 </a:solidFill>
@@ -21049,14 +21032,14 @@
               </a:rPr>
               <a:t>(longest side, opposite the right angle)</a:t>
             </a:r>
-            <a:endParaRPr lang="en-US" sz="1300" dirty="0"/>
-          </a:p>
-          <a:p>
-            <a:pPr marL="0" indent="0">
-              <a:buNone/>
-            </a:pPr>
-            <a:r>
-              <a:rPr lang="en-US" sz="1300" b="1" dirty="0">
+            <a:endParaRPr lang="en-US" sz="1300"/>
+          </a:p>
+          <a:p>
+            <a:pPr marL="0" indent="0">
+              <a:buNone/>
+            </a:pPr>
+            <a:r>
+              <a:rPr lang="en-US" sz="1300" b="1">
                 <a:solidFill>
                   <a:srgbClr val="1A7A7A"/>
                 </a:solidFill>
@@ -21067,7 +21050,7 @@
               <a:t>a, b = legs </a:t>
             </a:r>
             <a:r>
-              <a:rPr lang="en-US" sz="1300" dirty="0">
+              <a:rPr lang="en-US" sz="1300">
                 <a:solidFill>
                   <a:srgbClr val="3D4A5C"/>
                 </a:solidFill>
@@ -21077,7 +21060,7 @@
               </a:rPr>
               <a:t>(the two shorter sides)</a:t>
             </a:r>
-            <a:endParaRPr lang="en-US" sz="1300" dirty="0"/>
+            <a:endParaRPr lang="en-US" sz="1300"/>
           </a:p>
         </p:txBody>
       </p:sp>
@@ -21167,7 +21150,7 @@
               <a:buNone/>
             </a:pPr>
             <a:r>
-              <a:rPr lang="en-US" sz="1200" b="1" dirty="0">
+              <a:rPr lang="en-US" sz="1200" b="1">
                 <a:solidFill>
                   <a:srgbClr val="D4A843"/>
                 </a:solidFill>
@@ -21177,7 +21160,7 @@
               </a:rPr>
               <a:t>Checking Right Angles</a:t>
             </a:r>
-            <a:endParaRPr lang="en-US" sz="1200" dirty="0"/>
+            <a:endParaRPr lang="en-US" sz="1200"/>
           </a:p>
         </p:txBody>
       </p:sp>
@@ -21206,7 +21189,7 @@
               <a:buNone/>
             </a:pPr>
             <a:r>
-              <a:rPr lang="en-US" sz="1300" dirty="0">
+              <a:rPr lang="en-US" sz="1300">
                 <a:solidFill>
                   <a:srgbClr val="3D4A5C"/>
                 </a:solidFill>
@@ -21216,14 +21199,14 @@
               </a:rPr>
               <a:t>If a² + b² = c²  →  right angle (opposite c)</a:t>
             </a:r>
-            <a:endParaRPr lang="en-US" sz="1300" dirty="0"/>
-          </a:p>
-          <a:p>
-            <a:pPr marL="0" indent="0">
-              <a:buNone/>
-            </a:pPr>
-            <a:r>
-              <a:rPr lang="en-US" sz="1300" dirty="0">
+            <a:endParaRPr lang="en-US" sz="1300"/>
+          </a:p>
+          <a:p>
+            <a:pPr marL="0" indent="0">
+              <a:buNone/>
+            </a:pPr>
+            <a:r>
+              <a:rPr lang="en-US" sz="1300">
                 <a:solidFill>
                   <a:srgbClr val="3D4A5C"/>
                 </a:solidFill>
@@ -21233,14 +21216,14 @@
               </a:rPr>
               <a:t>If a² + b² &gt; c²  →  angle opposite c is acute (triangle is acute)</a:t>
             </a:r>
-            <a:endParaRPr lang="en-US" sz="1300" dirty="0"/>
-          </a:p>
-          <a:p>
-            <a:pPr marL="0" indent="0">
-              <a:buNone/>
-            </a:pPr>
-            <a:r>
-              <a:rPr lang="en-US" sz="1300" dirty="0">
+            <a:endParaRPr lang="en-US" sz="1300"/>
+          </a:p>
+          <a:p>
+            <a:pPr marL="0" indent="0">
+              <a:buNone/>
+            </a:pPr>
+            <a:r>
+              <a:rPr lang="en-US" sz="1300">
                 <a:solidFill>
                   <a:srgbClr val="3D4A5C"/>
                 </a:solidFill>
@@ -21250,7 +21233,7 @@
               </a:rPr>
               <a:t>If a² + b² &lt; c²  →  angle opposite c is obtuse (triangle is obtuse)</a:t>
             </a:r>
-            <a:endParaRPr lang="en-US" sz="1300" dirty="0"/>
+            <a:endParaRPr lang="en-US" sz="1300"/>
           </a:p>
         </p:txBody>
       </p:sp>
@@ -21333,7 +21316,7 @@
               <a:buNone/>
             </a:pPr>
             <a:r>
-              <a:rPr lang="en-US" sz="1200" b="1" dirty="0">
+              <a:rPr lang="en-US" sz="1200" b="1">
                 <a:solidFill>
                   <a:srgbClr val="1B2A4A"/>
                 </a:solidFill>
@@ -21344,7 +21327,7 @@
               <a:t>Example: </a:t>
             </a:r>
             <a:r>
-              <a:rPr lang="en-US" sz="1200" dirty="0">
+              <a:rPr lang="en-US" sz="1200">
                 <a:solidFill>
                   <a:srgbClr val="3D4A5C"/>
                 </a:solidFill>
@@ -21354,7 +21337,7 @@
               </a:rPr>
               <a:t>Box is 13 × 10 in with diagonal 16.75 in. Is it square?  13² + 10² = 269, but 16.75² = 280.5625. Since 269 &lt; 280.56, the angles are obtuse — not right angles.</a:t>
             </a:r>
-            <a:endParaRPr lang="en-US" sz="1200" dirty="0"/>
+            <a:endParaRPr lang="en-US" sz="1200"/>
           </a:p>
         </p:txBody>
       </p:sp>
@@ -21443,7 +21426,7 @@
               <a:buNone/>
             </a:pPr>
             <a:r>
-              <a:rPr lang="en-US" sz="1900" b="1" dirty="0">
+              <a:rPr lang="en-US" sz="1900" b="1">
                 <a:solidFill>
                   <a:srgbClr val="1B2A4A"/>
                 </a:solidFill>
@@ -21595,7 +21578,7 @@
               <a:buNone/>
             </a:pPr>
             <a:r>
-              <a:rPr lang="en-US" sz="1500" b="1" dirty="0">
+              <a:rPr lang="en-US" sz="1500" b="1">
                 <a:solidFill>
                   <a:srgbClr val="1A7A7A"/>
                 </a:solidFill>
@@ -21609,7 +21592,7 @@
               <a:buNone/>
             </a:pPr>
             <a:r>
-              <a:rPr lang="en-US" sz="1200" dirty="0">
+              <a:rPr lang="en-US" sz="1200">
                 <a:solidFill>
                   <a:srgbClr val="FFFFFF"/>
                 </a:solidFill>
@@ -21623,7 +21606,7 @@
               <a:buNone/>
             </a:pPr>
             <a:r>
-              <a:rPr lang="en-US" sz="1300" dirty="0">
+              <a:rPr lang="en-US" sz="1300">
                 <a:solidFill>
                   <a:srgbClr val="3D4A5C"/>
                 </a:solidFill>
@@ -21637,7 +21620,7 @@
               <a:buNone/>
             </a:pPr>
             <a:r>
-              <a:rPr lang="en-US" sz="1200" dirty="0">
+              <a:rPr lang="en-US" sz="1200">
                 <a:solidFill>
                   <a:srgbClr val="FFFFFF"/>
                 </a:solidFill>
@@ -21651,7 +21634,7 @@
               <a:buNone/>
             </a:pPr>
             <a:r>
-              <a:rPr lang="en-US" sz="1400" b="1" dirty="0">
+              <a:rPr lang="en-US" sz="1400" b="1">
                 <a:solidFill>
                   <a:srgbClr val="1B2A4A"/>
                 </a:solidFill>
@@ -21665,7 +21648,7 @@
               <a:buNone/>
             </a:pPr>
             <a:r>
-              <a:rPr lang="en-US" sz="1300" dirty="0">
+              <a:rPr lang="en-US" sz="1300">
                 <a:solidFill>
                   <a:srgbClr val="5C6B7A"/>
                 </a:solidFill>
@@ -21679,7 +21662,7 @@
               <a:buNone/>
             </a:pPr>
             <a:r>
-              <a:rPr lang="en-US" sz="1900" b="1" dirty="0">
+              <a:rPr lang="en-US" sz="1900" b="1">
                 <a:solidFill>
                   <a:srgbClr val="D4A843"/>
                 </a:solidFill>
@@ -21775,7 +21758,7 @@
               <a:buNone/>
             </a:pPr>
             <a:r>
-              <a:rPr lang="en-US" sz="3200" b="1" dirty="0">
+              <a:rPr lang="en-US" sz="3200" b="1">
                 <a:solidFill>
                   <a:srgbClr val="1B2A4A"/>
                 </a:solidFill>
@@ -21872,7 +21855,7 @@
               <a:buNone/>
             </a:pPr>
             <a:r>
-              <a:rPr lang="en-US" sz="1500" b="1" dirty="0">
+              <a:rPr lang="en-US" sz="1500" b="1">
                 <a:solidFill>
                   <a:srgbClr val="D4A843"/>
                 </a:solidFill>
@@ -21886,7 +21869,7 @@
               <a:buNone/>
             </a:pPr>
             <a:r>
-              <a:rPr lang="en-US" sz="1200" dirty="0">
+              <a:rPr lang="en-US" sz="1200">
                 <a:solidFill>
                   <a:srgbClr val="FFFFFF"/>
                 </a:solidFill>
@@ -21900,7 +21883,7 @@
               <a:buNone/>
             </a:pPr>
             <a:r>
-              <a:rPr lang="en-US" sz="1400" dirty="0">
+              <a:rPr lang="en-US" sz="1400">
                 <a:solidFill>
                   <a:srgbClr val="3D4A5C"/>
                 </a:solidFill>
@@ -21909,7 +21892,7 @@
               <a:t>The correct theorem (a² + b² = c²) is </a:t>
             </a:r>
             <a:r>
-              <a:rPr lang="en-US" sz="1400" b="1" dirty="0">
+              <a:rPr lang="en-US" sz="1400" b="1">
                 <a:solidFill>
                   <a:srgbClr val="3D4A5C"/>
                 </a:solidFill>
@@ -21918,7 +21901,7 @@
               <a:t>NOT</a:t>
             </a:r>
             <a:r>
-              <a:rPr lang="en-US" sz="1400" dirty="0">
+              <a:rPr lang="en-US" sz="1400">
                 <a:solidFill>
                   <a:srgbClr val="3D4A5C"/>
                 </a:solidFill>
@@ -21927,7 +21910,7 @@
               <a:t> the Scarecrow’s “theorem” from </a:t>
             </a:r>
             <a:r>
-              <a:rPr lang="en-US" sz="1400" i="1" dirty="0">
+              <a:rPr lang="en-US" sz="1400" i="1">
                 <a:solidFill>
                   <a:srgbClr val="3D4A5C"/>
                 </a:solidFill>
@@ -21936,7 +21919,7 @@
               <a:t>The Wizard of Oz</a:t>
             </a:r>
             <a:r>
-              <a:rPr lang="en-US" sz="1400" dirty="0">
+              <a:rPr lang="en-US" sz="1400">
                 <a:solidFill>
                   <a:srgbClr val="3D4A5C"/>
                 </a:solidFill>
@@ -21950,7 +21933,7 @@
               <a:buNone/>
             </a:pPr>
             <a:r>
-              <a:rPr lang="en-US" sz="1200" dirty="0">
+              <a:rPr lang="en-US" sz="1200">
                 <a:solidFill>
                   <a:srgbClr val="FFFFFF"/>
                 </a:solidFill>
@@ -21964,7 +21947,7 @@
               <a:buNone/>
             </a:pPr>
             <a:r>
-              <a:rPr lang="en-US" sz="1400" i="1" dirty="0">
+              <a:rPr lang="en-US" sz="1400" i="1">
                 <a:solidFill>
                   <a:srgbClr val="1A7A7A"/>
                 </a:solidFill>
@@ -21978,7 +21961,7 @@
               <a:buNone/>
             </a:pPr>
             <a:r>
-              <a:rPr lang="en-US" sz="1200" dirty="0">
+              <a:rPr lang="en-US" sz="1200">
                 <a:solidFill>
                   <a:srgbClr val="FFFFFF"/>
                 </a:solidFill>
@@ -21992,7 +21975,7 @@
               <a:buNone/>
             </a:pPr>
             <a:r>
-              <a:rPr lang="en-US" sz="1500" b="1" dirty="0">
+              <a:rPr lang="en-US" sz="1500" b="1">
                 <a:solidFill>
                   <a:srgbClr val="1A7A7A"/>
                 </a:solidFill>
@@ -22006,7 +21989,7 @@
               <a:buNone/>
             </a:pPr>
             <a:r>
-              <a:rPr lang="en-US" sz="1400" dirty="0">
+              <a:rPr lang="en-US" sz="1400">
                 <a:solidFill>
                   <a:srgbClr val="3D4A5C"/>
                 </a:solidFill>
@@ -22020,7 +22003,7 @@
               <a:buNone/>
             </a:pPr>
             <a:r>
-              <a:rPr lang="en-US" sz="1400" dirty="0">
+              <a:rPr lang="en-US" sz="1400">
                 <a:solidFill>
                   <a:srgbClr val="3D4A5C"/>
                 </a:solidFill>
@@ -22029,7 +22012,7 @@
               <a:t>1.732... + 1.732... = 1 ???  </a:t>
             </a:r>
             <a:r>
-              <a:rPr lang="en-US" sz="1400" b="1" dirty="0">
+              <a:rPr lang="en-US" sz="1400" b="1">
                 <a:solidFill>
                   <a:srgbClr val="B85042"/>
                 </a:solidFill>
@@ -22043,7 +22026,7 @@
               <a:buNone/>
             </a:pPr>
             <a:r>
-              <a:rPr lang="en-US" sz="1200" dirty="0">
+              <a:rPr lang="en-US" sz="1200">
                 <a:solidFill>
                   <a:srgbClr val="FFFFFF"/>
                 </a:solidFill>
@@ -22057,7 +22040,7 @@
               <a:buNone/>
             </a:pPr>
             <a:r>
-              <a:rPr lang="en-US" sz="1300" i="1" dirty="0">
+              <a:rPr lang="en-US" sz="1300" i="1">
                 <a:solidFill>
                   <a:srgbClr val="3D4A5C"/>
                 </a:solidFill>
@@ -22153,7 +22136,7 @@
               <a:buNone/>
             </a:pPr>
             <a:r>
-              <a:rPr lang="en-US" sz="1400" b="1" dirty="0">
+              <a:rPr lang="en-US" sz="1400" b="1">
                 <a:solidFill>
                   <a:srgbClr val="B8922F"/>
                 </a:solidFill>
@@ -22167,7 +22150,7 @@
               <a:buNone/>
             </a:pPr>
             <a:r>
-              <a:rPr lang="en-US" sz="1200" dirty="0">
+              <a:rPr lang="en-US" sz="1200">
                 <a:solidFill>
                   <a:srgbClr val="FFFFFF"/>
                 </a:solidFill>
@@ -22181,7 +22164,7 @@
               <a:buNone/>
             </a:pPr>
             <a:r>
-              <a:rPr lang="en-US" sz="1300" dirty="0">
+              <a:rPr lang="en-US" sz="1300">
                 <a:solidFill>
                   <a:srgbClr val="3D4A5C"/>
                 </a:solidFill>
@@ -22195,7 +22178,7 @@
               <a:buNone/>
             </a:pPr>
             <a:r>
-              <a:rPr lang="en-US" sz="1300" dirty="0">
+              <a:rPr lang="en-US" sz="1300">
                 <a:solidFill>
                   <a:srgbClr val="3D4A5C"/>
                 </a:solidFill>
@@ -22291,7 +22274,7 @@
               <a:buNone/>
             </a:pPr>
             <a:r>
-              <a:rPr lang="en-US" sz="1400" kern="0" spc="600" dirty="0">
+              <a:rPr lang="en-US" sz="1400" kern="0" spc="600">
                 <a:solidFill>
                   <a:srgbClr val="4ECDC4"/>
                 </a:solidFill>
@@ -22301,7 +22284,7 @@
               </a:rPr>
               <a:t>SECTION 1</a:t>
             </a:r>
-            <a:endParaRPr lang="en-US" sz="1400" dirty="0"/>
+            <a:endParaRPr lang="en-US" sz="1400"/>
           </a:p>
         </p:txBody>
       </p:sp>
@@ -22330,7 +22313,7 @@
               <a:buNone/>
             </a:pPr>
             <a:r>
-              <a:rPr lang="en-US" sz="4000" b="1" dirty="0">
+              <a:rPr lang="en-US" sz="4000" b="1">
                 <a:solidFill>
                   <a:srgbClr val="FFFFFF"/>
                 </a:solidFill>
@@ -22340,14 +22323,14 @@
               </a:rPr>
               <a:t>Foundations:</a:t>
             </a:r>
-            <a:endParaRPr lang="en-US" sz="4000" dirty="0"/>
-          </a:p>
-          <a:p>
-            <a:pPr marL="0" indent="0">
-              <a:buNone/>
-            </a:pPr>
-            <a:r>
-              <a:rPr lang="en-US" sz="4000" b="1" dirty="0">
+            <a:endParaRPr lang="en-US" sz="4000"/>
+          </a:p>
+          <a:p>
+            <a:pPr marL="0" indent="0">
+              <a:buNone/>
+            </a:pPr>
+            <a:r>
+              <a:rPr lang="en-US" sz="4000" b="1">
                 <a:solidFill>
                   <a:srgbClr val="FFFFFF"/>
                 </a:solidFill>
@@ -22357,7 +22340,7 @@
               </a:rPr>
               <a:t>Points, Lines &amp; Angles</a:t>
             </a:r>
-            <a:endParaRPr lang="en-US" sz="4000" dirty="0"/>
+            <a:endParaRPr lang="en-US" sz="4000"/>
           </a:p>
         </p:txBody>
       </p:sp>
@@ -22416,7 +22399,7 @@
               <a:buNone/>
             </a:pPr>
             <a:r>
-              <a:rPr lang="en-US" sz="1400" i="1" dirty="0">
+              <a:rPr lang="en-US" sz="1400" i="1">
                 <a:solidFill>
                   <a:srgbClr val="D4C5A0"/>
                 </a:solidFill>
@@ -22512,7 +22495,7 @@
               <a:buNone/>
             </a:pPr>
             <a:r>
-              <a:rPr lang="en-US" sz="2800" b="1" dirty="0">
+              <a:rPr lang="en-US" sz="2800" b="1">
                 <a:solidFill>
                   <a:srgbClr val="1B2A4A"/>
                 </a:solidFill>
@@ -22611,7 +22594,7 @@
               <a:buNone/>
             </a:pPr>
             <a:r>
-              <a:rPr lang="en-US" sz="1600" b="1" dirty="0">
+              <a:rPr lang="en-US" sz="1600" b="1">
                 <a:solidFill>
                   <a:srgbClr val="D4A843"/>
                 </a:solidFill>
@@ -22625,7 +22608,7 @@
               <a:buNone/>
             </a:pPr>
             <a:r>
-              <a:rPr lang="en-US" sz="1200" dirty="0">
+              <a:rPr lang="en-US" sz="1200">
                 <a:solidFill>
                   <a:srgbClr val="FFFFFF"/>
                 </a:solidFill>
@@ -22639,7 +22622,7 @@
               <a:buNone/>
             </a:pPr>
             <a:r>
-              <a:rPr lang="en-US" sz="1600" b="1" dirty="0">
+              <a:rPr lang="en-US" sz="1600" b="1">
                 <a:solidFill>
                   <a:srgbClr val="1A7A7A"/>
                 </a:solidFill>
@@ -22653,7 +22636,7 @@
               <a:buNone/>
             </a:pPr>
             <a:r>
-              <a:rPr lang="en-US" sz="1200" dirty="0">
+              <a:rPr lang="en-US" sz="1200">
                 <a:solidFill>
                   <a:srgbClr val="FFFFFF"/>
                 </a:solidFill>
@@ -22667,7 +22650,7 @@
               <a:buNone/>
             </a:pPr>
             <a:r>
-              <a:rPr lang="en-US" sz="1300" dirty="0">
+              <a:rPr lang="en-US" sz="1300">
                 <a:solidFill>
                   <a:srgbClr val="3D4A5C"/>
                 </a:solidFill>
@@ -22681,7 +22664,7 @@
               <a:buNone/>
             </a:pPr>
             <a:r>
-              <a:rPr lang="en-US" sz="1600" b="1" dirty="0">
+              <a:rPr lang="en-US" sz="1600" b="1">
                 <a:solidFill>
                   <a:srgbClr val="1A7A7A"/>
                 </a:solidFill>
@@ -22695,7 +22678,7 @@
               <a:buNone/>
             </a:pPr>
             <a:r>
-              <a:rPr lang="en-US" sz="1200" dirty="0">
+              <a:rPr lang="en-US" sz="1200">
                 <a:solidFill>
                   <a:srgbClr val="FFFFFF"/>
                 </a:solidFill>
@@ -22709,7 +22692,7 @@
               <a:buNone/>
             </a:pPr>
             <a:r>
-              <a:rPr lang="en-US" sz="1300" dirty="0">
+              <a:rPr lang="en-US" sz="1300">
                 <a:solidFill>
                   <a:srgbClr val="3D4A5C"/>
                 </a:solidFill>
@@ -22723,7 +22706,7 @@
               <a:buNone/>
             </a:pPr>
             <a:r>
-              <a:rPr lang="en-US" sz="1600" b="1" dirty="0">
+              <a:rPr lang="en-US" sz="1600" b="1">
                 <a:solidFill>
                   <a:srgbClr val="1A7A7A"/>
                 </a:solidFill>
@@ -22737,7 +22720,7 @@
               <a:buNone/>
             </a:pPr>
             <a:r>
-              <a:rPr lang="en-US" sz="1200" dirty="0">
+              <a:rPr lang="en-US" sz="1200">
                 <a:solidFill>
                   <a:srgbClr val="FFFFFF"/>
                 </a:solidFill>
@@ -22751,7 +22734,7 @@
               <a:buNone/>
             </a:pPr>
             <a:r>
-              <a:rPr lang="en-US" sz="1300" dirty="0">
+              <a:rPr lang="en-US" sz="1300">
                 <a:solidFill>
                   <a:srgbClr val="3D4A5C"/>
                 </a:solidFill>
@@ -22765,7 +22748,7 @@
               <a:buNone/>
             </a:pPr>
             <a:r>
-              <a:rPr lang="en-US" sz="1600" b="1" dirty="0">
+              <a:rPr lang="en-US" sz="1600" b="1">
                 <a:solidFill>
                   <a:srgbClr val="1A7A7A"/>
                 </a:solidFill>
@@ -22779,7 +22762,7 @@
               <a:buNone/>
             </a:pPr>
             <a:r>
-              <a:rPr lang="en-US" sz="1200" dirty="0">
+              <a:rPr lang="en-US" sz="1200">
                 <a:solidFill>
                   <a:srgbClr val="FFFFFF"/>
                 </a:solidFill>
@@ -22793,7 +22776,7 @@
               <a:buNone/>
             </a:pPr>
             <a:r>
-              <a:rPr lang="en-US" sz="1300" dirty="0">
+              <a:rPr lang="en-US" sz="1300">
                 <a:solidFill>
                   <a:srgbClr val="3D4A5C"/>
                 </a:solidFill>
@@ -22889,7 +22872,7 @@
               <a:buNone/>
             </a:pPr>
             <a:r>
-              <a:rPr lang="en-US" sz="1400" kern="0" spc="600" dirty="0">
+              <a:rPr lang="en-US" sz="1400" kern="0" spc="600">
                 <a:solidFill>
                   <a:srgbClr val="4ECDC4"/>
                 </a:solidFill>
@@ -22899,7 +22882,7 @@
               </a:rPr>
               <a:t>SECTION 4</a:t>
             </a:r>
-            <a:endParaRPr lang="en-US" sz="1400" dirty="0"/>
+            <a:endParaRPr lang="en-US" sz="1400"/>
           </a:p>
         </p:txBody>
       </p:sp>
@@ -22928,7 +22911,7 @@
               <a:buNone/>
             </a:pPr>
             <a:r>
-              <a:rPr lang="en-US" sz="4400" b="1" dirty="0">
+              <a:rPr lang="en-US" sz="4400" b="1">
                 <a:solidFill>
                   <a:srgbClr val="FFFFFF"/>
                 </a:solidFill>
@@ -22938,7 +22921,7 @@
               </a:rPr>
               <a:t>Similar Polygons</a:t>
             </a:r>
-            <a:endParaRPr lang="en-US" sz="4400" dirty="0"/>
+            <a:endParaRPr lang="en-US" sz="4400"/>
           </a:p>
         </p:txBody>
       </p:sp>
@@ -22997,7 +22980,7 @@
               <a:buNone/>
             </a:pPr>
             <a:r>
-              <a:rPr lang="en-US" sz="1400" i="1" dirty="0">
+              <a:rPr lang="en-US" sz="1400" i="1">
                 <a:solidFill>
                   <a:srgbClr val="D4C5A0"/>
                 </a:solidFill>
@@ -23093,7 +23076,7 @@
               <a:buNone/>
             </a:pPr>
             <a:r>
-              <a:rPr lang="en-US" sz="3200" b="1" dirty="0">
+              <a:rPr lang="en-US" sz="3200" b="1">
                 <a:solidFill>
                   <a:srgbClr val="1B2A4A"/>
                 </a:solidFill>
@@ -23103,7 +23086,7 @@
               </a:rPr>
               <a:t>Similar Triangles</a:t>
             </a:r>
-            <a:endParaRPr lang="en-US" sz="3200" dirty="0"/>
+            <a:endParaRPr lang="en-US" sz="3200"/>
           </a:p>
         </p:txBody>
       </p:sp>
@@ -23132,7 +23115,7 @@
               <a:buNone/>
             </a:pPr>
             <a:r>
-              <a:rPr lang="en-US" sz="1400" dirty="0">
+              <a:rPr lang="en-US" sz="1400">
                 <a:solidFill>
                   <a:srgbClr val="3D4A5C"/>
                 </a:solidFill>
@@ -23142,7 +23125,7 @@
               </a:rPr>
               <a:t>Two polygons are similar if they have the same shape (but not necessarily the same size).</a:t>
             </a:r>
-            <a:endParaRPr lang="en-US" sz="1400" dirty="0"/>
+            <a:endParaRPr lang="en-US" sz="1400"/>
           </a:p>
         </p:txBody>
       </p:sp>
@@ -23232,7 +23215,7 @@
               <a:buNone/>
             </a:pPr>
             <a:r>
-              <a:rPr lang="en-US" sz="1200" b="1" kern="0" spc="200" dirty="0">
+              <a:rPr lang="en-US" sz="1200" b="1" kern="0" spc="200">
                 <a:solidFill>
                   <a:srgbClr val="1A7A7A"/>
                 </a:solidFill>
@@ -23242,7 +23225,7 @@
               </a:rPr>
               <a:t>Property 1</a:t>
             </a:r>
-            <a:endParaRPr lang="en-US" sz="1200" dirty="0"/>
+            <a:endParaRPr lang="en-US" sz="1200"/>
           </a:p>
         </p:txBody>
       </p:sp>
@@ -23271,7 +23254,7 @@
               <a:buNone/>
             </a:pPr>
             <a:r>
-              <a:rPr lang="en-US" sz="1300" dirty="0">
+              <a:rPr lang="en-US" sz="1300">
                 <a:solidFill>
                   <a:srgbClr val="3D4A5C"/>
                 </a:solidFill>
@@ -23281,14 +23264,14 @@
               </a:rPr>
               <a:t>Corresponding angles are equal in measure.</a:t>
             </a:r>
-            <a:endParaRPr lang="en-US" sz="1300" dirty="0"/>
-          </a:p>
-          <a:p>
-            <a:pPr marL="0" indent="0">
-              <a:buNone/>
-            </a:pPr>
-            <a:r>
-              <a:rPr lang="en-US" sz="1300" dirty="0">
+            <a:endParaRPr lang="en-US" sz="1300"/>
+          </a:p>
+          <a:p>
+            <a:pPr marL="0" indent="0">
+              <a:buNone/>
+            </a:pPr>
+            <a:r>
+              <a:rPr lang="en-US" sz="1300">
                 <a:solidFill>
                   <a:srgbClr val="3D4A5C"/>
                 </a:solidFill>
@@ -23298,7 +23281,7 @@
               </a:rPr>
               <a:t>∠A = ∠D,  ∠B = ∠E,  ∠C = ∠F</a:t>
             </a:r>
-            <a:endParaRPr lang="en-US" sz="1300" dirty="0"/>
+            <a:endParaRPr lang="en-US" sz="1300"/>
           </a:p>
         </p:txBody>
       </p:sp>
@@ -23388,7 +23371,7 @@
               <a:buNone/>
             </a:pPr>
             <a:r>
-              <a:rPr lang="en-US" sz="1200" b="1" kern="0" spc="200" dirty="0">
+              <a:rPr lang="en-US" sz="1200" b="1" kern="0" spc="200">
                 <a:solidFill>
                   <a:srgbClr val="D4A843"/>
                 </a:solidFill>
@@ -23398,7 +23381,7 @@
               </a:rPr>
               <a:t>Property 2</a:t>
             </a:r>
-            <a:endParaRPr lang="en-US" sz="1200" dirty="0"/>
+            <a:endParaRPr lang="en-US" sz="1200"/>
           </a:p>
         </p:txBody>
       </p:sp>
@@ -23427,7 +23410,7 @@
               <a:buNone/>
             </a:pPr>
             <a:r>
-              <a:rPr lang="en-US" sz="1300" dirty="0">
+              <a:rPr lang="en-US" sz="1300">
                 <a:solidFill>
                   <a:srgbClr val="3D4A5C"/>
                 </a:solidFill>
@@ -23437,14 +23420,14 @@
               </a:rPr>
               <a:t>Corresponding sides are proportional.</a:t>
             </a:r>
-            <a:endParaRPr lang="en-US" sz="1300" dirty="0"/>
-          </a:p>
-          <a:p>
-            <a:pPr marL="0" indent="0">
-              <a:buNone/>
-            </a:pPr>
-            <a:r>
-              <a:rPr lang="en-US" sz="1300" dirty="0">
+            <a:endParaRPr lang="en-US" sz="1300"/>
+          </a:p>
+          <a:p>
+            <a:pPr marL="0" indent="0">
+              <a:buNone/>
+            </a:pPr>
+            <a:r>
+              <a:rPr lang="en-US" sz="1300">
                 <a:solidFill>
                   <a:srgbClr val="3D4A5C"/>
                 </a:solidFill>
@@ -23454,7 +23437,7 @@
               </a:rPr>
               <a:t>AB/DE = BC/EF = AC/DF</a:t>
             </a:r>
-            <a:endParaRPr lang="en-US" sz="1300" dirty="0"/>
+            <a:endParaRPr lang="en-US" sz="1300"/>
           </a:p>
         </p:txBody>
       </p:sp>
@@ -23510,7 +23493,7 @@
               <a:buNone/>
             </a:pPr>
             <a:r>
-              <a:rPr lang="en-US" sz="1400" dirty="0">
+              <a:rPr lang="en-US" sz="1400">
                 <a:solidFill>
                   <a:srgbClr val="FFFFFF"/>
                 </a:solidFill>
@@ -23520,7 +23503,7 @@
               </a:rPr>
               <a:t>We write  △ABC ~ △DEF  to denote similarity.   Only 2 pairs of equal angles are needed to prove similarity.</a:t>
             </a:r>
-            <a:endParaRPr lang="en-US" sz="1400" dirty="0"/>
+            <a:endParaRPr lang="en-US" sz="1400"/>
           </a:p>
         </p:txBody>
       </p:sp>
@@ -23610,7 +23593,7 @@
               <a:buNone/>
             </a:pPr>
             <a:r>
-              <a:rPr lang="en-US" sz="1200" b="1" kern="0" spc="200" dirty="0">
+              <a:rPr lang="en-US" sz="1200" b="1" kern="0" spc="200">
                 <a:solidFill>
                   <a:srgbClr val="D4A843"/>
                 </a:solidFill>
@@ -23620,7 +23603,7 @@
               </a:rPr>
               <a:t>Quiz Tip</a:t>
             </a:r>
-            <a:endParaRPr lang="en-US" sz="1200" dirty="0"/>
+            <a:endParaRPr lang="en-US" sz="1200"/>
           </a:p>
         </p:txBody>
       </p:sp>
@@ -23651,7 +23634,7 @@
               <a:buNone/>
             </a:pPr>
             <a:r>
-              <a:rPr lang="en-US" sz="1300" dirty="0">
+              <a:rPr lang="en-US" sz="1300">
                 <a:solidFill>
                   <a:srgbClr val="3D4A5C"/>
                 </a:solidFill>
@@ -23661,7 +23644,7 @@
               </a:rPr>
               <a:t>Given △MNP ~ △QRS, use corresponding angles to find missing angles (they sum to 180°), and set up proportions like MN/QR = NP/RS = MP/QS to find missing sides.</a:t>
             </a:r>
-            <a:endParaRPr lang="en-US" sz="1300" dirty="0"/>
+            <a:endParaRPr lang="en-US" sz="1300"/>
           </a:p>
         </p:txBody>
       </p:sp>
@@ -23750,7 +23733,7 @@
               <a:buNone/>
             </a:pPr>
             <a:r>
-              <a:rPr lang="en-US" sz="2800" b="1" dirty="0">
+              <a:rPr lang="en-US" sz="2800" b="1">
                 <a:solidFill>
                   <a:srgbClr val="1B2A4A"/>
                 </a:solidFill>
@@ -23849,7 +23832,7 @@
               <a:buNone/>
             </a:pPr>
             <a:r>
-              <a:rPr lang="en-US" sz="1600" b="1" dirty="0">
+              <a:rPr lang="en-US" sz="1600" b="1">
                 <a:solidFill>
                   <a:srgbClr val="1A7A7A"/>
                 </a:solidFill>
@@ -23863,7 +23846,7 @@
               <a:buNone/>
             </a:pPr>
             <a:r>
-              <a:rPr lang="en-US" sz="1200" dirty="0">
+              <a:rPr lang="en-US" sz="1200">
                 <a:solidFill>
                   <a:srgbClr val="FFFFFF"/>
                 </a:solidFill>
@@ -23877,7 +23860,7 @@
               <a:buNone/>
             </a:pPr>
             <a:r>
-              <a:rPr lang="en-US" sz="1600" b="1" dirty="0">
+              <a:rPr lang="en-US" sz="1600" b="1">
                 <a:solidFill>
                   <a:srgbClr val="D4A843"/>
                 </a:solidFill>
@@ -23891,7 +23874,7 @@
               <a:buNone/>
             </a:pPr>
             <a:r>
-              <a:rPr lang="en-US" sz="1200" dirty="0">
+              <a:rPr lang="en-US" sz="1200">
                 <a:solidFill>
                   <a:srgbClr val="FFFFFF"/>
                 </a:solidFill>
@@ -23905,7 +23888,7 @@
               <a:buNone/>
             </a:pPr>
             <a:r>
-              <a:rPr lang="en-US" sz="1300" dirty="0">
+              <a:rPr lang="en-US" sz="1300">
                 <a:solidFill>
                   <a:srgbClr val="3D4A5C"/>
                 </a:solidFill>
@@ -23919,7 +23902,7 @@
               <a:buNone/>
             </a:pPr>
             <a:r>
-              <a:rPr lang="en-US" sz="1600" b="1" dirty="0">
+              <a:rPr lang="en-US" sz="1600" b="1">
                 <a:solidFill>
                   <a:srgbClr val="D4A843"/>
                 </a:solidFill>
@@ -23933,7 +23916,7 @@
               <a:buNone/>
             </a:pPr>
             <a:r>
-              <a:rPr lang="en-US" sz="1200" dirty="0">
+              <a:rPr lang="en-US" sz="1200">
                 <a:solidFill>
                   <a:srgbClr val="FFFFFF"/>
                 </a:solidFill>
@@ -23947,7 +23930,7 @@
               <a:buNone/>
             </a:pPr>
             <a:r>
-              <a:rPr lang="en-US" sz="1300" dirty="0">
+              <a:rPr lang="en-US" sz="1300">
                 <a:solidFill>
                   <a:srgbClr val="3D4A5C"/>
                 </a:solidFill>
@@ -23961,7 +23944,7 @@
               <a:buNone/>
             </a:pPr>
             <a:r>
-              <a:rPr lang="en-US" sz="1600" b="1" dirty="0">
+              <a:rPr lang="en-US" sz="1600" b="1">
                 <a:solidFill>
                   <a:srgbClr val="D4A843"/>
                 </a:solidFill>
@@ -23975,7 +23958,7 @@
               <a:buNone/>
             </a:pPr>
             <a:r>
-              <a:rPr lang="en-US" sz="1200" dirty="0">
+              <a:rPr lang="en-US" sz="1200">
                 <a:solidFill>
                   <a:srgbClr val="FFFFFF"/>
                 </a:solidFill>
@@ -23989,7 +23972,7 @@
               <a:buNone/>
             </a:pPr>
             <a:r>
-              <a:rPr lang="en-US" sz="1300" dirty="0">
+              <a:rPr lang="en-US" sz="1300">
                 <a:solidFill>
                   <a:srgbClr val="3D4A5C"/>
                 </a:solidFill>
@@ -24003,7 +23986,7 @@
               <a:buNone/>
             </a:pPr>
             <a:r>
-              <a:rPr lang="en-US" sz="1600" b="1" dirty="0">
+              <a:rPr lang="en-US" sz="1600" b="1">
                 <a:solidFill>
                   <a:srgbClr val="D4A843"/>
                 </a:solidFill>
@@ -24017,7 +24000,7 @@
               <a:buNone/>
             </a:pPr>
             <a:r>
-              <a:rPr lang="en-US" sz="1200" dirty="0">
+              <a:rPr lang="en-US" sz="1200">
                 <a:solidFill>
                   <a:srgbClr val="FFFFFF"/>
                 </a:solidFill>
@@ -24031,7 +24014,7 @@
               <a:buNone/>
             </a:pPr>
             <a:r>
-              <a:rPr lang="en-US" sz="1300" dirty="0">
+              <a:rPr lang="en-US" sz="1300">
                 <a:solidFill>
                   <a:srgbClr val="3D4A5C"/>
                 </a:solidFill>
@@ -24045,7 +24028,7 @@
               <a:buNone/>
             </a:pPr>
             <a:r>
-              <a:rPr lang="en-US" sz="1600" b="1" dirty="0">
+              <a:rPr lang="en-US" sz="1600" b="1">
                 <a:solidFill>
                   <a:srgbClr val="D4A843"/>
                 </a:solidFill>
@@ -24059,7 +24042,7 @@
               <a:buNone/>
             </a:pPr>
             <a:r>
-              <a:rPr lang="en-US" sz="1200" dirty="0">
+              <a:rPr lang="en-US" sz="1200">
                 <a:solidFill>
                   <a:srgbClr val="FFFFFF"/>
                 </a:solidFill>
@@ -24162,7 +24145,7 @@
               <a:buNone/>
             </a:pPr>
             <a:r>
-              <a:rPr lang="en-US" sz="1400" b="1" dirty="0">
+              <a:rPr lang="en-US" sz="1400" b="1">
                 <a:solidFill>
                   <a:srgbClr val="1A7A7A"/>
                 </a:solidFill>
@@ -24176,7 +24159,7 @@
               <a:buNone/>
             </a:pPr>
             <a:r>
-              <a:rPr lang="en-US" sz="1200" dirty="0">
+              <a:rPr lang="en-US" sz="1200">
                 <a:solidFill>
                   <a:srgbClr val="FFFFFF"/>
                 </a:solidFill>
@@ -24190,7 +24173,7 @@
               <a:buNone/>
             </a:pPr>
             <a:r>
-              <a:rPr lang="en-US" sz="1300" dirty="0">
+              <a:rPr lang="en-US" sz="1300">
                 <a:solidFill>
                   <a:srgbClr val="3D4A5C"/>
                 </a:solidFill>
@@ -24204,7 +24187,7 @@
               <a:buNone/>
             </a:pPr>
             <a:r>
-              <a:rPr lang="en-US" sz="1300" dirty="0">
+              <a:rPr lang="en-US" sz="1300">
                 <a:solidFill>
                   <a:srgbClr val="3D4A5C"/>
                 </a:solidFill>
@@ -24300,7 +24283,7 @@
               <a:buNone/>
             </a:pPr>
             <a:r>
-              <a:rPr lang="en-US" sz="3000" b="1" dirty="0">
+              <a:rPr lang="en-US" sz="3000" b="1">
                 <a:solidFill>
                   <a:srgbClr val="1B2A4A"/>
                 </a:solidFill>
@@ -24310,7 +24293,7 @@
               </a:rPr>
               <a:t>Example: Similar Triangles</a:t>
             </a:r>
-            <a:endParaRPr lang="en-US" sz="3000" dirty="0"/>
+            <a:endParaRPr lang="en-US" sz="3000"/>
           </a:p>
         </p:txBody>
       </p:sp>
@@ -24393,7 +24376,7 @@
               <a:buNone/>
             </a:pPr>
             <a:r>
-              <a:rPr lang="en-US" sz="1300" dirty="0">
+              <a:rPr lang="en-US" sz="1300">
                 <a:solidFill>
                   <a:srgbClr val="3D4A5C"/>
                 </a:solidFill>
@@ -24403,7 +24386,7 @@
               </a:rPr>
               <a:t>Given:  △MNP ~ △QRS,  ∠P = 41°,  ∠R = 85°,  MN = 35,  QR = 20,  RS = 24,  MP = 56</a:t>
             </a:r>
-            <a:endParaRPr lang="en-US" sz="1300" dirty="0"/>
+            <a:endParaRPr lang="en-US" sz="1300"/>
           </a:p>
         </p:txBody>
       </p:sp>
@@ -24432,7 +24415,7 @@
               <a:buNone/>
             </a:pPr>
             <a:r>
-              <a:rPr lang="en-US" sz="1400" b="1" dirty="0">
+              <a:rPr lang="en-US" sz="1400" b="1">
                 <a:solidFill>
                   <a:srgbClr val="1B2A4A"/>
                 </a:solidFill>
@@ -24442,7 +24425,7 @@
               </a:rPr>
               <a:t>Find: ∠N, ∠M, NP, QS</a:t>
             </a:r>
-            <a:endParaRPr lang="en-US" sz="1400" dirty="0"/>
+            <a:endParaRPr lang="en-US" sz="1400"/>
           </a:p>
         </p:txBody>
       </p:sp>
@@ -24532,7 +24515,7 @@
               <a:buNone/>
             </a:pPr>
             <a:r>
-              <a:rPr lang="en-US" sz="1200" b="1" kern="0" spc="200" dirty="0">
+              <a:rPr lang="en-US" sz="1200" b="1" kern="0" spc="200">
                 <a:solidFill>
                   <a:srgbClr val="1A7A7A"/>
                 </a:solidFill>
@@ -24542,7 +24525,7 @@
               </a:rPr>
               <a:t>Angles</a:t>
             </a:r>
-            <a:endParaRPr lang="en-US" sz="1200" dirty="0"/>
+            <a:endParaRPr lang="en-US" sz="1200"/>
           </a:p>
         </p:txBody>
       </p:sp>
@@ -24574,7 +24557,7 @@
               <a:buNone/>
             </a:pPr>
             <a:r>
-              <a:rPr lang="en-US" sz="1300" dirty="0">
+              <a:rPr lang="en-US" sz="1300">
                 <a:solidFill>
                   <a:srgbClr val="3D4A5C"/>
                 </a:solidFill>
@@ -24584,7 +24567,7 @@
               </a:rPr>
               <a:t>∠N corresponds to ∠R = 85°</a:t>
             </a:r>
-            <a:endParaRPr lang="en-US" sz="1300" dirty="0"/>
+            <a:endParaRPr lang="en-US" sz="1300"/>
           </a:p>
           <a:p>
             <a:pPr marL="0" indent="0">
@@ -24594,7 +24577,7 @@
               <a:buNone/>
             </a:pPr>
             <a:r>
-              <a:rPr lang="en-US" sz="1300" b="1" dirty="0">
+              <a:rPr lang="en-US" sz="1300" b="1">
                 <a:solidFill>
                   <a:srgbClr val="1A7A7A"/>
                 </a:solidFill>
@@ -24604,7 +24587,7 @@
               </a:rPr>
               <a:t>∠N = 85°</a:t>
             </a:r>
-            <a:endParaRPr lang="en-US" sz="1300" dirty="0"/>
+            <a:endParaRPr lang="en-US" sz="1300"/>
           </a:p>
           <a:p>
             <a:pPr marL="0" indent="0">
@@ -24613,7 +24596,7 @@
               </a:spcAft>
               <a:buNone/>
             </a:pPr>
-            <a:endParaRPr lang="en-US" sz="1300" dirty="0"/>
+            <a:endParaRPr lang="en-US" sz="1300"/>
           </a:p>
           <a:p>
             <a:pPr marL="0" indent="0">
@@ -24623,7 +24606,7 @@
               <a:buNone/>
             </a:pPr>
             <a:r>
-              <a:rPr lang="en-US" sz="1300" dirty="0">
+              <a:rPr lang="en-US" sz="1300">
                 <a:solidFill>
                   <a:srgbClr val="3D4A5C"/>
                 </a:solidFill>
@@ -24633,7 +24616,7 @@
               </a:rPr>
               <a:t>∠M + ∠N + ∠P = 180°</a:t>
             </a:r>
-            <a:endParaRPr lang="en-US" sz="1300" dirty="0"/>
+            <a:endParaRPr lang="en-US" sz="1300"/>
           </a:p>
           <a:p>
             <a:pPr marL="0" indent="0">
@@ -24643,7 +24626,7 @@
               <a:buNone/>
             </a:pPr>
             <a:r>
-              <a:rPr lang="en-US" sz="1300" dirty="0">
+              <a:rPr lang="en-US" sz="1300">
                 <a:solidFill>
                   <a:srgbClr val="3D4A5C"/>
                 </a:solidFill>
@@ -24653,7 +24636,7 @@
               </a:rPr>
               <a:t>∠M + 85° + 41° = 180°</a:t>
             </a:r>
-            <a:endParaRPr lang="en-US" sz="1300" dirty="0"/>
+            <a:endParaRPr lang="en-US" sz="1300"/>
           </a:p>
           <a:p>
             <a:pPr marL="0" indent="0">
@@ -24663,7 +24646,7 @@
               <a:buNone/>
             </a:pPr>
             <a:r>
-              <a:rPr lang="en-US" sz="1300" b="1" dirty="0">
+              <a:rPr lang="en-US" sz="1300" b="1">
                 <a:solidFill>
                   <a:srgbClr val="1A7A7A"/>
                 </a:solidFill>
@@ -24673,7 +24656,7 @@
               </a:rPr>
               <a:t>∠M = 54°</a:t>
             </a:r>
-            <a:endParaRPr lang="en-US" sz="1300" dirty="0"/>
+            <a:endParaRPr lang="en-US" sz="1300"/>
           </a:p>
         </p:txBody>
       </p:sp>
@@ -24763,7 +24746,7 @@
               <a:buNone/>
             </a:pPr>
             <a:r>
-              <a:rPr lang="en-US" sz="1200" b="1" kern="0" spc="200" dirty="0">
+              <a:rPr lang="en-US" sz="1200" b="1" kern="0" spc="200">
                 <a:solidFill>
                   <a:srgbClr val="D4A843"/>
                 </a:solidFill>
@@ -24773,7 +24756,7 @@
               </a:rPr>
               <a:t>Sides</a:t>
             </a:r>
-            <a:endParaRPr lang="en-US" sz="1200" dirty="0"/>
+            <a:endParaRPr lang="en-US" sz="1200"/>
           </a:p>
         </p:txBody>
       </p:sp>
@@ -24805,7 +24788,7 @@
               <a:buNone/>
             </a:pPr>
             <a:r>
-              <a:rPr lang="en-US" sz="1300" dirty="0">
+              <a:rPr lang="en-US" sz="1300">
                 <a:solidFill>
                   <a:srgbClr val="3D4A5C"/>
                 </a:solidFill>
@@ -24815,7 +24798,7 @@
               </a:rPr>
               <a:t>Scale: MN/QR = 35/20 = 7/4</a:t>
             </a:r>
-            <a:endParaRPr lang="en-US" sz="1300" dirty="0"/>
+            <a:endParaRPr lang="en-US" sz="1300"/>
           </a:p>
           <a:p>
             <a:pPr marL="0" indent="0">
@@ -24824,7 +24807,7 @@
               </a:spcAft>
               <a:buNone/>
             </a:pPr>
-            <a:endParaRPr lang="en-US" sz="1300" dirty="0"/>
+            <a:endParaRPr lang="en-US" sz="1300"/>
           </a:p>
           <a:p>
             <a:pPr marL="0" indent="0">
@@ -24834,7 +24817,7 @@
               <a:buNone/>
             </a:pPr>
             <a:r>
-              <a:rPr lang="en-US" sz="1300" dirty="0">
+              <a:rPr lang="en-US" sz="1300">
                 <a:solidFill>
                   <a:srgbClr val="3D4A5C"/>
                 </a:solidFill>
@@ -24844,7 +24827,7 @@
               </a:rPr>
               <a:t>NP/RS = 7/4  →  NP/24 = 7/4</a:t>
             </a:r>
-            <a:endParaRPr lang="en-US" sz="1300" dirty="0"/>
+            <a:endParaRPr lang="en-US" sz="1300"/>
           </a:p>
           <a:p>
             <a:pPr marL="0" indent="0">
@@ -24854,7 +24837,7 @@
               <a:buNone/>
             </a:pPr>
             <a:r>
-              <a:rPr lang="en-US" sz="1300" b="1" dirty="0">
+              <a:rPr lang="en-US" sz="1300" b="1">
                 <a:solidFill>
                   <a:srgbClr val="D4A843"/>
                 </a:solidFill>
@@ -24864,7 +24847,7 @@
               </a:rPr>
               <a:t>NP = 42</a:t>
             </a:r>
-            <a:endParaRPr lang="en-US" sz="1300" dirty="0"/>
+            <a:endParaRPr lang="en-US" sz="1300"/>
           </a:p>
           <a:p>
             <a:pPr marL="0" indent="0">
@@ -24873,7 +24856,7 @@
               </a:spcAft>
               <a:buNone/>
             </a:pPr>
-            <a:endParaRPr lang="en-US" sz="1300" dirty="0"/>
+            <a:endParaRPr lang="en-US" sz="1300"/>
           </a:p>
           <a:p>
             <a:pPr marL="0" indent="0">
@@ -24883,7 +24866,7 @@
               <a:buNone/>
             </a:pPr>
             <a:r>
-              <a:rPr lang="en-US" sz="1300" dirty="0">
+              <a:rPr lang="en-US" sz="1300">
                 <a:solidFill>
                   <a:srgbClr val="3D4A5C"/>
                 </a:solidFill>
@@ -24893,7 +24876,7 @@
               </a:rPr>
               <a:t>MP/QS = 7/4  →  56/QS = 7/4</a:t>
             </a:r>
-            <a:endParaRPr lang="en-US" sz="1300" dirty="0"/>
+            <a:endParaRPr lang="en-US" sz="1300"/>
           </a:p>
           <a:p>
             <a:pPr marL="0" indent="0">
@@ -24903,7 +24886,7 @@
               <a:buNone/>
             </a:pPr>
             <a:r>
-              <a:rPr lang="en-US" sz="1300" b="1" dirty="0">
+              <a:rPr lang="en-US" sz="1300" b="1">
                 <a:solidFill>
                   <a:srgbClr val="D4A843"/>
                 </a:solidFill>
@@ -24913,7 +24896,7 @@
               </a:rPr>
               <a:t>QS = 32</a:t>
             </a:r>
-            <a:endParaRPr lang="en-US" sz="1300" dirty="0"/>
+            <a:endParaRPr lang="en-US" sz="1300"/>
           </a:p>
         </p:txBody>
       </p:sp>
@@ -25002,7 +24985,7 @@
               <a:buNone/>
             </a:pPr>
             <a:r>
-              <a:rPr lang="en-US" sz="3000" b="1" dirty="0">
+              <a:rPr lang="en-US" sz="3000" b="1">
                 <a:solidFill>
                   <a:srgbClr val="1B2A4A"/>
                 </a:solidFill>
@@ -25012,7 +24995,7 @@
               </a:rPr>
               <a:t>Applications: Similar Triangles</a:t>
             </a:r>
-            <a:endParaRPr lang="en-US" sz="3000" dirty="0"/>
+            <a:endParaRPr lang="en-US" sz="3000"/>
           </a:p>
         </p:txBody>
       </p:sp>
@@ -25102,7 +25085,7 @@
               <a:buNone/>
             </a:pPr>
             <a:r>
-              <a:rPr lang="en-US" sz="1600" b="1" dirty="0">
+              <a:rPr lang="en-US" sz="1600" b="1">
                 <a:solidFill>
                   <a:srgbClr val="1B2A4A"/>
                 </a:solidFill>
@@ -25112,7 +25095,7 @@
               </a:rPr>
               <a:t>Shadow Problem</a:t>
             </a:r>
-            <a:endParaRPr lang="en-US" sz="1600" dirty="0"/>
+            <a:endParaRPr lang="en-US" sz="1600"/>
           </a:p>
         </p:txBody>
       </p:sp>
@@ -25141,7 +25124,7 @@
               <a:buNone/>
             </a:pPr>
             <a:r>
-              <a:rPr lang="en-US" sz="1200" dirty="0">
+              <a:rPr lang="en-US" sz="1200">
                 <a:solidFill>
                   <a:srgbClr val="3D4A5C"/>
                 </a:solidFill>
@@ -25151,7 +25134,7 @@
               </a:rPr>
               <a:t>A 6 ft man stands 10 ft from a flagpole. His 8 ft shadow ends at the same point as the flagpole's shadow.</a:t>
             </a:r>
-            <a:endParaRPr lang="en-US" sz="1200" dirty="0"/>
+            <a:endParaRPr lang="en-US" sz="1200"/>
           </a:p>
         </p:txBody>
       </p:sp>
@@ -25180,7 +25163,7 @@
               <a:buNone/>
             </a:pPr>
             <a:r>
-              <a:rPr lang="en-US" sz="1400" b="1" dirty="0">
+              <a:rPr lang="en-US" sz="1400" b="1">
                 <a:solidFill>
                   <a:srgbClr val="1A7A7A"/>
                 </a:solidFill>
@@ -25190,7 +25173,7 @@
               </a:rPr>
               <a:t>6/h = 8/18  →  h = 13.5 ft</a:t>
             </a:r>
-            <a:endParaRPr lang="en-US" sz="1400" dirty="0"/>
+            <a:endParaRPr lang="en-US" sz="1400"/>
           </a:p>
         </p:txBody>
       </p:sp>
@@ -25219,7 +25202,7 @@
               <a:buNone/>
             </a:pPr>
             <a:r>
-              <a:rPr lang="en-US" sz="1200" i="1" dirty="0">
+              <a:rPr lang="en-US" sz="1200" i="1">
                 <a:solidFill>
                   <a:srgbClr val="7A8599"/>
                 </a:solidFill>
@@ -25229,7 +25212,7 @@
               </a:rPr>
               <a:t>(Total shadow = 8 + 10 = 18 ft)</a:t>
             </a:r>
-            <a:endParaRPr lang="en-US" sz="1200" dirty="0"/>
+            <a:endParaRPr lang="en-US" sz="1200"/>
           </a:p>
         </p:txBody>
       </p:sp>
@@ -25319,7 +25302,7 @@
               <a:buNone/>
             </a:pPr>
             <a:r>
-              <a:rPr lang="en-US" sz="1600" b="1" dirty="0">
+              <a:rPr lang="en-US" sz="1600" b="1">
                 <a:solidFill>
                   <a:srgbClr val="1B2A4A"/>
                 </a:solidFill>
@@ -25329,7 +25312,7 @@
               </a:rPr>
               <a:t>River Width Problem</a:t>
             </a:r>
-            <a:endParaRPr lang="en-US" sz="1600" dirty="0"/>
+            <a:endParaRPr lang="en-US" sz="1600"/>
           </a:p>
         </p:txBody>
       </p:sp>
@@ -25358,7 +25341,7 @@
               <a:buNone/>
             </a:pPr>
             <a:r>
-              <a:rPr lang="en-US" sz="1200" dirty="0">
+              <a:rPr lang="en-US" sz="1200">
                 <a:solidFill>
                   <a:srgbClr val="3D4A5C"/>
                 </a:solidFill>
@@ -25368,7 +25351,7 @@
               </a:rPr>
               <a:t>BC ∥ DE. AB = 50 ft, AD = 180 ft, BC = 60 ft. Find DE (river width).</a:t>
             </a:r>
-            <a:endParaRPr lang="en-US" sz="1200" dirty="0"/>
+            <a:endParaRPr lang="en-US" sz="1200"/>
           </a:p>
         </p:txBody>
       </p:sp>
@@ -25397,7 +25380,7 @@
               <a:buNone/>
             </a:pPr>
             <a:r>
-              <a:rPr lang="en-US" sz="1400" b="1" dirty="0">
+              <a:rPr lang="en-US" sz="1400" b="1">
                 <a:solidFill>
                   <a:srgbClr val="D4A843"/>
                 </a:solidFill>
@@ -25407,14 +25390,14 @@
               </a:rPr>
               <a:t>AB/AD = BC/DE</a:t>
             </a:r>
-            <a:endParaRPr lang="en-US" sz="1400" dirty="0"/>
-          </a:p>
-          <a:p>
-            <a:pPr marL="0" indent="0">
-              <a:buNone/>
-            </a:pPr>
-            <a:r>
-              <a:rPr lang="en-US" sz="1400" b="1" dirty="0">
+            <a:endParaRPr lang="en-US" sz="1400"/>
+          </a:p>
+          <a:p>
+            <a:pPr marL="0" indent="0">
+              <a:buNone/>
+            </a:pPr>
+            <a:r>
+              <a:rPr lang="en-US" sz="1400" b="1">
                 <a:solidFill>
                   <a:srgbClr val="D4A843"/>
                 </a:solidFill>
@@ -25424,7 +25407,7 @@
               </a:rPr>
               <a:t>50/180 = 60/DE → DE = 216 ft</a:t>
             </a:r>
-            <a:endParaRPr lang="en-US" sz="1400" dirty="0"/>
+            <a:endParaRPr lang="en-US" sz="1400"/>
           </a:p>
         </p:txBody>
       </p:sp>
@@ -25507,7 +25490,7 @@
               <a:buNone/>
             </a:pPr>
             <a:r>
-              <a:rPr lang="en-US" sz="1300" b="1" dirty="0">
+              <a:rPr lang="en-US" sz="1300" b="1">
                 <a:solidFill>
                   <a:srgbClr val="1B2A4A"/>
                 </a:solidFill>
@@ -25518,7 +25501,7 @@
               <a:t>Strategy: </a:t>
             </a:r>
             <a:r>
-              <a:rPr lang="en-US" sz="1300" dirty="0">
+              <a:rPr lang="en-US" sz="1300">
                 <a:solidFill>
                   <a:srgbClr val="3D4A5C"/>
                 </a:solidFill>
@@ -25528,7 +25511,7 @@
               </a:rPr>
               <a:t>Identify the two similar triangles → match corresponding sides → set up the proportion → cross-multiply and solve.</a:t>
             </a:r>
-            <a:endParaRPr lang="en-US" sz="1300" dirty="0"/>
+            <a:endParaRPr lang="en-US" sz="1300"/>
           </a:p>
         </p:txBody>
       </p:sp>
@@ -25617,7 +25600,7 @@
               <a:buNone/>
             </a:pPr>
             <a:r>
-              <a:rPr lang="en-US" sz="2800" b="1" dirty="0">
+              <a:rPr lang="en-US" sz="2800" b="1">
                 <a:solidFill>
                   <a:srgbClr val="1B2A4A"/>
                 </a:solidFill>
@@ -25716,7 +25699,7 @@
               <a:buNone/>
             </a:pPr>
             <a:r>
-              <a:rPr lang="en-US" sz="1600" b="1" dirty="0">
+              <a:rPr lang="en-US" sz="1600" b="1">
                 <a:solidFill>
                   <a:srgbClr val="D4A843"/>
                 </a:solidFill>
@@ -25730,7 +25713,7 @@
               <a:buNone/>
             </a:pPr>
             <a:r>
-              <a:rPr lang="en-US" sz="1200" dirty="0">
+              <a:rPr lang="en-US" sz="1200">
                 <a:solidFill>
                   <a:srgbClr val="FFFFFF"/>
                 </a:solidFill>
@@ -25744,7 +25727,7 @@
               <a:buNone/>
             </a:pPr>
             <a:r>
-              <a:rPr lang="en-US" sz="1300" dirty="0">
+              <a:rPr lang="en-US" sz="1300">
                 <a:solidFill>
                   <a:srgbClr val="3D4A5C"/>
                 </a:solidFill>
@@ -25758,7 +25741,7 @@
               <a:buNone/>
             </a:pPr>
             <a:r>
-              <a:rPr lang="en-US" sz="1600" b="1" dirty="0">
+              <a:rPr lang="en-US" sz="1600" b="1">
                 <a:solidFill>
                   <a:srgbClr val="1A7A7A"/>
                 </a:solidFill>
@@ -25772,7 +25755,7 @@
               <a:buNone/>
             </a:pPr>
             <a:r>
-              <a:rPr lang="en-US" sz="1200" dirty="0">
+              <a:rPr lang="en-US" sz="1200">
                 <a:solidFill>
                   <a:srgbClr val="FFFFFF"/>
                 </a:solidFill>
@@ -25786,7 +25769,7 @@
               <a:buNone/>
             </a:pPr>
             <a:r>
-              <a:rPr lang="en-US" sz="1300" dirty="0">
+              <a:rPr lang="en-US" sz="1300">
                 <a:solidFill>
                   <a:srgbClr val="3D4A5C"/>
                 </a:solidFill>
@@ -25800,7 +25783,7 @@
               <a:buNone/>
             </a:pPr>
             <a:r>
-              <a:rPr lang="en-US" sz="1300" dirty="0">
+              <a:rPr lang="en-US" sz="1300">
                 <a:solidFill>
                   <a:srgbClr val="3D4A5C"/>
                 </a:solidFill>
@@ -25814,7 +25797,7 @@
               <a:buNone/>
             </a:pPr>
             <a:r>
-              <a:rPr lang="en-US" sz="1300" dirty="0">
+              <a:rPr lang="en-US" sz="1300">
                 <a:solidFill>
                   <a:srgbClr val="3D4A5C"/>
                 </a:solidFill>
@@ -25828,7 +25811,7 @@
               <a:buNone/>
             </a:pPr>
             <a:r>
-              <a:rPr lang="en-US" sz="1300" dirty="0">
+              <a:rPr lang="en-US" sz="1300">
                 <a:solidFill>
                   <a:srgbClr val="3D4A5C"/>
                 </a:solidFill>
@@ -25842,7 +25825,7 @@
               <a:buNone/>
             </a:pPr>
             <a:r>
-              <a:rPr lang="en-US" sz="1600" b="1" dirty="0">
+              <a:rPr lang="en-US" sz="1600" b="1">
                 <a:solidFill>
                   <a:srgbClr val="D4A843"/>
                 </a:solidFill>
@@ -25856,7 +25839,7 @@
               <a:buNone/>
             </a:pPr>
             <a:r>
-              <a:rPr lang="en-US" sz="1200" dirty="0">
+              <a:rPr lang="en-US" sz="1200">
                 <a:solidFill>
                   <a:srgbClr val="FFFFFF"/>
                 </a:solidFill>
@@ -25870,7 +25853,7 @@
               <a:buNone/>
             </a:pPr>
             <a:r>
-              <a:rPr lang="en-US" sz="1300" dirty="0">
+              <a:rPr lang="en-US" sz="1300">
                 <a:solidFill>
                   <a:srgbClr val="3D4A5C"/>
                 </a:solidFill>
@@ -25966,7 +25949,7 @@
               <a:buNone/>
             </a:pPr>
             <a:r>
-              <a:rPr lang="en-US" sz="2800" b="1" dirty="0">
+              <a:rPr lang="en-US" sz="2800" b="1">
                 <a:solidFill>
                   <a:srgbClr val="1B2A4A"/>
                 </a:solidFill>
@@ -26065,7 +26048,7 @@
               <a:buNone/>
             </a:pPr>
             <a:r>
-              <a:rPr lang="en-US" sz="1600" b="1" dirty="0">
+              <a:rPr lang="en-US" sz="1600" b="1">
                 <a:solidFill>
                   <a:srgbClr val="D4A843"/>
                 </a:solidFill>
@@ -26079,7 +26062,7 @@
               <a:buNone/>
             </a:pPr>
             <a:r>
-              <a:rPr lang="en-US" sz="1200" dirty="0">
+              <a:rPr lang="en-US" sz="1200">
                 <a:solidFill>
                   <a:srgbClr val="FFFFFF"/>
                 </a:solidFill>
@@ -26093,7 +26076,7 @@
               <a:buNone/>
             </a:pPr>
             <a:r>
-              <a:rPr lang="en-US" sz="1600" b="1" dirty="0">
+              <a:rPr lang="en-US" sz="1600" b="1">
                 <a:solidFill>
                   <a:srgbClr val="1A7A7A"/>
                 </a:solidFill>
@@ -26107,7 +26090,7 @@
               <a:buNone/>
             </a:pPr>
             <a:r>
-              <a:rPr lang="en-US" sz="1200" dirty="0">
+              <a:rPr lang="en-US" sz="1200">
                 <a:solidFill>
                   <a:srgbClr val="FFFFFF"/>
                 </a:solidFill>
@@ -26116,7 +26099,7 @@
               <a:t> </a:t>
             </a:r>
             <a:r>
-              <a:rPr lang="en-US" sz="1300" dirty="0">
+              <a:rPr lang="en-US" sz="1300">
                 <a:solidFill>
                   <a:srgbClr val="3D4A5C"/>
                 </a:solidFill>
@@ -26129,7 +26112,7 @@
             <a:pPr marL="0" indent="0">
               <a:buNone/>
             </a:pPr>
-            <a:endParaRPr lang="en-US" sz="1600" b="1" dirty="0">
+            <a:endParaRPr lang="en-US" sz="1600" b="1">
               <a:solidFill>
                 <a:srgbClr val="1A7A7A"/>
               </a:solidFill>
@@ -26141,7 +26124,7 @@
               <a:buNone/>
             </a:pPr>
             <a:r>
-              <a:rPr lang="en-US" sz="1600" b="1" dirty="0">
+              <a:rPr lang="en-US" sz="1600" b="1">
                 <a:solidFill>
                   <a:srgbClr val="1A7A7A"/>
                 </a:solidFill>
@@ -26150,7 +26133,7 @@
               <a:t>Mistake 2 — Inverting the ratio</a:t>
             </a:r>
             <a:r>
-              <a:rPr lang="en-US" sz="1200" dirty="0">
+              <a:rPr lang="en-US" sz="1200">
                 <a:solidFill>
                   <a:srgbClr val="FFFFFF"/>
                 </a:solidFill>
@@ -26164,7 +26147,7 @@
               <a:buNone/>
             </a:pPr>
             <a:r>
-              <a:rPr lang="en-US" sz="1300" dirty="0">
+              <a:rPr lang="en-US" sz="1300">
                 <a:solidFill>
                   <a:srgbClr val="3D4A5C"/>
                 </a:solidFill>
@@ -26177,7 +26160,7 @@
             <a:pPr marL="0" indent="0">
               <a:buNone/>
             </a:pPr>
-            <a:endParaRPr lang="en-US" sz="1600" b="1" dirty="0">
+            <a:endParaRPr lang="en-US" sz="1600" b="1">
               <a:solidFill>
                 <a:srgbClr val="1A7A7A"/>
               </a:solidFill>
@@ -26189,7 +26172,7 @@
               <a:buNone/>
             </a:pPr>
             <a:r>
-              <a:rPr lang="en-US" sz="1600" b="1" dirty="0">
+              <a:rPr lang="en-US" sz="1600" b="1">
                 <a:solidFill>
                   <a:srgbClr val="1A7A7A"/>
                 </a:solidFill>
@@ -26198,7 +26181,7 @@
               <a:t>Mistake 3 — Mixing sides from different triangles</a:t>
             </a:r>
             <a:r>
-              <a:rPr lang="en-US" sz="1200" dirty="0">
+              <a:rPr lang="en-US" sz="1200">
                 <a:solidFill>
                   <a:srgbClr val="FFFFFF"/>
                 </a:solidFill>
@@ -26212,7 +26195,7 @@
               <a:buNone/>
             </a:pPr>
             <a:r>
-              <a:rPr lang="en-US" sz="1300" dirty="0">
+              <a:rPr lang="en-US" sz="1300">
                 <a:solidFill>
                   <a:srgbClr val="3D4A5C"/>
                 </a:solidFill>
@@ -26225,7 +26208,7 @@
             <a:pPr marL="0" indent="0">
               <a:buNone/>
             </a:pPr>
-            <a:endParaRPr lang="en-US" sz="1600" b="1" dirty="0">
+            <a:endParaRPr lang="en-US" sz="1600" b="1">
               <a:solidFill>
                 <a:srgbClr val="1A7A7A"/>
               </a:solidFill>
@@ -26237,7 +26220,7 @@
               <a:buNone/>
             </a:pPr>
             <a:r>
-              <a:rPr lang="en-US" sz="1600" b="1" dirty="0">
+              <a:rPr lang="en-US" sz="1600" b="1">
                 <a:solidFill>
                   <a:srgbClr val="1A7A7A"/>
                 </a:solidFill>
@@ -26246,7 +26229,7 @@
               <a:t>Mistake 4 — Confusing the scale factor direction</a:t>
             </a:r>
             <a:r>
-              <a:rPr lang="en-US" sz="1200" dirty="0">
+              <a:rPr lang="en-US" sz="1200">
                 <a:solidFill>
                   <a:srgbClr val="FFFFFF"/>
                 </a:solidFill>
@@ -26260,7 +26243,7 @@
               <a:buNone/>
             </a:pPr>
             <a:r>
-              <a:rPr lang="en-US" sz="1300" dirty="0">
+              <a:rPr lang="en-US" sz="1300">
                 <a:solidFill>
                   <a:srgbClr val="3D4A5C"/>
                 </a:solidFill>
@@ -26363,7 +26346,7 @@
               <a:buNone/>
             </a:pPr>
             <a:r>
-              <a:rPr lang="en-US" sz="1400" b="1" dirty="0">
+              <a:rPr lang="en-US" sz="1400" b="1">
                 <a:solidFill>
                   <a:srgbClr val="D4A843"/>
                 </a:solidFill>
@@ -26377,7 +26360,7 @@
               <a:buNone/>
             </a:pPr>
             <a:r>
-              <a:rPr lang="en-US" sz="1300" dirty="0">
+              <a:rPr lang="en-US" sz="1300">
                 <a:solidFill>
                   <a:srgbClr val="3D4A5C"/>
                 </a:solidFill>
@@ -26391,7 +26374,7 @@
               <a:buNone/>
             </a:pPr>
             <a:r>
-              <a:rPr lang="en-US" sz="1300" dirty="0">
+              <a:rPr lang="en-US" sz="1300">
                 <a:solidFill>
                   <a:srgbClr val="3D4A5C"/>
                 </a:solidFill>
@@ -26487,7 +26470,7 @@
               <a:buNone/>
             </a:pPr>
             <a:r>
-              <a:rPr lang="en-US" sz="1400" kern="0" spc="600" dirty="0">
+              <a:rPr lang="en-US" sz="1400" kern="0" spc="600">
                 <a:solidFill>
                   <a:srgbClr val="4ECDC4"/>
                 </a:solidFill>
@@ -26497,7 +26480,7 @@
               </a:rPr>
               <a:t>SECTION 5</a:t>
             </a:r>
-            <a:endParaRPr lang="en-US" sz="1400" dirty="0"/>
+            <a:endParaRPr lang="en-US" sz="1400"/>
           </a:p>
         </p:txBody>
       </p:sp>
@@ -26526,7 +26509,7 @@
               <a:buNone/>
             </a:pPr>
             <a:r>
-              <a:rPr lang="en-US" sz="4000" b="1" dirty="0">
+              <a:rPr lang="en-US" sz="4000" b="1">
                 <a:solidFill>
                   <a:srgbClr val="FFFFFF"/>
                 </a:solidFill>
@@ -26536,14 +26519,14 @@
               </a:rPr>
               <a:t>Degrees, Minutes</a:t>
             </a:r>
-            <a:endParaRPr lang="en-US" sz="4000" dirty="0"/>
-          </a:p>
-          <a:p>
-            <a:pPr marL="0" indent="0">
-              <a:buNone/>
-            </a:pPr>
-            <a:r>
-              <a:rPr lang="en-US" sz="4000" b="1" dirty="0">
+            <a:endParaRPr lang="en-US" sz="4000"/>
+          </a:p>
+          <a:p>
+            <a:pPr marL="0" indent="0">
+              <a:buNone/>
+            </a:pPr>
+            <a:r>
+              <a:rPr lang="en-US" sz="4000" b="1">
                 <a:solidFill>
                   <a:srgbClr val="FFFFFF"/>
                 </a:solidFill>
@@ -26553,7 +26536,7 @@
               </a:rPr>
               <a:t>&amp; Seconds</a:t>
             </a:r>
-            <a:endParaRPr lang="en-US" sz="4000" dirty="0"/>
+            <a:endParaRPr lang="en-US" sz="4000"/>
           </a:p>
         </p:txBody>
       </p:sp>
@@ -26612,7 +26595,7 @@
               <a:buNone/>
             </a:pPr>
             <a:r>
-              <a:rPr lang="en-US" sz="1300" i="1" dirty="0">
+              <a:rPr lang="en-US" sz="1300" i="1">
                 <a:solidFill>
                   <a:srgbClr val="D4C5A0"/>
                 </a:solidFill>
@@ -26708,7 +26691,7 @@
               <a:buNone/>
             </a:pPr>
             <a:r>
-              <a:rPr lang="en-US" sz="3200" b="1" dirty="0">
+              <a:rPr lang="en-US" sz="3200" b="1">
                 <a:solidFill>
                   <a:srgbClr val="1B2A4A"/>
                 </a:solidFill>
@@ -26718,7 +26701,7 @@
               </a:rPr>
               <a:t>Degrees, Minutes &amp; Seconds</a:t>
             </a:r>
-            <a:endParaRPr lang="en-US" sz="3200" dirty="0"/>
+            <a:endParaRPr lang="en-US" sz="3200"/>
           </a:p>
         </p:txBody>
       </p:sp>
@@ -26774,7 +26757,7 @@
               <a:buNone/>
             </a:pPr>
             <a:r>
-              <a:rPr lang="en-US" sz="1800" b="1" dirty="0">
+              <a:rPr lang="en-US" sz="1800" b="1">
                 <a:solidFill>
                   <a:srgbClr val="FFFFFF"/>
                 </a:solidFill>
@@ -26784,7 +26767,7 @@
               </a:rPr>
               <a:t>1° = 60 minutes (60′)          1′ = 60 seconds (60″)          1° = 3600″</a:t>
             </a:r>
-            <a:endParaRPr lang="en-US" sz="1800" dirty="0"/>
+            <a:endParaRPr lang="en-US" sz="1800"/>
           </a:p>
         </p:txBody>
       </p:sp>
@@ -26840,7 +26823,7 @@
               <a:buNone/>
             </a:pPr>
             <a:r>
-              <a:rPr lang="en-US" sz="1200" i="1" dirty="0">
+              <a:rPr lang="en-US" sz="1200" i="1">
                 <a:solidFill>
                   <a:srgbClr val="7A8599"/>
                 </a:solidFill>
@@ -26850,7 +26833,7 @@
               </a:rPr>
               <a:t>Angles in navigation, surveying, and GPS use degrees-minutes-seconds (DMS) — here’s how to convert. Used in navigation, latitude/longitude, and aviation approach plates.</a:t>
             </a:r>
-            <a:endParaRPr lang="en-US" sz="1200" dirty="0"/>
+            <a:endParaRPr lang="en-US" sz="1200"/>
           </a:p>
         </p:txBody>
       </p:sp>
@@ -26946,7 +26929,7 @@
               <a:buNone/>
             </a:pPr>
             <a:r>
-              <a:rPr lang="en-US" sz="1600" b="1" dirty="0">
+              <a:rPr lang="en-US" sz="1600" b="1">
                 <a:solidFill>
                   <a:srgbClr val="1A7A7A"/>
                 </a:solidFill>
@@ -26960,7 +26943,7 @@
               <a:buNone/>
             </a:pPr>
             <a:r>
-              <a:rPr lang="en-US" sz="1200" dirty="0">
+              <a:rPr lang="en-US" sz="1200">
                 <a:solidFill>
                   <a:srgbClr val="FFFFFF"/>
                 </a:solidFill>
@@ -26974,7 +26957,7 @@
               <a:buNone/>
             </a:pPr>
             <a:r>
-              <a:rPr lang="en-US" sz="2000" b="1" dirty="0">
+              <a:rPr lang="en-US" sz="2000" b="1">
                 <a:solidFill>
                   <a:srgbClr val="1B2A4A"/>
                 </a:solidFill>
@@ -26988,7 +26971,7 @@
               <a:buNone/>
             </a:pPr>
             <a:r>
-              <a:rPr lang="en-US" sz="1200" dirty="0">
+              <a:rPr lang="en-US" sz="1200">
                 <a:solidFill>
                   <a:srgbClr val="FFFFFF"/>
                 </a:solidFill>
@@ -27002,7 +26985,7 @@
               <a:buNone/>
             </a:pPr>
             <a:r>
-              <a:rPr lang="en-US" sz="1300" dirty="0">
+              <a:rPr lang="en-US" sz="1300">
                 <a:solidFill>
                   <a:srgbClr val="3D4A5C"/>
                 </a:solidFill>
@@ -27016,7 +26999,7 @@
               <a:buNone/>
             </a:pPr>
             <a:r>
-              <a:rPr lang="en-US" sz="1300" dirty="0">
+              <a:rPr lang="en-US" sz="1300">
                 <a:solidFill>
                   <a:srgbClr val="3D4A5C"/>
                 </a:solidFill>
@@ -27030,7 +27013,7 @@
               <a:buNone/>
             </a:pPr>
             <a:r>
-              <a:rPr lang="en-US" sz="1300" dirty="0">
+              <a:rPr lang="en-US" sz="1300">
                 <a:solidFill>
                   <a:srgbClr val="3D4A5C"/>
                 </a:solidFill>
@@ -27044,7 +27027,7 @@
               <a:buNone/>
             </a:pPr>
             <a:r>
-              <a:rPr lang="en-US" sz="1200" dirty="0">
+              <a:rPr lang="en-US" sz="1200">
                 <a:solidFill>
                   <a:srgbClr val="FFFFFF"/>
                 </a:solidFill>
@@ -27058,7 +27041,7 @@
               <a:buNone/>
             </a:pPr>
             <a:r>
-              <a:rPr lang="en-US" sz="1300" b="1" dirty="0">
+              <a:rPr lang="en-US" sz="1300" b="1">
                 <a:solidFill>
                   <a:srgbClr val="D4A843"/>
                 </a:solidFill>
@@ -27161,7 +27144,7 @@
               <a:buNone/>
             </a:pPr>
             <a:r>
-              <a:rPr lang="en-US" sz="1600" b="1" dirty="0">
+              <a:rPr lang="en-US" sz="1600" b="1">
                 <a:solidFill>
                   <a:srgbClr val="D4A843"/>
                 </a:solidFill>
@@ -27175,7 +27158,7 @@
               <a:buNone/>
             </a:pPr>
             <a:r>
-              <a:rPr lang="en-US" sz="1200" dirty="0">
+              <a:rPr lang="en-US" sz="1200">
                 <a:solidFill>
                   <a:srgbClr val="FFFFFF"/>
                 </a:solidFill>
@@ -27189,7 +27172,7 @@
               <a:buNone/>
             </a:pPr>
             <a:r>
-              <a:rPr lang="en-US" sz="1300" dirty="0">
+              <a:rPr lang="en-US" sz="1300">
                 <a:solidFill>
                   <a:srgbClr val="3D4A5C"/>
                 </a:solidFill>
@@ -27203,7 +27186,7 @@
               <a:buNone/>
             </a:pPr>
             <a:r>
-              <a:rPr lang="en-US" sz="1300" dirty="0">
+              <a:rPr lang="en-US" sz="1300">
                 <a:solidFill>
                   <a:srgbClr val="3D4A5C"/>
                 </a:solidFill>
@@ -27217,7 +27200,7 @@
               <a:buNone/>
             </a:pPr>
             <a:r>
-              <a:rPr lang="en-US" sz="1300" dirty="0">
+              <a:rPr lang="en-US" sz="1300">
                 <a:solidFill>
                   <a:srgbClr val="3D4A5C"/>
                 </a:solidFill>
@@ -27231,7 +27214,7 @@
               <a:buNone/>
             </a:pPr>
             <a:r>
-              <a:rPr lang="en-US" sz="1300" dirty="0">
+              <a:rPr lang="en-US" sz="1300">
                 <a:solidFill>
                   <a:srgbClr val="3D4A5C"/>
                 </a:solidFill>
@@ -27245,7 +27228,7 @@
               <a:buNone/>
             </a:pPr>
             <a:r>
-              <a:rPr lang="en-US" sz="1200" dirty="0">
+              <a:rPr lang="en-US" sz="1200">
                 <a:solidFill>
                   <a:srgbClr val="FFFFFF"/>
                 </a:solidFill>
@@ -27259,7 +27242,7 @@
               <a:buNone/>
             </a:pPr>
             <a:r>
-              <a:rPr lang="en-US" sz="1300" b="1" dirty="0">
+              <a:rPr lang="en-US" sz="1300" b="1">
                 <a:solidFill>
                   <a:srgbClr val="1A7A7A"/>
                 </a:solidFill>
@@ -27355,7 +27338,7 @@
               <a:buNone/>
             </a:pPr>
             <a:r>
-              <a:rPr lang="en-US" sz="3200" b="1" dirty="0">
+              <a:rPr lang="en-US" sz="3200" b="1">
                 <a:solidFill>
                   <a:srgbClr val="1B2A4A"/>
                 </a:solidFill>
@@ -27365,7 +27348,7 @@
               </a:rPr>
               <a:t>Undefined Terms in Geometry</a:t>
             </a:r>
-            <a:endParaRPr lang="en-US" sz="3200" dirty="0"/>
+            <a:endParaRPr lang="en-US" sz="3200"/>
           </a:p>
         </p:txBody>
       </p:sp>
@@ -27455,7 +27438,7 @@
               <a:buNone/>
             </a:pPr>
             <a:r>
-              <a:rPr lang="en-US" sz="1400" i="1" dirty="0">
+              <a:rPr lang="en-US" sz="1400" i="1">
                 <a:solidFill>
                   <a:srgbClr val="3D4A5C"/>
                 </a:solidFill>
@@ -27465,7 +27448,7 @@
               </a:rPr>
               <a:t>Euclid attempted to define all geometric terms, but some definitions create challenges. We accept that point, line, and plane are undefined terms — we understand them intuitively.</a:t>
             </a:r>
-            <a:endParaRPr lang="en-US" sz="1400" dirty="0"/>
+            <a:endParaRPr lang="en-US" sz="1400"/>
           </a:p>
         </p:txBody>
       </p:sp>
@@ -27555,7 +27538,7 @@
               <a:buNone/>
             </a:pPr>
             <a:r>
-              <a:rPr lang="en-US" sz="2800" dirty="0">
+              <a:rPr lang="en-US" sz="2800">
                 <a:solidFill>
                   <a:srgbClr val="1A7A7A"/>
                 </a:solidFill>
@@ -27565,7 +27548,7 @@
               </a:rPr>
               <a:t>•</a:t>
             </a:r>
-            <a:endParaRPr lang="en-US" sz="2800" dirty="0"/>
+            <a:endParaRPr lang="en-US" sz="2800"/>
           </a:p>
         </p:txBody>
       </p:sp>
@@ -27594,7 +27577,7 @@
               <a:buNone/>
             </a:pPr>
             <a:r>
-              <a:rPr lang="en-US" sz="1800" b="1" dirty="0">
+              <a:rPr lang="en-US" sz="1800" b="1">
                 <a:solidFill>
                   <a:srgbClr val="1B2A4A"/>
                 </a:solidFill>
@@ -27604,7 +27587,7 @@
               </a:rPr>
               <a:t>Point</a:t>
             </a:r>
-            <a:endParaRPr lang="en-US" sz="1800" dirty="0"/>
+            <a:endParaRPr lang="en-US" sz="1800"/>
           </a:p>
         </p:txBody>
       </p:sp>
@@ -27633,7 +27616,7 @@
               <a:buNone/>
             </a:pPr>
             <a:r>
-              <a:rPr lang="en-US" sz="1200" dirty="0">
+              <a:rPr lang="en-US" sz="1200">
                 <a:solidFill>
                   <a:srgbClr val="3D4A5C"/>
                 </a:solidFill>
@@ -27643,7 +27626,7 @@
               </a:rPr>
               <a:t>A location in space with no dimension — no length, width, or height.</a:t>
             </a:r>
-            <a:endParaRPr lang="en-US" sz="1200" dirty="0"/>
+            <a:endParaRPr lang="en-US" sz="1200"/>
           </a:p>
         </p:txBody>
       </p:sp>
@@ -27733,7 +27716,7 @@
               <a:buNone/>
             </a:pPr>
             <a:r>
-              <a:rPr lang="en-US" sz="2800" dirty="0">
+              <a:rPr lang="en-US" sz="2800">
                 <a:solidFill>
                   <a:srgbClr val="1A7A7A"/>
                 </a:solidFill>
@@ -27743,7 +27726,7 @@
               </a:rPr>
               <a:t>↔</a:t>
             </a:r>
-            <a:endParaRPr lang="en-US" sz="2800" dirty="0"/>
+            <a:endParaRPr lang="en-US" sz="2800"/>
           </a:p>
         </p:txBody>
       </p:sp>
@@ -27772,7 +27755,7 @@
               <a:buNone/>
             </a:pPr>
             <a:r>
-              <a:rPr lang="en-US" sz="1800" b="1" dirty="0">
+              <a:rPr lang="en-US" sz="1800" b="1">
                 <a:solidFill>
                   <a:srgbClr val="1B2A4A"/>
                 </a:solidFill>
@@ -27782,7 +27765,7 @@
               </a:rPr>
               <a:t>Line</a:t>
             </a:r>
-            <a:endParaRPr lang="en-US" sz="1800" dirty="0"/>
+            <a:endParaRPr lang="en-US" sz="1800"/>
           </a:p>
         </p:txBody>
       </p:sp>
@@ -27811,7 +27794,7 @@
               <a:buNone/>
             </a:pPr>
             <a:r>
-              <a:rPr lang="en-US" sz="1200" dirty="0">
+              <a:rPr lang="en-US" sz="1200">
                 <a:solidFill>
                   <a:srgbClr val="3D4A5C"/>
                 </a:solidFill>
@@ -27821,7 +27804,7 @@
               </a:rPr>
               <a:t>A straight path extending infinitely in both directions. Has length but no width.</a:t>
             </a:r>
-            <a:endParaRPr lang="en-US" sz="1200" dirty="0"/>
+            <a:endParaRPr lang="en-US" sz="1200"/>
           </a:p>
         </p:txBody>
       </p:sp>
@@ -27911,7 +27894,7 @@
               <a:buNone/>
             </a:pPr>
             <a:r>
-              <a:rPr lang="en-US" sz="2800" dirty="0">
+              <a:rPr lang="en-US" sz="2800">
                 <a:solidFill>
                   <a:srgbClr val="1A7A7A"/>
                 </a:solidFill>
@@ -27921,7 +27904,7 @@
               </a:rPr>
               <a:t>▱</a:t>
             </a:r>
-            <a:endParaRPr lang="en-US" sz="2800" dirty="0"/>
+            <a:endParaRPr lang="en-US" sz="2800"/>
           </a:p>
         </p:txBody>
       </p:sp>
@@ -27950,7 +27933,7 @@
               <a:buNone/>
             </a:pPr>
             <a:r>
-              <a:rPr lang="en-US" sz="1800" b="1" dirty="0">
+              <a:rPr lang="en-US" sz="1800" b="1">
                 <a:solidFill>
                   <a:srgbClr val="1B2A4A"/>
                 </a:solidFill>
@@ -27960,7 +27943,7 @@
               </a:rPr>
               <a:t>Plane</a:t>
             </a:r>
-            <a:endParaRPr lang="en-US" sz="1800" dirty="0"/>
+            <a:endParaRPr lang="en-US" sz="1800"/>
           </a:p>
         </p:txBody>
       </p:sp>
@@ -27989,7 +27972,7 @@
               <a:buNone/>
             </a:pPr>
             <a:r>
-              <a:rPr lang="en-US" sz="1200" dirty="0">
+              <a:rPr lang="en-US" sz="1200">
                 <a:solidFill>
                   <a:srgbClr val="3D4A5C"/>
                 </a:solidFill>
@@ -27999,7 +27982,7 @@
               </a:rPr>
               <a:t>A flat surface that extends infinitely in all directions. Has length and width but no depth.</a:t>
             </a:r>
-            <a:endParaRPr lang="en-US" sz="1200" dirty="0"/>
+            <a:endParaRPr lang="en-US" sz="1200"/>
           </a:p>
         </p:txBody>
       </p:sp>
@@ -28061,7 +28044,7 @@
               <a:buNone/>
             </a:pPr>
             <a:r>
-              <a:rPr lang="en-US" sz="1300" b="1" dirty="0">
+              <a:rPr lang="en-US" sz="1300" b="1">
                 <a:solidFill>
                   <a:srgbClr val="B8922F"/>
                 </a:solidFill>
@@ -28070,7 +28053,7 @@
               <a:t>Why “undefined”? </a:t>
             </a:r>
             <a:r>
-              <a:rPr lang="en-US" sz="1300" dirty="0">
+              <a:rPr lang="en-US" sz="1300">
                 <a:solidFill>
                   <a:srgbClr val="3D4A5C"/>
                 </a:solidFill>
@@ -28166,7 +28149,7 @@
               <a:buNone/>
             </a:pPr>
             <a:r>
-              <a:rPr lang="en-US" sz="2800" b="1" dirty="0">
+              <a:rPr lang="en-US" sz="2800" b="1">
                 <a:solidFill>
                   <a:srgbClr val="1B2A4A"/>
                 </a:solidFill>
@@ -28265,7 +28248,7 @@
               <a:buNone/>
             </a:pPr>
             <a:r>
-              <a:rPr lang="en-US" sz="1600" b="1" dirty="0">
+              <a:rPr lang="en-US" sz="1600" b="1">
                 <a:solidFill>
                   <a:srgbClr val="1A7A7A"/>
                 </a:solidFill>
@@ -28279,7 +28262,7 @@
               <a:buNone/>
             </a:pPr>
             <a:r>
-              <a:rPr lang="en-US" sz="1200" dirty="0">
+              <a:rPr lang="en-US" sz="1200">
                 <a:solidFill>
                   <a:srgbClr val="FFFFFF"/>
                 </a:solidFill>
@@ -28293,7 +28276,7 @@
               <a:buNone/>
             </a:pPr>
             <a:r>
-              <a:rPr lang="en-US" sz="1600" b="1" dirty="0">
+              <a:rPr lang="en-US" sz="1600" b="1">
                 <a:solidFill>
                   <a:srgbClr val="D4A843"/>
                 </a:solidFill>
@@ -28307,7 +28290,7 @@
               <a:buNone/>
             </a:pPr>
             <a:r>
-              <a:rPr lang="en-US" sz="1200" dirty="0">
+              <a:rPr lang="en-US" sz="1200">
                 <a:solidFill>
                   <a:srgbClr val="FFFFFF"/>
                 </a:solidFill>
@@ -28321,7 +28304,7 @@
               <a:buNone/>
             </a:pPr>
             <a:r>
-              <a:rPr lang="en-US" sz="1600" b="1" dirty="0">
+              <a:rPr lang="en-US" sz="1600" b="1">
                 <a:solidFill>
                   <a:srgbClr val="D4A843"/>
                 </a:solidFill>
@@ -28335,7 +28318,7 @@
               <a:buNone/>
             </a:pPr>
             <a:r>
-              <a:rPr lang="en-US" sz="1200" dirty="0">
+              <a:rPr lang="en-US" sz="1200">
                 <a:solidFill>
                   <a:srgbClr val="FFFFFF"/>
                 </a:solidFill>
@@ -28349,7 +28332,7 @@
               <a:buNone/>
             </a:pPr>
             <a:r>
-              <a:rPr lang="en-US" sz="1600" b="1" dirty="0">
+              <a:rPr lang="en-US" sz="1600" b="1">
                 <a:solidFill>
                   <a:srgbClr val="D4A843"/>
                 </a:solidFill>
@@ -28363,7 +28346,7 @@
               <a:buNone/>
             </a:pPr>
             <a:r>
-              <a:rPr lang="en-US" sz="1200" dirty="0">
+              <a:rPr lang="en-US" sz="1200">
                 <a:solidFill>
                   <a:srgbClr val="FFFFFF"/>
                 </a:solidFill>
@@ -28377,7 +28360,7 @@
               <a:buNone/>
             </a:pPr>
             <a:r>
-              <a:rPr lang="en-US" sz="1600" b="1" dirty="0">
+              <a:rPr lang="en-US" sz="1600" b="1">
                 <a:solidFill>
                   <a:srgbClr val="1A7A7A"/>
                 </a:solidFill>
@@ -28391,7 +28374,7 @@
               <a:buNone/>
             </a:pPr>
             <a:r>
-              <a:rPr lang="en-US" sz="1200" dirty="0">
+              <a:rPr lang="en-US" sz="1200">
                 <a:solidFill>
                   <a:srgbClr val="FFFFFF"/>
                 </a:solidFill>
@@ -28405,7 +28388,7 @@
               <a:buNone/>
             </a:pPr>
             <a:r>
-              <a:rPr lang="en-US" sz="1300" dirty="0">
+              <a:rPr lang="en-US" sz="1300">
                 <a:solidFill>
                   <a:srgbClr val="3D4A5C"/>
                 </a:solidFill>
@@ -28419,7 +28402,7 @@
               <a:buNone/>
             </a:pPr>
             <a:r>
-              <a:rPr lang="en-US" sz="1300" dirty="0">
+              <a:rPr lang="en-US" sz="1300">
                 <a:solidFill>
                   <a:srgbClr val="3D4A5C"/>
                 </a:solidFill>
@@ -28433,7 +28416,7 @@
               <a:buNone/>
             </a:pPr>
             <a:r>
-              <a:rPr lang="en-US" sz="1300" dirty="0">
+              <a:rPr lang="en-US" sz="1300">
                 <a:solidFill>
                   <a:srgbClr val="3D4A5C"/>
                 </a:solidFill>
@@ -28447,7 +28430,7 @@
               <a:buNone/>
             </a:pPr>
             <a:r>
-              <a:rPr lang="en-US" sz="1600" b="1" dirty="0">
+              <a:rPr lang="en-US" sz="1600" b="1">
                 <a:solidFill>
                   <a:srgbClr val="D4A843"/>
                 </a:solidFill>
@@ -28461,7 +28444,7 @@
               <a:buNone/>
             </a:pPr>
             <a:r>
-              <a:rPr lang="en-US" sz="1200" dirty="0">
+              <a:rPr lang="en-US" sz="1200">
                 <a:solidFill>
                   <a:srgbClr val="FFFFFF"/>
                 </a:solidFill>
@@ -28557,7 +28540,7 @@
               <a:buNone/>
             </a:pPr>
             <a:r>
-              <a:rPr lang="en-US" sz="2800" b="1" dirty="0">
+              <a:rPr lang="en-US" sz="2800" b="1">
                 <a:solidFill>
                   <a:srgbClr val="1B2A4A"/>
                 </a:solidFill>
@@ -28656,7 +28639,7 @@
               <a:buNone/>
             </a:pPr>
             <a:r>
-              <a:rPr lang="en-US" sz="1600" b="1" dirty="0">
+              <a:rPr lang="en-US" sz="1600" b="1">
                 <a:solidFill>
                   <a:srgbClr val="1A7A7A"/>
                 </a:solidFill>
@@ -28670,7 +28653,7 @@
               <a:buNone/>
             </a:pPr>
             <a:r>
-              <a:rPr lang="en-US" sz="1200" dirty="0">
+              <a:rPr lang="en-US" sz="1200">
                 <a:solidFill>
                   <a:srgbClr val="FFFFFF"/>
                 </a:solidFill>
@@ -28684,7 +28667,7 @@
               <a:buNone/>
             </a:pPr>
             <a:r>
-              <a:rPr lang="en-US" sz="1600" b="1" dirty="0">
+              <a:rPr lang="en-US" sz="1600" b="1">
                 <a:solidFill>
                   <a:srgbClr val="D4A843"/>
                 </a:solidFill>
@@ -28698,7 +28681,7 @@
               <a:buNone/>
             </a:pPr>
             <a:r>
-              <a:rPr lang="en-US" sz="1200" dirty="0">
+              <a:rPr lang="en-US" sz="1200">
                 <a:solidFill>
                   <a:srgbClr val="FFFFFF"/>
                 </a:solidFill>
@@ -28712,7 +28695,7 @@
               <a:buNone/>
             </a:pPr>
             <a:r>
-              <a:rPr lang="en-US" sz="1600" b="1" dirty="0">
+              <a:rPr lang="en-US" sz="1600" b="1">
                 <a:solidFill>
                   <a:srgbClr val="D4A843"/>
                 </a:solidFill>
@@ -28726,7 +28709,7 @@
               <a:buNone/>
             </a:pPr>
             <a:r>
-              <a:rPr lang="en-US" sz="1200" dirty="0">
+              <a:rPr lang="en-US" sz="1200">
                 <a:solidFill>
                   <a:srgbClr val="FFFFFF"/>
                 </a:solidFill>
@@ -28740,7 +28723,7 @@
               <a:buNone/>
             </a:pPr>
             <a:r>
-              <a:rPr lang="en-US" sz="1600" b="1" dirty="0">
+              <a:rPr lang="en-US" sz="1600" b="1">
                 <a:solidFill>
                   <a:srgbClr val="D4A843"/>
                 </a:solidFill>
@@ -28754,7 +28737,7 @@
               <a:buNone/>
             </a:pPr>
             <a:r>
-              <a:rPr lang="en-US" sz="1200" dirty="0">
+              <a:rPr lang="en-US" sz="1200">
                 <a:solidFill>
                   <a:srgbClr val="FFFFFF"/>
                 </a:solidFill>
@@ -28768,7 +28751,7 @@
               <a:buNone/>
             </a:pPr>
             <a:r>
-              <a:rPr lang="en-US" sz="1600" b="1" dirty="0">
+              <a:rPr lang="en-US" sz="1600" b="1">
                 <a:solidFill>
                   <a:srgbClr val="1A7A7A"/>
                 </a:solidFill>
@@ -28782,7 +28765,7 @@
               <a:buNone/>
             </a:pPr>
             <a:r>
-              <a:rPr lang="en-US" sz="1200" dirty="0">
+              <a:rPr lang="en-US" sz="1200">
                 <a:solidFill>
                   <a:srgbClr val="FFFFFF"/>
                 </a:solidFill>
@@ -28796,7 +28779,7 @@
               <a:buNone/>
             </a:pPr>
             <a:r>
-              <a:rPr lang="en-US" sz="1300" dirty="0">
+              <a:rPr lang="en-US" sz="1300">
                 <a:solidFill>
                   <a:srgbClr val="3D4A5C"/>
                 </a:solidFill>
@@ -28810,7 +28793,7 @@
               <a:buNone/>
             </a:pPr>
             <a:r>
-              <a:rPr lang="en-US" sz="1300" dirty="0">
+              <a:rPr lang="en-US" sz="1300">
                 <a:solidFill>
                   <a:srgbClr val="3D4A5C"/>
                 </a:solidFill>
@@ -28824,7 +28807,7 @@
               <a:buNone/>
             </a:pPr>
             <a:r>
-              <a:rPr lang="en-US" sz="1300" dirty="0">
+              <a:rPr lang="en-US" sz="1300">
                 <a:solidFill>
                   <a:srgbClr val="3D4A5C"/>
                 </a:solidFill>
@@ -28838,7 +28821,7 @@
               <a:buNone/>
             </a:pPr>
             <a:r>
-              <a:rPr lang="en-US" sz="1300" dirty="0">
+              <a:rPr lang="en-US" sz="1300">
                 <a:solidFill>
                   <a:srgbClr val="3D4A5C"/>
                 </a:solidFill>
@@ -28852,7 +28835,7 @@
               <a:buNone/>
             </a:pPr>
             <a:r>
-              <a:rPr lang="en-US" sz="1600" b="1" dirty="0">
+              <a:rPr lang="en-US" sz="1600" b="1">
                 <a:solidFill>
                   <a:srgbClr val="D4A843"/>
                 </a:solidFill>
@@ -28866,7 +28849,7 @@
               <a:buNone/>
             </a:pPr>
             <a:r>
-              <a:rPr lang="en-US" sz="1200" dirty="0">
+              <a:rPr lang="en-US" sz="1200">
                 <a:solidFill>
                   <a:srgbClr val="FFFFFF"/>
                 </a:solidFill>
@@ -28935,7 +28918,7 @@
               <a:buNone/>
             </a:pPr>
             <a:r>
-              <a:rPr lang="en-US" sz="1300" b="1" dirty="0">
+              <a:rPr lang="en-US" sz="1300" b="1">
                 <a:solidFill>
                   <a:srgbClr val="C0392B"/>
                 </a:solidFill>
@@ -28944,7 +28927,7 @@
               <a:t>Common mistake: </a:t>
             </a:r>
             <a:r>
-              <a:rPr lang="en-US" sz="1300" dirty="0">
+              <a:rPr lang="en-US" sz="1300">
                 <a:solidFill>
                   <a:srgbClr val="3D4A5C"/>
                 </a:solidFill>
@@ -29040,7 +29023,7 @@
               <a:buNone/>
             </a:pPr>
             <a:r>
-              <a:rPr lang="en-US" sz="1900" b="1" dirty="0">
+              <a:rPr lang="en-US" sz="1900" b="1">
                 <a:solidFill>
                   <a:srgbClr val="1B2A4A"/>
                 </a:solidFill>
@@ -29192,7 +29175,7 @@
               <a:buNone/>
             </a:pPr>
             <a:r>
-              <a:rPr lang="en-US" sz="1500" b="1" dirty="0">
+              <a:rPr lang="en-US" sz="1500" b="1">
                 <a:solidFill>
                   <a:srgbClr val="1A7A7A"/>
                 </a:solidFill>
@@ -29206,7 +29189,7 @@
               <a:buNone/>
             </a:pPr>
             <a:r>
-              <a:rPr lang="en-US" sz="1200" dirty="0">
+              <a:rPr lang="en-US" sz="1200">
                 <a:solidFill>
                   <a:srgbClr val="FFFFFF"/>
                 </a:solidFill>
@@ -29220,7 +29203,7 @@
               <a:buNone/>
             </a:pPr>
             <a:r>
-              <a:rPr lang="en-US" sz="1300" dirty="0">
+              <a:rPr lang="en-US" sz="1300">
                 <a:solidFill>
                   <a:srgbClr val="3D4A5C"/>
                 </a:solidFill>
@@ -29229,7 +29212,7 @@
               <a:t>Historically, one </a:t>
             </a:r>
             <a:r>
-              <a:rPr lang="en-US" sz="1300" b="1" dirty="0">
+              <a:rPr lang="en-US" sz="1300" b="1">
                 <a:solidFill>
                   <a:srgbClr val="3D4A5C"/>
                 </a:solidFill>
@@ -29238,7 +29221,7 @@
               <a:t>nautical mile</a:t>
             </a:r>
             <a:r>
-              <a:rPr lang="en-US" sz="1300" dirty="0">
+              <a:rPr lang="en-US" sz="1300">
                 <a:solidFill>
                   <a:srgbClr val="3D4A5C"/>
                 </a:solidFill>
@@ -29247,7 +29230,7 @@
               <a:t> was defined as the distance of </a:t>
             </a:r>
             <a:r>
-              <a:rPr lang="en-US" sz="1300" b="1" dirty="0">
+              <a:rPr lang="en-US" sz="1300" b="1">
                 <a:solidFill>
                   <a:srgbClr val="3D4A5C"/>
                 </a:solidFill>
@@ -29256,7 +29239,7 @@
               <a:t>one minute of latitude</a:t>
             </a:r>
             <a:r>
-              <a:rPr lang="en-US" sz="1300" dirty="0">
+              <a:rPr lang="en-US" sz="1300">
                 <a:solidFill>
                   <a:srgbClr val="3D4A5C"/>
                 </a:solidFill>
@@ -29270,7 +29253,7 @@
               <a:buNone/>
             </a:pPr>
             <a:r>
-              <a:rPr lang="en-US" sz="1200" dirty="0">
+              <a:rPr lang="en-US" sz="1200">
                 <a:solidFill>
                   <a:srgbClr val="FFFFFF"/>
                 </a:solidFill>
@@ -29284,7 +29267,7 @@
               <a:buNone/>
             </a:pPr>
             <a:r>
-              <a:rPr lang="en-US" sz="1400" b="1" dirty="0">
+              <a:rPr lang="en-US" sz="1400" b="1">
                 <a:solidFill>
                   <a:srgbClr val="1B2A4A"/>
                 </a:solidFill>
@@ -29298,7 +29281,7 @@
               <a:buNone/>
             </a:pPr>
             <a:r>
-              <a:rPr lang="en-US" sz="1200" dirty="0">
+              <a:rPr lang="en-US" sz="1200">
                 <a:solidFill>
                   <a:srgbClr val="FFFFFF"/>
                 </a:solidFill>
@@ -29312,7 +29295,7 @@
               <a:buNone/>
             </a:pPr>
             <a:r>
-              <a:rPr lang="en-US" sz="1300" dirty="0">
+              <a:rPr lang="en-US" sz="1300">
                 <a:solidFill>
                   <a:srgbClr val="3D4A5C"/>
                 </a:solidFill>
@@ -29326,7 +29309,7 @@
               <a:buNone/>
             </a:pPr>
             <a:r>
-              <a:rPr lang="en-US" sz="1400" b="1" dirty="0">
+              <a:rPr lang="en-US" sz="1400" b="1">
                 <a:solidFill>
                   <a:srgbClr val="D4A843"/>
                 </a:solidFill>
@@ -29340,7 +29323,7 @@
               <a:buNone/>
             </a:pPr>
             <a:r>
-              <a:rPr lang="en-US" sz="1200" dirty="0">
+              <a:rPr lang="en-US" sz="1200">
                 <a:solidFill>
                   <a:srgbClr val="FFFFFF"/>
                 </a:solidFill>
@@ -29354,7 +29337,7 @@
               <a:buNone/>
             </a:pPr>
             <a:r>
-              <a:rPr lang="en-US" sz="1300" b="1" dirty="0">
+              <a:rPr lang="en-US" sz="1300" b="1">
                 <a:solidFill>
                   <a:srgbClr val="1A7A7A"/>
                 </a:solidFill>
@@ -29368,7 +29351,7 @@
               <a:buNone/>
             </a:pPr>
             <a:r>
-              <a:rPr lang="en-US" sz="1300" dirty="0">
+              <a:rPr lang="en-US" sz="1300">
                 <a:solidFill>
                   <a:srgbClr val="3D4A5C"/>
                 </a:solidFill>
@@ -29382,7 +29365,7 @@
               <a:buNone/>
             </a:pPr>
             <a:r>
-              <a:rPr lang="en-US" sz="1200" dirty="0">
+              <a:rPr lang="en-US" sz="1200">
                 <a:solidFill>
                   <a:srgbClr val="FFFFFF"/>
                 </a:solidFill>
@@ -29396,7 +29379,7 @@
               <a:buNone/>
             </a:pPr>
             <a:r>
-              <a:rPr lang="en-US" sz="1300" b="1" dirty="0">
+              <a:rPr lang="en-US" sz="1300" b="1">
                 <a:solidFill>
                   <a:srgbClr val="1A7A7A"/>
                 </a:solidFill>
@@ -29410,7 +29393,7 @@
               <a:buNone/>
             </a:pPr>
             <a:r>
-              <a:rPr lang="en-US" sz="1300" dirty="0">
+              <a:rPr lang="en-US" sz="1300">
                 <a:solidFill>
                   <a:srgbClr val="3D4A5C"/>
                 </a:solidFill>
@@ -29506,7 +29489,7 @@
               <a:buNone/>
             </a:pPr>
             <a:r>
-              <a:rPr lang="en-US" sz="2800" b="1" dirty="0">
+              <a:rPr lang="en-US" sz="2800" b="1">
                 <a:solidFill>
                   <a:srgbClr val="1B2A4A"/>
                 </a:solidFill>
@@ -29542,7 +29525,7 @@
               <a:buNone/>
             </a:pPr>
             <a:r>
-              <a:rPr lang="en-US" sz="1300" dirty="0">
+              <a:rPr lang="en-US" sz="1300">
                 <a:solidFill>
                   <a:srgbClr val="5C6B7A"/>
                 </a:solidFill>
@@ -29645,7 +29628,7 @@
               <a:buNone/>
             </a:pPr>
             <a:r>
-              <a:rPr lang="en-US" sz="1400" b="1" dirty="0">
+              <a:rPr lang="en-US" sz="1400" b="1">
                 <a:solidFill>
                   <a:srgbClr val="1A7A7A"/>
                 </a:solidFill>
@@ -29659,7 +29642,7 @@
               <a:buNone/>
             </a:pPr>
             <a:r>
-              <a:rPr lang="en-US" sz="1200" dirty="0">
+              <a:rPr lang="en-US" sz="1200">
                 <a:solidFill>
                   <a:srgbClr val="FFFFFF"/>
                 </a:solidFill>
@@ -29673,7 +29656,7 @@
               <a:buNone/>
             </a:pPr>
             <a:r>
-              <a:rPr lang="en-US" sz="1200" dirty="0">
+              <a:rPr lang="en-US" sz="1200">
                 <a:solidFill>
                   <a:srgbClr val="3D4A5C"/>
                 </a:solidFill>
@@ -29776,7 +29759,7 @@
               <a:buNone/>
             </a:pPr>
             <a:r>
-              <a:rPr lang="en-US" sz="1400" b="1" dirty="0">
+              <a:rPr lang="en-US" sz="1400" b="1">
                 <a:solidFill>
                   <a:srgbClr val="D4A843"/>
                 </a:solidFill>
@@ -29790,7 +29773,7 @@
               <a:buNone/>
             </a:pPr>
             <a:r>
-              <a:rPr lang="en-US" sz="1200" dirty="0">
+              <a:rPr lang="en-US" sz="1200">
                 <a:solidFill>
                   <a:srgbClr val="FFFFFF"/>
                 </a:solidFill>
@@ -29804,7 +29787,7 @@
               <a:buNone/>
             </a:pPr>
             <a:r>
-              <a:rPr lang="en-US" sz="1200" dirty="0">
+              <a:rPr lang="en-US" sz="1200">
                 <a:solidFill>
                   <a:srgbClr val="3D4A5C"/>
                 </a:solidFill>
@@ -29907,7 +29890,7 @@
               <a:buNone/>
             </a:pPr>
             <a:r>
-              <a:rPr lang="en-US" sz="1400" b="1" dirty="0">
+              <a:rPr lang="en-US" sz="1400" b="1">
                 <a:solidFill>
                   <a:srgbClr val="1A7A7A"/>
                 </a:solidFill>
@@ -29921,7 +29904,7 @@
               <a:buNone/>
             </a:pPr>
             <a:r>
-              <a:rPr lang="en-US" sz="1200" dirty="0">
+              <a:rPr lang="en-US" sz="1200">
                 <a:solidFill>
                   <a:srgbClr val="FFFFFF"/>
                 </a:solidFill>
@@ -29935,7 +29918,7 @@
               <a:buNone/>
             </a:pPr>
             <a:r>
-              <a:rPr lang="en-US" sz="1200" dirty="0">
+              <a:rPr lang="en-US" sz="1200">
                 <a:solidFill>
                   <a:srgbClr val="3D4A5C"/>
                 </a:solidFill>
@@ -30038,7 +30021,7 @@
               <a:buNone/>
             </a:pPr>
             <a:r>
-              <a:rPr lang="en-US" sz="1400" b="1" dirty="0">
+              <a:rPr lang="en-US" sz="1400" b="1">
                 <a:solidFill>
                   <a:srgbClr val="D4A843"/>
                 </a:solidFill>
@@ -30052,7 +30035,7 @@
               <a:buNone/>
             </a:pPr>
             <a:r>
-              <a:rPr lang="en-US" sz="1200" dirty="0">
+              <a:rPr lang="en-US" sz="1200">
                 <a:solidFill>
                   <a:srgbClr val="FFFFFF"/>
                 </a:solidFill>
@@ -30066,7 +30049,7 @@
               <a:buNone/>
             </a:pPr>
             <a:r>
-              <a:rPr lang="en-US" sz="1200" dirty="0">
+              <a:rPr lang="en-US" sz="1200">
                 <a:solidFill>
                   <a:srgbClr val="3D4A5C"/>
                 </a:solidFill>
@@ -30169,7 +30152,7 @@
               <a:buNone/>
             </a:pPr>
             <a:r>
-              <a:rPr lang="en-US" sz="1400" b="1" dirty="0">
+              <a:rPr lang="en-US" sz="1400" b="1">
                 <a:solidFill>
                   <a:srgbClr val="1A7A7A"/>
                 </a:solidFill>
@@ -30183,7 +30166,7 @@
               <a:buNone/>
             </a:pPr>
             <a:r>
-              <a:rPr lang="en-US" sz="1200" dirty="0">
+              <a:rPr lang="en-US" sz="1200">
                 <a:solidFill>
                   <a:srgbClr val="FFFFFF"/>
                 </a:solidFill>
@@ -30197,7 +30180,7 @@
               <a:buNone/>
             </a:pPr>
             <a:r>
-              <a:rPr lang="en-US" sz="1200" dirty="0">
+              <a:rPr lang="en-US" sz="1200">
                 <a:solidFill>
                   <a:srgbClr val="3D4A5C"/>
                 </a:solidFill>
@@ -30293,7 +30276,7 @@
               <a:buNone/>
             </a:pPr>
             <a:r>
-              <a:rPr lang="en-US" sz="3000" b="1" dirty="0">
+              <a:rPr lang="en-US" sz="3000" b="1">
                 <a:solidFill>
                   <a:srgbClr val="1B2A4A"/>
                 </a:solidFill>
@@ -30303,7 +30286,7 @@
               </a:rPr>
               <a:t>Quiz Preparation: Key Skills</a:t>
             </a:r>
-            <a:endParaRPr lang="en-US" sz="3000" dirty="0"/>
+            <a:endParaRPr lang="en-US" sz="3000"/>
           </a:p>
         </p:txBody>
       </p:sp>
@@ -30393,7 +30376,7 @@
               <a:buNone/>
             </a:pPr>
             <a:r>
-              <a:rPr lang="en-US" sz="1300" b="1" dirty="0">
+              <a:rPr lang="en-US" sz="1300" b="1">
                 <a:solidFill>
                   <a:srgbClr val="FFFFFF"/>
                 </a:solidFill>
@@ -30403,7 +30386,7 @@
               </a:rPr>
               <a:t>1</a:t>
             </a:r>
-            <a:endParaRPr lang="en-US" sz="1300" dirty="0"/>
+            <a:endParaRPr lang="en-US" sz="1300"/>
           </a:p>
         </p:txBody>
       </p:sp>
@@ -30432,7 +30415,7 @@
               <a:buNone/>
             </a:pPr>
             <a:r>
-              <a:rPr lang="en-US" sz="1300" b="1" dirty="0">
+              <a:rPr lang="en-US" sz="1300" b="1">
                 <a:solidFill>
                   <a:srgbClr val="1B2A4A"/>
                 </a:solidFill>
@@ -30442,7 +30425,7 @@
               </a:rPr>
               <a:t>Similar Triangles</a:t>
             </a:r>
-            <a:endParaRPr lang="en-US" sz="1300" dirty="0"/>
+            <a:endParaRPr lang="en-US" sz="1300"/>
           </a:p>
         </p:txBody>
       </p:sp>
@@ -30471,7 +30454,7 @@
               <a:buNone/>
             </a:pPr>
             <a:r>
-              <a:rPr lang="en-US" sz="1200" dirty="0">
+              <a:rPr lang="en-US" sz="1200">
                 <a:solidFill>
                   <a:srgbClr val="3D4A5C"/>
                 </a:solidFill>
@@ -30481,7 +30464,7 @@
               </a:rPr>
               <a:t>Find missing angles and sides using proportions (△MNP ~ △QRS)</a:t>
             </a:r>
-            <a:endParaRPr lang="en-US" sz="1200" dirty="0"/>
+            <a:endParaRPr lang="en-US" sz="1200"/>
           </a:p>
         </p:txBody>
       </p:sp>
@@ -30564,7 +30547,7 @@
               <a:buNone/>
             </a:pPr>
             <a:r>
-              <a:rPr lang="en-US" sz="1300" b="1" dirty="0">
+              <a:rPr lang="en-US" sz="1300" b="1">
                 <a:solidFill>
                   <a:srgbClr val="FFFFFF"/>
                 </a:solidFill>
@@ -30574,7 +30557,7 @@
               </a:rPr>
               <a:t>2</a:t>
             </a:r>
-            <a:endParaRPr lang="en-US" sz="1300" dirty="0"/>
+            <a:endParaRPr lang="en-US" sz="1300"/>
           </a:p>
         </p:txBody>
       </p:sp>
@@ -30603,7 +30586,7 @@
               <a:buNone/>
             </a:pPr>
             <a:r>
-              <a:rPr lang="en-US" sz="1300" b="1" dirty="0">
+              <a:rPr lang="en-US" sz="1300" b="1">
                 <a:solidFill>
                   <a:srgbClr val="1B2A4A"/>
                 </a:solidFill>
@@ -30613,7 +30596,7 @@
               </a:rPr>
               <a:t>Parallel Lines &amp; Angles</a:t>
             </a:r>
-            <a:endParaRPr lang="en-US" sz="1300" dirty="0"/>
+            <a:endParaRPr lang="en-US" sz="1300"/>
           </a:p>
         </p:txBody>
       </p:sp>
@@ -30642,7 +30625,7 @@
               <a:buNone/>
             </a:pPr>
             <a:r>
-              <a:rPr lang="en-US" sz="1200" dirty="0">
+              <a:rPr lang="en-US" sz="1200">
                 <a:solidFill>
                   <a:srgbClr val="3D4A5C"/>
                 </a:solidFill>
@@ -30652,7 +30635,7 @@
               </a:rPr>
               <a:t>Identify corresponding, alternate interior, and alternate exterior angles</a:t>
             </a:r>
-            <a:endParaRPr lang="en-US" sz="1200" dirty="0"/>
+            <a:endParaRPr lang="en-US" sz="1200"/>
           </a:p>
         </p:txBody>
       </p:sp>
@@ -30742,7 +30725,7 @@
               <a:buNone/>
             </a:pPr>
             <a:r>
-              <a:rPr lang="en-US" sz="1300" b="1" dirty="0">
+              <a:rPr lang="en-US" sz="1300" b="1">
                 <a:solidFill>
                   <a:srgbClr val="FFFFFF"/>
                 </a:solidFill>
@@ -30752,7 +30735,7 @@
               </a:rPr>
               <a:t>3</a:t>
             </a:r>
-            <a:endParaRPr lang="en-US" sz="1300" dirty="0"/>
+            <a:endParaRPr lang="en-US" sz="1300"/>
           </a:p>
         </p:txBody>
       </p:sp>
@@ -30781,7 +30764,7 @@
               <a:buNone/>
             </a:pPr>
             <a:r>
-              <a:rPr lang="en-US" sz="1300" b="1" dirty="0">
+              <a:rPr lang="en-US" sz="1300" b="1">
                 <a:solidFill>
                   <a:srgbClr val="1B2A4A"/>
                 </a:solidFill>
@@ -30791,7 +30774,7 @@
               </a:rPr>
               <a:t>Triangle Areas</a:t>
             </a:r>
-            <a:endParaRPr lang="en-US" sz="1300" dirty="0"/>
+            <a:endParaRPr lang="en-US" sz="1300"/>
           </a:p>
         </p:txBody>
       </p:sp>
@@ -30820,7 +30803,7 @@
               <a:buNone/>
             </a:pPr>
             <a:r>
-              <a:rPr lang="en-US" sz="1200" dirty="0">
+              <a:rPr lang="en-US" sz="1200">
                 <a:solidFill>
                   <a:srgbClr val="3D4A5C"/>
                 </a:solidFill>
@@ -30830,7 +30813,7 @@
               </a:rPr>
               <a:t>Use A = ½bh, equilateral formula, and Heron's formula</a:t>
             </a:r>
-            <a:endParaRPr lang="en-US" sz="1200" dirty="0"/>
+            <a:endParaRPr lang="en-US" sz="1200"/>
           </a:p>
         </p:txBody>
       </p:sp>
@@ -30913,7 +30896,7 @@
               <a:buNone/>
             </a:pPr>
             <a:r>
-              <a:rPr lang="en-US" sz="1300" b="1" dirty="0">
+              <a:rPr lang="en-US" sz="1300" b="1">
                 <a:solidFill>
                   <a:srgbClr val="FFFFFF"/>
                 </a:solidFill>
@@ -30923,7 +30906,7 @@
               </a:rPr>
               <a:t>4</a:t>
             </a:r>
-            <a:endParaRPr lang="en-US" sz="1300" dirty="0"/>
+            <a:endParaRPr lang="en-US" sz="1300"/>
           </a:p>
         </p:txBody>
       </p:sp>
@@ -30952,7 +30935,7 @@
               <a:buNone/>
             </a:pPr>
             <a:r>
-              <a:rPr lang="en-US" sz="1300" b="1" dirty="0">
+              <a:rPr lang="en-US" sz="1300" b="1">
                 <a:solidFill>
                   <a:srgbClr val="1B2A4A"/>
                 </a:solidFill>
@@ -30962,7 +30945,7 @@
               </a:rPr>
               <a:t>Compound Shapes</a:t>
             </a:r>
-            <a:endParaRPr lang="en-US" sz="1300" dirty="0"/>
+            <a:endParaRPr lang="en-US" sz="1300"/>
           </a:p>
         </p:txBody>
       </p:sp>
@@ -30991,7 +30974,7 @@
               <a:buNone/>
             </a:pPr>
             <a:r>
-              <a:rPr lang="en-US" sz="1200" dirty="0">
+              <a:rPr lang="en-US" sz="1200">
                 <a:solidFill>
                   <a:srgbClr val="3D4A5C"/>
                 </a:solidFill>
@@ -31001,7 +30984,7 @@
               </a:rPr>
               <a:t>Break complex shapes into parallelograms and rectangles, sum the areas</a:t>
             </a:r>
-            <a:endParaRPr lang="en-US" sz="1200" dirty="0"/>
+            <a:endParaRPr lang="en-US" sz="1200"/>
           </a:p>
         </p:txBody>
       </p:sp>
@@ -31091,7 +31074,7 @@
               <a:buNone/>
             </a:pPr>
             <a:r>
-              <a:rPr lang="en-US" sz="1300" b="1" dirty="0">
+              <a:rPr lang="en-US" sz="1300" b="1">
                 <a:solidFill>
                   <a:srgbClr val="FFFFFF"/>
                 </a:solidFill>
@@ -31101,7 +31084,7 @@
               </a:rPr>
               <a:t>5</a:t>
             </a:r>
-            <a:endParaRPr lang="en-US" sz="1300" dirty="0"/>
+            <a:endParaRPr lang="en-US" sz="1300"/>
           </a:p>
         </p:txBody>
       </p:sp>
@@ -31130,7 +31113,7 @@
               <a:buNone/>
             </a:pPr>
             <a:r>
-              <a:rPr lang="en-US" sz="1300" b="1" dirty="0">
+              <a:rPr lang="en-US" sz="1300" b="1">
                 <a:solidFill>
                   <a:srgbClr val="1B2A4A"/>
                 </a:solidFill>
@@ -31140,7 +31123,7 @@
               </a:rPr>
               <a:t>Polygon Angle Sums</a:t>
             </a:r>
-            <a:endParaRPr lang="en-US" sz="1300" dirty="0"/>
+            <a:endParaRPr lang="en-US" sz="1300"/>
           </a:p>
         </p:txBody>
       </p:sp>
@@ -31169,7 +31152,7 @@
               <a:buNone/>
             </a:pPr>
             <a:r>
-              <a:rPr lang="en-US" sz="1200" dirty="0">
+              <a:rPr lang="en-US" sz="1200">
                 <a:solidFill>
                   <a:srgbClr val="3D4A5C"/>
                 </a:solidFill>
@@ -31179,7 +31162,7 @@
               </a:rPr>
               <a:t>Interior: (n−2)×180°, Exterior: always 360°, Regular: (n−2)×180°/n</a:t>
             </a:r>
-            <a:endParaRPr lang="en-US" sz="1200" dirty="0"/>
+            <a:endParaRPr lang="en-US" sz="1200"/>
           </a:p>
         </p:txBody>
       </p:sp>
@@ -31262,7 +31245,7 @@
               <a:buNone/>
             </a:pPr>
             <a:r>
-              <a:rPr lang="en-US" sz="1300" b="1" dirty="0">
+              <a:rPr lang="en-US" sz="1300" b="1">
                 <a:solidFill>
                   <a:srgbClr val="FFFFFF"/>
                 </a:solidFill>
@@ -31272,7 +31255,7 @@
               </a:rPr>
               <a:t>6</a:t>
             </a:r>
-            <a:endParaRPr lang="en-US" sz="1300" dirty="0"/>
+            <a:endParaRPr lang="en-US" sz="1300"/>
           </a:p>
         </p:txBody>
       </p:sp>
@@ -31301,7 +31284,7 @@
               <a:buNone/>
             </a:pPr>
             <a:r>
-              <a:rPr lang="en-US" sz="1300" b="1" dirty="0">
+              <a:rPr lang="en-US" sz="1300" b="1">
                 <a:solidFill>
                   <a:srgbClr val="1B2A4A"/>
                 </a:solidFill>
@@ -31311,7 +31294,7 @@
               </a:rPr>
               <a:t>Trapezoid Area</a:t>
             </a:r>
-            <a:endParaRPr lang="en-US" sz="1300" dirty="0"/>
+            <a:endParaRPr lang="en-US" sz="1300"/>
           </a:p>
         </p:txBody>
       </p:sp>
@@ -31340,7 +31323,7 @@
               <a:buNone/>
             </a:pPr>
             <a:r>
-              <a:rPr lang="en-US" sz="1200" dirty="0">
+              <a:rPr lang="en-US" sz="1200">
                 <a:solidFill>
                   <a:srgbClr val="3D4A5C"/>
                 </a:solidFill>
@@ -31350,7 +31333,7 @@
               </a:rPr>
               <a:t>A = ½(b₁ + b₂)h — identify bases, height, and any diagonal measurements</a:t>
             </a:r>
-            <a:endParaRPr lang="en-US" sz="1200" dirty="0"/>
+            <a:endParaRPr lang="en-US" sz="1200"/>
           </a:p>
         </p:txBody>
       </p:sp>
@@ -31406,7 +31389,7 @@
               <a:buNone/>
             </a:pPr>
             <a:r>
-              <a:rPr lang="en-US" sz="1300" b="1" dirty="0">
+              <a:rPr lang="en-US" sz="1300" b="1">
                 <a:solidFill>
                   <a:srgbClr val="4ECDC4"/>
                 </a:solidFill>
@@ -31416,7 +31399,7 @@
               </a:rPr>
               <a:t>Remember: Show all work for full credit!  Label your units.</a:t>
             </a:r>
-            <a:endParaRPr lang="en-US" sz="1300" dirty="0"/>
+            <a:endParaRPr lang="en-US" sz="1300"/>
           </a:p>
         </p:txBody>
       </p:sp>
@@ -31505,7 +31488,7 @@
               <a:buNone/>
             </a:pPr>
             <a:r>
-              <a:rPr lang="en-US" sz="2800" b="1" dirty="0">
+              <a:rPr lang="en-US" sz="2800" b="1">
                 <a:solidFill>
                   <a:srgbClr val="1B2A4A"/>
                 </a:solidFill>
@@ -31604,7 +31587,7 @@
               <a:buNone/>
             </a:pPr>
             <a:r>
-              <a:rPr lang="en-US" sz="1600" b="1" dirty="0">
+              <a:rPr lang="en-US" sz="1600" b="1">
                 <a:solidFill>
                   <a:srgbClr val="D4A843"/>
                 </a:solidFill>
@@ -31618,7 +31601,7 @@
               <a:buNone/>
             </a:pPr>
             <a:r>
-              <a:rPr lang="en-US" sz="1200" dirty="0">
+              <a:rPr lang="en-US" sz="1200">
                 <a:solidFill>
                   <a:srgbClr val="FFFFFF"/>
                 </a:solidFill>
@@ -31632,7 +31615,7 @@
               <a:buNone/>
             </a:pPr>
             <a:r>
-              <a:rPr lang="en-US" sz="1600" b="1" dirty="0">
+              <a:rPr lang="en-US" sz="1600" b="1">
                 <a:solidFill>
                   <a:srgbClr val="1A7A7A"/>
                 </a:solidFill>
@@ -31646,7 +31629,7 @@
               <a:buNone/>
             </a:pPr>
             <a:r>
-              <a:rPr lang="en-US" sz="1200" dirty="0">
+              <a:rPr lang="en-US" sz="1200">
                 <a:solidFill>
                   <a:srgbClr val="FFFFFF"/>
                 </a:solidFill>
@@ -31660,7 +31643,7 @@
               <a:buNone/>
             </a:pPr>
             <a:r>
-              <a:rPr lang="en-US" sz="1300" dirty="0">
+              <a:rPr lang="en-US" sz="1300">
                 <a:solidFill>
                   <a:srgbClr val="3D4A5C"/>
                 </a:solidFill>
@@ -31674,7 +31657,7 @@
               <a:buNone/>
             </a:pPr>
             <a:r>
-              <a:rPr lang="en-US" sz="1600" b="1" dirty="0">
+              <a:rPr lang="en-US" sz="1600" b="1">
                 <a:solidFill>
                   <a:srgbClr val="1A7A7A"/>
                 </a:solidFill>
@@ -31688,7 +31671,7 @@
               <a:buNone/>
             </a:pPr>
             <a:r>
-              <a:rPr lang="en-US" sz="1200" dirty="0">
+              <a:rPr lang="en-US" sz="1200">
                 <a:solidFill>
                   <a:srgbClr val="FFFFFF"/>
                 </a:solidFill>
@@ -31702,7 +31685,7 @@
               <a:buNone/>
             </a:pPr>
             <a:r>
-              <a:rPr lang="en-US" sz="1300" dirty="0">
+              <a:rPr lang="en-US" sz="1300">
                 <a:solidFill>
                   <a:srgbClr val="3D4A5C"/>
                 </a:solidFill>
@@ -31716,7 +31699,7 @@
               <a:buNone/>
             </a:pPr>
             <a:r>
-              <a:rPr lang="en-US" sz="1600" b="1" dirty="0">
+              <a:rPr lang="en-US" sz="1600" b="1">
                 <a:solidFill>
                   <a:srgbClr val="1A7A7A"/>
                 </a:solidFill>
@@ -31730,7 +31713,7 @@
               <a:buNone/>
             </a:pPr>
             <a:r>
-              <a:rPr lang="en-US" sz="1200" dirty="0">
+              <a:rPr lang="en-US" sz="1200">
                 <a:solidFill>
                   <a:srgbClr val="FFFFFF"/>
                 </a:solidFill>
@@ -31744,7 +31727,7 @@
               <a:buNone/>
             </a:pPr>
             <a:r>
-              <a:rPr lang="en-US" sz="1300" dirty="0">
+              <a:rPr lang="en-US" sz="1300">
                 <a:solidFill>
                   <a:srgbClr val="3D4A5C"/>
                 </a:solidFill>
@@ -31758,7 +31741,7 @@
               <a:buNone/>
             </a:pPr>
             <a:r>
-              <a:rPr lang="en-US" sz="1600" b="1" dirty="0">
+              <a:rPr lang="en-US" sz="1600" b="1">
                 <a:solidFill>
                   <a:srgbClr val="1A7A7A"/>
                 </a:solidFill>
@@ -31772,7 +31755,7 @@
               <a:buNone/>
             </a:pPr>
             <a:r>
-              <a:rPr lang="en-US" sz="1200" dirty="0">
+              <a:rPr lang="en-US" sz="1200">
                 <a:solidFill>
                   <a:srgbClr val="FFFFFF"/>
                 </a:solidFill>
@@ -31786,7 +31769,7 @@
               <a:buNone/>
             </a:pPr>
             <a:r>
-              <a:rPr lang="en-US" sz="1300" dirty="0">
+              <a:rPr lang="en-US" sz="1300">
                 <a:solidFill>
                   <a:srgbClr val="3D4A5C"/>
                 </a:solidFill>
@@ -31800,7 +31783,7 @@
               <a:buNone/>
             </a:pPr>
             <a:r>
-              <a:rPr lang="en-US" sz="1600" b="1" dirty="0">
+              <a:rPr lang="en-US" sz="1600" b="1">
                 <a:solidFill>
                   <a:srgbClr val="1A7A7A"/>
                 </a:solidFill>
@@ -31814,7 +31797,7 @@
               <a:buNone/>
             </a:pPr>
             <a:r>
-              <a:rPr lang="en-US" sz="1200" dirty="0">
+              <a:rPr lang="en-US" sz="1200">
                 <a:solidFill>
                   <a:srgbClr val="FFFFFF"/>
                 </a:solidFill>
@@ -31828,7 +31811,7 @@
               <a:buNone/>
             </a:pPr>
             <a:r>
-              <a:rPr lang="en-US" sz="1300" dirty="0">
+              <a:rPr lang="en-US" sz="1300">
                 <a:solidFill>
                   <a:srgbClr val="3D4A5C"/>
                 </a:solidFill>
@@ -32011,7 +31994,7 @@
               <a:buNone/>
             </a:pPr>
             <a:r>
-              <a:rPr lang="en-US" sz="1600" b="1" kern="0" spc="800" dirty="0">
+              <a:rPr lang="en-US" sz="1600" b="1" kern="0" spc="800">
                 <a:solidFill>
                   <a:srgbClr val="4ECDC4"/>
                 </a:solidFill>
@@ -32021,7 +32004,7 @@
               </a:rPr>
               <a:t>MATH 130</a:t>
             </a:r>
-            <a:endParaRPr lang="en-US" sz="1600" dirty="0"/>
+            <a:endParaRPr lang="en-US" sz="1600"/>
           </a:p>
         </p:txBody>
       </p:sp>
@@ -32050,7 +32033,7 @@
               <a:buNone/>
             </a:pPr>
             <a:r>
-              <a:rPr lang="en-US" sz="4000" b="1" dirty="0">
+              <a:rPr lang="en-US" sz="4000" b="1">
                 <a:solidFill>
                   <a:srgbClr val="FFFFFF"/>
                 </a:solidFill>
@@ -32060,14 +32043,14 @@
               </a:rPr>
               <a:t>Questions?</a:t>
             </a:r>
-            <a:endParaRPr lang="en-US" sz="4000" dirty="0"/>
-          </a:p>
-          <a:p>
-            <a:pPr marL="0" indent="0">
-              <a:buNone/>
-            </a:pPr>
-            <a:r>
-              <a:rPr lang="en-US" sz="4000" b="1" dirty="0">
+            <a:endParaRPr lang="en-US" sz="4000"/>
+          </a:p>
+          <a:p>
+            <a:pPr marL="0" indent="0">
+              <a:buNone/>
+            </a:pPr>
+            <a:r>
+              <a:rPr lang="en-US" sz="4000" b="1">
                 <a:solidFill>
                   <a:srgbClr val="FFFFFF"/>
                 </a:solidFill>
@@ -32077,7 +32060,7 @@
               </a:rPr>
               <a:t>Practice &amp; Review</a:t>
             </a:r>
-            <a:endParaRPr lang="en-US" sz="4000" dirty="0"/>
+            <a:endParaRPr lang="en-US" sz="4000"/>
           </a:p>
         </p:txBody>
       </p:sp>
@@ -32136,7 +32119,7 @@
               <a:buNone/>
             </a:pPr>
             <a:r>
-              <a:rPr lang="en-US" sz="1400" i="1" dirty="0">
+              <a:rPr lang="en-US" sz="1400" i="1">
                 <a:solidFill>
                   <a:srgbClr val="E8E4DD"/>
                 </a:solidFill>
@@ -32146,7 +32129,7 @@
               </a:rPr>
               <a:t>Worksheet: Covers Sections 1–5 (parallel lines, polygon area, triangles, similar figures, DMS). Due: Next class meeting. Quiz format: 12 problems, no calculator on DMS conversions, calculator permitted for area and similar triangle problems. Show all work for full credit.</a:t>
             </a:r>
-            <a:endParaRPr lang="en-US" sz="1400" dirty="0"/>
+            <a:endParaRPr lang="en-US" sz="1400"/>
           </a:p>
         </p:txBody>
       </p:sp>
@@ -32175,7 +32158,7 @@
               <a:buNone/>
             </a:pPr>
             <a:r>
-              <a:rPr lang="en-US" sz="1200" dirty="0">
+              <a:rPr lang="en-US" sz="1200">
                 <a:solidFill>
                   <a:srgbClr val="7A8599"/>
                 </a:solidFill>
@@ -32185,7 +32168,7 @@
               </a:rPr>
               <a:t>Liberty University  |  Geometry: Angles &amp; Polygons</a:t>
             </a:r>
-            <a:endParaRPr lang="en-US" sz="1200" dirty="0"/>
+            <a:endParaRPr lang="en-US" sz="1200"/>
           </a:p>
         </p:txBody>
       </p:sp>
@@ -32274,7 +32257,7 @@
               <a:buNone/>
             </a:pPr>
             <a:r>
-              <a:rPr lang="en-US" sz="2800" b="1" dirty="0">
+              <a:rPr lang="en-US" sz="2800" b="1">
                 <a:solidFill>
                   <a:srgbClr val="1B2A4A"/>
                 </a:solidFill>
@@ -32373,7 +32356,7 @@
               <a:buNone/>
             </a:pPr>
             <a:r>
-              <a:rPr lang="en-US" sz="1600" b="1" dirty="0">
+              <a:rPr lang="en-US" sz="1600" b="1">
                 <a:solidFill>
                   <a:srgbClr val="D4A843"/>
                 </a:solidFill>
@@ -32387,7 +32370,7 @@
               <a:buNone/>
             </a:pPr>
             <a:r>
-              <a:rPr lang="en-US" sz="1200" dirty="0">
+              <a:rPr lang="en-US" sz="1200">
                 <a:solidFill>
                   <a:srgbClr val="FFFFFF"/>
                 </a:solidFill>
@@ -32401,7 +32384,7 @@
               <a:buNone/>
             </a:pPr>
             <a:r>
-              <a:rPr lang="en-US" sz="1600" b="1" dirty="0">
+              <a:rPr lang="en-US" sz="1600" b="1">
                 <a:solidFill>
                   <a:srgbClr val="1A7A7A"/>
                 </a:solidFill>
@@ -32415,7 +32398,7 @@
               <a:buNone/>
             </a:pPr>
             <a:r>
-              <a:rPr lang="en-US" sz="1200" dirty="0">
+              <a:rPr lang="en-US" sz="1200">
                 <a:solidFill>
                   <a:srgbClr val="FFFFFF"/>
                 </a:solidFill>
@@ -32429,7 +32412,7 @@
               <a:buNone/>
             </a:pPr>
             <a:r>
-              <a:rPr lang="en-US" sz="1300" dirty="0">
+              <a:rPr lang="en-US" sz="1300">
                 <a:solidFill>
                   <a:srgbClr val="3D4A5C"/>
                 </a:solidFill>
@@ -32443,7 +32426,7 @@
               <a:buNone/>
             </a:pPr>
             <a:r>
-              <a:rPr lang="en-US" sz="1600" b="1" dirty="0">
+              <a:rPr lang="en-US" sz="1600" b="1">
                 <a:solidFill>
                   <a:srgbClr val="1A7A7A"/>
                 </a:solidFill>
@@ -32457,7 +32440,7 @@
               <a:buNone/>
             </a:pPr>
             <a:r>
-              <a:rPr lang="en-US" sz="1200" dirty="0">
+              <a:rPr lang="en-US" sz="1200">
                 <a:solidFill>
                   <a:srgbClr val="FFFFFF"/>
                 </a:solidFill>
@@ -32471,7 +32454,7 @@
               <a:buNone/>
             </a:pPr>
             <a:r>
-              <a:rPr lang="en-US" sz="1300" dirty="0">
+              <a:rPr lang="en-US" sz="1300">
                 <a:solidFill>
                   <a:srgbClr val="3D4A5C"/>
                 </a:solidFill>
@@ -32485,7 +32468,7 @@
               <a:buNone/>
             </a:pPr>
             <a:r>
-              <a:rPr lang="en-US" sz="1600" b="1" dirty="0">
+              <a:rPr lang="en-US" sz="1600" b="1">
                 <a:solidFill>
                   <a:srgbClr val="1A7A7A"/>
                 </a:solidFill>
@@ -32499,7 +32482,7 @@
               <a:buNone/>
             </a:pPr>
             <a:r>
-              <a:rPr lang="en-US" sz="1200" dirty="0">
+              <a:rPr lang="en-US" sz="1200">
                 <a:solidFill>
                   <a:srgbClr val="FFFFFF"/>
                 </a:solidFill>
@@ -32513,7 +32496,7 @@
               <a:buNone/>
             </a:pPr>
             <a:r>
-              <a:rPr lang="en-US" sz="1300" dirty="0">
+              <a:rPr lang="en-US" sz="1300">
                 <a:solidFill>
                   <a:srgbClr val="3D4A5C"/>
                 </a:solidFill>
@@ -32527,7 +32510,7 @@
               <a:buNone/>
             </a:pPr>
             <a:r>
-              <a:rPr lang="en-US" sz="1600" b="1" dirty="0">
+              <a:rPr lang="en-US" sz="1600" b="1">
                 <a:solidFill>
                   <a:srgbClr val="D4A843"/>
                 </a:solidFill>
@@ -32541,7 +32524,7 @@
               <a:buNone/>
             </a:pPr>
             <a:r>
-              <a:rPr lang="en-US" sz="1200" dirty="0">
+              <a:rPr lang="en-US" sz="1200">
                 <a:solidFill>
                   <a:srgbClr val="FFFFFF"/>
                 </a:solidFill>
@@ -32639,7 +32622,7 @@
               <a:buNone/>
             </a:pPr>
             <a:r>
-              <a:rPr lang="en-US" sz="3200" b="1" dirty="0">
+              <a:rPr lang="en-US" sz="3200" b="1">
                 <a:solidFill>
                   <a:srgbClr val="1B2A4A"/>
                 </a:solidFill>
@@ -32649,7 +32632,7 @@
               </a:rPr>
               <a:t>Geometric Notation Conventions</a:t>
             </a:r>
-            <a:endParaRPr lang="en-US" sz="3200" dirty="0"/>
+            <a:endParaRPr lang="en-US" sz="3200"/>
           </a:p>
         </p:txBody>
       </p:sp>
@@ -32741,7 +32724,7 @@
               <a:buNone/>
             </a:pPr>
             <a:r>
-              <a:rPr lang="en-US" sz="1300" b="1" dirty="0">
+              <a:rPr lang="en-US" sz="1300" b="1">
                 <a:solidFill>
                   <a:srgbClr val="1B2A4A"/>
                 </a:solidFill>
@@ -32751,7 +32734,7 @@
               </a:rPr>
               <a:t>Line  AB</a:t>
             </a:r>
-            <a:endParaRPr lang="en-US" sz="1300" dirty="0"/>
+            <a:endParaRPr lang="en-US" sz="1300"/>
           </a:p>
         </p:txBody>
       </p:sp>
@@ -32782,7 +32765,7 @@
               <a:buNone/>
             </a:pPr>
             <a:r>
-              <a:rPr lang="en-US" sz="1200" b="1" dirty="0">
+              <a:rPr lang="en-US" sz="1200" b="1">
                 <a:solidFill>
                   <a:srgbClr val="1A7A7A"/>
                 </a:solidFill>
@@ -32792,7 +32775,7 @@
               </a:rPr>
               <a:t>A straight path extending in both directions, no endpoints. Notation: AB with arrows above both ends (AB⇔) or line through AB.</a:t>
             </a:r>
-            <a:endParaRPr lang="en-US" sz="1200" dirty="0"/>
+            <a:endParaRPr lang="en-US" sz="1200"/>
           </a:p>
         </p:txBody>
       </p:sp>
@@ -32884,7 +32867,7 @@
               <a:buNone/>
             </a:pPr>
             <a:r>
-              <a:rPr lang="en-US" sz="1300" b="1" dirty="0">
+              <a:rPr lang="en-US" sz="1300" b="1">
                 <a:solidFill>
                   <a:srgbClr val="1B2A4A"/>
                 </a:solidFill>
@@ -32894,7 +32877,7 @@
               </a:rPr>
               <a:t>Ray  AB</a:t>
             </a:r>
-            <a:endParaRPr lang="en-US" sz="1300" dirty="0"/>
+            <a:endParaRPr lang="en-US" sz="1300"/>
           </a:p>
         </p:txBody>
       </p:sp>
@@ -32925,7 +32908,7 @@
               <a:buNone/>
             </a:pPr>
             <a:r>
-              <a:rPr lang="en-US" sz="1200" b="1" dirty="0">
+              <a:rPr lang="en-US" sz="1200" b="1">
                 <a:solidFill>
                   <a:srgbClr val="0D4F4F"/>
                 </a:solidFill>
@@ -32935,7 +32918,7 @@
               </a:rPr>
               <a:t>Starts at endpoint A, passes through B, extends forever. Notation: AB with a right-pointing arrow above (AB→). Endpoint listed first.</a:t>
             </a:r>
-            <a:endParaRPr lang="en-US" sz="1200" dirty="0"/>
+            <a:endParaRPr lang="en-US" sz="1200"/>
           </a:p>
         </p:txBody>
       </p:sp>
@@ -33027,7 +33010,7 @@
               <a:buNone/>
             </a:pPr>
             <a:r>
-              <a:rPr lang="en-US" sz="1300" b="1" dirty="0">
+              <a:rPr lang="en-US" sz="1300" b="1">
                 <a:solidFill>
                   <a:srgbClr val="1B2A4A"/>
                 </a:solidFill>
@@ -33037,7 +33020,7 @@
               </a:rPr>
               <a:t>Segment  AB</a:t>
             </a:r>
-            <a:endParaRPr lang="en-US" sz="1300" dirty="0"/>
+            <a:endParaRPr lang="en-US" sz="1300"/>
           </a:p>
         </p:txBody>
       </p:sp>
@@ -33068,7 +33051,7 @@
               <a:buNone/>
             </a:pPr>
             <a:r>
-              <a:rPr lang="en-US" sz="1200" b="1" dirty="0">
+              <a:rPr lang="en-US" sz="1200" b="1">
                 <a:solidFill>
                   <a:srgbClr val="2AA5A5"/>
                 </a:solidFill>
@@ -33078,7 +33061,7 @@
               </a:rPr>
               <a:t>A finite path connecting two endpoints A and B. Notation: AB with a bar above (AB̅). Has a definite, measurable length.</a:t>
             </a:r>
-            <a:endParaRPr lang="en-US" sz="1200" dirty="0"/>
+            <a:endParaRPr lang="en-US" sz="1200"/>
           </a:p>
         </p:txBody>
       </p:sp>
@@ -33170,7 +33153,7 @@
               <a:buNone/>
             </a:pPr>
             <a:r>
-              <a:rPr lang="en-US" sz="1300" b="1" dirty="0">
+              <a:rPr lang="en-US" sz="1300" b="1">
                 <a:solidFill>
                   <a:srgbClr val="1B2A4A"/>
                 </a:solidFill>
@@ -33180,7 +33163,7 @@
               </a:rPr>
               <a:t>Angle  ∠ABC</a:t>
             </a:r>
-            <a:endParaRPr lang="en-US" sz="1300" dirty="0"/>
+            <a:endParaRPr lang="en-US" sz="1300"/>
           </a:p>
         </p:txBody>
       </p:sp>
@@ -33211,7 +33194,7 @@
               <a:buNone/>
             </a:pPr>
             <a:r>
-              <a:rPr lang="en-US" sz="1200" b="1" dirty="0">
+              <a:rPr lang="en-US" sz="1200" b="1">
                 <a:solidFill>
                   <a:srgbClr val="D4A843"/>
                 </a:solidFill>
@@ -33221,7 +33204,7 @@
               </a:rPr>
               <a:t>Two rays meeting at a vertex. Notation: ∠ABC where B is the vertex. Can abbreviate as ∠B if unambiguous. Measured in degrees.</a:t>
             </a:r>
-            <a:endParaRPr lang="en-US" sz="1200" dirty="0"/>
+            <a:endParaRPr lang="en-US" sz="1200"/>
           </a:p>
         </p:txBody>
       </p:sp>
@@ -33312,7 +33295,7 @@
               <a:buNone/>
             </a:pPr>
             <a:r>
-              <a:rPr lang="en-US" sz="3200" b="1" dirty="0">
+              <a:rPr lang="en-US" sz="3200" b="1">
                 <a:solidFill>
                   <a:srgbClr val="1B2A4A"/>
                 </a:solidFill>
@@ -33322,7 +33305,7 @@
               </a:rPr>
               <a:t>Congruence &amp; Similarity</a:t>
             </a:r>
-            <a:endParaRPr lang="en-US" sz="3200" dirty="0"/>
+            <a:endParaRPr lang="en-US" sz="3200"/>
           </a:p>
         </p:txBody>
       </p:sp>
@@ -33380,7 +33363,7 @@
               <a:buNone/>
             </a:pPr>
             <a:r>
-              <a:rPr lang="en-US" sz="1300" b="1" dirty="0">
+              <a:rPr lang="en-US" sz="1300" b="1">
                 <a:solidFill>
                   <a:srgbClr val="4ECDC4"/>
                 </a:solidFill>
@@ -33390,7 +33373,7 @@
               </a:rPr>
               <a:t>Congruence  ≅</a:t>
             </a:r>
-            <a:endParaRPr lang="en-US" sz="1300" dirty="0"/>
+            <a:endParaRPr lang="en-US" sz="1300"/>
           </a:p>
         </p:txBody>
       </p:sp>
@@ -33421,7 +33404,7 @@
               <a:buNone/>
             </a:pPr>
             <a:r>
-              <a:rPr lang="en-US" sz="1200" dirty="0">
+              <a:rPr lang="en-US" sz="1200">
                 <a:solidFill>
                   <a:srgbClr val="FFFFFF"/>
                 </a:solidFill>
@@ -33431,14 +33414,14 @@
               </a:rPr>
               <a:t>Use this notation consistently throughout the course.</a:t>
             </a:r>
-            <a:endParaRPr lang="en-US" sz="1200" dirty="0"/>
-          </a:p>
-          <a:p>
-            <a:pPr marL="0" indent="0">
-              <a:buNone/>
-            </a:pPr>
-            <a:r>
-              <a:rPr lang="en-US" sz="1200" dirty="0">
+            <a:endParaRPr lang="en-US" sz="1200"/>
+          </a:p>
+          <a:p>
+            <a:pPr marL="0" indent="0">
+              <a:buNone/>
+            </a:pPr>
+            <a:r>
+              <a:rPr lang="en-US" sz="1200">
                 <a:solidFill>
                   <a:srgbClr val="FFFFFF"/>
                 </a:solidFill>
@@ -33448,7 +33431,7 @@
               </a:rPr>
               <a:t>Same shape and size. △ABC ≅ △DEF means identical in shape and size.</a:t>
             </a:r>
-            <a:endParaRPr lang="en-US" sz="1200" dirty="0"/>
+            <a:endParaRPr lang="en-US" sz="1200"/>
           </a:p>
         </p:txBody>
       </p:sp>
@@ -33506,7 +33489,7 @@
               <a:buNone/>
             </a:pPr>
             <a:r>
-              <a:rPr lang="en-US" sz="1300" b="1" dirty="0">
+              <a:rPr lang="en-US" sz="1300" b="1">
                 <a:solidFill>
                   <a:srgbClr val="4ECDC4"/>
                 </a:solidFill>
@@ -33516,7 +33499,7 @@
               </a:rPr>
               <a:t>Similarity  ~</a:t>
             </a:r>
-            <a:endParaRPr lang="en-US" sz="1300" dirty="0"/>
+            <a:endParaRPr lang="en-US" sz="1300"/>
           </a:p>
         </p:txBody>
       </p:sp>
@@ -33547,7 +33530,7 @@
               <a:buNone/>
             </a:pPr>
             <a:r>
-              <a:rPr lang="en-US" sz="1200" dirty="0">
+              <a:rPr lang="en-US" sz="1200">
                 <a:solidFill>
                   <a:srgbClr val="FFFFFF"/>
                 </a:solidFill>
@@ -33557,14 +33540,14 @@
               </a:rPr>
               <a:t>Same shape, proportional sizes. △ABC ~ △DEF:</a:t>
             </a:r>
-            <a:endParaRPr lang="en-US" sz="1200" dirty="0"/>
-          </a:p>
-          <a:p>
-            <a:pPr marL="0" indent="0">
-              <a:buNone/>
-            </a:pPr>
-            <a:r>
-              <a:rPr lang="en-US" sz="1200" dirty="0">
+            <a:endParaRPr lang="en-US" sz="1200"/>
+          </a:p>
+          <a:p>
+            <a:pPr marL="0" indent="0">
+              <a:buNone/>
+            </a:pPr>
+            <a:r>
+              <a:rPr lang="en-US" sz="1200">
                 <a:solidFill>
                   <a:srgbClr val="FFFFFF"/>
                 </a:solidFill>
@@ -33574,7 +33557,7 @@
               </a:rPr>
               <a:t>corresponding sides proportional. Order of letters in similarity statement matters!</a:t>
             </a:r>
-            <a:endParaRPr lang="en-US" sz="1200" dirty="0"/>
+            <a:endParaRPr lang="en-US" sz="1200"/>
           </a:p>
         </p:txBody>
       </p:sp>
@@ -33663,7 +33646,7 @@
               <a:buNone/>
             </a:pPr>
             <a:r>
-              <a:rPr lang="en-US" sz="3200" b="1" dirty="0">
+              <a:rPr lang="en-US" sz="3200" b="1">
                 <a:solidFill>
                   <a:srgbClr val="1B2A4A"/>
                 </a:solidFill>
@@ -33673,7 +33656,7 @@
               </a:rPr>
               <a:t>Rays &amp; Angles</a:t>
             </a:r>
-            <a:endParaRPr lang="en-US" sz="3200" dirty="0"/>
+            <a:endParaRPr lang="en-US" sz="3200"/>
           </a:p>
         </p:txBody>
       </p:sp>
@@ -33763,7 +33746,7 @@
               <a:buNone/>
             </a:pPr>
             <a:r>
-              <a:rPr lang="en-US" sz="1800" b="1" dirty="0">
+              <a:rPr lang="en-US" sz="1800" b="1">
                 <a:solidFill>
                   <a:srgbClr val="1B2A4A"/>
                 </a:solidFill>
@@ -33773,7 +33756,7 @@
               </a:rPr>
               <a:t>Ray</a:t>
             </a:r>
-            <a:endParaRPr lang="en-US" sz="1800" dirty="0"/>
+            <a:endParaRPr lang="en-US" sz="1800"/>
           </a:p>
         </p:txBody>
       </p:sp>
@@ -33802,7 +33785,7 @@
               <a:buNone/>
             </a:pPr>
             <a:r>
-              <a:rPr lang="en-US" sz="1300" dirty="0">
+              <a:rPr lang="en-US" sz="1300">
                 <a:solidFill>
                   <a:srgbClr val="3D4A5C"/>
                 </a:solidFill>
@@ -33812,7 +33795,7 @@
               </a:rPr>
               <a:t>A half-line — starts at a point (endpoint) and extends infinitely in one direction.</a:t>
             </a:r>
-            <a:endParaRPr lang="en-US" sz="1300" dirty="0"/>
+            <a:endParaRPr lang="en-US" sz="1300"/>
           </a:p>
         </p:txBody>
       </p:sp>
@@ -33902,7 +33885,7 @@
               <a:buNone/>
             </a:pPr>
             <a:r>
-              <a:rPr lang="en-US" sz="1800" b="1" dirty="0">
+              <a:rPr lang="en-US" sz="1800" b="1">
                 <a:solidFill>
                   <a:srgbClr val="1B2A4A"/>
                 </a:solidFill>
@@ -33912,7 +33895,7 @@
               </a:rPr>
               <a:t>Angle</a:t>
             </a:r>
-            <a:endParaRPr lang="en-US" sz="1800" dirty="0"/>
+            <a:endParaRPr lang="en-US" sz="1800"/>
           </a:p>
         </p:txBody>
       </p:sp>
@@ -33941,7 +33924,7 @@
               <a:buNone/>
             </a:pPr>
             <a:r>
-              <a:rPr lang="en-US" sz="1300" dirty="0">
+              <a:rPr lang="en-US" sz="1300">
                 <a:solidFill>
                   <a:srgbClr val="3D4A5C"/>
                 </a:solidFill>
@@ -33951,7 +33934,7 @@
               </a:rPr>
               <a:t>Two rays sharing a common endpoint (vertex). The measure is the rotation from one ray to the other.</a:t>
             </a:r>
-            <a:endParaRPr lang="en-US" sz="1300" dirty="0"/>
+            <a:endParaRPr lang="en-US" sz="1300"/>
           </a:p>
         </p:txBody>
       </p:sp>
@@ -34007,7 +33990,7 @@
               <a:buNone/>
             </a:pPr>
             <a:r>
-              <a:rPr lang="en-US" sz="1300" dirty="0">
+              <a:rPr lang="en-US" sz="1300">
                 <a:solidFill>
                   <a:srgbClr val="FFFFFF"/>
                 </a:solidFill>
@@ -34017,7 +34000,7 @@
               </a:rPr>
               <a:t>One complete rotation = 360°      |      Measured in degrees or radians      |      Protractor: tool for measuring angles</a:t>
             </a:r>
-            <a:endParaRPr lang="en-US" sz="1300" dirty="0"/>
+            <a:endParaRPr lang="en-US" sz="1300"/>
           </a:p>
         </p:txBody>
       </p:sp>
@@ -34080,7 +34063,7 @@
               <a:buNone/>
             </a:pPr>
             <a:r>
-              <a:rPr lang="en-US" sz="1600" b="1" dirty="0">
+              <a:rPr lang="en-US" sz="1600" b="1">
                 <a:solidFill>
                   <a:srgbClr val="1B2A4A"/>
                 </a:solidFill>
@@ -34090,7 +34073,7 @@
               </a:rPr>
               <a:t>Components of an Angle</a:t>
             </a:r>
-            <a:endParaRPr lang="en-US" sz="1600" dirty="0"/>
+            <a:endParaRPr lang="en-US" sz="1600"/>
           </a:p>
         </p:txBody>
       </p:sp>
@@ -34119,7 +34102,7 @@
               <a:buNone/>
             </a:pPr>
             <a:r>
-              <a:rPr lang="en-US" sz="1300" b="1" dirty="0">
+              <a:rPr lang="en-US" sz="1300" b="1">
                 <a:solidFill>
                   <a:srgbClr val="1A7A7A"/>
                 </a:solidFill>
@@ -34130,7 +34113,7 @@
               <a:t>Initial Side (R₁): </a:t>
             </a:r>
             <a:r>
-              <a:rPr lang="en-US" sz="1300" dirty="0">
+              <a:rPr lang="en-US" sz="1300">
                 <a:solidFill>
                   <a:srgbClr val="3D4A5C"/>
                 </a:solidFill>
@@ -34140,14 +34123,14 @@
               </a:rPr>
               <a:t>The starting ray of the angle</a:t>
             </a:r>
-            <a:endParaRPr lang="en-US" sz="1300" dirty="0"/>
-          </a:p>
-          <a:p>
-            <a:pPr marL="0" indent="0">
-              <a:buNone/>
-            </a:pPr>
-            <a:r>
-              <a:rPr lang="en-US" sz="1300" b="1" dirty="0">
+            <a:endParaRPr lang="en-US" sz="1300"/>
+          </a:p>
+          <a:p>
+            <a:pPr marL="0" indent="0">
+              <a:buNone/>
+            </a:pPr>
+            <a:r>
+              <a:rPr lang="en-US" sz="1300" b="1">
                 <a:solidFill>
                   <a:srgbClr val="1A7A7A"/>
                 </a:solidFill>
@@ -34158,7 +34141,7 @@
               <a:t>Terminal Side (R₂): </a:t>
             </a:r>
             <a:r>
-              <a:rPr lang="en-US" sz="1300" dirty="0">
+              <a:rPr lang="en-US" sz="1300">
                 <a:solidFill>
                   <a:srgbClr val="3D4A5C"/>
                 </a:solidFill>
@@ -34168,14 +34151,14 @@
               </a:rPr>
               <a:t>The ending ray after rotation</a:t>
             </a:r>
-            <a:endParaRPr lang="en-US" sz="1300" dirty="0"/>
-          </a:p>
-          <a:p>
-            <a:pPr marL="0" indent="0">
-              <a:buNone/>
-            </a:pPr>
-            <a:r>
-              <a:rPr lang="en-US" sz="1300" b="1" dirty="0">
+            <a:endParaRPr lang="en-US" sz="1300"/>
+          </a:p>
+          <a:p>
+            <a:pPr marL="0" indent="0">
+              <a:buNone/>
+            </a:pPr>
+            <a:r>
+              <a:rPr lang="en-US" sz="1300" b="1">
                 <a:solidFill>
                   <a:srgbClr val="1A7A7A"/>
                 </a:solidFill>
@@ -34186,7 +34169,7 @@
               <a:t>Vertex: </a:t>
             </a:r>
             <a:r>
-              <a:rPr lang="en-US" sz="1300" dirty="0">
+              <a:rPr lang="en-US" sz="1300">
                 <a:solidFill>
                   <a:srgbClr val="3D4A5C"/>
                 </a:solidFill>
@@ -34196,7 +34179,7 @@
               </a:rPr>
               <a:t>The common endpoint where both rays meet</a:t>
             </a:r>
-            <a:endParaRPr lang="en-US" sz="1300" dirty="0"/>
+            <a:endParaRPr lang="en-US" sz="1300"/>
           </a:p>
         </p:txBody>
       </p:sp>
@@ -34285,7 +34268,7 @@
               <a:buNone/>
             </a:pPr>
             <a:r>
-              <a:rPr lang="en-US" sz="3200" b="1" dirty="0">
+              <a:rPr lang="en-US" sz="3200" b="1">
                 <a:solidFill>
                   <a:srgbClr val="1B2A4A"/>
                 </a:solidFill>
@@ -34437,7 +34420,7 @@
               <a:buNone/>
             </a:pPr>
             <a:r>
-              <a:rPr lang="en-US" sz="1600" b="1" dirty="0">
+              <a:rPr lang="en-US" sz="1600" b="1">
                 <a:solidFill>
                   <a:srgbClr val="1A7A7A"/>
                 </a:solidFill>
@@ -34451,7 +34434,7 @@
               <a:buNone/>
             </a:pPr>
             <a:r>
-              <a:rPr lang="en-US" sz="1200" dirty="0">
+              <a:rPr lang="en-US" sz="1200">
                 <a:solidFill>
                   <a:srgbClr val="FFFFFF"/>
                 </a:solidFill>
@@ -34465,7 +34448,7 @@
               <a:buNone/>
             </a:pPr>
             <a:r>
-              <a:rPr lang="en-US" sz="1400" dirty="0">
+              <a:rPr lang="en-US" sz="1400">
                 <a:solidFill>
                   <a:srgbClr val="3D4A5C"/>
                 </a:solidFill>
@@ -34474,7 +34457,7 @@
               <a:t>Angles can be measured in </a:t>
             </a:r>
             <a:r>
-              <a:rPr lang="en-US" sz="1400" b="1" dirty="0">
+              <a:rPr lang="en-US" sz="1400" b="1">
                 <a:solidFill>
                   <a:srgbClr val="3D4A5C"/>
                 </a:solidFill>
@@ -34483,7 +34466,7 @@
               <a:t>degrees</a:t>
             </a:r>
             <a:r>
-              <a:rPr lang="en-US" sz="1400" dirty="0">
+              <a:rPr lang="en-US" sz="1400">
                 <a:solidFill>
                   <a:srgbClr val="3D4A5C"/>
                 </a:solidFill>
@@ -34492,7 +34475,7 @@
               <a:t> or </a:t>
             </a:r>
             <a:r>
-              <a:rPr lang="en-US" sz="1400" b="1" dirty="0">
+              <a:rPr lang="en-US" sz="1400" b="1">
                 <a:solidFill>
                   <a:srgbClr val="3D4A5C"/>
                 </a:solidFill>
@@ -34501,7 +34484,7 @@
               <a:t>radians</a:t>
             </a:r>
             <a:r>
-              <a:rPr lang="en-US" sz="1400" dirty="0">
+              <a:rPr lang="en-US" sz="1400">
                 <a:solidFill>
                   <a:srgbClr val="3D4A5C"/>
                 </a:solidFill>
@@ -34515,7 +34498,7 @@
               <a:buNone/>
             </a:pPr>
             <a:r>
-              <a:rPr lang="en-US" sz="1200" dirty="0">
+              <a:rPr lang="en-US" sz="1200">
                 <a:solidFill>
                   <a:srgbClr val="FFFFFF"/>
                 </a:solidFill>
@@ -34529,7 +34512,7 @@
               <a:buNone/>
             </a:pPr>
             <a:r>
-              <a:rPr lang="en-US" sz="1400" b="1" dirty="0">
+              <a:rPr lang="en-US" sz="1400" b="1">
                 <a:solidFill>
                   <a:srgbClr val="1A7A7A"/>
                 </a:solidFill>
@@ -34543,7 +34526,7 @@
               <a:buNone/>
             </a:pPr>
             <a:r>
-              <a:rPr lang="en-US" sz="1400" dirty="0">
+              <a:rPr lang="en-US" sz="1400">
                 <a:solidFill>
                   <a:srgbClr val="3D4A5C"/>
                 </a:solidFill>
@@ -34557,7 +34540,7 @@
               <a:buNone/>
             </a:pPr>
             <a:r>
-              <a:rPr lang="en-US" sz="1200" dirty="0">
+              <a:rPr lang="en-US" sz="1200">
                 <a:solidFill>
                   <a:srgbClr val="FFFFFF"/>
                 </a:solidFill>
@@ -34571,7 +34554,7 @@
               <a:buNone/>
             </a:pPr>
             <a:r>
-              <a:rPr lang="en-US" sz="1400" b="1" dirty="0">
+              <a:rPr lang="en-US" sz="1400" b="1">
                 <a:solidFill>
                   <a:srgbClr val="1A7A7A"/>
                 </a:solidFill>
@@ -34585,7 +34568,7 @@
               <a:buNone/>
             </a:pPr>
             <a:r>
-              <a:rPr lang="en-US" sz="1300" dirty="0">
+              <a:rPr lang="en-US" sz="1300">
                 <a:solidFill>
                   <a:srgbClr val="3D4A5C"/>
                 </a:solidFill>
@@ -34599,7 +34582,7 @@
               <a:buNone/>
             </a:pPr>
             <a:r>
-              <a:rPr lang="en-US" sz="1300" dirty="0">
+              <a:rPr lang="en-US" sz="1300">
                 <a:solidFill>
                   <a:srgbClr val="3D4A5C"/>
                 </a:solidFill>
